--- a/docs/presentations/Group9_Presentation2_Weeks1-2.pptx
+++ b/docs/presentations/Group9_Presentation2_Weeks1-2.pptx
@@ -12,9 +12,11 @@
     <p:sldId id="260" r:id="rId6"/>
     <p:sldId id="261" r:id="rId7"/>
     <p:sldId id="262" r:id="rId8"/>
+    <p:sldId id="263" r:id="rId9"/>
+    <p:sldId id="264" r:id="rId10"/>
   </p:sldIdLst>
   <p:notesMasterIdLst>
-    <p:notesMasterId r:id="rId9"/>
+    <p:notesMasterId r:id="rId11"/>
   </p:notesMasterIdLst>
   <p:sldSz cx="12192000" cy="6858000"/>
   <p:notesSz cx="6858000" cy="12192000"/>
@@ -125,7 +127,7 @@
           <a:lstStyle/>
           <a:p>
             <a:pPr>
-              <a:defRPr sz="1300" b="0" i="0" u="none" strike="noStrike">
+              <a:defRPr sz="1200" b="0" i="0" u="none" strike="noStrike">
                 <a:solidFill>
                   <a:srgbClr val="1E2761"/>
                 </a:solidFill>
@@ -133,7 +135,7 @@
               </a:defRPr>
             </a:pPr>
             <a:r>
-              <a:rPr sz="1300" b="0" i="0" u="none" strike="noStrike">
+              <a:rPr sz="1200" b="0" i="0" u="none" strike="noStrike">
                 <a:solidFill>
                   <a:srgbClr val="1E2761"/>
                 </a:solidFill>
@@ -573,7 +575,7 @@
               <a:lstStyle/>
               <a:p>
                 <a:pPr>
-                  <a:defRPr sz="1100" b="0" i="0" u="none" strike="noStrike">
+                  <a:defRPr sz="1000" b="0" i="0" u="none" strike="noStrike">
                     <a:solidFill>
                       <a:srgbClr val="000000"/>
                     </a:solidFill>
@@ -581,7 +583,7 @@
                   </a:defRPr>
                 </a:pPr>
                 <a:r>
-                  <a:rPr sz="1100" b="0" i="0" u="none" strike="noStrike">
+                  <a:rPr sz="1000" b="0" i="0" u="none" strike="noStrike">
                     <a:solidFill>
                       <a:srgbClr val="000000"/>
                     </a:solidFill>
@@ -613,7 +615,7 @@
           <a:lstStyle/>
           <a:p>
             <a:pPr>
-              <a:defRPr sz="1000" b="0" i="0" u="none" strike="noStrike">
+              <a:defRPr sz="900" b="0" i="0" u="none" strike="noStrike">
                 <a:solidFill>
                   <a:srgbClr val="5B6B8A"/>
                 </a:solidFill>
@@ -656,7 +658,7 @@
               <a:lstStyle/>
               <a:p>
                 <a:pPr>
-                  <a:defRPr sz="1100" b="0" i="0" u="none" strike="noStrike">
+                  <a:defRPr sz="1000" b="0" i="0" u="none" strike="noStrike">
                     <a:solidFill>
                       <a:srgbClr val="000000"/>
                     </a:solidFill>
@@ -664,7 +666,7 @@
                   </a:defRPr>
                 </a:pPr>
                 <a:r>
-                  <a:rPr sz="1100" b="0" i="0" u="none" strike="noStrike">
+                  <a:rPr sz="1000" b="0" i="0" u="none" strike="noStrike">
                     <a:solidFill>
                       <a:srgbClr val="000000"/>
                     </a:solidFill>
@@ -696,7 +698,7 @@
           <a:lstStyle/>
           <a:p>
             <a:pPr>
-              <a:defRPr sz="1000" b="0" i="0" u="none" strike="noStrike">
+              <a:defRPr sz="900" b="0" i="0" u="none" strike="noStrike">
                 <a:solidFill>
                   <a:srgbClr val="5B6B8A"/>
                 </a:solidFill>
@@ -726,7 +728,7 @@
         <a:lstStyle/>
         <a:p>
           <a:pPr>
-            <a:defRPr sz="1000">      </a:defRPr>
+            <a:defRPr sz="900">      </a:defRPr>
           </a:pPr>
           <a:endParaRPr lang="en-US"/>
         </a:p>
@@ -1695,6 +1697,182 @@
             <a:fld id="{F7021451-1387-4CA6-816F-3879F97B5CBC}" type="slidenum">
               <a:rPr lang="en-US"/>
               <a:t>7</a:t>
+            </a:fld>
+            <a:endParaRPr lang="en-US"/>
+          </a:p>
+        </p:txBody>
+      </p:sp>
+    </p:spTree>
+    <p:extLst>
+      <p:ext uri="{BB962C8B-B14F-4D97-AF65-F5344CB8AC3E}">
+        <p14:creationId xmlns:p14="http://schemas.microsoft.com/office/powerpoint/2010/main" val="1024086991"/>
+      </p:ext>
+    </p:extLst>
+  </p:cSld>
+  <p:clrMapOvr>
+    <a:masterClrMapping/>
+  </p:clrMapOvr>
+</p:notes>
+</file>
+
+<file path=ppt/notesSlides/notesSlide8.xml><?xml version="1.0" encoding="utf-8"?>
+<p:notes xmlns:a="http://schemas.openxmlformats.org/drawingml/2006/main" xmlns:r="http://schemas.openxmlformats.org/officeDocument/2006/relationships" xmlns:p="http://schemas.openxmlformats.org/presentationml/2006/main">
+  <p:cSld>
+    <p:spTree>
+      <p:nvGrpSpPr>
+        <p:cNvPr id="1" name=""/>
+        <p:cNvGrpSpPr/>
+        <p:nvPr/>
+      </p:nvGrpSpPr>
+      <p:grpSpPr>
+        <a:xfrm>
+          <a:off x="0" y="0"/>
+          <a:ext cx="0" cy="0"/>
+          <a:chOff x="0" y="0"/>
+          <a:chExt cx="0" cy="0"/>
+        </a:xfrm>
+      </p:grpSpPr>
+      <p:sp>
+        <p:nvSpPr>
+          <p:cNvPr id="2" name="Slide Image Placeholder 1"/>
+          <p:cNvSpPr>
+            <a:spLocks noGrp="1" noRot="1" noChangeAspect="1"/>
+          </p:cNvSpPr>
+          <p:nvPr>
+            <p:ph type="sldImg"/>
+          </p:nvPr>
+        </p:nvSpPr>
+        <p:spPr/>
+      </p:sp>
+      <p:sp>
+        <p:nvSpPr>
+          <p:cNvPr id="3" name="Notes Placeholder 2"/>
+          <p:cNvSpPr>
+            <a:spLocks noGrp="1"/>
+          </p:cNvSpPr>
+          <p:nvPr>
+            <p:ph type="body" idx="1"/>
+          </p:nvPr>
+        </p:nvSpPr>
+        <p:spPr/>
+        <p:txBody>
+          <a:bodyPr/>
+          <a:lstStyle/>
+          <a:p>
+            <a:r>
+              <a:rPr lang="en-US" dirty="0"/>
+              <a:t/>
+            </a:r>
+            <a:endParaRPr lang="en-US" dirty="0"/>
+          </a:p>
+        </p:txBody>
+      </p:sp>
+      <p:sp>
+        <p:nvSpPr>
+          <p:cNvPr id="4" name="Slide Number Placeholder 3"/>
+          <p:cNvSpPr>
+            <a:spLocks noGrp="1"/>
+          </p:cNvSpPr>
+          <p:nvPr>
+            <p:ph type="sldNum" sz="quarter" idx="10"/>
+          </p:nvPr>
+        </p:nvSpPr>
+        <p:spPr/>
+        <p:txBody>
+          <a:bodyPr/>
+          <a:lstStyle/>
+          <a:p>
+            <a:fld id="{F7021451-1387-4CA6-816F-3879F97B5CBC}" type="slidenum">
+              <a:rPr lang="en-US"/>
+              <a:t>8</a:t>
+            </a:fld>
+            <a:endParaRPr lang="en-US"/>
+          </a:p>
+        </p:txBody>
+      </p:sp>
+    </p:spTree>
+    <p:extLst>
+      <p:ext uri="{BB962C8B-B14F-4D97-AF65-F5344CB8AC3E}">
+        <p14:creationId xmlns:p14="http://schemas.microsoft.com/office/powerpoint/2010/main" val="1024086991"/>
+      </p:ext>
+    </p:extLst>
+  </p:cSld>
+  <p:clrMapOvr>
+    <a:masterClrMapping/>
+  </p:clrMapOvr>
+</p:notes>
+</file>
+
+<file path=ppt/notesSlides/notesSlide9.xml><?xml version="1.0" encoding="utf-8"?>
+<p:notes xmlns:a="http://schemas.openxmlformats.org/drawingml/2006/main" xmlns:r="http://schemas.openxmlformats.org/officeDocument/2006/relationships" xmlns:p="http://schemas.openxmlformats.org/presentationml/2006/main">
+  <p:cSld>
+    <p:spTree>
+      <p:nvGrpSpPr>
+        <p:cNvPr id="1" name=""/>
+        <p:cNvGrpSpPr/>
+        <p:nvPr/>
+      </p:nvGrpSpPr>
+      <p:grpSpPr>
+        <a:xfrm>
+          <a:off x="0" y="0"/>
+          <a:ext cx="0" cy="0"/>
+          <a:chOff x="0" y="0"/>
+          <a:chExt cx="0" cy="0"/>
+        </a:xfrm>
+      </p:grpSpPr>
+      <p:sp>
+        <p:nvSpPr>
+          <p:cNvPr id="2" name="Slide Image Placeholder 1"/>
+          <p:cNvSpPr>
+            <a:spLocks noGrp="1" noRot="1" noChangeAspect="1"/>
+          </p:cNvSpPr>
+          <p:nvPr>
+            <p:ph type="sldImg"/>
+          </p:nvPr>
+        </p:nvSpPr>
+        <p:spPr/>
+      </p:sp>
+      <p:sp>
+        <p:nvSpPr>
+          <p:cNvPr id="3" name="Notes Placeholder 2"/>
+          <p:cNvSpPr>
+            <a:spLocks noGrp="1"/>
+          </p:cNvSpPr>
+          <p:nvPr>
+            <p:ph type="body" idx="1"/>
+          </p:nvPr>
+        </p:nvSpPr>
+        <p:spPr/>
+        <p:txBody>
+          <a:bodyPr/>
+          <a:lstStyle/>
+          <a:p>
+            <a:r>
+              <a:rPr lang="en-US" dirty="0"/>
+              <a:t/>
+            </a:r>
+            <a:endParaRPr lang="en-US" dirty="0"/>
+          </a:p>
+        </p:txBody>
+      </p:sp>
+      <p:sp>
+        <p:nvSpPr>
+          <p:cNvPr id="4" name="Slide Number Placeholder 3"/>
+          <p:cNvSpPr>
+            <a:spLocks noGrp="1"/>
+          </p:cNvSpPr>
+          <p:nvPr>
+            <p:ph type="sldNum" sz="quarter" idx="10"/>
+          </p:nvPr>
+        </p:nvSpPr>
+        <p:spPr/>
+        <p:txBody>
+          <a:bodyPr/>
+          <a:lstStyle/>
+          <a:p>
+            <a:fld id="{F7021451-1387-4CA6-816F-3879F97B5CBC}" type="slidenum">
+              <a:rPr lang="en-US"/>
+              <a:t>9</a:t>
             </a:fld>
             <a:endParaRPr lang="en-US"/>
           </a:p>
@@ -2225,13 +2403,33 @@
       </p:sp>
       <p:sp>
         <p:nvSpPr>
-          <p:cNvPr id="8" name="Text 6"/>
-          <p:cNvSpPr txBox="1"/>
-          <p:nvPr/>
-        </p:nvSpPr>
-        <p:spPr>
-          <a:xfrm>
-            <a:off x="640080" y="4315968"/>
+          <p:cNvPr id="8" name="Shape 6"/>
+          <p:cNvSpPr/>
+          <p:nvPr/>
+        </p:nvSpPr>
+        <p:spPr>
+          <a:xfrm>
+            <a:off x="640080" y="4206240"/>
+            <a:ext cx="1920240" cy="82296"/>
+          </a:xfrm>
+          <a:prstGeom prst="roundRect">
+            <a:avLst/>
+          </a:prstGeom>
+          <a:solidFill>
+            <a:srgbClr val="1199BD"/>
+          </a:solidFill>
+          <a:ln/>
+        </p:spPr>
+      </p:sp>
+      <p:sp>
+        <p:nvSpPr>
+          <p:cNvPr id="9" name="Text 7"/>
+          <p:cNvSpPr txBox="1"/>
+          <p:nvPr/>
+        </p:nvSpPr>
+        <p:spPr>
+          <a:xfrm>
+            <a:off x="640080" y="4343400"/>
             <a:ext cx="1920240" cy="365760"/>
           </a:xfrm>
           <a:prstGeom prst="rect">
@@ -2264,13 +2462,13 @@
       </p:sp>
       <p:sp>
         <p:nvSpPr>
-          <p:cNvPr id="9" name="Text 7"/>
-          <p:cNvSpPr txBox="1"/>
-          <p:nvPr/>
-        </p:nvSpPr>
-        <p:spPr>
-          <a:xfrm>
-            <a:off x="640080" y="4681728"/>
+          <p:cNvPr id="10" name="Text 8"/>
+          <p:cNvSpPr txBox="1"/>
+          <p:nvPr/>
+        </p:nvSpPr>
+        <p:spPr>
+          <a:xfrm>
+            <a:off x="640080" y="4700016"/>
             <a:ext cx="1920240" cy="457200"/>
           </a:xfrm>
           <a:prstGeom prst="rect">
@@ -2303,7 +2501,7 @@
       </p:sp>
       <p:sp>
         <p:nvSpPr>
-          <p:cNvPr id="10" name="Shape 8"/>
+          <p:cNvPr id="11" name="Shape 9"/>
           <p:cNvSpPr/>
           <p:nvPr/>
         </p:nvSpPr>
@@ -2325,13 +2523,33 @@
       </p:sp>
       <p:sp>
         <p:nvSpPr>
-          <p:cNvPr id="11" name="Text 9"/>
-          <p:cNvSpPr txBox="1"/>
-          <p:nvPr/>
-        </p:nvSpPr>
-        <p:spPr>
-          <a:xfrm>
-            <a:off x="2788920" y="4315968"/>
+          <p:cNvPr id="12" name="Shape 10"/>
+          <p:cNvSpPr/>
+          <p:nvPr/>
+        </p:nvSpPr>
+        <p:spPr>
+          <a:xfrm>
+            <a:off x="2788920" y="4206240"/>
+            <a:ext cx="1920240" cy="82296"/>
+          </a:xfrm>
+          <a:prstGeom prst="roundRect">
+            <a:avLst/>
+          </a:prstGeom>
+          <a:solidFill>
+            <a:srgbClr val="6D4BDB"/>
+          </a:solidFill>
+          <a:ln/>
+        </p:spPr>
+      </p:sp>
+      <p:sp>
+        <p:nvSpPr>
+          <p:cNvPr id="13" name="Text 11"/>
+          <p:cNvSpPr txBox="1"/>
+          <p:nvPr/>
+        </p:nvSpPr>
+        <p:spPr>
+          <a:xfrm>
+            <a:off x="2788920" y="4343400"/>
             <a:ext cx="1920240" cy="365760"/>
           </a:xfrm>
           <a:prstGeom prst="rect">
@@ -2364,13 +2582,13 @@
       </p:sp>
       <p:sp>
         <p:nvSpPr>
-          <p:cNvPr id="12" name="Text 10"/>
-          <p:cNvSpPr txBox="1"/>
-          <p:nvPr/>
-        </p:nvSpPr>
-        <p:spPr>
-          <a:xfrm>
-            <a:off x="2788920" y="4681728"/>
+          <p:cNvPr id="14" name="Text 12"/>
+          <p:cNvSpPr txBox="1"/>
+          <p:nvPr/>
+        </p:nvSpPr>
+        <p:spPr>
+          <a:xfrm>
+            <a:off x="2788920" y="4700016"/>
             <a:ext cx="1920240" cy="457200"/>
           </a:xfrm>
           <a:prstGeom prst="rect">
@@ -2403,7 +2621,7 @@
       </p:sp>
       <p:sp>
         <p:nvSpPr>
-          <p:cNvPr id="13" name="Shape 11"/>
+          <p:cNvPr id="15" name="Shape 13"/>
           <p:cNvSpPr/>
           <p:nvPr/>
         </p:nvSpPr>
@@ -2425,13 +2643,33 @@
       </p:sp>
       <p:sp>
         <p:nvSpPr>
-          <p:cNvPr id="14" name="Text 12"/>
-          <p:cNvSpPr txBox="1"/>
-          <p:nvPr/>
-        </p:nvSpPr>
-        <p:spPr>
-          <a:xfrm>
-            <a:off x="4937760" y="4315968"/>
+          <p:cNvPr id="16" name="Shape 14"/>
+          <p:cNvSpPr/>
+          <p:nvPr/>
+        </p:nvSpPr>
+        <p:spPr>
+          <a:xfrm>
+            <a:off x="4937760" y="4206240"/>
+            <a:ext cx="1920240" cy="82296"/>
+          </a:xfrm>
+          <a:prstGeom prst="roundRect">
+            <a:avLst/>
+          </a:prstGeom>
+          <a:solidFill>
+            <a:srgbClr val="E58E1A"/>
+          </a:solidFill>
+          <a:ln/>
+        </p:spPr>
+      </p:sp>
+      <p:sp>
+        <p:nvSpPr>
+          <p:cNvPr id="17" name="Text 15"/>
+          <p:cNvSpPr txBox="1"/>
+          <p:nvPr/>
+        </p:nvSpPr>
+        <p:spPr>
+          <a:xfrm>
+            <a:off x="4937760" y="4343400"/>
             <a:ext cx="1920240" cy="365760"/>
           </a:xfrm>
           <a:prstGeom prst="rect">
@@ -2464,13 +2702,13 @@
       </p:sp>
       <p:sp>
         <p:nvSpPr>
-          <p:cNvPr id="15" name="Text 13"/>
-          <p:cNvSpPr txBox="1"/>
-          <p:nvPr/>
-        </p:nvSpPr>
-        <p:spPr>
-          <a:xfrm>
-            <a:off x="4937760" y="4681728"/>
+          <p:cNvPr id="18" name="Text 16"/>
+          <p:cNvSpPr txBox="1"/>
+          <p:nvPr/>
+        </p:nvSpPr>
+        <p:spPr>
+          <a:xfrm>
+            <a:off x="4937760" y="4700016"/>
             <a:ext cx="1920240" cy="457200"/>
           </a:xfrm>
           <a:prstGeom prst="rect">
@@ -2503,7 +2741,7 @@
       </p:sp>
       <p:sp>
         <p:nvSpPr>
-          <p:cNvPr id="16" name="Shape 14"/>
+          <p:cNvPr id="19" name="Shape 17"/>
           <p:cNvSpPr/>
           <p:nvPr/>
         </p:nvSpPr>
@@ -2525,13 +2763,33 @@
       </p:sp>
       <p:sp>
         <p:nvSpPr>
-          <p:cNvPr id="17" name="Text 15"/>
-          <p:cNvSpPr txBox="1"/>
-          <p:nvPr/>
-        </p:nvSpPr>
-        <p:spPr>
-          <a:xfrm>
-            <a:off x="7086600" y="4315968"/>
+          <p:cNvPr id="20" name="Shape 18"/>
+          <p:cNvSpPr/>
+          <p:nvPr/>
+        </p:nvSpPr>
+        <p:spPr>
+          <a:xfrm>
+            <a:off x="7086600" y="4206240"/>
+            <a:ext cx="1920240" cy="82296"/>
+          </a:xfrm>
+          <a:prstGeom prst="roundRect">
+            <a:avLst/>
+          </a:prstGeom>
+          <a:solidFill>
+            <a:srgbClr val="D9488C"/>
+          </a:solidFill>
+          <a:ln/>
+        </p:spPr>
+      </p:sp>
+      <p:sp>
+        <p:nvSpPr>
+          <p:cNvPr id="21" name="Text 19"/>
+          <p:cNvSpPr txBox="1"/>
+          <p:nvPr/>
+        </p:nvSpPr>
+        <p:spPr>
+          <a:xfrm>
+            <a:off x="7086600" y="4343400"/>
             <a:ext cx="1920240" cy="365760"/>
           </a:xfrm>
           <a:prstGeom prst="rect">
@@ -2564,13 +2822,13 @@
       </p:sp>
       <p:sp>
         <p:nvSpPr>
-          <p:cNvPr id="18" name="Text 16"/>
-          <p:cNvSpPr txBox="1"/>
-          <p:nvPr/>
-        </p:nvSpPr>
-        <p:spPr>
-          <a:xfrm>
-            <a:off x="7086600" y="4681728"/>
+          <p:cNvPr id="22" name="Text 20"/>
+          <p:cNvSpPr txBox="1"/>
+          <p:nvPr/>
+        </p:nvSpPr>
+        <p:spPr>
+          <a:xfrm>
+            <a:off x="7086600" y="4700016"/>
             <a:ext cx="1920240" cy="457200"/>
           </a:xfrm>
           <a:prstGeom prst="rect">
@@ -2603,7 +2861,7 @@
       </p:sp>
       <p:sp>
         <p:nvSpPr>
-          <p:cNvPr id="19" name="Text 17"/>
+          <p:cNvPr id="23" name="Text 21"/>
           <p:cNvSpPr txBox="1"/>
           <p:nvPr/>
         </p:nvSpPr>
@@ -2705,7 +2963,7 @@
                 <a:ea typeface="Cambria" pitchFamily="34" charset="-122"/>
                 <a:cs typeface="Cambria" pitchFamily="34" charset="-120"/>
               </a:rPr>
-              <a:t>System Architecture</a:t>
+              <a:t>Project Objective &amp; Evaluation</a:t>
             </a:r>
             <a:endParaRPr lang="en-US" sz="3200" dirty="0"/>
           </a:p>
@@ -2719,74 +2977,8 @@
         </p:nvSpPr>
         <p:spPr>
           <a:xfrm>
-            <a:off x="502920" y="1234440"/>
-            <a:ext cx="3291840" cy="3200400"/>
-          </a:xfrm>
-          <a:prstGeom prst="roundRect">
-            <a:avLst>
-              <a:gd name="adj" fmla="val 3429"/>
-            </a:avLst>
-          </a:prstGeom>
-          <a:solidFill>
-            <a:srgbClr val="F2F6FC"/>
-          </a:solidFill>
-          <a:ln w="15875">
-            <a:solidFill>
-              <a:srgbClr val="1E2761"/>
-            </a:solidFill>
-            <a:prstDash val="solid"/>
-          </a:ln>
-        </p:spPr>
-      </p:sp>
-      <p:sp>
-        <p:nvSpPr>
-          <p:cNvPr id="4" name="Text 2"/>
-          <p:cNvSpPr txBox="1"/>
-          <p:nvPr/>
-        </p:nvSpPr>
-        <p:spPr>
-          <a:xfrm>
-            <a:off x="502920" y="1325880"/>
-            <a:ext cx="3291840" cy="320040"/>
-          </a:xfrm>
-          <a:prstGeom prst="rect">
-            <a:avLst/>
-          </a:prstGeom>
-          <a:noFill/>
-          <a:ln/>
-        </p:spPr>
-        <p:txBody>
-          <a:bodyPr wrap="square" lIns="0" tIns="0" rIns="0" bIns="0" rtlCol="0" anchor="ctr"/>
-          <a:lstStyle/>
-          <a:p>
-            <a:pPr algn="ctr" indent="0" marL="0">
-              <a:buNone/>
-            </a:pPr>
-            <a:r>
-              <a:rPr lang="en-US" sz="1400" b="1" dirty="0">
-                <a:solidFill>
-                  <a:srgbClr val="1E2761"/>
-                </a:solidFill>
-                <a:latin typeface="Calibri" pitchFamily="34" charset="0"/>
-                <a:ea typeface="Calibri" pitchFamily="34" charset="-122"/>
-                <a:cs typeface="Calibri" pitchFamily="34" charset="-120"/>
-              </a:rPr>
-              <a:t>VEHICLE A</a:t>
-            </a:r>
-            <a:endParaRPr lang="en-US" sz="1400" dirty="0"/>
-          </a:p>
-        </p:txBody>
-      </p:sp>
-      <p:sp>
-        <p:nvSpPr>
-          <p:cNvPr id="5" name="Shape 3"/>
-          <p:cNvSpPr/>
-          <p:nvPr/>
-        </p:nvSpPr>
-        <p:spPr>
-          <a:xfrm>
-            <a:off x="731520" y="1737360"/>
-            <a:ext cx="2834640" cy="960120"/>
+            <a:off x="502920" y="1097280"/>
+            <a:ext cx="5852160" cy="1371600"/>
           </a:xfrm>
           <a:prstGeom prst="roundRect">
             <a:avLst>
@@ -2794,26 +2986,21 @@
             </a:avLst>
           </a:prstGeom>
           <a:solidFill>
-            <a:srgbClr val="FFFFFF"/>
+            <a:srgbClr val="1E2761"/>
           </a:solidFill>
-          <a:ln w="19050">
-            <a:solidFill>
-              <a:srgbClr val="1E2761"/>
-            </a:solidFill>
-            <a:prstDash val="solid"/>
-          </a:ln>
-        </p:spPr>
-      </p:sp>
-      <p:sp>
-        <p:nvSpPr>
-          <p:cNvPr id="6" name="Text 4"/>
-          <p:cNvSpPr txBox="1"/>
-          <p:nvPr/>
-        </p:nvSpPr>
-        <p:spPr>
-          <a:xfrm>
-            <a:off x="822960" y="1828800"/>
-            <a:ext cx="2697480" cy="777240"/>
+          <a:ln/>
+        </p:spPr>
+      </p:sp>
+      <p:sp>
+        <p:nvSpPr>
+          <p:cNvPr id="4" name="Text 2"/>
+          <p:cNvSpPr txBox="1"/>
+          <p:nvPr/>
+        </p:nvSpPr>
+        <p:spPr>
+          <a:xfrm>
+            <a:off x="731520" y="1234440"/>
+            <a:ext cx="5440680" cy="1097280"/>
           </a:xfrm>
           <a:prstGeom prst="rect">
             <a:avLst/>
@@ -2829,663 +3016,46 @@
               <a:buNone/>
             </a:pPr>
             <a:r>
-              <a:rPr lang="en-US" sz="1250" b="1" dirty="0">
-                <a:solidFill>
-                  <a:srgbClr val="1E2761"/>
-                </a:solidFill>
-                <a:latin typeface="Calibri" pitchFamily="34" charset="0"/>
-                <a:ea typeface="Calibri" pitchFamily="34" charset="-122"/>
-                <a:cs typeface="Calibri" pitchFamily="34" charset="-120"/>
-              </a:rPr>
-              <a:t>Heltec V4 — radio node</a:t>
-            </a:r>
-            <a:endParaRPr lang="en-US" sz="1250" dirty="0"/>
-          </a:p>
+              <a:rPr lang="en-US" sz="1450" dirty="0">
+                <a:solidFill>
+                  <a:srgbClr val="FFFFFF"/>
+                </a:solidFill>
+                <a:latin typeface="Calibri" pitchFamily="34" charset="0"/>
+                <a:ea typeface="Calibri" pitchFamily="34" charset="-122"/>
+                <a:cs typeface="Calibri" pitchFamily="34" charset="-120"/>
+              </a:rPr>
+              <a:t>Design, build, and field-validate a fully off-grid system that continuously shows a driver the direction and distance to a partner vehicle, across multi-km terrain with no communications infrastructure.</a:t>
+            </a:r>
+            <a:endParaRPr lang="en-US" sz="1450" dirty="0"/>
+          </a:p>
+        </p:txBody>
+      </p:sp>
+      <p:sp>
+        <p:nvSpPr>
+          <p:cNvPr id="5" name="Text 3"/>
+          <p:cNvSpPr txBox="1"/>
+          <p:nvPr/>
+        </p:nvSpPr>
+        <p:spPr>
+          <a:xfrm>
+            <a:off x="502920" y="2697480"/>
+            <a:ext cx="5486400" cy="365760"/>
+          </a:xfrm>
+          <a:prstGeom prst="rect">
+            <a:avLst/>
+          </a:prstGeom>
+          <a:noFill/>
+          <a:ln/>
+        </p:spPr>
+        <p:txBody>
+          <a:bodyPr wrap="square" lIns="0" tIns="0" rIns="0" bIns="0" rtlCol="0" anchor="ctr"/>
+          <a:lstStyle/>
           <a:p>
             <a:pPr indent="0" marL="0">
               <a:buNone/>
             </a:pPr>
             <a:r>
-              <a:rPr lang="en-US" sz="1050" dirty="0">
-                <a:solidFill>
-                  <a:srgbClr val="5B6B8A"/>
-                </a:solidFill>
-                <a:latin typeface="Calibri" pitchFamily="34" charset="0"/>
-                <a:ea typeface="Calibri" pitchFamily="34" charset="-122"/>
-                <a:cs typeface="Calibri" pitchFamily="34" charset="-120"/>
-              </a:rPr>
-              <a:t>ESP32-S3 · SX1262 LoRa · GNSS</a:t>
-            </a:r>
-            <a:endParaRPr lang="en-US" sz="1250" dirty="0"/>
-          </a:p>
-        </p:txBody>
-      </p:sp>
-      <p:sp>
-        <p:nvSpPr>
-          <p:cNvPr id="7" name="Text 5"/>
-          <p:cNvSpPr txBox="1"/>
-          <p:nvPr/>
-        </p:nvSpPr>
-        <p:spPr>
-          <a:xfrm>
-            <a:off x="822960" y="2395728"/>
-            <a:ext cx="2697480" cy="274320"/>
-          </a:xfrm>
-          <a:prstGeom prst="rect">
-            <a:avLst/>
-          </a:prstGeom>
-          <a:noFill/>
-          <a:ln/>
-        </p:spPr>
-        <p:txBody>
-          <a:bodyPr wrap="square" lIns="0" tIns="0" rIns="0" bIns="0" rtlCol="0" anchor="ctr"/>
-          <a:lstStyle/>
-          <a:p>
-            <a:pPr indent="0" marL="0">
-              <a:buNone/>
-            </a:pPr>
-            <a:r>
-              <a:rPr lang="en-US" sz="1000" i="1" dirty="0">
-                <a:solidFill>
-                  <a:srgbClr val="5B6B8A"/>
-                </a:solidFill>
-                <a:latin typeface="Calibri" pitchFamily="34" charset="0"/>
-                <a:ea typeface="Calibri" pitchFamily="34" charset="-122"/>
-                <a:cs typeface="Calibri" pitchFamily="34" charset="-120"/>
-              </a:rPr>
-              <a:t>stock Meshtastic firmware</a:t>
-            </a:r>
-            <a:endParaRPr lang="en-US" sz="1000" dirty="0"/>
-          </a:p>
-        </p:txBody>
-      </p:sp>
-      <p:sp>
-        <p:nvSpPr>
-          <p:cNvPr id="8" name="Shape 6"/>
-          <p:cNvSpPr/>
-          <p:nvPr/>
-        </p:nvSpPr>
-        <p:spPr>
-          <a:xfrm>
-            <a:off x="2148840" y="2697480"/>
-            <a:ext cx="0" cy="548640"/>
-          </a:xfrm>
-          <a:prstGeom prst="line">
-            <a:avLst/>
-          </a:prstGeom>
-          <a:noFill/>
-          <a:ln w="28575">
-            <a:solidFill>
-              <a:srgbClr val="E58E1A"/>
-            </a:solidFill>
-            <a:prstDash val="solid"/>
-            <a:tailEnd type="triangle"/>
-          </a:ln>
-        </p:spPr>
-      </p:sp>
-      <p:sp>
-        <p:nvSpPr>
-          <p:cNvPr id="9" name="Text 7"/>
-          <p:cNvSpPr txBox="1"/>
-          <p:nvPr/>
-        </p:nvSpPr>
-        <p:spPr>
-          <a:xfrm>
-            <a:off x="2286000" y="2816352"/>
-            <a:ext cx="1280160" cy="274320"/>
-          </a:xfrm>
-          <a:prstGeom prst="rect">
-            <a:avLst/>
-          </a:prstGeom>
-          <a:noFill/>
-          <a:ln/>
-        </p:spPr>
-        <p:txBody>
-          <a:bodyPr wrap="square" lIns="0" tIns="0" rIns="0" bIns="0" rtlCol="0" anchor="ctr"/>
-          <a:lstStyle/>
-          <a:p>
-            <a:pPr indent="0" marL="0">
-              <a:buNone/>
-            </a:pPr>
-            <a:r>
-              <a:rPr lang="en-US" sz="1000" b="1" dirty="0">
-                <a:solidFill>
-                  <a:srgbClr val="E58E1A"/>
-                </a:solidFill>
-                <a:latin typeface="Calibri" pitchFamily="34" charset="0"/>
-                <a:ea typeface="Calibri" pitchFamily="34" charset="-122"/>
-                <a:cs typeface="Calibri" pitchFamily="34" charset="-120"/>
-              </a:rPr>
-              <a:t>BLE (in-cab)</a:t>
-            </a:r>
-            <a:endParaRPr lang="en-US" sz="1000" dirty="0"/>
-          </a:p>
-        </p:txBody>
-      </p:sp>
-      <p:sp>
-        <p:nvSpPr>
-          <p:cNvPr id="10" name="Shape 8"/>
-          <p:cNvSpPr/>
-          <p:nvPr/>
-        </p:nvSpPr>
-        <p:spPr>
-          <a:xfrm>
-            <a:off x="731520" y="3246120"/>
-            <a:ext cx="2834640" cy="960120"/>
-          </a:xfrm>
-          <a:prstGeom prst="roundRect">
-            <a:avLst>
-              <a:gd name="adj" fmla="val 6667"/>
-            </a:avLst>
-          </a:prstGeom>
-          <a:solidFill>
-            <a:srgbClr val="FFFFFF"/>
-          </a:solidFill>
-          <a:ln w="19050">
-            <a:solidFill>
-              <a:srgbClr val="6D4BDB"/>
-            </a:solidFill>
-            <a:prstDash val="solid"/>
-          </a:ln>
-        </p:spPr>
-      </p:sp>
-      <p:sp>
-        <p:nvSpPr>
-          <p:cNvPr id="11" name="Text 9"/>
-          <p:cNvSpPr txBox="1"/>
-          <p:nvPr/>
-        </p:nvSpPr>
-        <p:spPr>
-          <a:xfrm>
-            <a:off x="822960" y="3346704"/>
-            <a:ext cx="2697480" cy="731520"/>
-          </a:xfrm>
-          <a:prstGeom prst="rect">
-            <a:avLst/>
-          </a:prstGeom>
-          <a:noFill/>
-          <a:ln/>
-        </p:spPr>
-        <p:txBody>
-          <a:bodyPr wrap="square" lIns="0" tIns="0" rIns="0" bIns="0" rtlCol="0" anchor="ctr"/>
-          <a:lstStyle/>
-          <a:p>
-            <a:pPr indent="0" marL="0">
-              <a:buNone/>
-            </a:pPr>
-            <a:r>
-              <a:rPr lang="en-US" sz="1250" b="1" dirty="0">
-                <a:solidFill>
-                  <a:srgbClr val="1E2761"/>
-                </a:solidFill>
-                <a:latin typeface="Calibri" pitchFamily="34" charset="0"/>
-                <a:ea typeface="Calibri" pitchFamily="34" charset="-122"/>
-                <a:cs typeface="Calibri" pitchFamily="34" charset="-120"/>
-              </a:rPr>
-              <a:t>Waveshare 4.2″ RLCD — display</a:t>
-            </a:r>
-            <a:endParaRPr lang="en-US" sz="1250" dirty="0"/>
-          </a:p>
-          <a:p>
-            <a:pPr indent="0" marL="0">
-              <a:buNone/>
-            </a:pPr>
-            <a:r>
-              <a:rPr lang="en-US" sz="1050" dirty="0">
-                <a:solidFill>
-                  <a:srgbClr val="5B6B8A"/>
-                </a:solidFill>
-                <a:latin typeface="Calibri" pitchFamily="34" charset="0"/>
-                <a:ea typeface="Calibri" pitchFamily="34" charset="-122"/>
-                <a:cs typeface="Calibri" pitchFamily="34" charset="-120"/>
-              </a:rPr>
-              <a:t>our only custom firmware</a:t>
-            </a:r>
-            <a:endParaRPr lang="en-US" sz="1250" dirty="0"/>
-          </a:p>
-        </p:txBody>
-      </p:sp>
-      <p:sp>
-        <p:nvSpPr>
-          <p:cNvPr id="12" name="Shape 10"/>
-          <p:cNvSpPr/>
-          <p:nvPr/>
-        </p:nvSpPr>
-        <p:spPr>
-          <a:xfrm>
-            <a:off x="4572000" y="1234440"/>
-            <a:ext cx="3291840" cy="3200400"/>
-          </a:xfrm>
-          <a:prstGeom prst="roundRect">
-            <a:avLst>
-              <a:gd name="adj" fmla="val 3429"/>
-            </a:avLst>
-          </a:prstGeom>
-          <a:solidFill>
-            <a:srgbClr val="F2F6FC"/>
-          </a:solidFill>
-          <a:ln w="15875">
-            <a:solidFill>
-              <a:srgbClr val="1E2761"/>
-            </a:solidFill>
-            <a:prstDash val="solid"/>
-          </a:ln>
-        </p:spPr>
-      </p:sp>
-      <p:sp>
-        <p:nvSpPr>
-          <p:cNvPr id="13" name="Text 11"/>
-          <p:cNvSpPr txBox="1"/>
-          <p:nvPr/>
-        </p:nvSpPr>
-        <p:spPr>
-          <a:xfrm>
-            <a:off x="4572000" y="1325880"/>
-            <a:ext cx="3291840" cy="320040"/>
-          </a:xfrm>
-          <a:prstGeom prst="rect">
-            <a:avLst/>
-          </a:prstGeom>
-          <a:noFill/>
-          <a:ln/>
-        </p:spPr>
-        <p:txBody>
-          <a:bodyPr wrap="square" lIns="0" tIns="0" rIns="0" bIns="0" rtlCol="0" anchor="ctr"/>
-          <a:lstStyle/>
-          <a:p>
-            <a:pPr algn="ctr" indent="0" marL="0">
-              <a:buNone/>
-            </a:pPr>
-            <a:r>
-              <a:rPr lang="en-US" sz="1400" b="1" dirty="0">
-                <a:solidFill>
-                  <a:srgbClr val="1E2761"/>
-                </a:solidFill>
-                <a:latin typeface="Calibri" pitchFamily="34" charset="0"/>
-                <a:ea typeface="Calibri" pitchFamily="34" charset="-122"/>
-                <a:cs typeface="Calibri" pitchFamily="34" charset="-120"/>
-              </a:rPr>
-              <a:t>VEHICLE B</a:t>
-            </a:r>
-            <a:endParaRPr lang="en-US" sz="1400" dirty="0"/>
-          </a:p>
-        </p:txBody>
-      </p:sp>
-      <p:sp>
-        <p:nvSpPr>
-          <p:cNvPr id="14" name="Shape 12"/>
-          <p:cNvSpPr/>
-          <p:nvPr/>
-        </p:nvSpPr>
-        <p:spPr>
-          <a:xfrm>
-            <a:off x="4800600" y="1737360"/>
-            <a:ext cx="2834640" cy="960120"/>
-          </a:xfrm>
-          <a:prstGeom prst="roundRect">
-            <a:avLst>
-              <a:gd name="adj" fmla="val 6667"/>
-            </a:avLst>
-          </a:prstGeom>
-          <a:solidFill>
-            <a:srgbClr val="FFFFFF"/>
-          </a:solidFill>
-          <a:ln w="19050">
-            <a:solidFill>
-              <a:srgbClr val="1E2761"/>
-            </a:solidFill>
-            <a:prstDash val="solid"/>
-          </a:ln>
-        </p:spPr>
-      </p:sp>
-      <p:sp>
-        <p:nvSpPr>
-          <p:cNvPr id="15" name="Text 13"/>
-          <p:cNvSpPr txBox="1"/>
-          <p:nvPr/>
-        </p:nvSpPr>
-        <p:spPr>
-          <a:xfrm>
-            <a:off x="4892040" y="1828800"/>
-            <a:ext cx="2697480" cy="777240"/>
-          </a:xfrm>
-          <a:prstGeom prst="rect">
-            <a:avLst/>
-          </a:prstGeom>
-          <a:noFill/>
-          <a:ln/>
-        </p:spPr>
-        <p:txBody>
-          <a:bodyPr wrap="square" lIns="0" tIns="0" rIns="0" bIns="0" rtlCol="0" anchor="ctr"/>
-          <a:lstStyle/>
-          <a:p>
-            <a:pPr indent="0" marL="0">
-              <a:buNone/>
-            </a:pPr>
-            <a:r>
-              <a:rPr lang="en-US" sz="1250" b="1" dirty="0">
-                <a:solidFill>
-                  <a:srgbClr val="1E2761"/>
-                </a:solidFill>
-                <a:latin typeface="Calibri" pitchFamily="34" charset="0"/>
-                <a:ea typeface="Calibri" pitchFamily="34" charset="-122"/>
-                <a:cs typeface="Calibri" pitchFamily="34" charset="-120"/>
-              </a:rPr>
-              <a:t>Heltec V4 — radio node</a:t>
-            </a:r>
-            <a:endParaRPr lang="en-US" sz="1250" dirty="0"/>
-          </a:p>
-          <a:p>
-            <a:pPr indent="0" marL="0">
-              <a:buNone/>
-            </a:pPr>
-            <a:r>
-              <a:rPr lang="en-US" sz="1050" dirty="0">
-                <a:solidFill>
-                  <a:srgbClr val="5B6B8A"/>
-                </a:solidFill>
-                <a:latin typeface="Calibri" pitchFamily="34" charset="0"/>
-                <a:ea typeface="Calibri" pitchFamily="34" charset="-122"/>
-                <a:cs typeface="Calibri" pitchFamily="34" charset="-120"/>
-              </a:rPr>
-              <a:t>ESP32-S3 · SX1262 LoRa · GNSS</a:t>
-            </a:r>
-            <a:endParaRPr lang="en-US" sz="1250" dirty="0"/>
-          </a:p>
-        </p:txBody>
-      </p:sp>
-      <p:sp>
-        <p:nvSpPr>
-          <p:cNvPr id="16" name="Text 14"/>
-          <p:cNvSpPr txBox="1"/>
-          <p:nvPr/>
-        </p:nvSpPr>
-        <p:spPr>
-          <a:xfrm>
-            <a:off x="4892040" y="2395728"/>
-            <a:ext cx="2697480" cy="274320"/>
-          </a:xfrm>
-          <a:prstGeom prst="rect">
-            <a:avLst/>
-          </a:prstGeom>
-          <a:noFill/>
-          <a:ln/>
-        </p:spPr>
-        <p:txBody>
-          <a:bodyPr wrap="square" lIns="0" tIns="0" rIns="0" bIns="0" rtlCol="0" anchor="ctr"/>
-          <a:lstStyle/>
-          <a:p>
-            <a:pPr indent="0" marL="0">
-              <a:buNone/>
-            </a:pPr>
-            <a:r>
-              <a:rPr lang="en-US" sz="1000" i="1" dirty="0">
-                <a:solidFill>
-                  <a:srgbClr val="5B6B8A"/>
-                </a:solidFill>
-                <a:latin typeface="Calibri" pitchFamily="34" charset="0"/>
-                <a:ea typeface="Calibri" pitchFamily="34" charset="-122"/>
-                <a:cs typeface="Calibri" pitchFamily="34" charset="-120"/>
-              </a:rPr>
-              <a:t>stock Meshtastic firmware</a:t>
-            </a:r>
-            <a:endParaRPr lang="en-US" sz="1000" dirty="0"/>
-          </a:p>
-        </p:txBody>
-      </p:sp>
-      <p:sp>
-        <p:nvSpPr>
-          <p:cNvPr id="17" name="Shape 15"/>
-          <p:cNvSpPr/>
-          <p:nvPr/>
-        </p:nvSpPr>
-        <p:spPr>
-          <a:xfrm>
-            <a:off x="6217920" y="2697480"/>
-            <a:ext cx="0" cy="548640"/>
-          </a:xfrm>
-          <a:prstGeom prst="line">
-            <a:avLst/>
-          </a:prstGeom>
-          <a:noFill/>
-          <a:ln w="28575">
-            <a:solidFill>
-              <a:srgbClr val="E58E1A"/>
-            </a:solidFill>
-            <a:prstDash val="solid"/>
-            <a:tailEnd type="triangle"/>
-          </a:ln>
-        </p:spPr>
-      </p:sp>
-      <p:sp>
-        <p:nvSpPr>
-          <p:cNvPr id="18" name="Text 16"/>
-          <p:cNvSpPr txBox="1"/>
-          <p:nvPr/>
-        </p:nvSpPr>
-        <p:spPr>
-          <a:xfrm>
-            <a:off x="6355080" y="2816352"/>
-            <a:ext cx="1280160" cy="274320"/>
-          </a:xfrm>
-          <a:prstGeom prst="rect">
-            <a:avLst/>
-          </a:prstGeom>
-          <a:noFill/>
-          <a:ln/>
-        </p:spPr>
-        <p:txBody>
-          <a:bodyPr wrap="square" lIns="0" tIns="0" rIns="0" bIns="0" rtlCol="0" anchor="ctr"/>
-          <a:lstStyle/>
-          <a:p>
-            <a:pPr indent="0" marL="0">
-              <a:buNone/>
-            </a:pPr>
-            <a:r>
-              <a:rPr lang="en-US" sz="1000" b="1" dirty="0">
-                <a:solidFill>
-                  <a:srgbClr val="E58E1A"/>
-                </a:solidFill>
-                <a:latin typeface="Calibri" pitchFamily="34" charset="0"/>
-                <a:ea typeface="Calibri" pitchFamily="34" charset="-122"/>
-                <a:cs typeface="Calibri" pitchFamily="34" charset="-120"/>
-              </a:rPr>
-              <a:t>BLE (in-cab)</a:t>
-            </a:r>
-            <a:endParaRPr lang="en-US" sz="1000" dirty="0"/>
-          </a:p>
-        </p:txBody>
-      </p:sp>
-      <p:sp>
-        <p:nvSpPr>
-          <p:cNvPr id="19" name="Shape 17"/>
-          <p:cNvSpPr/>
-          <p:nvPr/>
-        </p:nvSpPr>
-        <p:spPr>
-          <a:xfrm>
-            <a:off x="4800600" y="3246120"/>
-            <a:ext cx="2834640" cy="960120"/>
-          </a:xfrm>
-          <a:prstGeom prst="roundRect">
-            <a:avLst>
-              <a:gd name="adj" fmla="val 6667"/>
-            </a:avLst>
-          </a:prstGeom>
-          <a:solidFill>
-            <a:srgbClr val="FFFFFF"/>
-          </a:solidFill>
-          <a:ln w="19050">
-            <a:solidFill>
-              <a:srgbClr val="6D4BDB"/>
-            </a:solidFill>
-            <a:prstDash val="solid"/>
-          </a:ln>
-        </p:spPr>
-      </p:sp>
-      <p:sp>
-        <p:nvSpPr>
-          <p:cNvPr id="20" name="Text 18"/>
-          <p:cNvSpPr txBox="1"/>
-          <p:nvPr/>
-        </p:nvSpPr>
-        <p:spPr>
-          <a:xfrm>
-            <a:off x="4892040" y="3346704"/>
-            <a:ext cx="2697480" cy="731520"/>
-          </a:xfrm>
-          <a:prstGeom prst="rect">
-            <a:avLst/>
-          </a:prstGeom>
-          <a:noFill/>
-          <a:ln/>
-        </p:spPr>
-        <p:txBody>
-          <a:bodyPr wrap="square" lIns="0" tIns="0" rIns="0" bIns="0" rtlCol="0" anchor="ctr"/>
-          <a:lstStyle/>
-          <a:p>
-            <a:pPr indent="0" marL="0">
-              <a:buNone/>
-            </a:pPr>
-            <a:r>
-              <a:rPr lang="en-US" sz="1250" b="1" dirty="0">
-                <a:solidFill>
-                  <a:srgbClr val="1E2761"/>
-                </a:solidFill>
-                <a:latin typeface="Calibri" pitchFamily="34" charset="0"/>
-                <a:ea typeface="Calibri" pitchFamily="34" charset="-122"/>
-                <a:cs typeface="Calibri" pitchFamily="34" charset="-120"/>
-              </a:rPr>
-              <a:t>Waveshare 4.2″ RLCD — display</a:t>
-            </a:r>
-            <a:endParaRPr lang="en-US" sz="1250" dirty="0"/>
-          </a:p>
-          <a:p>
-            <a:pPr indent="0" marL="0">
-              <a:buNone/>
-            </a:pPr>
-            <a:r>
-              <a:rPr lang="en-US" sz="1050" dirty="0">
-                <a:solidFill>
-                  <a:srgbClr val="5B6B8A"/>
-                </a:solidFill>
-                <a:latin typeface="Calibri" pitchFamily="34" charset="0"/>
-                <a:ea typeface="Calibri" pitchFamily="34" charset="-122"/>
-                <a:cs typeface="Calibri" pitchFamily="34" charset="-120"/>
-              </a:rPr>
-              <a:t>our only custom firmware</a:t>
-            </a:r>
-            <a:endParaRPr lang="en-US" sz="1250" dirty="0"/>
-          </a:p>
-        </p:txBody>
-      </p:sp>
-      <p:sp>
-        <p:nvSpPr>
-          <p:cNvPr id="21" name="Shape 19"/>
-          <p:cNvSpPr/>
-          <p:nvPr/>
-        </p:nvSpPr>
-        <p:spPr>
-          <a:xfrm>
-            <a:off x="3794760" y="2103120"/>
-            <a:ext cx="777240" cy="0"/>
-          </a:xfrm>
-          <a:prstGeom prst="line">
-            <a:avLst/>
-          </a:prstGeom>
-          <a:noFill/>
-          <a:ln w="31750">
-            <a:solidFill>
-              <a:srgbClr val="1E2761"/>
-            </a:solidFill>
-            <a:prstDash val="solid"/>
-            <a:headEnd type="triangle"/>
-            <a:tailEnd type="triangle"/>
-          </a:ln>
-        </p:spPr>
-      </p:sp>
-      <p:sp>
-        <p:nvSpPr>
-          <p:cNvPr id="22" name="Text 20"/>
-          <p:cNvSpPr txBox="1"/>
-          <p:nvPr/>
-        </p:nvSpPr>
-        <p:spPr>
-          <a:xfrm>
-            <a:off x="3383280" y="1371600"/>
-            <a:ext cx="1645920" cy="640080"/>
-          </a:xfrm>
-          <a:prstGeom prst="rect">
-            <a:avLst/>
-          </a:prstGeom>
-          <a:noFill/>
-          <a:ln/>
-        </p:spPr>
-        <p:txBody>
-          <a:bodyPr wrap="square" lIns="0" tIns="0" rIns="0" bIns="0" rtlCol="0" anchor="ctr"/>
-          <a:lstStyle/>
-          <a:p>
-            <a:pPr algn="ctr" indent="0" marL="0">
-              <a:buNone/>
-            </a:pPr>
-            <a:r>
-              <a:rPr lang="en-US" sz="1000" b="1" dirty="0">
-                <a:solidFill>
-                  <a:srgbClr val="1E2761"/>
-                </a:solidFill>
-                <a:latin typeface="Calibri" pitchFamily="34" charset="0"/>
-                <a:ea typeface="Calibri" pitchFamily="34" charset="-122"/>
-                <a:cs typeface="Calibri" pitchFamily="34" charset="-120"/>
-              </a:rPr>
-              <a:t>LoRa 915 MHz</a:t>
-            </a:r>
-            <a:endParaRPr lang="en-US" sz="1000" dirty="0"/>
-          </a:p>
-          <a:p>
-            <a:pPr algn="ctr" indent="0" marL="0">
-              <a:buNone/>
-            </a:pPr>
-            <a:r>
-              <a:rPr lang="en-US" sz="1000" b="1" dirty="0">
-                <a:solidFill>
-                  <a:srgbClr val="1E2761"/>
-                </a:solidFill>
-                <a:latin typeface="Calibri" pitchFamily="34" charset="0"/>
-                <a:ea typeface="Calibri" pitchFamily="34" charset="-122"/>
-                <a:cs typeface="Calibri" pitchFamily="34" charset="-120"/>
-              </a:rPr>
-              <a:t>2–8+ km · AES · mesh</a:t>
-            </a:r>
-            <a:endParaRPr lang="en-US" sz="1000" dirty="0"/>
-          </a:p>
-        </p:txBody>
-      </p:sp>
-      <p:sp>
-        <p:nvSpPr>
-          <p:cNvPr id="23" name="Text 21"/>
-          <p:cNvSpPr txBox="1"/>
-          <p:nvPr/>
-        </p:nvSpPr>
-        <p:spPr>
-          <a:xfrm>
-            <a:off x="8229600" y="1234440"/>
-            <a:ext cx="3474720" cy="365760"/>
-          </a:xfrm>
-          <a:prstGeom prst="rect">
-            <a:avLst/>
-          </a:prstGeom>
-          <a:noFill/>
-          <a:ln/>
-        </p:spPr>
-        <p:txBody>
-          <a:bodyPr wrap="square" lIns="0" tIns="0" rIns="0" bIns="0" rtlCol="0" anchor="ctr"/>
-          <a:lstStyle/>
-          <a:p>
-            <a:pPr indent="0" marL="0">
-              <a:buNone/>
-            </a:pPr>
-            <a:r>
-              <a:rPr lang="en-US" sz="1800" b="1" dirty="0">
+              <a:rPr lang="en-US" sz="1700" b="1" dirty="0">
                 <a:solidFill>
                   <a:srgbClr val="1E2761"/>
                 </a:solidFill>
@@ -3493,39 +3063,96 @@
                 <a:ea typeface="Cambria" pitchFamily="34" charset="-122"/>
                 <a:cs typeface="Cambria" pitchFamily="34" charset="-120"/>
               </a:rPr>
-              <a:t>Why this architecture</a:t>
-            </a:r>
-            <a:endParaRPr lang="en-US" sz="1800" dirty="0"/>
-          </a:p>
-        </p:txBody>
-      </p:sp>
-      <p:sp>
-        <p:nvSpPr>
-          <p:cNvPr id="24" name="Text 22"/>
-          <p:cNvSpPr txBox="1"/>
-          <p:nvPr/>
-        </p:nvSpPr>
-        <p:spPr>
-          <a:xfrm>
-            <a:off x="8229600" y="1645920"/>
-            <a:ext cx="3520440" cy="2834640"/>
-          </a:xfrm>
-          <a:prstGeom prst="rect">
-            <a:avLst/>
-          </a:prstGeom>
-          <a:noFill/>
-          <a:ln/>
-        </p:spPr>
-        <p:txBody>
-          <a:bodyPr wrap="square" lIns="0" tIns="0" rIns="0" bIns="0" rtlCol="0" anchor="ctr"/>
-          <a:lstStyle/>
-          <a:p>
-            <a:pPr marL="342900" indent="-342900">
-              <a:spcAft>
-                <a:spcPts val="800"/>
-              </a:spcAft>
-              <a:buSzPct val="100000"/>
-              <a:buChar char="•"/>
+              <a:t>Engineering requirements</a:t>
+            </a:r>
+            <a:endParaRPr lang="en-US" sz="1700" dirty="0"/>
+          </a:p>
+        </p:txBody>
+      </p:sp>
+      <p:sp>
+        <p:nvSpPr>
+          <p:cNvPr id="6" name="Shape 4"/>
+          <p:cNvSpPr/>
+          <p:nvPr/>
+        </p:nvSpPr>
+        <p:spPr>
+          <a:xfrm>
+            <a:off x="502920" y="3108960"/>
+            <a:ext cx="502920" cy="384048"/>
+          </a:xfrm>
+          <a:prstGeom prst="roundRect">
+            <a:avLst>
+              <a:gd name="adj" fmla="val 19048"/>
+            </a:avLst>
+          </a:prstGeom>
+          <a:solidFill>
+            <a:srgbClr val="E58E1A"/>
+          </a:solidFill>
+          <a:ln/>
+        </p:spPr>
+      </p:sp>
+      <p:sp>
+        <p:nvSpPr>
+          <p:cNvPr id="7" name="Text 5"/>
+          <p:cNvSpPr txBox="1"/>
+          <p:nvPr/>
+        </p:nvSpPr>
+        <p:spPr>
+          <a:xfrm>
+            <a:off x="502920" y="3163824"/>
+            <a:ext cx="502920" cy="274320"/>
+          </a:xfrm>
+          <a:prstGeom prst="rect">
+            <a:avLst/>
+          </a:prstGeom>
+          <a:noFill/>
+          <a:ln/>
+        </p:spPr>
+        <p:txBody>
+          <a:bodyPr wrap="square" lIns="0" tIns="0" rIns="0" bIns="0" rtlCol="0" anchor="ctr"/>
+          <a:lstStyle/>
+          <a:p>
+            <a:pPr algn="ctr" indent="0" marL="0">
+              <a:buNone/>
+            </a:pPr>
+            <a:r>
+              <a:rPr lang="en-US" sz="1300" b="1" dirty="0">
+                <a:solidFill>
+                  <a:srgbClr val="FFFFFF"/>
+                </a:solidFill>
+                <a:latin typeface="Calibri" pitchFamily="34" charset="0"/>
+                <a:ea typeface="Calibri" pitchFamily="34" charset="-122"/>
+                <a:cs typeface="Calibri" pitchFamily="34" charset="-120"/>
+              </a:rPr>
+              <a:t>R1</a:t>
+            </a:r>
+            <a:endParaRPr lang="en-US" sz="1300" dirty="0"/>
+          </a:p>
+        </p:txBody>
+      </p:sp>
+      <p:sp>
+        <p:nvSpPr>
+          <p:cNvPr id="8" name="Text 6"/>
+          <p:cNvSpPr txBox="1"/>
+          <p:nvPr/>
+        </p:nvSpPr>
+        <p:spPr>
+          <a:xfrm>
+            <a:off x="1170432" y="3127248"/>
+            <a:ext cx="5212080" cy="502920"/>
+          </a:xfrm>
+          <a:prstGeom prst="rect">
+            <a:avLst/>
+          </a:prstGeom>
+          <a:noFill/>
+          <a:ln/>
+        </p:spPr>
+        <p:txBody>
+          <a:bodyPr wrap="square" lIns="0" tIns="0" rIns="0" bIns="0" rtlCol="0" anchor="ctr"/>
+          <a:lstStyle/>
+          <a:p>
+            <a:pPr indent="0" marL="0">
+              <a:buNone/>
             </a:pPr>
             <a:r>
               <a:rPr lang="en-US" sz="1250" dirty="0">
@@ -3536,17 +3163,96 @@
                 <a:ea typeface="Calibri" pitchFamily="34" charset="-122"/>
                 <a:cs typeface="Calibri" pitchFamily="34" charset="-120"/>
               </a:rPr>
-              <a:t>Meshtastic Client API: documented protobuf stream over BLE — the same interface its phone apps use. No firmware fork.</a:t>
+              <a:t>No infrastructure: license-free 915 MHz ISM link, vehicle-to-vehicle</a:t>
             </a:r>
             <a:endParaRPr lang="en-US" sz="1250" dirty="0"/>
           </a:p>
-          <a:p>
-            <a:pPr marL="342900" indent="-342900">
-              <a:spcAft>
-                <a:spcPts val="800"/>
-              </a:spcAft>
-              <a:buSzPct val="100000"/>
-              <a:buChar char="•"/>
+        </p:txBody>
+      </p:sp>
+      <p:sp>
+        <p:nvSpPr>
+          <p:cNvPr id="9" name="Shape 7"/>
+          <p:cNvSpPr/>
+          <p:nvPr/>
+        </p:nvSpPr>
+        <p:spPr>
+          <a:xfrm>
+            <a:off x="502920" y="3675888"/>
+            <a:ext cx="502920" cy="384048"/>
+          </a:xfrm>
+          <a:prstGeom prst="roundRect">
+            <a:avLst>
+              <a:gd name="adj" fmla="val 19048"/>
+            </a:avLst>
+          </a:prstGeom>
+          <a:solidFill>
+            <a:srgbClr val="E58E1A"/>
+          </a:solidFill>
+          <a:ln/>
+        </p:spPr>
+      </p:sp>
+      <p:sp>
+        <p:nvSpPr>
+          <p:cNvPr id="10" name="Text 8"/>
+          <p:cNvSpPr txBox="1"/>
+          <p:nvPr/>
+        </p:nvSpPr>
+        <p:spPr>
+          <a:xfrm>
+            <a:off x="502920" y="3730752"/>
+            <a:ext cx="502920" cy="274320"/>
+          </a:xfrm>
+          <a:prstGeom prst="rect">
+            <a:avLst/>
+          </a:prstGeom>
+          <a:noFill/>
+          <a:ln/>
+        </p:spPr>
+        <p:txBody>
+          <a:bodyPr wrap="square" lIns="0" tIns="0" rIns="0" bIns="0" rtlCol="0" anchor="ctr"/>
+          <a:lstStyle/>
+          <a:p>
+            <a:pPr algn="ctr" indent="0" marL="0">
+              <a:buNone/>
+            </a:pPr>
+            <a:r>
+              <a:rPr lang="en-US" sz="1300" b="1" dirty="0">
+                <a:solidFill>
+                  <a:srgbClr val="FFFFFF"/>
+                </a:solidFill>
+                <a:latin typeface="Calibri" pitchFamily="34" charset="0"/>
+                <a:ea typeface="Calibri" pitchFamily="34" charset="-122"/>
+                <a:cs typeface="Calibri" pitchFamily="34" charset="-120"/>
+              </a:rPr>
+              <a:t>R2</a:t>
+            </a:r>
+            <a:endParaRPr lang="en-US" sz="1300" dirty="0"/>
+          </a:p>
+        </p:txBody>
+      </p:sp>
+      <p:sp>
+        <p:nvSpPr>
+          <p:cNvPr id="11" name="Text 9"/>
+          <p:cNvSpPr txBox="1"/>
+          <p:nvPr/>
+        </p:nvSpPr>
+        <p:spPr>
+          <a:xfrm>
+            <a:off x="1170432" y="3694176"/>
+            <a:ext cx="5212080" cy="502920"/>
+          </a:xfrm>
+          <a:prstGeom prst="rect">
+            <a:avLst/>
+          </a:prstGeom>
+          <a:noFill/>
+          <a:ln/>
+        </p:spPr>
+        <p:txBody>
+          <a:bodyPr wrap="square" lIns="0" tIns="0" rIns="0" bIns="0" rtlCol="0" anchor="ctr"/>
+          <a:lstStyle/>
+          <a:p>
+            <a:pPr indent="0" marL="0">
+              <a:buNone/>
             </a:pPr>
             <a:r>
               <a:rPr lang="en-US" sz="1250" dirty="0">
@@ -3557,17 +3263,96 @@
                 <a:ea typeface="Calibri" pitchFamily="34" charset="-122"/>
                 <a:cs typeface="Calibri" pitchFamily="34" charset="-120"/>
               </a:rPr>
-              <a:t>One custom-firmware surface (the display). GPS, encryption, radio timing, mesh relay all ship pre-tested.</a:t>
+              <a:t>Driver-glanceable: arrow + distance + data age, sunlight-readable</a:t>
             </a:r>
             <a:endParaRPr lang="en-US" sz="1250" dirty="0"/>
           </a:p>
-          <a:p>
-            <a:pPr marL="342900" indent="-342900">
-              <a:spcAft>
-                <a:spcPts val="800"/>
-              </a:spcAft>
-              <a:buSzPct val="100000"/>
-              <a:buChar char="•"/>
+        </p:txBody>
+      </p:sp>
+      <p:sp>
+        <p:nvSpPr>
+          <p:cNvPr id="12" name="Shape 10"/>
+          <p:cNvSpPr/>
+          <p:nvPr/>
+        </p:nvSpPr>
+        <p:spPr>
+          <a:xfrm>
+            <a:off x="502920" y="4242816"/>
+            <a:ext cx="502920" cy="384048"/>
+          </a:xfrm>
+          <a:prstGeom prst="roundRect">
+            <a:avLst>
+              <a:gd name="adj" fmla="val 19048"/>
+            </a:avLst>
+          </a:prstGeom>
+          <a:solidFill>
+            <a:srgbClr val="E58E1A"/>
+          </a:solidFill>
+          <a:ln/>
+        </p:spPr>
+      </p:sp>
+      <p:sp>
+        <p:nvSpPr>
+          <p:cNvPr id="13" name="Text 11"/>
+          <p:cNvSpPr txBox="1"/>
+          <p:nvPr/>
+        </p:nvSpPr>
+        <p:spPr>
+          <a:xfrm>
+            <a:off x="502920" y="4297680"/>
+            <a:ext cx="502920" cy="274320"/>
+          </a:xfrm>
+          <a:prstGeom prst="rect">
+            <a:avLst/>
+          </a:prstGeom>
+          <a:noFill/>
+          <a:ln/>
+        </p:spPr>
+        <p:txBody>
+          <a:bodyPr wrap="square" lIns="0" tIns="0" rIns="0" bIns="0" rtlCol="0" anchor="ctr"/>
+          <a:lstStyle/>
+          <a:p>
+            <a:pPr algn="ctr" indent="0" marL="0">
+              <a:buNone/>
+            </a:pPr>
+            <a:r>
+              <a:rPr lang="en-US" sz="1300" b="1" dirty="0">
+                <a:solidFill>
+                  <a:srgbClr val="FFFFFF"/>
+                </a:solidFill>
+                <a:latin typeface="Calibri" pitchFamily="34" charset="0"/>
+                <a:ea typeface="Calibri" pitchFamily="34" charset="-122"/>
+                <a:cs typeface="Calibri" pitchFamily="34" charset="-120"/>
+              </a:rPr>
+              <a:t>R3</a:t>
+            </a:r>
+            <a:endParaRPr lang="en-US" sz="1300" dirty="0"/>
+          </a:p>
+        </p:txBody>
+      </p:sp>
+      <p:sp>
+        <p:nvSpPr>
+          <p:cNvPr id="14" name="Text 12"/>
+          <p:cNvSpPr txBox="1"/>
+          <p:nvPr/>
+        </p:nvSpPr>
+        <p:spPr>
+          <a:xfrm>
+            <a:off x="1170432" y="4261104"/>
+            <a:ext cx="5212080" cy="502920"/>
+          </a:xfrm>
+          <a:prstGeom prst="rect">
+            <a:avLst/>
+          </a:prstGeom>
+          <a:noFill/>
+          <a:ln/>
+        </p:spPr>
+        <p:txBody>
+          <a:bodyPr wrap="square" lIns="0" tIns="0" rIns="0" bIns="0" rtlCol="0" anchor="ctr"/>
+          <a:lstStyle/>
+          <a:p>
+            <a:pPr indent="0" marL="0">
+              <a:buNone/>
             </a:pPr>
             <a:r>
               <a:rPr lang="en-US" sz="1250" dirty="0">
@@ -3578,14 +3363,96 @@
                 <a:ea typeface="Calibri" pitchFamily="34" charset="-122"/>
                 <a:cs typeface="Calibri" pitchFamily="34" charset="-120"/>
               </a:rPr>
-              <a:t>Any third node (ridge relay, hiker) extends range automatically — mesh for free.</a:t>
+              <a:t>Wireless in-cab link between radio unit and display unit</a:t>
             </a:r>
             <a:endParaRPr lang="en-US" sz="1250" dirty="0"/>
           </a:p>
-          <a:p>
-            <a:pPr marL="342900" indent="-342900">
-              <a:buSzPct val="100000"/>
-              <a:buChar char="•"/>
+        </p:txBody>
+      </p:sp>
+      <p:sp>
+        <p:nvSpPr>
+          <p:cNvPr id="15" name="Shape 13"/>
+          <p:cNvSpPr/>
+          <p:nvPr/>
+        </p:nvSpPr>
+        <p:spPr>
+          <a:xfrm>
+            <a:off x="502920" y="4809744"/>
+            <a:ext cx="502920" cy="384048"/>
+          </a:xfrm>
+          <a:prstGeom prst="roundRect">
+            <a:avLst>
+              <a:gd name="adj" fmla="val 19048"/>
+            </a:avLst>
+          </a:prstGeom>
+          <a:solidFill>
+            <a:srgbClr val="E58E1A"/>
+          </a:solidFill>
+          <a:ln/>
+        </p:spPr>
+      </p:sp>
+      <p:sp>
+        <p:nvSpPr>
+          <p:cNvPr id="16" name="Text 14"/>
+          <p:cNvSpPr txBox="1"/>
+          <p:nvPr/>
+        </p:nvSpPr>
+        <p:spPr>
+          <a:xfrm>
+            <a:off x="502920" y="4864608"/>
+            <a:ext cx="502920" cy="274320"/>
+          </a:xfrm>
+          <a:prstGeom prst="rect">
+            <a:avLst/>
+          </a:prstGeom>
+          <a:noFill/>
+          <a:ln/>
+        </p:spPr>
+        <p:txBody>
+          <a:bodyPr wrap="square" lIns="0" tIns="0" rIns="0" bIns="0" rtlCol="0" anchor="ctr"/>
+          <a:lstStyle/>
+          <a:p>
+            <a:pPr algn="ctr" indent="0" marL="0">
+              <a:buNone/>
+            </a:pPr>
+            <a:r>
+              <a:rPr lang="en-US" sz="1300" b="1" dirty="0">
+                <a:solidFill>
+                  <a:srgbClr val="FFFFFF"/>
+                </a:solidFill>
+                <a:latin typeface="Calibri" pitchFamily="34" charset="0"/>
+                <a:ea typeface="Calibri" pitchFamily="34" charset="-122"/>
+                <a:cs typeface="Calibri" pitchFamily="34" charset="-120"/>
+              </a:rPr>
+              <a:t>R4</a:t>
+            </a:r>
+            <a:endParaRPr lang="en-US" sz="1300" dirty="0"/>
+          </a:p>
+        </p:txBody>
+      </p:sp>
+      <p:sp>
+        <p:nvSpPr>
+          <p:cNvPr id="17" name="Text 15"/>
+          <p:cNvSpPr txBox="1"/>
+          <p:nvPr/>
+        </p:nvSpPr>
+        <p:spPr>
+          <a:xfrm>
+            <a:off x="1170432" y="4828032"/>
+            <a:ext cx="5212080" cy="502920"/>
+          </a:xfrm>
+          <a:prstGeom prst="rect">
+            <a:avLst/>
+          </a:prstGeom>
+          <a:noFill/>
+          <a:ln/>
+        </p:spPr>
+        <p:txBody>
+          <a:bodyPr wrap="square" lIns="0" tIns="0" rIns="0" bIns="0" rtlCol="0" anchor="ctr"/>
+          <a:lstStyle/>
+          <a:p>
+            <a:pPr indent="0" marL="0">
+              <a:buNone/>
             </a:pPr>
             <a:r>
               <a:rPr lang="en-US" sz="1250" dirty="0">
@@ -3596,7 +3463,7 @@
                 <a:ea typeface="Calibri" pitchFamily="34" charset="-122"/>
                 <a:cs typeface="Calibri" pitchFamily="34" charset="-120"/>
               </a:rPr>
-              <a:t>Reflective LCD: sunlight-readable on a dash where TFTs wash out; refreshes fast enough for a live arrow.</a:t>
+              <a:t>Multi-km range in terrain (2–8 km design target, LOS ≫)</a:t>
             </a:r>
             <a:endParaRPr lang="en-US" sz="1250" dirty="0"/>
           </a:p>
@@ -3604,14 +3471,75 @@
       </p:sp>
       <p:sp>
         <p:nvSpPr>
-          <p:cNvPr id="25" name="Text 23"/>
-          <p:cNvSpPr txBox="1"/>
-          <p:nvPr/>
-        </p:nvSpPr>
-        <p:spPr>
-          <a:xfrm>
-            <a:off x="502920" y="4709160"/>
-            <a:ext cx="2743200" cy="320040"/>
+          <p:cNvPr id="18" name="Shape 16"/>
+          <p:cNvSpPr/>
+          <p:nvPr/>
+        </p:nvSpPr>
+        <p:spPr>
+          <a:xfrm>
+            <a:off x="502920" y="5376672"/>
+            <a:ext cx="502920" cy="384048"/>
+          </a:xfrm>
+          <a:prstGeom prst="roundRect">
+            <a:avLst>
+              <a:gd name="adj" fmla="val 19048"/>
+            </a:avLst>
+          </a:prstGeom>
+          <a:solidFill>
+            <a:srgbClr val="E58E1A"/>
+          </a:solidFill>
+          <a:ln/>
+        </p:spPr>
+      </p:sp>
+      <p:sp>
+        <p:nvSpPr>
+          <p:cNvPr id="19" name="Text 17"/>
+          <p:cNvSpPr txBox="1"/>
+          <p:nvPr/>
+        </p:nvSpPr>
+        <p:spPr>
+          <a:xfrm>
+            <a:off x="502920" y="5431536"/>
+            <a:ext cx="502920" cy="274320"/>
+          </a:xfrm>
+          <a:prstGeom prst="rect">
+            <a:avLst/>
+          </a:prstGeom>
+          <a:noFill/>
+          <a:ln/>
+        </p:spPr>
+        <p:txBody>
+          <a:bodyPr wrap="square" lIns="0" tIns="0" rIns="0" bIns="0" rtlCol="0" anchor="ctr"/>
+          <a:lstStyle/>
+          <a:p>
+            <a:pPr algn="ctr" indent="0" marL="0">
+              <a:buNone/>
+            </a:pPr>
+            <a:r>
+              <a:rPr lang="en-US" sz="1300" b="1" dirty="0">
+                <a:solidFill>
+                  <a:srgbClr val="FFFFFF"/>
+                </a:solidFill>
+                <a:latin typeface="Calibri" pitchFamily="34" charset="0"/>
+                <a:ea typeface="Calibri" pitchFamily="34" charset="-122"/>
+                <a:cs typeface="Calibri" pitchFamily="34" charset="-120"/>
+              </a:rPr>
+              <a:t>R5</a:t>
+            </a:r>
+            <a:endParaRPr lang="en-US" sz="1300" dirty="0"/>
+          </a:p>
+        </p:txBody>
+      </p:sp>
+      <p:sp>
+        <p:nvSpPr>
+          <p:cNvPr id="20" name="Text 18"/>
+          <p:cNvSpPr txBox="1"/>
+          <p:nvPr/>
+        </p:nvSpPr>
+        <p:spPr>
+          <a:xfrm>
+            <a:off x="1170432" y="5394960"/>
+            <a:ext cx="5212080" cy="502920"/>
           </a:xfrm>
           <a:prstGeom prst="rect">
             <a:avLst/>
@@ -3627,7 +3555,46 @@
               <a:buNone/>
             </a:pPr>
             <a:r>
-              <a:rPr lang="en-US" sz="1500" b="1" dirty="0">
+              <a:rPr lang="en-US" sz="1250" dirty="0">
+                <a:solidFill>
+                  <a:srgbClr val="222A3F"/>
+                </a:solidFill>
+                <a:latin typeface="Calibri" pitchFamily="34" charset="0"/>
+                <a:ea typeface="Calibri" pitchFamily="34" charset="-122"/>
+                <a:cs typeface="Calibri" pitchFamily="34" charset="-120"/>
+              </a:rPr>
+              <a:t>Vehicle-powered; graceful degradation on any failure</a:t>
+            </a:r>
+            <a:endParaRPr lang="en-US" sz="1250" dirty="0"/>
+          </a:p>
+        </p:txBody>
+      </p:sp>
+      <p:sp>
+        <p:nvSpPr>
+          <p:cNvPr id="21" name="Text 19"/>
+          <p:cNvSpPr txBox="1"/>
+          <p:nvPr/>
+        </p:nvSpPr>
+        <p:spPr>
+          <a:xfrm>
+            <a:off x="6720840" y="1097280"/>
+            <a:ext cx="4937760" cy="365760"/>
+          </a:xfrm>
+          <a:prstGeom prst="rect">
+            <a:avLst/>
+          </a:prstGeom>
+          <a:noFill/>
+          <a:ln/>
+        </p:spPr>
+        <p:txBody>
+          <a:bodyPr wrap="square" lIns="0" tIns="0" rIns="0" bIns="0" rtlCol="0" anchor="ctr"/>
+          <a:lstStyle/>
+          <a:p>
+            <a:pPr indent="0" marL="0">
+              <a:buNone/>
+            </a:pPr>
+            <a:r>
+              <a:rPr lang="en-US" sz="1700" b="1" dirty="0">
                 <a:solidFill>
                   <a:srgbClr val="1E2761"/>
                 </a:solidFill>
@@ -3635,26 +3602,26 @@
                 <a:ea typeface="Cambria" pitchFamily="34" charset="-122"/>
                 <a:cs typeface="Cambria" pitchFamily="34" charset="-120"/>
               </a:rPr>
-              <a:t>Protocol stack</a:t>
-            </a:r>
-            <a:endParaRPr lang="en-US" sz="1500" dirty="0"/>
-          </a:p>
-        </p:txBody>
-      </p:sp>
-      <p:sp>
-        <p:nvSpPr>
-          <p:cNvPr id="26" name="Shape 24"/>
+              <a:t>How the project is evaluated</a:t>
+            </a:r>
+            <a:endParaRPr lang="en-US" sz="1700" dirty="0"/>
+          </a:p>
+        </p:txBody>
+      </p:sp>
+      <p:sp>
+        <p:nvSpPr>
+          <p:cNvPr id="22" name="Shape 20"/>
           <p:cNvSpPr/>
           <p:nvPr/>
         </p:nvSpPr>
         <p:spPr>
           <a:xfrm>
-            <a:off x="502920" y="5074920"/>
-            <a:ext cx="2697480" cy="914400"/>
+            <a:off x="6720840" y="1554480"/>
+            <a:ext cx="1051560" cy="457200"/>
           </a:xfrm>
           <a:prstGeom prst="roundRect">
             <a:avLst>
-              <a:gd name="adj" fmla="val 7000"/>
+              <a:gd name="adj" fmla="val 16000"/>
             </a:avLst>
           </a:prstGeom>
           <a:solidFill>
@@ -3670,14 +3637,53 @@
       </p:sp>
       <p:sp>
         <p:nvSpPr>
-          <p:cNvPr id="27" name="Text 25"/>
-          <p:cNvSpPr txBox="1"/>
-          <p:nvPr/>
-        </p:nvSpPr>
-        <p:spPr>
-          <a:xfrm>
-            <a:off x="630936" y="5148072"/>
-            <a:ext cx="2468880" cy="274320"/>
+          <p:cNvPr id="23" name="Text 21"/>
+          <p:cNvSpPr txBox="1"/>
+          <p:nvPr/>
+        </p:nvSpPr>
+        <p:spPr>
+          <a:xfrm>
+            <a:off x="6720840" y="1645920"/>
+            <a:ext cx="1051560" cy="292608"/>
+          </a:xfrm>
+          <a:prstGeom prst="rect">
+            <a:avLst/>
+          </a:prstGeom>
+          <a:noFill/>
+          <a:ln/>
+        </p:spPr>
+        <p:txBody>
+          <a:bodyPr wrap="square" lIns="0" tIns="0" rIns="0" bIns="0" rtlCol="0" anchor="ctr"/>
+          <a:lstStyle/>
+          <a:p>
+            <a:pPr algn="ctr" indent="0" marL="0">
+              <a:buNone/>
+            </a:pPr>
+            <a:r>
+              <a:rPr lang="en-US" sz="1100" b="1" dirty="0">
+                <a:solidFill>
+                  <a:srgbClr val="1E2761"/>
+                </a:solidFill>
+                <a:latin typeface="Calibri" pitchFamily="34" charset="0"/>
+                <a:ea typeface="Calibri" pitchFamily="34" charset="-122"/>
+                <a:cs typeface="Calibri" pitchFamily="34" charset="-120"/>
+              </a:rPr>
+              <a:t>Weekly</a:t>
+            </a:r>
+            <a:endParaRPr lang="en-US" sz="1100" dirty="0"/>
+          </a:p>
+        </p:txBody>
+      </p:sp>
+      <p:sp>
+        <p:nvSpPr>
+          <p:cNvPr id="24" name="Text 22"/>
+          <p:cNvSpPr txBox="1"/>
+          <p:nvPr/>
+        </p:nvSpPr>
+        <p:spPr>
+          <a:xfrm>
+            <a:off x="7936992" y="1536192"/>
+            <a:ext cx="3749040" cy="658368"/>
           </a:xfrm>
           <a:prstGeom prst="rect">
             <a:avLst/>
@@ -3693,46 +3699,7 @@
               <a:buNone/>
             </a:pPr>
             <a:r>
-              <a:rPr lang="en-US" sz="1200" b="1" dirty="0">
-                <a:solidFill>
-                  <a:srgbClr val="E58E1A"/>
-                </a:solidFill>
-                <a:latin typeface="Calibri" pitchFamily="34" charset="0"/>
-                <a:ea typeface="Calibri" pitchFamily="34" charset="-122"/>
-                <a:cs typeface="Calibri" pitchFamily="34" charset="-120"/>
-              </a:rPr>
-              <a:t>APP</a:t>
-            </a:r>
-            <a:endParaRPr lang="en-US" sz="1200" dirty="0"/>
-          </a:p>
-        </p:txBody>
-      </p:sp>
-      <p:sp>
-        <p:nvSpPr>
-          <p:cNvPr id="28" name="Text 26"/>
-          <p:cNvSpPr txBox="1"/>
-          <p:nvPr/>
-        </p:nvSpPr>
-        <p:spPr>
-          <a:xfrm>
-            <a:off x="630936" y="5413248"/>
-            <a:ext cx="2468880" cy="502920"/>
-          </a:xfrm>
-          <a:prstGeom prst="rect">
-            <a:avLst/>
-          </a:prstGeom>
-          <a:noFill/>
-          <a:ln/>
-        </p:spPr>
-        <p:txBody>
-          <a:bodyPr wrap="square" lIns="0" tIns="0" rIns="0" bIns="0" rtlCol="0" anchor="ctr"/>
-          <a:lstStyle/>
-          <a:p>
-            <a:pPr indent="0" marL="0">
-              <a:buNone/>
-            </a:pPr>
-            <a:r>
-              <a:rPr lang="en-US" sz="1050" dirty="0">
+              <a:rPr lang="en-US" sz="1150" dirty="0">
                 <a:solidFill>
                   <a:srgbClr val="222A3F"/>
                 </a:solidFill>
@@ -3740,26 +3707,26 @@
                 <a:ea typeface="Calibri" pitchFamily="34" charset="-122"/>
                 <a:cs typeface="Calibri" pitchFamily="34" charset="-120"/>
               </a:rPr>
-              <a:t>Position payload (protobuf, ~40 B)</a:t>
-            </a:r>
-            <a:endParaRPr lang="en-US" sz="1050" dirty="0"/>
-          </a:p>
-        </p:txBody>
-      </p:sp>
-      <p:sp>
-        <p:nvSpPr>
-          <p:cNvPr id="29" name="Shape 27"/>
+              <a:t>15 progress presentations (W1–W15) — engineering content, hours &amp; budget tracking</a:t>
+            </a:r>
+            <a:endParaRPr lang="en-US" sz="1150" dirty="0"/>
+          </a:p>
+        </p:txBody>
+      </p:sp>
+      <p:sp>
+        <p:nvSpPr>
+          <p:cNvPr id="25" name="Shape 23"/>
           <p:cNvSpPr/>
           <p:nvPr/>
         </p:nvSpPr>
         <p:spPr>
           <a:xfrm>
-            <a:off x="3355848" y="5074920"/>
-            <a:ext cx="2697480" cy="914400"/>
+            <a:off x="6720840" y="2212848"/>
+            <a:ext cx="1051560" cy="457200"/>
           </a:xfrm>
           <a:prstGeom prst="roundRect">
             <a:avLst>
-              <a:gd name="adj" fmla="val 7000"/>
+              <a:gd name="adj" fmla="val 16000"/>
             </a:avLst>
           </a:prstGeom>
           <a:solidFill>
@@ -3775,14 +3742,53 @@
       </p:sp>
       <p:sp>
         <p:nvSpPr>
-          <p:cNvPr id="30" name="Text 28"/>
-          <p:cNvSpPr txBox="1"/>
-          <p:nvPr/>
-        </p:nvSpPr>
-        <p:spPr>
-          <a:xfrm>
-            <a:off x="3483864" y="5148072"/>
-            <a:ext cx="2468880" cy="274320"/>
+          <p:cNvPr id="26" name="Text 24"/>
+          <p:cNvSpPr txBox="1"/>
+          <p:nvPr/>
+        </p:nvSpPr>
+        <p:spPr>
+          <a:xfrm>
+            <a:off x="6720840" y="2304288"/>
+            <a:ext cx="1051560" cy="292608"/>
+          </a:xfrm>
+          <a:prstGeom prst="rect">
+            <a:avLst/>
+          </a:prstGeom>
+          <a:noFill/>
+          <a:ln/>
+        </p:spPr>
+        <p:txBody>
+          <a:bodyPr wrap="square" lIns="0" tIns="0" rIns="0" bIns="0" rtlCol="0" anchor="ctr"/>
+          <a:lstStyle/>
+          <a:p>
+            <a:pPr algn="ctr" indent="0" marL="0">
+              <a:buNone/>
+            </a:pPr>
+            <a:r>
+              <a:rPr lang="en-US" sz="1100" b="1" dirty="0">
+                <a:solidFill>
+                  <a:srgbClr val="1E2761"/>
+                </a:solidFill>
+                <a:latin typeface="Calibri" pitchFamily="34" charset="0"/>
+                <a:ea typeface="Calibri" pitchFamily="34" charset="-122"/>
+                <a:cs typeface="Calibri" pitchFamily="34" charset="-120"/>
+              </a:rPr>
+              <a:t>~W8</a:t>
+            </a:r>
+            <a:endParaRPr lang="en-US" sz="1100" dirty="0"/>
+          </a:p>
+        </p:txBody>
+      </p:sp>
+      <p:sp>
+        <p:nvSpPr>
+          <p:cNvPr id="27" name="Text 25"/>
+          <p:cNvSpPr txBox="1"/>
+          <p:nvPr/>
+        </p:nvSpPr>
+        <p:spPr>
+          <a:xfrm>
+            <a:off x="7936992" y="2194560"/>
+            <a:ext cx="3749040" cy="658368"/>
           </a:xfrm>
           <a:prstGeom prst="rect">
             <a:avLst/>
@@ -3798,46 +3804,7 @@
               <a:buNone/>
             </a:pPr>
             <a:r>
-              <a:rPr lang="en-US" sz="1200" b="1" dirty="0">
-                <a:solidFill>
-                  <a:srgbClr val="E58E1A"/>
-                </a:solidFill>
-                <a:latin typeface="Calibri" pitchFamily="34" charset="0"/>
-                <a:ea typeface="Calibri" pitchFamily="34" charset="-122"/>
-                <a:cs typeface="Calibri" pitchFamily="34" charset="-120"/>
-              </a:rPr>
-              <a:t>NET</a:t>
-            </a:r>
-            <a:endParaRPr lang="en-US" sz="1200" dirty="0"/>
-          </a:p>
-        </p:txBody>
-      </p:sp>
-      <p:sp>
-        <p:nvSpPr>
-          <p:cNvPr id="31" name="Text 29"/>
-          <p:cNvSpPr txBox="1"/>
-          <p:nvPr/>
-        </p:nvSpPr>
-        <p:spPr>
-          <a:xfrm>
-            <a:off x="3483864" y="5413248"/>
-            <a:ext cx="2468880" cy="502920"/>
-          </a:xfrm>
-          <a:prstGeom prst="rect">
-            <a:avLst/>
-          </a:prstGeom>
-          <a:noFill/>
-          <a:ln/>
-        </p:spPr>
-        <p:txBody>
-          <a:bodyPr wrap="square" lIns="0" tIns="0" rIns="0" bIns="0" rtlCol="0" anchor="ctr"/>
-          <a:lstStyle/>
-          <a:p>
-            <a:pPr indent="0" marL="0">
-              <a:buNone/>
-            </a:pPr>
-            <a:r>
-              <a:rPr lang="en-US" sz="1050" dirty="0">
+              <a:rPr lang="en-US" sz="1150" dirty="0">
                 <a:solidFill>
                   <a:srgbClr val="222A3F"/>
                 </a:solidFill>
@@ -3845,26 +3812,26 @@
                 <a:ea typeface="Calibri" pitchFamily="34" charset="-122"/>
                 <a:cs typeface="Calibri" pitchFamily="34" charset="-120"/>
               </a:rPr>
-              <a:t>Managed flooding · hop limit 3 · AES-256</a:t>
-            </a:r>
-            <a:endParaRPr lang="en-US" sz="1050" dirty="0"/>
-          </a:p>
-        </p:txBody>
-      </p:sp>
-      <p:sp>
-        <p:nvSpPr>
-          <p:cNvPr id="32" name="Shape 30"/>
+              <a:t>Midterm review: bench-integrated system demonstration</a:t>
+            </a:r>
+            <a:endParaRPr lang="en-US" sz="1150" dirty="0"/>
+          </a:p>
+        </p:txBody>
+      </p:sp>
+      <p:sp>
+        <p:nvSpPr>
+          <p:cNvPr id="28" name="Shape 26"/>
           <p:cNvSpPr/>
           <p:nvPr/>
         </p:nvSpPr>
         <p:spPr>
           <a:xfrm>
-            <a:off x="6208776" y="5074920"/>
-            <a:ext cx="2697480" cy="914400"/>
+            <a:off x="6720840" y="2871216"/>
+            <a:ext cx="1051560" cy="457200"/>
           </a:xfrm>
           <a:prstGeom prst="roundRect">
             <a:avLst>
-              <a:gd name="adj" fmla="val 7000"/>
+              <a:gd name="adj" fmla="val 16000"/>
             </a:avLst>
           </a:prstGeom>
           <a:solidFill>
@@ -3880,14 +3847,53 @@
       </p:sp>
       <p:sp>
         <p:nvSpPr>
-          <p:cNvPr id="33" name="Text 31"/>
-          <p:cNvSpPr txBox="1"/>
-          <p:nvPr/>
-        </p:nvSpPr>
-        <p:spPr>
-          <a:xfrm>
-            <a:off x="6336792" y="5148072"/>
-            <a:ext cx="2468880" cy="274320"/>
+          <p:cNvPr id="29" name="Text 27"/>
+          <p:cNvSpPr txBox="1"/>
+          <p:nvPr/>
+        </p:nvSpPr>
+        <p:spPr>
+          <a:xfrm>
+            <a:off x="6720840" y="2962656"/>
+            <a:ext cx="1051560" cy="292608"/>
+          </a:xfrm>
+          <a:prstGeom prst="rect">
+            <a:avLst/>
+          </a:prstGeom>
+          <a:noFill/>
+          <a:ln/>
+        </p:spPr>
+        <p:txBody>
+          <a:bodyPr wrap="square" lIns="0" tIns="0" rIns="0" bIns="0" rtlCol="0" anchor="ctr"/>
+          <a:lstStyle/>
+          <a:p>
+            <a:pPr algn="ctr" indent="0" marL="0">
+              <a:buNone/>
+            </a:pPr>
+            <a:r>
+              <a:rPr lang="en-US" sz="1100" b="1" dirty="0">
+                <a:solidFill>
+                  <a:srgbClr val="1E2761"/>
+                </a:solidFill>
+                <a:latin typeface="Calibri" pitchFamily="34" charset="0"/>
+                <a:ea typeface="Calibri" pitchFamily="34" charset="-122"/>
+                <a:cs typeface="Calibri" pitchFamily="34" charset="-120"/>
+              </a:rPr>
+              <a:t>W8–W12</a:t>
+            </a:r>
+            <a:endParaRPr lang="en-US" sz="1100" dirty="0"/>
+          </a:p>
+        </p:txBody>
+      </p:sp>
+      <p:sp>
+        <p:nvSpPr>
+          <p:cNvPr id="30" name="Text 28"/>
+          <p:cNvSpPr txBox="1"/>
+          <p:nvPr/>
+        </p:nvSpPr>
+        <p:spPr>
+          <a:xfrm>
+            <a:off x="7936992" y="2852928"/>
+            <a:ext cx="3749040" cy="658368"/>
           </a:xfrm>
           <a:prstGeom prst="rect">
             <a:avLst/>
@@ -3903,46 +3909,7 @@
               <a:buNone/>
             </a:pPr>
             <a:r>
-              <a:rPr lang="en-US" sz="1200" b="1" dirty="0">
-                <a:solidFill>
-                  <a:srgbClr val="E58E1A"/>
-                </a:solidFill>
-                <a:latin typeface="Calibri" pitchFamily="34" charset="0"/>
-                <a:ea typeface="Calibri" pitchFamily="34" charset="-122"/>
-                <a:cs typeface="Calibri" pitchFamily="34" charset="-120"/>
-              </a:rPr>
-              <a:t>MAC</a:t>
-            </a:r>
-            <a:endParaRPr lang="en-US" sz="1200" dirty="0"/>
-          </a:p>
-        </p:txBody>
-      </p:sp>
-      <p:sp>
-        <p:nvSpPr>
-          <p:cNvPr id="34" name="Text 32"/>
-          <p:cNvSpPr txBox="1"/>
-          <p:nvPr/>
-        </p:nvSpPr>
-        <p:spPr>
-          <a:xfrm>
-            <a:off x="6336792" y="5413248"/>
-            <a:ext cx="2468880" cy="502920"/>
-          </a:xfrm>
-          <a:prstGeom prst="rect">
-            <a:avLst/>
-          </a:prstGeom>
-          <a:noFill/>
-          <a:ln/>
-        </p:spPr>
-        <p:txBody>
-          <a:bodyPr wrap="square" lIns="0" tIns="0" rIns="0" bIns="0" rtlCol="0" anchor="ctr"/>
-          <a:lstStyle/>
-          <a:p>
-            <a:pPr indent="0" marL="0">
-              <a:buNone/>
-            </a:pPr>
-            <a:r>
-              <a:rPr lang="en-US" sz="1050" dirty="0">
+              <a:rPr lang="en-US" sz="1150" dirty="0">
                 <a:solidFill>
                   <a:srgbClr val="222A3F"/>
                 </a:solidFill>
@@ -3950,30 +3917,30 @@
                 <a:ea typeface="Calibri" pitchFamily="34" charset="-122"/>
                 <a:cs typeface="Calibri" pitchFamily="34" charset="-120"/>
               </a:rPr>
-              <a:t>CSMA, SNR-weighted backoff</a:t>
-            </a:r>
-            <a:endParaRPr lang="en-US" sz="1050" dirty="0"/>
-          </a:p>
-        </p:txBody>
-      </p:sp>
-      <p:sp>
-        <p:nvSpPr>
-          <p:cNvPr id="35" name="Shape 33"/>
+              <a:t>Field evidence: two-vehicle drive tests + range characterization data</a:t>
+            </a:r>
+            <a:endParaRPr lang="en-US" sz="1150" dirty="0"/>
+          </a:p>
+        </p:txBody>
+      </p:sp>
+      <p:sp>
+        <p:nvSpPr>
+          <p:cNvPr id="31" name="Shape 29"/>
           <p:cNvSpPr/>
           <p:nvPr/>
         </p:nvSpPr>
         <p:spPr>
           <a:xfrm>
-            <a:off x="9061704" y="5074920"/>
-            <a:ext cx="2697480" cy="914400"/>
+            <a:off x="6720840" y="3529584"/>
+            <a:ext cx="1051560" cy="457200"/>
           </a:xfrm>
           <a:prstGeom prst="roundRect">
             <a:avLst>
-              <a:gd name="adj" fmla="val 7000"/>
+              <a:gd name="adj" fmla="val 16000"/>
             </a:avLst>
           </a:prstGeom>
           <a:solidFill>
-            <a:srgbClr val="1E2761"/>
+            <a:srgbClr val="F2F6FC"/>
           </a:solidFill>
           <a:ln w="12700">
             <a:solidFill>
@@ -3985,14 +3952,158 @@
       </p:sp>
       <p:sp>
         <p:nvSpPr>
+          <p:cNvPr id="32" name="Text 30"/>
+          <p:cNvSpPr txBox="1"/>
+          <p:nvPr/>
+        </p:nvSpPr>
+        <p:spPr>
+          <a:xfrm>
+            <a:off x="6720840" y="3621024"/>
+            <a:ext cx="1051560" cy="292608"/>
+          </a:xfrm>
+          <a:prstGeom prst="rect">
+            <a:avLst/>
+          </a:prstGeom>
+          <a:noFill/>
+          <a:ln/>
+        </p:spPr>
+        <p:txBody>
+          <a:bodyPr wrap="square" lIns="0" tIns="0" rIns="0" bIns="0" rtlCol="0" anchor="ctr"/>
+          <a:lstStyle/>
+          <a:p>
+            <a:pPr algn="ctr" indent="0" marL="0">
+              <a:buNone/>
+            </a:pPr>
+            <a:r>
+              <a:rPr lang="en-US" sz="1100" b="1" dirty="0">
+                <a:solidFill>
+                  <a:srgbClr val="1E2761"/>
+                </a:solidFill>
+                <a:latin typeface="Calibri" pitchFamily="34" charset="0"/>
+                <a:ea typeface="Calibri" pitchFamily="34" charset="-122"/>
+                <a:cs typeface="Calibri" pitchFamily="34" charset="-120"/>
+              </a:rPr>
+              <a:t>Dec 10</a:t>
+            </a:r>
+            <a:endParaRPr lang="en-US" sz="1100" dirty="0"/>
+          </a:p>
+        </p:txBody>
+      </p:sp>
+      <p:sp>
+        <p:nvSpPr>
+          <p:cNvPr id="33" name="Text 31"/>
+          <p:cNvSpPr txBox="1"/>
+          <p:nvPr/>
+        </p:nvSpPr>
+        <p:spPr>
+          <a:xfrm>
+            <a:off x="7936992" y="3511296"/>
+            <a:ext cx="3749040" cy="658368"/>
+          </a:xfrm>
+          <a:prstGeom prst="rect">
+            <a:avLst/>
+          </a:prstGeom>
+          <a:noFill/>
+          <a:ln/>
+        </p:spPr>
+        <p:txBody>
+          <a:bodyPr wrap="square" lIns="0" tIns="0" rIns="0" bIns="0" rtlCol="0" anchor="ctr"/>
+          <a:lstStyle/>
+          <a:p>
+            <a:pPr indent="0" marL="0">
+              <a:buNone/>
+            </a:pPr>
+            <a:r>
+              <a:rPr lang="en-US" sz="1150" dirty="0">
+                <a:solidFill>
+                  <a:srgbClr val="222A3F"/>
+                </a:solidFill>
+                <a:latin typeface="Calibri" pitchFamily="34" charset="0"/>
+                <a:ea typeface="Calibri" pitchFamily="34" charset="-122"/>
+                <a:cs typeface="Calibri" pitchFamily="34" charset="-120"/>
+              </a:rPr>
+              <a:t>Demo Day (W16): live end-to-end demonstration for the sponsor</a:t>
+            </a:r>
+            <a:endParaRPr lang="en-US" sz="1150" dirty="0"/>
+          </a:p>
+        </p:txBody>
+      </p:sp>
+      <p:sp>
+        <p:nvSpPr>
+          <p:cNvPr id="34" name="Shape 32"/>
+          <p:cNvSpPr/>
+          <p:nvPr/>
+        </p:nvSpPr>
+        <p:spPr>
+          <a:xfrm>
+            <a:off x="6720840" y="4187952"/>
+            <a:ext cx="1051560" cy="457200"/>
+          </a:xfrm>
+          <a:prstGeom prst="roundRect">
+            <a:avLst>
+              <a:gd name="adj" fmla="val 16000"/>
+            </a:avLst>
+          </a:prstGeom>
+          <a:solidFill>
+            <a:srgbClr val="F2F6FC"/>
+          </a:solidFill>
+          <a:ln w="12700">
+            <a:solidFill>
+              <a:srgbClr val="1E2761"/>
+            </a:solidFill>
+            <a:prstDash val="solid"/>
+          </a:ln>
+        </p:spPr>
+      </p:sp>
+      <p:sp>
+        <p:nvSpPr>
+          <p:cNvPr id="35" name="Text 33"/>
+          <p:cNvSpPr txBox="1"/>
+          <p:nvPr/>
+        </p:nvSpPr>
+        <p:spPr>
+          <a:xfrm>
+            <a:off x="6720840" y="4279392"/>
+            <a:ext cx="1051560" cy="292608"/>
+          </a:xfrm>
+          <a:prstGeom prst="rect">
+            <a:avLst/>
+          </a:prstGeom>
+          <a:noFill/>
+          <a:ln/>
+        </p:spPr>
+        <p:txBody>
+          <a:bodyPr wrap="square" lIns="0" tIns="0" rIns="0" bIns="0" rtlCol="0" anchor="ctr"/>
+          <a:lstStyle/>
+          <a:p>
+            <a:pPr algn="ctr" indent="0" marL="0">
+              <a:buNone/>
+            </a:pPr>
+            <a:r>
+              <a:rPr lang="en-US" sz="1100" b="1" dirty="0">
+                <a:solidFill>
+                  <a:srgbClr val="1E2761"/>
+                </a:solidFill>
+                <a:latin typeface="Calibri" pitchFamily="34" charset="0"/>
+                <a:ea typeface="Calibri" pitchFamily="34" charset="-122"/>
+                <a:cs typeface="Calibri" pitchFamily="34" charset="-120"/>
+              </a:rPr>
+              <a:t>W15–16</a:t>
+            </a:r>
+            <a:endParaRPr lang="en-US" sz="1100" dirty="0"/>
+          </a:p>
+        </p:txBody>
+      </p:sp>
+      <p:sp>
+        <p:nvSpPr>
           <p:cNvPr id="36" name="Text 34"/>
           <p:cNvSpPr txBox="1"/>
           <p:nvPr/>
         </p:nvSpPr>
         <p:spPr>
           <a:xfrm>
-            <a:off x="9189720" y="5148072"/>
-            <a:ext cx="2468880" cy="274320"/>
+            <a:off x="7936992" y="4169664"/>
+            <a:ext cx="3749040" cy="658368"/>
           </a:xfrm>
           <a:prstGeom prst="rect">
             <a:avLst/>
@@ -4008,30 +4119,57 @@
               <a:buNone/>
             </a:pPr>
             <a:r>
-              <a:rPr lang="en-US" sz="1200" b="1" dirty="0">
-                <a:solidFill>
-                  <a:srgbClr val="E58E1A"/>
-                </a:solidFill>
-                <a:latin typeface="Calibri" pitchFamily="34" charset="0"/>
-                <a:ea typeface="Calibri" pitchFamily="34" charset="-122"/>
-                <a:cs typeface="Calibri" pitchFamily="34" charset="-120"/>
-              </a:rPr>
-              <a:t>PHY</a:t>
-            </a:r>
-            <a:endParaRPr lang="en-US" sz="1200" dirty="0"/>
-          </a:p>
-        </p:txBody>
-      </p:sp>
-      <p:sp>
-        <p:nvSpPr>
-          <p:cNvPr id="37" name="Text 35"/>
-          <p:cNvSpPr txBox="1"/>
-          <p:nvPr/>
-        </p:nvSpPr>
-        <p:spPr>
-          <a:xfrm>
-            <a:off x="9189720" y="5413248"/>
-            <a:ext cx="2468880" cy="502920"/>
+              <a:rPr lang="en-US" sz="1150" dirty="0">
+                <a:solidFill>
+                  <a:srgbClr val="222A3F"/>
+                </a:solidFill>
+                <a:latin typeface="Calibri" pitchFamily="34" charset="0"/>
+                <a:ea typeface="Calibri" pitchFamily="34" charset="-122"/>
+                <a:cs typeface="Calibri" pitchFamily="34" charset="-120"/>
+              </a:rPr>
+              <a:t>Final report: design, analysis, measurements vs. predictions</a:t>
+            </a:r>
+            <a:endParaRPr lang="en-US" sz="1150" dirty="0"/>
+          </a:p>
+        </p:txBody>
+      </p:sp>
+      <p:sp>
+        <p:nvSpPr>
+          <p:cNvPr id="37" name="Shape 35"/>
+          <p:cNvSpPr/>
+          <p:nvPr/>
+        </p:nvSpPr>
+        <p:spPr>
+          <a:xfrm>
+            <a:off x="6720840" y="5029200"/>
+            <a:ext cx="4937760" cy="1417320"/>
+          </a:xfrm>
+          <a:prstGeom prst="roundRect">
+            <a:avLst>
+              <a:gd name="adj" fmla="val 6452"/>
+            </a:avLst>
+          </a:prstGeom>
+          <a:solidFill>
+            <a:srgbClr val="F2F6FC"/>
+          </a:solidFill>
+          <a:ln w="15875">
+            <a:solidFill>
+              <a:srgbClr val="E58E1A"/>
+            </a:solidFill>
+            <a:prstDash val="solid"/>
+          </a:ln>
+        </p:spPr>
+      </p:sp>
+      <p:sp>
+        <p:nvSpPr>
+          <p:cNvPr id="38" name="Text 36"/>
+          <p:cNvSpPr txBox="1"/>
+          <p:nvPr/>
+        </p:nvSpPr>
+        <p:spPr>
+          <a:xfrm>
+            <a:off x="6949440" y="5138928"/>
+            <a:ext cx="4572000" cy="292608"/>
           </a:xfrm>
           <a:prstGeom prst="rect">
             <a:avLst/>
@@ -4047,17 +4185,99 @@
               <a:buNone/>
             </a:pPr>
             <a:r>
-              <a:rPr lang="en-US" sz="1050" dirty="0">
-                <a:solidFill>
-                  <a:srgbClr val="FFFFFF"/>
-                </a:solidFill>
-                <a:latin typeface="Calibri" pitchFamily="34" charset="0"/>
-                <a:ea typeface="Calibri" pitchFamily="34" charset="-122"/>
-                <a:cs typeface="Calibri" pitchFamily="34" charset="-120"/>
-              </a:rPr>
-              <a:t>LoRa chirp spread spectrum · 915 MHz ISM</a:t>
-            </a:r>
-            <a:endParaRPr lang="en-US" sz="1050" dirty="0"/>
+              <a:rPr lang="en-US" sz="1300" b="1" dirty="0">
+                <a:solidFill>
+                  <a:srgbClr val="1E2761"/>
+                </a:solidFill>
+                <a:latin typeface="Calibri" pitchFamily="34" charset="0"/>
+                <a:ea typeface="Calibri" pitchFamily="34" charset="-122"/>
+                <a:cs typeface="Calibri" pitchFamily="34" charset="-120"/>
+              </a:rPr>
+              <a:t>Success criteria (measurable)</a:t>
+            </a:r>
+            <a:endParaRPr lang="en-US" sz="1300" dirty="0"/>
+          </a:p>
+        </p:txBody>
+      </p:sp>
+      <p:sp>
+        <p:nvSpPr>
+          <p:cNvPr id="39" name="Text 37"/>
+          <p:cNvSpPr txBox="1"/>
+          <p:nvPr/>
+        </p:nvSpPr>
+        <p:spPr>
+          <a:xfrm>
+            <a:off x="6949440" y="5468112"/>
+            <a:ext cx="4572000" cy="914400"/>
+          </a:xfrm>
+          <a:prstGeom prst="rect">
+            <a:avLst/>
+          </a:prstGeom>
+          <a:noFill/>
+          <a:ln/>
+        </p:spPr>
+        <p:txBody>
+          <a:bodyPr wrap="square" lIns="0" tIns="0" rIns="0" bIns="0" rtlCol="0" anchor="ctr"/>
+          <a:lstStyle/>
+          <a:p>
+            <a:pPr marL="342900" indent="-342900">
+              <a:spcAft>
+                <a:spcPts val="300"/>
+              </a:spcAft>
+              <a:buSzPct val="100000"/>
+              <a:buChar char="•"/>
+            </a:pPr>
+            <a:r>
+              <a:rPr lang="en-US" sz="1150" dirty="0">
+                <a:solidFill>
+                  <a:srgbClr val="222A3F"/>
+                </a:solidFill>
+                <a:latin typeface="Calibri" pitchFamily="34" charset="0"/>
+                <a:ea typeface="Calibri" pitchFamily="34" charset="-122"/>
+                <a:cs typeface="Calibri" pitchFamily="34" charset="-120"/>
+              </a:rPr>
+              <a:t>Live position exchange at ≥ 2 km in terrain (PDR ≥ 90%)</a:t>
+            </a:r>
+            <a:endParaRPr lang="en-US" sz="1150" dirty="0"/>
+          </a:p>
+          <a:p>
+            <a:pPr marL="342900" indent="-342900">
+              <a:spcAft>
+                <a:spcPts val="300"/>
+              </a:spcAft>
+              <a:buSzPct val="100000"/>
+              <a:buChar char="•"/>
+            </a:pPr>
+            <a:r>
+              <a:rPr lang="en-US" sz="1150" dirty="0">
+                <a:solidFill>
+                  <a:srgbClr val="222A3F"/>
+                </a:solidFill>
+                <a:latin typeface="Calibri" pitchFamily="34" charset="0"/>
+                <a:ea typeface="Calibri" pitchFamily="34" charset="-122"/>
+                <a:cs typeface="Calibri" pitchFamily="34" charset="-120"/>
+              </a:rPr>
+              <a:t>Vehicle-relative arrow correct vs. GPS ground truth</a:t>
+            </a:r>
+            <a:endParaRPr lang="en-US" sz="1150" dirty="0"/>
+          </a:p>
+          <a:p>
+            <a:pPr marL="342900" indent="-342900">
+              <a:buSzPct val="100000"/>
+              <a:buChar char="•"/>
+            </a:pPr>
+            <a:r>
+              <a:rPr lang="en-US" sz="1150" dirty="0">
+                <a:solidFill>
+                  <a:srgbClr val="222A3F"/>
+                </a:solidFill>
+                <a:latin typeface="Calibri" pitchFamily="34" charset="0"/>
+                <a:ea typeface="Calibri" pitchFamily="34" charset="-122"/>
+                <a:cs typeface="Calibri" pitchFamily="34" charset="-120"/>
+              </a:rPr>
+              <a:t>Data age ≤ 60 s in normal operation, always displayed</a:t>
+            </a:r>
+            <a:endParaRPr lang="en-US" sz="1150" dirty="0"/>
           </a:p>
         </p:txBody>
       </p:sp>
@@ -4126,7 +4346,7 @@
                 <a:ea typeface="Cambria" pitchFamily="34" charset="-122"/>
                 <a:cs typeface="Cambria" pitchFamily="34" charset="-120"/>
               </a:rPr>
-              <a:t>Weeks 1–2 · Shared Foundations</a:t>
+              <a:t>System Architecture</a:t>
             </a:r>
             <a:endParaRPr lang="en-US" sz="3200" dirty="0"/>
           </a:p>
@@ -4134,14 +4354,107 @@
       </p:sp>
       <p:sp>
         <p:nvSpPr>
-          <p:cNvPr id="3" name="Text 1"/>
-          <p:cNvSpPr txBox="1"/>
-          <p:nvPr/>
-        </p:nvSpPr>
-        <p:spPr>
-          <a:xfrm>
-            <a:off x="502920" y="1097280"/>
-            <a:ext cx="5486400" cy="365760"/>
+          <p:cNvPr id="3" name="Shape 1"/>
+          <p:cNvSpPr/>
+          <p:nvPr/>
+        </p:nvSpPr>
+        <p:spPr>
+          <a:xfrm>
+            <a:off x="502920" y="1234440"/>
+            <a:ext cx="3291840" cy="3200400"/>
+          </a:xfrm>
+          <a:prstGeom prst="roundRect">
+            <a:avLst>
+              <a:gd name="adj" fmla="val 3429"/>
+            </a:avLst>
+          </a:prstGeom>
+          <a:solidFill>
+            <a:srgbClr val="F2F6FC"/>
+          </a:solidFill>
+          <a:ln w="15875">
+            <a:solidFill>
+              <a:srgbClr val="1E2761"/>
+            </a:solidFill>
+            <a:prstDash val="solid"/>
+          </a:ln>
+        </p:spPr>
+      </p:sp>
+      <p:sp>
+        <p:nvSpPr>
+          <p:cNvPr id="4" name="Text 2"/>
+          <p:cNvSpPr txBox="1"/>
+          <p:nvPr/>
+        </p:nvSpPr>
+        <p:spPr>
+          <a:xfrm>
+            <a:off x="502920" y="1325880"/>
+            <a:ext cx="3291840" cy="320040"/>
+          </a:xfrm>
+          <a:prstGeom prst="rect">
+            <a:avLst/>
+          </a:prstGeom>
+          <a:noFill/>
+          <a:ln/>
+        </p:spPr>
+        <p:txBody>
+          <a:bodyPr wrap="square" lIns="0" tIns="0" rIns="0" bIns="0" rtlCol="0" anchor="ctr"/>
+          <a:lstStyle/>
+          <a:p>
+            <a:pPr algn="ctr" indent="0" marL="0">
+              <a:buNone/>
+            </a:pPr>
+            <a:r>
+              <a:rPr lang="en-US" sz="1400" b="1" dirty="0">
+                <a:solidFill>
+                  <a:srgbClr val="1E2761"/>
+                </a:solidFill>
+                <a:latin typeface="Calibri" pitchFamily="34" charset="0"/>
+                <a:ea typeface="Calibri" pitchFamily="34" charset="-122"/>
+                <a:cs typeface="Calibri" pitchFamily="34" charset="-120"/>
+              </a:rPr>
+              <a:t>VEHICLE A</a:t>
+            </a:r>
+            <a:endParaRPr lang="en-US" sz="1400" dirty="0"/>
+          </a:p>
+        </p:txBody>
+      </p:sp>
+      <p:sp>
+        <p:nvSpPr>
+          <p:cNvPr id="5" name="Shape 3"/>
+          <p:cNvSpPr/>
+          <p:nvPr/>
+        </p:nvSpPr>
+        <p:spPr>
+          <a:xfrm>
+            <a:off x="731520" y="1737360"/>
+            <a:ext cx="2834640" cy="960120"/>
+          </a:xfrm>
+          <a:prstGeom prst="roundRect">
+            <a:avLst>
+              <a:gd name="adj" fmla="val 6667"/>
+            </a:avLst>
+          </a:prstGeom>
+          <a:solidFill>
+            <a:srgbClr val="FFFFFF"/>
+          </a:solidFill>
+          <a:ln w="19050">
+            <a:solidFill>
+              <a:srgbClr val="1E2761"/>
+            </a:solidFill>
+            <a:prstDash val="solid"/>
+          </a:ln>
+        </p:spPr>
+      </p:sp>
+      <p:sp>
+        <p:nvSpPr>
+          <p:cNvPr id="6" name="Text 4"/>
+          <p:cNvSpPr txBox="1"/>
+          <p:nvPr/>
+        </p:nvSpPr>
+        <p:spPr>
+          <a:xfrm>
+            <a:off x="822960" y="1828800"/>
+            <a:ext cx="2697480" cy="777240"/>
           </a:xfrm>
           <a:prstGeom prst="rect">
             <a:avLst/>
@@ -4157,7 +4470,648 @@
               <a:buNone/>
             </a:pPr>
             <a:r>
-              <a:rPr lang="en-US" sz="1700" b="1" dirty="0">
+              <a:rPr lang="en-US" sz="1250" b="1" dirty="0">
+                <a:solidFill>
+                  <a:srgbClr val="1E2761"/>
+                </a:solidFill>
+                <a:latin typeface="Calibri" pitchFamily="34" charset="0"/>
+                <a:ea typeface="Calibri" pitchFamily="34" charset="-122"/>
+                <a:cs typeface="Calibri" pitchFamily="34" charset="-120"/>
+              </a:rPr>
+              <a:t>Heltec V4 — radio node</a:t>
+            </a:r>
+            <a:endParaRPr lang="en-US" sz="1250" dirty="0"/>
+          </a:p>
+          <a:p>
+            <a:pPr indent="0" marL="0">
+              <a:buNone/>
+            </a:pPr>
+            <a:r>
+              <a:rPr lang="en-US" sz="1050" dirty="0">
+                <a:solidFill>
+                  <a:srgbClr val="5B6B8A"/>
+                </a:solidFill>
+                <a:latin typeface="Calibri" pitchFamily="34" charset="0"/>
+                <a:ea typeface="Calibri" pitchFamily="34" charset="-122"/>
+                <a:cs typeface="Calibri" pitchFamily="34" charset="-120"/>
+              </a:rPr>
+              <a:t>ESP32-S3 · SX1262 LoRa · GNSS</a:t>
+            </a:r>
+            <a:endParaRPr lang="en-US" sz="1250" dirty="0"/>
+          </a:p>
+        </p:txBody>
+      </p:sp>
+      <p:sp>
+        <p:nvSpPr>
+          <p:cNvPr id="7" name="Text 5"/>
+          <p:cNvSpPr txBox="1"/>
+          <p:nvPr/>
+        </p:nvSpPr>
+        <p:spPr>
+          <a:xfrm>
+            <a:off x="822960" y="2395728"/>
+            <a:ext cx="2697480" cy="274320"/>
+          </a:xfrm>
+          <a:prstGeom prst="rect">
+            <a:avLst/>
+          </a:prstGeom>
+          <a:noFill/>
+          <a:ln/>
+        </p:spPr>
+        <p:txBody>
+          <a:bodyPr wrap="square" lIns="0" tIns="0" rIns="0" bIns="0" rtlCol="0" anchor="ctr"/>
+          <a:lstStyle/>
+          <a:p>
+            <a:pPr indent="0" marL="0">
+              <a:buNone/>
+            </a:pPr>
+            <a:r>
+              <a:rPr lang="en-US" sz="1000" i="1" dirty="0">
+                <a:solidFill>
+                  <a:srgbClr val="5B6B8A"/>
+                </a:solidFill>
+                <a:latin typeface="Calibri" pitchFamily="34" charset="0"/>
+                <a:ea typeface="Calibri" pitchFamily="34" charset="-122"/>
+                <a:cs typeface="Calibri" pitchFamily="34" charset="-120"/>
+              </a:rPr>
+              <a:t>stock Meshtastic firmware</a:t>
+            </a:r>
+            <a:endParaRPr lang="en-US" sz="1000" dirty="0"/>
+          </a:p>
+        </p:txBody>
+      </p:sp>
+      <p:sp>
+        <p:nvSpPr>
+          <p:cNvPr id="8" name="Shape 6"/>
+          <p:cNvSpPr/>
+          <p:nvPr/>
+        </p:nvSpPr>
+        <p:spPr>
+          <a:xfrm>
+            <a:off x="2148840" y="2697480"/>
+            <a:ext cx="0" cy="548640"/>
+          </a:xfrm>
+          <a:prstGeom prst="line">
+            <a:avLst/>
+          </a:prstGeom>
+          <a:noFill/>
+          <a:ln w="28575">
+            <a:solidFill>
+              <a:srgbClr val="E58E1A"/>
+            </a:solidFill>
+            <a:prstDash val="solid"/>
+            <a:tailEnd type="triangle"/>
+          </a:ln>
+        </p:spPr>
+      </p:sp>
+      <p:sp>
+        <p:nvSpPr>
+          <p:cNvPr id="9" name="Text 7"/>
+          <p:cNvSpPr txBox="1"/>
+          <p:nvPr/>
+        </p:nvSpPr>
+        <p:spPr>
+          <a:xfrm>
+            <a:off x="2286000" y="2816352"/>
+            <a:ext cx="1280160" cy="274320"/>
+          </a:xfrm>
+          <a:prstGeom prst="rect">
+            <a:avLst/>
+          </a:prstGeom>
+          <a:noFill/>
+          <a:ln/>
+        </p:spPr>
+        <p:txBody>
+          <a:bodyPr wrap="square" lIns="0" tIns="0" rIns="0" bIns="0" rtlCol="0" anchor="ctr"/>
+          <a:lstStyle/>
+          <a:p>
+            <a:pPr indent="0" marL="0">
+              <a:buNone/>
+            </a:pPr>
+            <a:r>
+              <a:rPr lang="en-US" sz="1000" b="1" dirty="0">
+                <a:solidFill>
+                  <a:srgbClr val="E58E1A"/>
+                </a:solidFill>
+                <a:latin typeface="Calibri" pitchFamily="34" charset="0"/>
+                <a:ea typeface="Calibri" pitchFamily="34" charset="-122"/>
+                <a:cs typeface="Calibri" pitchFamily="34" charset="-120"/>
+              </a:rPr>
+              <a:t>BLE (in-cab)</a:t>
+            </a:r>
+            <a:endParaRPr lang="en-US" sz="1000" dirty="0"/>
+          </a:p>
+        </p:txBody>
+      </p:sp>
+      <p:sp>
+        <p:nvSpPr>
+          <p:cNvPr id="10" name="Shape 8"/>
+          <p:cNvSpPr/>
+          <p:nvPr/>
+        </p:nvSpPr>
+        <p:spPr>
+          <a:xfrm>
+            <a:off x="731520" y="3246120"/>
+            <a:ext cx="2834640" cy="960120"/>
+          </a:xfrm>
+          <a:prstGeom prst="roundRect">
+            <a:avLst>
+              <a:gd name="adj" fmla="val 6667"/>
+            </a:avLst>
+          </a:prstGeom>
+          <a:solidFill>
+            <a:srgbClr val="FFFFFF"/>
+          </a:solidFill>
+          <a:ln w="19050">
+            <a:solidFill>
+              <a:srgbClr val="6D4BDB"/>
+            </a:solidFill>
+            <a:prstDash val="solid"/>
+          </a:ln>
+        </p:spPr>
+      </p:sp>
+      <p:sp>
+        <p:nvSpPr>
+          <p:cNvPr id="11" name="Text 9"/>
+          <p:cNvSpPr txBox="1"/>
+          <p:nvPr/>
+        </p:nvSpPr>
+        <p:spPr>
+          <a:xfrm>
+            <a:off x="822960" y="3346704"/>
+            <a:ext cx="2697480" cy="731520"/>
+          </a:xfrm>
+          <a:prstGeom prst="rect">
+            <a:avLst/>
+          </a:prstGeom>
+          <a:noFill/>
+          <a:ln/>
+        </p:spPr>
+        <p:txBody>
+          <a:bodyPr wrap="square" lIns="0" tIns="0" rIns="0" bIns="0" rtlCol="0" anchor="ctr"/>
+          <a:lstStyle/>
+          <a:p>
+            <a:pPr indent="0" marL="0">
+              <a:buNone/>
+            </a:pPr>
+            <a:r>
+              <a:rPr lang="en-US" sz="1250" b="1" dirty="0">
+                <a:solidFill>
+                  <a:srgbClr val="1E2761"/>
+                </a:solidFill>
+                <a:latin typeface="Calibri" pitchFamily="34" charset="0"/>
+                <a:ea typeface="Calibri" pitchFamily="34" charset="-122"/>
+                <a:cs typeface="Calibri" pitchFamily="34" charset="-120"/>
+              </a:rPr>
+              <a:t>Waveshare 4.2″ RLCD — display</a:t>
+            </a:r>
+            <a:endParaRPr lang="en-US" sz="1250" dirty="0"/>
+          </a:p>
+          <a:p>
+            <a:pPr indent="0" marL="0">
+              <a:buNone/>
+            </a:pPr>
+            <a:r>
+              <a:rPr lang="en-US" sz="1050" dirty="0">
+                <a:solidFill>
+                  <a:srgbClr val="5B6B8A"/>
+                </a:solidFill>
+                <a:latin typeface="Calibri" pitchFamily="34" charset="0"/>
+                <a:ea typeface="Calibri" pitchFamily="34" charset="-122"/>
+                <a:cs typeface="Calibri" pitchFamily="34" charset="-120"/>
+              </a:rPr>
+              <a:t>our only custom firmware</a:t>
+            </a:r>
+            <a:endParaRPr lang="en-US" sz="1250" dirty="0"/>
+          </a:p>
+        </p:txBody>
+      </p:sp>
+      <p:sp>
+        <p:nvSpPr>
+          <p:cNvPr id="12" name="Shape 10"/>
+          <p:cNvSpPr/>
+          <p:nvPr/>
+        </p:nvSpPr>
+        <p:spPr>
+          <a:xfrm>
+            <a:off x="4572000" y="1234440"/>
+            <a:ext cx="3291840" cy="3200400"/>
+          </a:xfrm>
+          <a:prstGeom prst="roundRect">
+            <a:avLst>
+              <a:gd name="adj" fmla="val 3429"/>
+            </a:avLst>
+          </a:prstGeom>
+          <a:solidFill>
+            <a:srgbClr val="F2F6FC"/>
+          </a:solidFill>
+          <a:ln w="15875">
+            <a:solidFill>
+              <a:srgbClr val="1E2761"/>
+            </a:solidFill>
+            <a:prstDash val="solid"/>
+          </a:ln>
+        </p:spPr>
+      </p:sp>
+      <p:sp>
+        <p:nvSpPr>
+          <p:cNvPr id="13" name="Text 11"/>
+          <p:cNvSpPr txBox="1"/>
+          <p:nvPr/>
+        </p:nvSpPr>
+        <p:spPr>
+          <a:xfrm>
+            <a:off x="4572000" y="1325880"/>
+            <a:ext cx="3291840" cy="320040"/>
+          </a:xfrm>
+          <a:prstGeom prst="rect">
+            <a:avLst/>
+          </a:prstGeom>
+          <a:noFill/>
+          <a:ln/>
+        </p:spPr>
+        <p:txBody>
+          <a:bodyPr wrap="square" lIns="0" tIns="0" rIns="0" bIns="0" rtlCol="0" anchor="ctr"/>
+          <a:lstStyle/>
+          <a:p>
+            <a:pPr algn="ctr" indent="0" marL="0">
+              <a:buNone/>
+            </a:pPr>
+            <a:r>
+              <a:rPr lang="en-US" sz="1400" b="1" dirty="0">
+                <a:solidFill>
+                  <a:srgbClr val="1E2761"/>
+                </a:solidFill>
+                <a:latin typeface="Calibri" pitchFamily="34" charset="0"/>
+                <a:ea typeface="Calibri" pitchFamily="34" charset="-122"/>
+                <a:cs typeface="Calibri" pitchFamily="34" charset="-120"/>
+              </a:rPr>
+              <a:t>VEHICLE B</a:t>
+            </a:r>
+            <a:endParaRPr lang="en-US" sz="1400" dirty="0"/>
+          </a:p>
+        </p:txBody>
+      </p:sp>
+      <p:sp>
+        <p:nvSpPr>
+          <p:cNvPr id="14" name="Shape 12"/>
+          <p:cNvSpPr/>
+          <p:nvPr/>
+        </p:nvSpPr>
+        <p:spPr>
+          <a:xfrm>
+            <a:off x="4800600" y="1737360"/>
+            <a:ext cx="2834640" cy="960120"/>
+          </a:xfrm>
+          <a:prstGeom prst="roundRect">
+            <a:avLst>
+              <a:gd name="adj" fmla="val 6667"/>
+            </a:avLst>
+          </a:prstGeom>
+          <a:solidFill>
+            <a:srgbClr val="FFFFFF"/>
+          </a:solidFill>
+          <a:ln w="19050">
+            <a:solidFill>
+              <a:srgbClr val="1E2761"/>
+            </a:solidFill>
+            <a:prstDash val="solid"/>
+          </a:ln>
+        </p:spPr>
+      </p:sp>
+      <p:sp>
+        <p:nvSpPr>
+          <p:cNvPr id="15" name="Text 13"/>
+          <p:cNvSpPr txBox="1"/>
+          <p:nvPr/>
+        </p:nvSpPr>
+        <p:spPr>
+          <a:xfrm>
+            <a:off x="4892040" y="1828800"/>
+            <a:ext cx="2697480" cy="777240"/>
+          </a:xfrm>
+          <a:prstGeom prst="rect">
+            <a:avLst/>
+          </a:prstGeom>
+          <a:noFill/>
+          <a:ln/>
+        </p:spPr>
+        <p:txBody>
+          <a:bodyPr wrap="square" lIns="0" tIns="0" rIns="0" bIns="0" rtlCol="0" anchor="ctr"/>
+          <a:lstStyle/>
+          <a:p>
+            <a:pPr indent="0" marL="0">
+              <a:buNone/>
+            </a:pPr>
+            <a:r>
+              <a:rPr lang="en-US" sz="1250" b="1" dirty="0">
+                <a:solidFill>
+                  <a:srgbClr val="1E2761"/>
+                </a:solidFill>
+                <a:latin typeface="Calibri" pitchFamily="34" charset="0"/>
+                <a:ea typeface="Calibri" pitchFamily="34" charset="-122"/>
+                <a:cs typeface="Calibri" pitchFamily="34" charset="-120"/>
+              </a:rPr>
+              <a:t>Heltec V4 — radio node</a:t>
+            </a:r>
+            <a:endParaRPr lang="en-US" sz="1250" dirty="0"/>
+          </a:p>
+          <a:p>
+            <a:pPr indent="0" marL="0">
+              <a:buNone/>
+            </a:pPr>
+            <a:r>
+              <a:rPr lang="en-US" sz="1050" dirty="0">
+                <a:solidFill>
+                  <a:srgbClr val="5B6B8A"/>
+                </a:solidFill>
+                <a:latin typeface="Calibri" pitchFamily="34" charset="0"/>
+                <a:ea typeface="Calibri" pitchFamily="34" charset="-122"/>
+                <a:cs typeface="Calibri" pitchFamily="34" charset="-120"/>
+              </a:rPr>
+              <a:t>ESP32-S3 · SX1262 LoRa · GNSS</a:t>
+            </a:r>
+            <a:endParaRPr lang="en-US" sz="1250" dirty="0"/>
+          </a:p>
+        </p:txBody>
+      </p:sp>
+      <p:sp>
+        <p:nvSpPr>
+          <p:cNvPr id="16" name="Text 14"/>
+          <p:cNvSpPr txBox="1"/>
+          <p:nvPr/>
+        </p:nvSpPr>
+        <p:spPr>
+          <a:xfrm>
+            <a:off x="4892040" y="2395728"/>
+            <a:ext cx="2697480" cy="274320"/>
+          </a:xfrm>
+          <a:prstGeom prst="rect">
+            <a:avLst/>
+          </a:prstGeom>
+          <a:noFill/>
+          <a:ln/>
+        </p:spPr>
+        <p:txBody>
+          <a:bodyPr wrap="square" lIns="0" tIns="0" rIns="0" bIns="0" rtlCol="0" anchor="ctr"/>
+          <a:lstStyle/>
+          <a:p>
+            <a:pPr indent="0" marL="0">
+              <a:buNone/>
+            </a:pPr>
+            <a:r>
+              <a:rPr lang="en-US" sz="1000" i="1" dirty="0">
+                <a:solidFill>
+                  <a:srgbClr val="5B6B8A"/>
+                </a:solidFill>
+                <a:latin typeface="Calibri" pitchFamily="34" charset="0"/>
+                <a:ea typeface="Calibri" pitchFamily="34" charset="-122"/>
+                <a:cs typeface="Calibri" pitchFamily="34" charset="-120"/>
+              </a:rPr>
+              <a:t>stock Meshtastic firmware</a:t>
+            </a:r>
+            <a:endParaRPr lang="en-US" sz="1000" dirty="0"/>
+          </a:p>
+        </p:txBody>
+      </p:sp>
+      <p:sp>
+        <p:nvSpPr>
+          <p:cNvPr id="17" name="Shape 15"/>
+          <p:cNvSpPr/>
+          <p:nvPr/>
+        </p:nvSpPr>
+        <p:spPr>
+          <a:xfrm>
+            <a:off x="6217920" y="2697480"/>
+            <a:ext cx="0" cy="548640"/>
+          </a:xfrm>
+          <a:prstGeom prst="line">
+            <a:avLst/>
+          </a:prstGeom>
+          <a:noFill/>
+          <a:ln w="28575">
+            <a:solidFill>
+              <a:srgbClr val="E58E1A"/>
+            </a:solidFill>
+            <a:prstDash val="solid"/>
+            <a:tailEnd type="triangle"/>
+          </a:ln>
+        </p:spPr>
+      </p:sp>
+      <p:sp>
+        <p:nvSpPr>
+          <p:cNvPr id="18" name="Text 16"/>
+          <p:cNvSpPr txBox="1"/>
+          <p:nvPr/>
+        </p:nvSpPr>
+        <p:spPr>
+          <a:xfrm>
+            <a:off x="6355080" y="2816352"/>
+            <a:ext cx="1280160" cy="274320"/>
+          </a:xfrm>
+          <a:prstGeom prst="rect">
+            <a:avLst/>
+          </a:prstGeom>
+          <a:noFill/>
+          <a:ln/>
+        </p:spPr>
+        <p:txBody>
+          <a:bodyPr wrap="square" lIns="0" tIns="0" rIns="0" bIns="0" rtlCol="0" anchor="ctr"/>
+          <a:lstStyle/>
+          <a:p>
+            <a:pPr indent="0" marL="0">
+              <a:buNone/>
+            </a:pPr>
+            <a:r>
+              <a:rPr lang="en-US" sz="1000" b="1" dirty="0">
+                <a:solidFill>
+                  <a:srgbClr val="E58E1A"/>
+                </a:solidFill>
+                <a:latin typeface="Calibri" pitchFamily="34" charset="0"/>
+                <a:ea typeface="Calibri" pitchFamily="34" charset="-122"/>
+                <a:cs typeface="Calibri" pitchFamily="34" charset="-120"/>
+              </a:rPr>
+              <a:t>BLE (in-cab)</a:t>
+            </a:r>
+            <a:endParaRPr lang="en-US" sz="1000" dirty="0"/>
+          </a:p>
+        </p:txBody>
+      </p:sp>
+      <p:sp>
+        <p:nvSpPr>
+          <p:cNvPr id="19" name="Shape 17"/>
+          <p:cNvSpPr/>
+          <p:nvPr/>
+        </p:nvSpPr>
+        <p:spPr>
+          <a:xfrm>
+            <a:off x="4800600" y="3246120"/>
+            <a:ext cx="2834640" cy="960120"/>
+          </a:xfrm>
+          <a:prstGeom prst="roundRect">
+            <a:avLst>
+              <a:gd name="adj" fmla="val 6667"/>
+            </a:avLst>
+          </a:prstGeom>
+          <a:solidFill>
+            <a:srgbClr val="FFFFFF"/>
+          </a:solidFill>
+          <a:ln w="19050">
+            <a:solidFill>
+              <a:srgbClr val="6D4BDB"/>
+            </a:solidFill>
+            <a:prstDash val="solid"/>
+          </a:ln>
+        </p:spPr>
+      </p:sp>
+      <p:sp>
+        <p:nvSpPr>
+          <p:cNvPr id="20" name="Text 18"/>
+          <p:cNvSpPr txBox="1"/>
+          <p:nvPr/>
+        </p:nvSpPr>
+        <p:spPr>
+          <a:xfrm>
+            <a:off x="4892040" y="3346704"/>
+            <a:ext cx="2697480" cy="731520"/>
+          </a:xfrm>
+          <a:prstGeom prst="rect">
+            <a:avLst/>
+          </a:prstGeom>
+          <a:noFill/>
+          <a:ln/>
+        </p:spPr>
+        <p:txBody>
+          <a:bodyPr wrap="square" lIns="0" tIns="0" rIns="0" bIns="0" rtlCol="0" anchor="ctr"/>
+          <a:lstStyle/>
+          <a:p>
+            <a:pPr indent="0" marL="0">
+              <a:buNone/>
+            </a:pPr>
+            <a:r>
+              <a:rPr lang="en-US" sz="1250" b="1" dirty="0">
+                <a:solidFill>
+                  <a:srgbClr val="1E2761"/>
+                </a:solidFill>
+                <a:latin typeface="Calibri" pitchFamily="34" charset="0"/>
+                <a:ea typeface="Calibri" pitchFamily="34" charset="-122"/>
+                <a:cs typeface="Calibri" pitchFamily="34" charset="-120"/>
+              </a:rPr>
+              <a:t>Waveshare 4.2″ RLCD — display</a:t>
+            </a:r>
+            <a:endParaRPr lang="en-US" sz="1250" dirty="0"/>
+          </a:p>
+          <a:p>
+            <a:pPr indent="0" marL="0">
+              <a:buNone/>
+            </a:pPr>
+            <a:r>
+              <a:rPr lang="en-US" sz="1050" dirty="0">
+                <a:solidFill>
+                  <a:srgbClr val="5B6B8A"/>
+                </a:solidFill>
+                <a:latin typeface="Calibri" pitchFamily="34" charset="0"/>
+                <a:ea typeface="Calibri" pitchFamily="34" charset="-122"/>
+                <a:cs typeface="Calibri" pitchFamily="34" charset="-120"/>
+              </a:rPr>
+              <a:t>our only custom firmware</a:t>
+            </a:r>
+            <a:endParaRPr lang="en-US" sz="1250" dirty="0"/>
+          </a:p>
+        </p:txBody>
+      </p:sp>
+      <p:sp>
+        <p:nvSpPr>
+          <p:cNvPr id="21" name="Shape 19"/>
+          <p:cNvSpPr/>
+          <p:nvPr/>
+        </p:nvSpPr>
+        <p:spPr>
+          <a:xfrm>
+            <a:off x="3794760" y="2212848"/>
+            <a:ext cx="777240" cy="0"/>
+          </a:xfrm>
+          <a:prstGeom prst="line">
+            <a:avLst/>
+          </a:prstGeom>
+          <a:noFill/>
+          <a:ln w="31750">
+            <a:solidFill>
+              <a:srgbClr val="1E2761"/>
+            </a:solidFill>
+            <a:prstDash val="solid"/>
+            <a:headEnd type="triangle"/>
+            <a:tailEnd type="triangle"/>
+          </a:ln>
+        </p:spPr>
+      </p:sp>
+      <p:sp>
+        <p:nvSpPr>
+          <p:cNvPr id="22" name="Text 20"/>
+          <p:cNvSpPr txBox="1"/>
+          <p:nvPr/>
+        </p:nvSpPr>
+        <p:spPr>
+          <a:xfrm>
+            <a:off x="3063240" y="1847088"/>
+            <a:ext cx="2286000" cy="274320"/>
+          </a:xfrm>
+          <a:prstGeom prst="rect">
+            <a:avLst/>
+          </a:prstGeom>
+          <a:solidFill>
+            <a:srgbClr val="FFFFFF"/>
+          </a:solidFill>
+          <a:ln/>
+        </p:spPr>
+        <p:txBody>
+          <a:bodyPr wrap="square" lIns="0" tIns="0" rIns="0" bIns="0" rtlCol="0" anchor="ctr"/>
+          <a:lstStyle/>
+          <a:p>
+            <a:pPr algn="ctr" indent="0" marL="0">
+              <a:buNone/>
+            </a:pPr>
+            <a:r>
+              <a:rPr lang="en-US" sz="1000" b="1" dirty="0">
+                <a:solidFill>
+                  <a:srgbClr val="1E2761"/>
+                </a:solidFill>
+                <a:latin typeface="Calibri" pitchFamily="34" charset="0"/>
+                <a:ea typeface="Calibri" pitchFamily="34" charset="-122"/>
+                <a:cs typeface="Calibri" pitchFamily="34" charset="-120"/>
+              </a:rPr>
+              <a:t>LoRa 915 MHz · AES · mesh</a:t>
+            </a:r>
+            <a:endParaRPr lang="en-US" sz="1000" dirty="0"/>
+          </a:p>
+        </p:txBody>
+      </p:sp>
+      <p:sp>
+        <p:nvSpPr>
+          <p:cNvPr id="23" name="Text 21"/>
+          <p:cNvSpPr txBox="1"/>
+          <p:nvPr/>
+        </p:nvSpPr>
+        <p:spPr>
+          <a:xfrm>
+            <a:off x="8229600" y="1234440"/>
+            <a:ext cx="3474720" cy="365760"/>
+          </a:xfrm>
+          <a:prstGeom prst="rect">
+            <a:avLst/>
+          </a:prstGeom>
+          <a:noFill/>
+          <a:ln/>
+        </p:spPr>
+        <p:txBody>
+          <a:bodyPr wrap="square" lIns="0" tIns="0" rIns="0" bIns="0" rtlCol="0" anchor="ctr"/>
+          <a:lstStyle/>
+          <a:p>
+            <a:pPr indent="0" marL="0">
+              <a:buNone/>
+            </a:pPr>
+            <a:r>
+              <a:rPr lang="en-US" sz="1800" b="1" dirty="0">
                 <a:solidFill>
                   <a:srgbClr val="1E2761"/>
                 </a:solidFill>
@@ -4165,33 +5119,705 @@
                 <a:ea typeface="Cambria" pitchFamily="34" charset="-122"/>
                 <a:cs typeface="Cambria" pitchFamily="34" charset="-120"/>
               </a:rPr>
-              <a:t>The interface contract (agreed W1–W2)</a:t>
-            </a:r>
-            <a:endParaRPr lang="en-US" sz="1700" dirty="0"/>
-          </a:p>
-        </p:txBody>
-      </p:sp>
-      <p:sp>
-        <p:nvSpPr>
-          <p:cNvPr id="4" name="Shape 2"/>
+              <a:t>Why this architecture</a:t>
+            </a:r>
+            <a:endParaRPr lang="en-US" sz="1800" dirty="0"/>
+          </a:p>
+        </p:txBody>
+      </p:sp>
+      <p:sp>
+        <p:nvSpPr>
+          <p:cNvPr id="24" name="Text 22"/>
+          <p:cNvSpPr txBox="1"/>
+          <p:nvPr/>
+        </p:nvSpPr>
+        <p:spPr>
+          <a:xfrm>
+            <a:off x="8229600" y="1645920"/>
+            <a:ext cx="3520440" cy="2834640"/>
+          </a:xfrm>
+          <a:prstGeom prst="rect">
+            <a:avLst/>
+          </a:prstGeom>
+          <a:noFill/>
+          <a:ln/>
+        </p:spPr>
+        <p:txBody>
+          <a:bodyPr wrap="square" lIns="0" tIns="0" rIns="0" bIns="0" rtlCol="0" anchor="ctr"/>
+          <a:lstStyle/>
+          <a:p>
+            <a:pPr marL="342900" indent="-342900">
+              <a:spcAft>
+                <a:spcPts val="800"/>
+              </a:spcAft>
+              <a:buSzPct val="100000"/>
+              <a:buChar char="•"/>
+            </a:pPr>
+            <a:r>
+              <a:rPr lang="en-US" sz="1250" dirty="0">
+                <a:solidFill>
+                  <a:srgbClr val="222A3F"/>
+                </a:solidFill>
+                <a:latin typeface="Calibri" pitchFamily="34" charset="0"/>
+                <a:ea typeface="Calibri" pitchFamily="34" charset="-122"/>
+                <a:cs typeface="Calibri" pitchFamily="34" charset="-120"/>
+              </a:rPr>
+              <a:t>Meshtastic Client API: documented protobuf stream over BLE — the same interface its phone apps use. No firmware fork.</a:t>
+            </a:r>
+            <a:endParaRPr lang="en-US" sz="1250" dirty="0"/>
+          </a:p>
+          <a:p>
+            <a:pPr marL="342900" indent="-342900">
+              <a:spcAft>
+                <a:spcPts val="800"/>
+              </a:spcAft>
+              <a:buSzPct val="100000"/>
+              <a:buChar char="•"/>
+            </a:pPr>
+            <a:r>
+              <a:rPr lang="en-US" sz="1250" dirty="0">
+                <a:solidFill>
+                  <a:srgbClr val="222A3F"/>
+                </a:solidFill>
+                <a:latin typeface="Calibri" pitchFamily="34" charset="0"/>
+                <a:ea typeface="Calibri" pitchFamily="34" charset="-122"/>
+                <a:cs typeface="Calibri" pitchFamily="34" charset="-120"/>
+              </a:rPr>
+              <a:t>One custom-firmware surface (the display). GPS, encryption, radio timing, mesh relay all ship pre-tested.</a:t>
+            </a:r>
+            <a:endParaRPr lang="en-US" sz="1250" dirty="0"/>
+          </a:p>
+          <a:p>
+            <a:pPr marL="342900" indent="-342900">
+              <a:spcAft>
+                <a:spcPts val="800"/>
+              </a:spcAft>
+              <a:buSzPct val="100000"/>
+              <a:buChar char="•"/>
+            </a:pPr>
+            <a:r>
+              <a:rPr lang="en-US" sz="1250" dirty="0">
+                <a:solidFill>
+                  <a:srgbClr val="222A3F"/>
+                </a:solidFill>
+                <a:latin typeface="Calibri" pitchFamily="34" charset="0"/>
+                <a:ea typeface="Calibri" pitchFamily="34" charset="-122"/>
+                <a:cs typeface="Calibri" pitchFamily="34" charset="-120"/>
+              </a:rPr>
+              <a:t>Any third node (ridge relay, hiker) extends range automatically — mesh for free.</a:t>
+            </a:r>
+            <a:endParaRPr lang="en-US" sz="1250" dirty="0"/>
+          </a:p>
+          <a:p>
+            <a:pPr marL="342900" indent="-342900">
+              <a:buSzPct val="100000"/>
+              <a:buChar char="•"/>
+            </a:pPr>
+            <a:r>
+              <a:rPr lang="en-US" sz="1250" dirty="0">
+                <a:solidFill>
+                  <a:srgbClr val="222A3F"/>
+                </a:solidFill>
+                <a:latin typeface="Calibri" pitchFamily="34" charset="0"/>
+                <a:ea typeface="Calibri" pitchFamily="34" charset="-122"/>
+                <a:cs typeface="Calibri" pitchFamily="34" charset="-120"/>
+              </a:rPr>
+              <a:t>Reflective LCD: sunlight-readable on a dash where TFTs wash out; fast enough for a live arrow.</a:t>
+            </a:r>
+            <a:endParaRPr lang="en-US" sz="1250" dirty="0"/>
+          </a:p>
+        </p:txBody>
+      </p:sp>
+      <p:sp>
+        <p:nvSpPr>
+          <p:cNvPr id="25" name="Text 23"/>
+          <p:cNvSpPr txBox="1"/>
+          <p:nvPr/>
+        </p:nvSpPr>
+        <p:spPr>
+          <a:xfrm>
+            <a:off x="502920" y="4709160"/>
+            <a:ext cx="2743200" cy="320040"/>
+          </a:xfrm>
+          <a:prstGeom prst="rect">
+            <a:avLst/>
+          </a:prstGeom>
+          <a:noFill/>
+          <a:ln/>
+        </p:spPr>
+        <p:txBody>
+          <a:bodyPr wrap="square" lIns="0" tIns="0" rIns="0" bIns="0" rtlCol="0" anchor="ctr"/>
+          <a:lstStyle/>
+          <a:p>
+            <a:pPr indent="0" marL="0">
+              <a:buNone/>
+            </a:pPr>
+            <a:r>
+              <a:rPr lang="en-US" sz="1500" b="1" dirty="0">
+                <a:solidFill>
+                  <a:srgbClr val="1E2761"/>
+                </a:solidFill>
+                <a:latin typeface="Cambria" pitchFamily="34" charset="0"/>
+                <a:ea typeface="Cambria" pitchFamily="34" charset="-122"/>
+                <a:cs typeface="Cambria" pitchFamily="34" charset="-120"/>
+              </a:rPr>
+              <a:t>Protocol stack</a:t>
+            </a:r>
+            <a:endParaRPr lang="en-US" sz="1500" dirty="0"/>
+          </a:p>
+        </p:txBody>
+      </p:sp>
+      <p:sp>
+        <p:nvSpPr>
+          <p:cNvPr id="26" name="Shape 24"/>
           <p:cNvSpPr/>
           <p:nvPr/>
         </p:nvSpPr>
         <p:spPr>
           <a:xfrm>
-            <a:off x="502920" y="1508760"/>
-            <a:ext cx="5486400" cy="2468880"/>
+            <a:off x="502920" y="5074920"/>
+            <a:ext cx="2697480" cy="914400"/>
           </a:xfrm>
           <a:prstGeom prst="roundRect">
             <a:avLst>
-              <a:gd name="adj" fmla="val 3704"/>
+              <a:gd name="adj" fmla="val 7000"/>
+            </a:avLst>
+          </a:prstGeom>
+          <a:solidFill>
+            <a:srgbClr val="F2F6FC"/>
+          </a:solidFill>
+          <a:ln w="12700">
+            <a:solidFill>
+              <a:srgbClr val="1E2761"/>
+            </a:solidFill>
+            <a:prstDash val="solid"/>
+          </a:ln>
+        </p:spPr>
+      </p:sp>
+      <p:sp>
+        <p:nvSpPr>
+          <p:cNvPr id="27" name="Text 25"/>
+          <p:cNvSpPr txBox="1"/>
+          <p:nvPr/>
+        </p:nvSpPr>
+        <p:spPr>
+          <a:xfrm>
+            <a:off x="630936" y="5148072"/>
+            <a:ext cx="2468880" cy="274320"/>
+          </a:xfrm>
+          <a:prstGeom prst="rect">
+            <a:avLst/>
+          </a:prstGeom>
+          <a:noFill/>
+          <a:ln/>
+        </p:spPr>
+        <p:txBody>
+          <a:bodyPr wrap="square" lIns="0" tIns="0" rIns="0" bIns="0" rtlCol="0" anchor="ctr"/>
+          <a:lstStyle/>
+          <a:p>
+            <a:pPr indent="0" marL="0">
+              <a:buNone/>
+            </a:pPr>
+            <a:r>
+              <a:rPr lang="en-US" sz="1200" b="1" dirty="0">
+                <a:solidFill>
+                  <a:srgbClr val="E58E1A"/>
+                </a:solidFill>
+                <a:latin typeface="Calibri" pitchFamily="34" charset="0"/>
+                <a:ea typeface="Calibri" pitchFamily="34" charset="-122"/>
+                <a:cs typeface="Calibri" pitchFamily="34" charset="-120"/>
+              </a:rPr>
+              <a:t>APP</a:t>
+            </a:r>
+            <a:endParaRPr lang="en-US" sz="1200" dirty="0"/>
+          </a:p>
+        </p:txBody>
+      </p:sp>
+      <p:sp>
+        <p:nvSpPr>
+          <p:cNvPr id="28" name="Text 26"/>
+          <p:cNvSpPr txBox="1"/>
+          <p:nvPr/>
+        </p:nvSpPr>
+        <p:spPr>
+          <a:xfrm>
+            <a:off x="630936" y="5413248"/>
+            <a:ext cx="2468880" cy="502920"/>
+          </a:xfrm>
+          <a:prstGeom prst="rect">
+            <a:avLst/>
+          </a:prstGeom>
+          <a:noFill/>
+          <a:ln/>
+        </p:spPr>
+        <p:txBody>
+          <a:bodyPr wrap="square" lIns="0" tIns="0" rIns="0" bIns="0" rtlCol="0" anchor="ctr"/>
+          <a:lstStyle/>
+          <a:p>
+            <a:pPr indent="0" marL="0">
+              <a:buNone/>
+            </a:pPr>
+            <a:r>
+              <a:rPr lang="en-US" sz="1050" dirty="0">
+                <a:solidFill>
+                  <a:srgbClr val="222A3F"/>
+                </a:solidFill>
+                <a:latin typeface="Calibri" pitchFamily="34" charset="0"/>
+                <a:ea typeface="Calibri" pitchFamily="34" charset="-122"/>
+                <a:cs typeface="Calibri" pitchFamily="34" charset="-120"/>
+              </a:rPr>
+              <a:t>Position payload (protobuf, ~40 B)</a:t>
+            </a:r>
+            <a:endParaRPr lang="en-US" sz="1050" dirty="0"/>
+          </a:p>
+        </p:txBody>
+      </p:sp>
+      <p:sp>
+        <p:nvSpPr>
+          <p:cNvPr id="29" name="Shape 27"/>
+          <p:cNvSpPr/>
+          <p:nvPr/>
+        </p:nvSpPr>
+        <p:spPr>
+          <a:xfrm>
+            <a:off x="3355848" y="5074920"/>
+            <a:ext cx="2697480" cy="914400"/>
+          </a:xfrm>
+          <a:prstGeom prst="roundRect">
+            <a:avLst>
+              <a:gd name="adj" fmla="val 7000"/>
+            </a:avLst>
+          </a:prstGeom>
+          <a:solidFill>
+            <a:srgbClr val="F2F6FC"/>
+          </a:solidFill>
+          <a:ln w="12700">
+            <a:solidFill>
+              <a:srgbClr val="1E2761"/>
+            </a:solidFill>
+            <a:prstDash val="solid"/>
+          </a:ln>
+        </p:spPr>
+      </p:sp>
+      <p:sp>
+        <p:nvSpPr>
+          <p:cNvPr id="30" name="Text 28"/>
+          <p:cNvSpPr txBox="1"/>
+          <p:nvPr/>
+        </p:nvSpPr>
+        <p:spPr>
+          <a:xfrm>
+            <a:off x="3483864" y="5148072"/>
+            <a:ext cx="2468880" cy="274320"/>
+          </a:xfrm>
+          <a:prstGeom prst="rect">
+            <a:avLst/>
+          </a:prstGeom>
+          <a:noFill/>
+          <a:ln/>
+        </p:spPr>
+        <p:txBody>
+          <a:bodyPr wrap="square" lIns="0" tIns="0" rIns="0" bIns="0" rtlCol="0" anchor="ctr"/>
+          <a:lstStyle/>
+          <a:p>
+            <a:pPr indent="0" marL="0">
+              <a:buNone/>
+            </a:pPr>
+            <a:r>
+              <a:rPr lang="en-US" sz="1200" b="1" dirty="0">
+                <a:solidFill>
+                  <a:srgbClr val="E58E1A"/>
+                </a:solidFill>
+                <a:latin typeface="Calibri" pitchFamily="34" charset="0"/>
+                <a:ea typeface="Calibri" pitchFamily="34" charset="-122"/>
+                <a:cs typeface="Calibri" pitchFamily="34" charset="-120"/>
+              </a:rPr>
+              <a:t>NET</a:t>
+            </a:r>
+            <a:endParaRPr lang="en-US" sz="1200" dirty="0"/>
+          </a:p>
+        </p:txBody>
+      </p:sp>
+      <p:sp>
+        <p:nvSpPr>
+          <p:cNvPr id="31" name="Text 29"/>
+          <p:cNvSpPr txBox="1"/>
+          <p:nvPr/>
+        </p:nvSpPr>
+        <p:spPr>
+          <a:xfrm>
+            <a:off x="3483864" y="5413248"/>
+            <a:ext cx="2468880" cy="502920"/>
+          </a:xfrm>
+          <a:prstGeom prst="rect">
+            <a:avLst/>
+          </a:prstGeom>
+          <a:noFill/>
+          <a:ln/>
+        </p:spPr>
+        <p:txBody>
+          <a:bodyPr wrap="square" lIns="0" tIns="0" rIns="0" bIns="0" rtlCol="0" anchor="ctr"/>
+          <a:lstStyle/>
+          <a:p>
+            <a:pPr indent="0" marL="0">
+              <a:buNone/>
+            </a:pPr>
+            <a:r>
+              <a:rPr lang="en-US" sz="1050" dirty="0">
+                <a:solidFill>
+                  <a:srgbClr val="222A3F"/>
+                </a:solidFill>
+                <a:latin typeface="Calibri" pitchFamily="34" charset="0"/>
+                <a:ea typeface="Calibri" pitchFamily="34" charset="-122"/>
+                <a:cs typeface="Calibri" pitchFamily="34" charset="-120"/>
+              </a:rPr>
+              <a:t>Managed flooding · hop limit 3 · AES-256</a:t>
+            </a:r>
+            <a:endParaRPr lang="en-US" sz="1050" dirty="0"/>
+          </a:p>
+        </p:txBody>
+      </p:sp>
+      <p:sp>
+        <p:nvSpPr>
+          <p:cNvPr id="32" name="Shape 30"/>
+          <p:cNvSpPr/>
+          <p:nvPr/>
+        </p:nvSpPr>
+        <p:spPr>
+          <a:xfrm>
+            <a:off x="6208776" y="5074920"/>
+            <a:ext cx="2697480" cy="914400"/>
+          </a:xfrm>
+          <a:prstGeom prst="roundRect">
+            <a:avLst>
+              <a:gd name="adj" fmla="val 7000"/>
+            </a:avLst>
+          </a:prstGeom>
+          <a:solidFill>
+            <a:srgbClr val="F2F6FC"/>
+          </a:solidFill>
+          <a:ln w="12700">
+            <a:solidFill>
+              <a:srgbClr val="1E2761"/>
+            </a:solidFill>
+            <a:prstDash val="solid"/>
+          </a:ln>
+        </p:spPr>
+      </p:sp>
+      <p:sp>
+        <p:nvSpPr>
+          <p:cNvPr id="33" name="Text 31"/>
+          <p:cNvSpPr txBox="1"/>
+          <p:nvPr/>
+        </p:nvSpPr>
+        <p:spPr>
+          <a:xfrm>
+            <a:off x="6336792" y="5148072"/>
+            <a:ext cx="2468880" cy="274320"/>
+          </a:xfrm>
+          <a:prstGeom prst="rect">
+            <a:avLst/>
+          </a:prstGeom>
+          <a:noFill/>
+          <a:ln/>
+        </p:spPr>
+        <p:txBody>
+          <a:bodyPr wrap="square" lIns="0" tIns="0" rIns="0" bIns="0" rtlCol="0" anchor="ctr"/>
+          <a:lstStyle/>
+          <a:p>
+            <a:pPr indent="0" marL="0">
+              <a:buNone/>
+            </a:pPr>
+            <a:r>
+              <a:rPr lang="en-US" sz="1200" b="1" dirty="0">
+                <a:solidFill>
+                  <a:srgbClr val="E58E1A"/>
+                </a:solidFill>
+                <a:latin typeface="Calibri" pitchFamily="34" charset="0"/>
+                <a:ea typeface="Calibri" pitchFamily="34" charset="-122"/>
+                <a:cs typeface="Calibri" pitchFamily="34" charset="-120"/>
+              </a:rPr>
+              <a:t>MAC</a:t>
+            </a:r>
+            <a:endParaRPr lang="en-US" sz="1200" dirty="0"/>
+          </a:p>
+        </p:txBody>
+      </p:sp>
+      <p:sp>
+        <p:nvSpPr>
+          <p:cNvPr id="34" name="Text 32"/>
+          <p:cNvSpPr txBox="1"/>
+          <p:nvPr/>
+        </p:nvSpPr>
+        <p:spPr>
+          <a:xfrm>
+            <a:off x="6336792" y="5413248"/>
+            <a:ext cx="2468880" cy="502920"/>
+          </a:xfrm>
+          <a:prstGeom prst="rect">
+            <a:avLst/>
+          </a:prstGeom>
+          <a:noFill/>
+          <a:ln/>
+        </p:spPr>
+        <p:txBody>
+          <a:bodyPr wrap="square" lIns="0" tIns="0" rIns="0" bIns="0" rtlCol="0" anchor="ctr"/>
+          <a:lstStyle/>
+          <a:p>
+            <a:pPr indent="0" marL="0">
+              <a:buNone/>
+            </a:pPr>
+            <a:r>
+              <a:rPr lang="en-US" sz="1050" dirty="0">
+                <a:solidFill>
+                  <a:srgbClr val="222A3F"/>
+                </a:solidFill>
+                <a:latin typeface="Calibri" pitchFamily="34" charset="0"/>
+                <a:ea typeface="Calibri" pitchFamily="34" charset="-122"/>
+                <a:cs typeface="Calibri" pitchFamily="34" charset="-120"/>
+              </a:rPr>
+              <a:t>CSMA, SNR-weighted backoff</a:t>
+            </a:r>
+            <a:endParaRPr lang="en-US" sz="1050" dirty="0"/>
+          </a:p>
+        </p:txBody>
+      </p:sp>
+      <p:sp>
+        <p:nvSpPr>
+          <p:cNvPr id="35" name="Shape 33"/>
+          <p:cNvSpPr/>
+          <p:nvPr/>
+        </p:nvSpPr>
+        <p:spPr>
+          <a:xfrm>
+            <a:off x="9061704" y="5074920"/>
+            <a:ext cx="2697480" cy="914400"/>
+          </a:xfrm>
+          <a:prstGeom prst="roundRect">
+            <a:avLst>
+              <a:gd name="adj" fmla="val 7000"/>
             </a:avLst>
           </a:prstGeom>
           <a:solidFill>
             <a:srgbClr val="1E2761"/>
           </a:solidFill>
-          <a:ln/>
-        </p:spPr>
+          <a:ln w="12700">
+            <a:solidFill>
+              <a:srgbClr val="1E2761"/>
+            </a:solidFill>
+            <a:prstDash val="solid"/>
+          </a:ln>
+        </p:spPr>
+      </p:sp>
+      <p:sp>
+        <p:nvSpPr>
+          <p:cNvPr id="36" name="Text 34"/>
+          <p:cNvSpPr txBox="1"/>
+          <p:nvPr/>
+        </p:nvSpPr>
+        <p:spPr>
+          <a:xfrm>
+            <a:off x="9189720" y="5148072"/>
+            <a:ext cx="2468880" cy="274320"/>
+          </a:xfrm>
+          <a:prstGeom prst="rect">
+            <a:avLst/>
+          </a:prstGeom>
+          <a:noFill/>
+          <a:ln/>
+        </p:spPr>
+        <p:txBody>
+          <a:bodyPr wrap="square" lIns="0" tIns="0" rIns="0" bIns="0" rtlCol="0" anchor="ctr"/>
+          <a:lstStyle/>
+          <a:p>
+            <a:pPr indent="0" marL="0">
+              <a:buNone/>
+            </a:pPr>
+            <a:r>
+              <a:rPr lang="en-US" sz="1200" b="1" dirty="0">
+                <a:solidFill>
+                  <a:srgbClr val="E58E1A"/>
+                </a:solidFill>
+                <a:latin typeface="Calibri" pitchFamily="34" charset="0"/>
+                <a:ea typeface="Calibri" pitchFamily="34" charset="-122"/>
+                <a:cs typeface="Calibri" pitchFamily="34" charset="-120"/>
+              </a:rPr>
+              <a:t>PHY</a:t>
+            </a:r>
+            <a:endParaRPr lang="en-US" sz="1200" dirty="0"/>
+          </a:p>
+        </p:txBody>
+      </p:sp>
+      <p:sp>
+        <p:nvSpPr>
+          <p:cNvPr id="37" name="Text 35"/>
+          <p:cNvSpPr txBox="1"/>
+          <p:nvPr/>
+        </p:nvSpPr>
+        <p:spPr>
+          <a:xfrm>
+            <a:off x="9189720" y="5413248"/>
+            <a:ext cx="2468880" cy="502920"/>
+          </a:xfrm>
+          <a:prstGeom prst="rect">
+            <a:avLst/>
+          </a:prstGeom>
+          <a:noFill/>
+          <a:ln/>
+        </p:spPr>
+        <p:txBody>
+          <a:bodyPr wrap="square" lIns="0" tIns="0" rIns="0" bIns="0" rtlCol="0" anchor="ctr"/>
+          <a:lstStyle/>
+          <a:p>
+            <a:pPr indent="0" marL="0">
+              <a:buNone/>
+            </a:pPr>
+            <a:r>
+              <a:rPr lang="en-US" sz="1050" dirty="0">
+                <a:solidFill>
+                  <a:srgbClr val="FFFFFF"/>
+                </a:solidFill>
+                <a:latin typeface="Calibri" pitchFamily="34" charset="0"/>
+                <a:ea typeface="Calibri" pitchFamily="34" charset="-122"/>
+                <a:cs typeface="Calibri" pitchFamily="34" charset="-120"/>
+              </a:rPr>
+              <a:t>LoRa chirp spread spectrum · 915 MHz ISM</a:t>
+            </a:r>
+            <a:endParaRPr lang="en-US" sz="1050" dirty="0"/>
+          </a:p>
+        </p:txBody>
+      </p:sp>
+    </p:spTree>
+  </p:cSld>
+  <p:clrMapOvr>
+    <a:masterClrMapping/>
+  </p:clrMapOvr>
+</p:sld>
+</file>
+
+<file path=ppt/slides/slide4.xml><?xml version="1.0" encoding="utf-8"?>
+<p:sld xmlns:a="http://schemas.openxmlformats.org/drawingml/2006/main" xmlns:r="http://schemas.openxmlformats.org/officeDocument/2006/relationships" xmlns:p="http://schemas.openxmlformats.org/presentationml/2006/main">
+  <p:cSld name="Slide 4">
+    <p:bg>
+      <p:bgPr>
+        <a:solidFill>
+          <a:srgbClr val="FFFFFF"/>
+        </a:solidFill>
+      </p:bgPr>
+    </p:bg>
+    <p:spTree>
+      <p:nvGrpSpPr>
+        <p:cNvPr id="1" name=""/>
+        <p:cNvGrpSpPr/>
+        <p:nvPr/>
+      </p:nvGrpSpPr>
+      <p:grpSpPr>
+        <a:xfrm>
+          <a:off x="0" y="0"/>
+          <a:ext cx="0" cy="0"/>
+          <a:chOff x="0" y="0"/>
+          <a:chExt cx="0" cy="0"/>
+        </a:xfrm>
+      </p:grpSpPr>
+      <p:sp>
+        <p:nvSpPr>
+          <p:cNvPr id="2" name="Text 0"/>
+          <p:cNvSpPr txBox="1"/>
+          <p:nvPr/>
+        </p:nvSpPr>
+        <p:spPr>
+          <a:xfrm>
+            <a:off x="502920" y="256032"/>
+            <a:ext cx="11155680" cy="685800"/>
+          </a:xfrm>
+          <a:prstGeom prst="rect">
+            <a:avLst/>
+          </a:prstGeom>
+          <a:noFill/>
+          <a:ln/>
+        </p:spPr>
+        <p:txBody>
+          <a:bodyPr wrap="square" lIns="0" tIns="0" rIns="0" bIns="0" rtlCol="0" anchor="ctr"/>
+          <a:lstStyle/>
+          <a:p>
+            <a:pPr indent="0" marL="0">
+              <a:buNone/>
+            </a:pPr>
+            <a:r>
+              <a:rPr lang="en-US" sz="3200" b="1" dirty="0">
+                <a:solidFill>
+                  <a:srgbClr val="1E2761"/>
+                </a:solidFill>
+                <a:latin typeface="Cambria" pitchFamily="34" charset="0"/>
+                <a:ea typeface="Cambria" pitchFamily="34" charset="-122"/>
+                <a:cs typeface="Cambria" pitchFamily="34" charset="-120"/>
+              </a:rPr>
+              <a:t>Team Roles &amp; Semester Timeline</a:t>
+            </a:r>
+            <a:endParaRPr lang="en-US" sz="3200" dirty="0"/>
+          </a:p>
+        </p:txBody>
+      </p:sp>
+      <p:sp>
+        <p:nvSpPr>
+          <p:cNvPr id="3" name="Shape 1"/>
+          <p:cNvSpPr/>
+          <p:nvPr/>
+        </p:nvSpPr>
+        <p:spPr>
+          <a:xfrm>
+            <a:off x="502920" y="1051560"/>
+            <a:ext cx="914400" cy="347472"/>
+          </a:xfrm>
+          <a:prstGeom prst="roundRect">
+            <a:avLst>
+              <a:gd name="adj" fmla="val 18421"/>
+            </a:avLst>
+          </a:prstGeom>
+          <a:solidFill>
+            <a:srgbClr val="1199BD"/>
+          </a:solidFill>
+          <a:ln/>
+        </p:spPr>
+      </p:sp>
+      <p:sp>
+        <p:nvSpPr>
+          <p:cNvPr id="4" name="Text 2"/>
+          <p:cNvSpPr txBox="1"/>
+          <p:nvPr/>
+        </p:nvSpPr>
+        <p:spPr>
+          <a:xfrm>
+            <a:off x="502920" y="1097280"/>
+            <a:ext cx="914400" cy="256032"/>
+          </a:xfrm>
+          <a:prstGeom prst="rect">
+            <a:avLst/>
+          </a:prstGeom>
+          <a:noFill/>
+          <a:ln/>
+        </p:spPr>
+        <p:txBody>
+          <a:bodyPr wrap="square" lIns="0" tIns="0" rIns="0" bIns="0" rtlCol="0" anchor="ctr"/>
+          <a:lstStyle/>
+          <a:p>
+            <a:pPr algn="ctr" indent="0" marL="0">
+              <a:buNone/>
+            </a:pPr>
+            <a:r>
+              <a:rPr lang="en-US" sz="1200" b="1" dirty="0">
+                <a:solidFill>
+                  <a:srgbClr val="FFFFFF"/>
+                </a:solidFill>
+                <a:latin typeface="Calibri" pitchFamily="34" charset="0"/>
+                <a:ea typeface="Calibri" pitchFamily="34" charset="-122"/>
+                <a:cs typeface="Calibri" pitchFamily="34" charset="-120"/>
+              </a:rPr>
+              <a:t>Deo</a:t>
+            </a:r>
+            <a:endParaRPr lang="en-US" sz="1200" dirty="0"/>
+          </a:p>
+        </p:txBody>
       </p:sp>
       <p:sp>
         <p:nvSpPr>
@@ -4201,8 +5827,1832 @@
         </p:nvSpPr>
         <p:spPr>
           <a:xfrm>
+            <a:off x="1572768" y="1069848"/>
+            <a:ext cx="10058400" cy="384048"/>
+          </a:xfrm>
+          <a:prstGeom prst="rect">
+            <a:avLst/>
+          </a:prstGeom>
+          <a:noFill/>
+          <a:ln/>
+        </p:spPr>
+        <p:txBody>
+          <a:bodyPr wrap="square" lIns="0" tIns="0" rIns="0" bIns="0" rtlCol="0" anchor="ctr"/>
+          <a:lstStyle/>
+          <a:p>
+            <a:pPr indent="0" marL="0">
+              <a:buNone/>
+            </a:pPr>
+            <a:r>
+              <a:rPr lang="en-US" sz="1250" dirty="0">
+                <a:solidFill>
+                  <a:srgbClr val="222A3F"/>
+                </a:solidFill>
+                <a:latin typeface="Calibri" pitchFamily="34" charset="0"/>
+                <a:ea typeface="Calibri" pitchFamily="34" charset="-122"/>
+                <a:cs typeface="Calibri" pitchFamily="34" charset="-120"/>
+              </a:rPr>
+              <a:t>Protocol firmware: Meshtastic BLE client, protobuf decode, TrackerState feed</a:t>
+            </a:r>
+            <a:endParaRPr lang="en-US" sz="1250" dirty="0"/>
+          </a:p>
+        </p:txBody>
+      </p:sp>
+      <p:sp>
+        <p:nvSpPr>
+          <p:cNvPr id="6" name="Shape 4"/>
+          <p:cNvSpPr/>
+          <p:nvPr/>
+        </p:nvSpPr>
+        <p:spPr>
+          <a:xfrm>
+            <a:off x="502920" y="1508760"/>
+            <a:ext cx="914400" cy="347472"/>
+          </a:xfrm>
+          <a:prstGeom prst="roundRect">
+            <a:avLst>
+              <a:gd name="adj" fmla="val 18421"/>
+            </a:avLst>
+          </a:prstGeom>
+          <a:solidFill>
+            <a:srgbClr val="6D4BDB"/>
+          </a:solidFill>
+          <a:ln/>
+        </p:spPr>
+      </p:sp>
+      <p:sp>
+        <p:nvSpPr>
+          <p:cNvPr id="7" name="Text 5"/>
+          <p:cNvSpPr txBox="1"/>
+          <p:nvPr/>
+        </p:nvSpPr>
+        <p:spPr>
+          <a:xfrm>
+            <a:off x="502920" y="1554480"/>
+            <a:ext cx="914400" cy="256032"/>
+          </a:xfrm>
+          <a:prstGeom prst="rect">
+            <a:avLst/>
+          </a:prstGeom>
+          <a:noFill/>
+          <a:ln/>
+        </p:spPr>
+        <p:txBody>
+          <a:bodyPr wrap="square" lIns="0" tIns="0" rIns="0" bIns="0" rtlCol="0" anchor="ctr"/>
+          <a:lstStyle/>
+          <a:p>
+            <a:pPr algn="ctr" indent="0" marL="0">
+              <a:buNone/>
+            </a:pPr>
+            <a:r>
+              <a:rPr lang="en-US" sz="1200" b="1" dirty="0">
+                <a:solidFill>
+                  <a:srgbClr val="FFFFFF"/>
+                </a:solidFill>
+                <a:latin typeface="Calibri" pitchFamily="34" charset="0"/>
+                <a:ea typeface="Calibri" pitchFamily="34" charset="-122"/>
+                <a:cs typeface="Calibri" pitchFamily="34" charset="-120"/>
+              </a:rPr>
+              <a:t>Josiah</a:t>
+            </a:r>
+            <a:endParaRPr lang="en-US" sz="1200" dirty="0"/>
+          </a:p>
+        </p:txBody>
+      </p:sp>
+      <p:sp>
+        <p:nvSpPr>
+          <p:cNvPr id="8" name="Text 6"/>
+          <p:cNvSpPr txBox="1"/>
+          <p:nvPr/>
+        </p:nvSpPr>
+        <p:spPr>
+          <a:xfrm>
+            <a:off x="1572768" y="1527048"/>
+            <a:ext cx="10058400" cy="384048"/>
+          </a:xfrm>
+          <a:prstGeom prst="rect">
+            <a:avLst/>
+          </a:prstGeom>
+          <a:noFill/>
+          <a:ln/>
+        </p:spPr>
+        <p:txBody>
+          <a:bodyPr wrap="square" lIns="0" tIns="0" rIns="0" bIns="0" rtlCol="0" anchor="ctr"/>
+          <a:lstStyle/>
+          <a:p>
+            <a:pPr indent="0" marL="0">
+              <a:buNone/>
+            </a:pPr>
+            <a:r>
+              <a:rPr lang="en-US" sz="1250" dirty="0">
+                <a:solidFill>
+                  <a:srgbClr val="222A3F"/>
+                </a:solidFill>
+                <a:latin typeface="Calibri" pitchFamily="34" charset="0"/>
+                <a:ea typeface="Calibri" pitchFamily="34" charset="-122"/>
+                <a:cs typeface="Calibri" pitchFamily="34" charset="-120"/>
+              </a:rPr>
+              <a:t>Display &amp; navigation: RLCD rendering, arrow UI, distance/bearing/heading math</a:t>
+            </a:r>
+            <a:endParaRPr lang="en-US" sz="1250" dirty="0"/>
+          </a:p>
+        </p:txBody>
+      </p:sp>
+      <p:sp>
+        <p:nvSpPr>
+          <p:cNvPr id="9" name="Shape 7"/>
+          <p:cNvSpPr/>
+          <p:nvPr/>
+        </p:nvSpPr>
+        <p:spPr>
+          <a:xfrm>
+            <a:off x="502920" y="1965960"/>
+            <a:ext cx="914400" cy="347472"/>
+          </a:xfrm>
+          <a:prstGeom prst="roundRect">
+            <a:avLst>
+              <a:gd name="adj" fmla="val 18421"/>
+            </a:avLst>
+          </a:prstGeom>
+          <a:solidFill>
+            <a:srgbClr val="E58E1A"/>
+          </a:solidFill>
+          <a:ln/>
+        </p:spPr>
+      </p:sp>
+      <p:sp>
+        <p:nvSpPr>
+          <p:cNvPr id="10" name="Text 8"/>
+          <p:cNvSpPr txBox="1"/>
+          <p:nvPr/>
+        </p:nvSpPr>
+        <p:spPr>
+          <a:xfrm>
+            <a:off x="502920" y="2011680"/>
+            <a:ext cx="914400" cy="256032"/>
+          </a:xfrm>
+          <a:prstGeom prst="rect">
+            <a:avLst/>
+          </a:prstGeom>
+          <a:noFill/>
+          <a:ln/>
+        </p:spPr>
+        <p:txBody>
+          <a:bodyPr wrap="square" lIns="0" tIns="0" rIns="0" bIns="0" rtlCol="0" anchor="ctr"/>
+          <a:lstStyle/>
+          <a:p>
+            <a:pPr algn="ctr" indent="0" marL="0">
+              <a:buNone/>
+            </a:pPr>
+            <a:r>
+              <a:rPr lang="en-US" sz="1200" b="1" dirty="0">
+                <a:solidFill>
+                  <a:srgbClr val="FFFFFF"/>
+                </a:solidFill>
+                <a:latin typeface="Calibri" pitchFamily="34" charset="0"/>
+                <a:ea typeface="Calibri" pitchFamily="34" charset="-122"/>
+                <a:cs typeface="Calibri" pitchFamily="34" charset="-120"/>
+              </a:rPr>
+              <a:t>Victor</a:t>
+            </a:r>
+            <a:endParaRPr lang="en-US" sz="1200" dirty="0"/>
+          </a:p>
+        </p:txBody>
+      </p:sp>
+      <p:sp>
+        <p:nvSpPr>
+          <p:cNvPr id="11" name="Text 9"/>
+          <p:cNvSpPr txBox="1"/>
+          <p:nvPr/>
+        </p:nvSpPr>
+        <p:spPr>
+          <a:xfrm>
+            <a:off x="1572768" y="1984248"/>
+            <a:ext cx="10058400" cy="384048"/>
+          </a:xfrm>
+          <a:prstGeom prst="rect">
+            <a:avLst/>
+          </a:prstGeom>
+          <a:noFill/>
+          <a:ln/>
+        </p:spPr>
+        <p:txBody>
+          <a:bodyPr wrap="square" lIns="0" tIns="0" rIns="0" bIns="0" rtlCol="0" anchor="ctr"/>
+          <a:lstStyle/>
+          <a:p>
+            <a:pPr indent="0" marL="0">
+              <a:buNone/>
+            </a:pPr>
+            <a:r>
+              <a:rPr lang="en-US" sz="1250" dirty="0">
+                <a:solidFill>
+                  <a:srgbClr val="222A3F"/>
+                </a:solidFill>
+                <a:latin typeface="Calibri" pitchFamily="34" charset="0"/>
+                <a:ea typeface="Calibri" pitchFamily="34" charset="-122"/>
+                <a:cs typeface="Calibri" pitchFamily="34" charset="-120"/>
+              </a:rPr>
+              <a:t>Radio &amp; hardware: Meshtastic config, GNSS, presets, antennas, range campaign</a:t>
+            </a:r>
+            <a:endParaRPr lang="en-US" sz="1250" dirty="0"/>
+          </a:p>
+        </p:txBody>
+      </p:sp>
+      <p:sp>
+        <p:nvSpPr>
+          <p:cNvPr id="12" name="Shape 10"/>
+          <p:cNvSpPr/>
+          <p:nvPr/>
+        </p:nvSpPr>
+        <p:spPr>
+          <a:xfrm>
+            <a:off x="502920" y="2423160"/>
+            <a:ext cx="914400" cy="347472"/>
+          </a:xfrm>
+          <a:prstGeom prst="roundRect">
+            <a:avLst>
+              <a:gd name="adj" fmla="val 18421"/>
+            </a:avLst>
+          </a:prstGeom>
+          <a:solidFill>
+            <a:srgbClr val="D9488C"/>
+          </a:solidFill>
+          <a:ln/>
+        </p:spPr>
+      </p:sp>
+      <p:sp>
+        <p:nvSpPr>
+          <p:cNvPr id="13" name="Text 11"/>
+          <p:cNvSpPr txBox="1"/>
+          <p:nvPr/>
+        </p:nvSpPr>
+        <p:spPr>
+          <a:xfrm>
+            <a:off x="502920" y="2468880"/>
+            <a:ext cx="914400" cy="256032"/>
+          </a:xfrm>
+          <a:prstGeom prst="rect">
+            <a:avLst/>
+          </a:prstGeom>
+          <a:noFill/>
+          <a:ln/>
+        </p:spPr>
+        <p:txBody>
+          <a:bodyPr wrap="square" lIns="0" tIns="0" rIns="0" bIns="0" rtlCol="0" anchor="ctr"/>
+          <a:lstStyle/>
+          <a:p>
+            <a:pPr algn="ctr" indent="0" marL="0">
+              <a:buNone/>
+            </a:pPr>
+            <a:r>
+              <a:rPr lang="en-US" sz="1200" b="1" dirty="0">
+                <a:solidFill>
+                  <a:srgbClr val="FFFFFF"/>
+                </a:solidFill>
+                <a:latin typeface="Calibri" pitchFamily="34" charset="0"/>
+                <a:ea typeface="Calibri" pitchFamily="34" charset="-122"/>
+                <a:cs typeface="Calibri" pitchFamily="34" charset="-120"/>
+              </a:rPr>
+              <a:t>Cannon</a:t>
+            </a:r>
+            <a:endParaRPr lang="en-US" sz="1200" dirty="0"/>
+          </a:p>
+        </p:txBody>
+      </p:sp>
+      <p:sp>
+        <p:nvSpPr>
+          <p:cNvPr id="14" name="Text 12"/>
+          <p:cNvSpPr txBox="1"/>
+          <p:nvPr/>
+        </p:nvSpPr>
+        <p:spPr>
+          <a:xfrm>
+            <a:off x="1572768" y="2441448"/>
+            <a:ext cx="10058400" cy="384048"/>
+          </a:xfrm>
+          <a:prstGeom prst="rect">
+            <a:avLst/>
+          </a:prstGeom>
+          <a:noFill/>
+          <a:ln/>
+        </p:spPr>
+        <p:txBody>
+          <a:bodyPr wrap="square" lIns="0" tIns="0" rIns="0" bIns="0" rtlCol="0" anchor="ctr"/>
+          <a:lstStyle/>
+          <a:p>
+            <a:pPr indent="0" marL="0">
+              <a:buNone/>
+            </a:pPr>
+            <a:r>
+              <a:rPr lang="en-US" sz="1250" dirty="0">
+                <a:solidFill>
+                  <a:srgbClr val="222A3F"/>
+                </a:solidFill>
+                <a:latin typeface="Calibri" pitchFamily="34" charset="0"/>
+                <a:ea typeface="Calibri" pitchFamily="34" charset="-122"/>
+                <a:cs typeface="Calibri" pitchFamily="34" charset="-120"/>
+              </a:rPr>
+              <a:t>Integration &amp; test: bench rig, logging harness, drive tests, reports</a:t>
+            </a:r>
+            <a:endParaRPr lang="en-US" sz="1250" dirty="0"/>
+          </a:p>
+        </p:txBody>
+      </p:sp>
+      <p:sp>
+        <p:nvSpPr>
+          <p:cNvPr id="15" name="Shape 13"/>
+          <p:cNvSpPr/>
+          <p:nvPr/>
+        </p:nvSpPr>
+        <p:spPr>
+          <a:xfrm>
+            <a:off x="1600200" y="3108960"/>
+            <a:ext cx="0" cy="3063240"/>
+          </a:xfrm>
+          <a:prstGeom prst="line">
+            <a:avLst/>
+          </a:prstGeom>
+          <a:noFill/>
+          <a:ln w="12700">
+            <a:solidFill>
+              <a:srgbClr val="E3EAF5"/>
+            </a:solidFill>
+            <a:prstDash val="solid"/>
+          </a:ln>
+        </p:spPr>
+      </p:sp>
+      <p:sp>
+        <p:nvSpPr>
+          <p:cNvPr id="16" name="Text 14"/>
+          <p:cNvSpPr txBox="1"/>
+          <p:nvPr/>
+        </p:nvSpPr>
+        <p:spPr>
+          <a:xfrm>
+            <a:off x="1371600" y="2862072"/>
+            <a:ext cx="548640" cy="237744"/>
+          </a:xfrm>
+          <a:prstGeom prst="rect">
+            <a:avLst/>
+          </a:prstGeom>
+          <a:noFill/>
+          <a:ln/>
+        </p:spPr>
+        <p:txBody>
+          <a:bodyPr wrap="square" lIns="0" tIns="0" rIns="0" bIns="0" rtlCol="0" anchor="ctr"/>
+          <a:lstStyle/>
+          <a:p>
+            <a:pPr algn="ctr" indent="0" marL="0">
+              <a:buNone/>
+            </a:pPr>
+            <a:r>
+              <a:rPr lang="en-US" sz="1000" dirty="0">
+                <a:solidFill>
+                  <a:srgbClr val="5B6B8A"/>
+                </a:solidFill>
+                <a:latin typeface="Calibri" pitchFamily="34" charset="0"/>
+                <a:ea typeface="Calibri" pitchFamily="34" charset="-122"/>
+                <a:cs typeface="Calibri" pitchFamily="34" charset="-120"/>
+              </a:rPr>
+              <a:t>W1</a:t>
+            </a:r>
+            <a:endParaRPr lang="en-US" sz="1000" dirty="0"/>
+          </a:p>
+        </p:txBody>
+      </p:sp>
+      <p:sp>
+        <p:nvSpPr>
+          <p:cNvPr id="17" name="Shape 15"/>
+          <p:cNvSpPr/>
+          <p:nvPr/>
+        </p:nvSpPr>
+        <p:spPr>
+          <a:xfrm>
+            <a:off x="3486150" y="3108960"/>
+            <a:ext cx="0" cy="3063240"/>
+          </a:xfrm>
+          <a:prstGeom prst="line">
+            <a:avLst/>
+          </a:prstGeom>
+          <a:noFill/>
+          <a:ln w="12700">
+            <a:solidFill>
+              <a:srgbClr val="E3EAF5"/>
+            </a:solidFill>
+            <a:prstDash val="solid"/>
+          </a:ln>
+        </p:spPr>
+      </p:sp>
+      <p:sp>
+        <p:nvSpPr>
+          <p:cNvPr id="18" name="Text 16"/>
+          <p:cNvSpPr txBox="1"/>
+          <p:nvPr/>
+        </p:nvSpPr>
+        <p:spPr>
+          <a:xfrm>
+            <a:off x="3257550" y="2862072"/>
+            <a:ext cx="548640" cy="237744"/>
+          </a:xfrm>
+          <a:prstGeom prst="rect">
+            <a:avLst/>
+          </a:prstGeom>
+          <a:noFill/>
+          <a:ln/>
+        </p:spPr>
+        <p:txBody>
+          <a:bodyPr wrap="square" lIns="0" tIns="0" rIns="0" bIns="0" rtlCol="0" anchor="ctr"/>
+          <a:lstStyle/>
+          <a:p>
+            <a:pPr algn="ctr" indent="0" marL="0">
+              <a:buNone/>
+            </a:pPr>
+            <a:r>
+              <a:rPr lang="en-US" sz="1000" dirty="0">
+                <a:solidFill>
+                  <a:srgbClr val="5B6B8A"/>
+                </a:solidFill>
+                <a:latin typeface="Calibri" pitchFamily="34" charset="0"/>
+                <a:ea typeface="Calibri" pitchFamily="34" charset="-122"/>
+                <a:cs typeface="Calibri" pitchFamily="34" charset="-120"/>
+              </a:rPr>
+              <a:t>W4</a:t>
+            </a:r>
+            <a:endParaRPr lang="en-US" sz="1000" dirty="0"/>
+          </a:p>
+        </p:txBody>
+      </p:sp>
+      <p:sp>
+        <p:nvSpPr>
+          <p:cNvPr id="19" name="Shape 17"/>
+          <p:cNvSpPr/>
+          <p:nvPr/>
+        </p:nvSpPr>
+        <p:spPr>
+          <a:xfrm>
+            <a:off x="6000750" y="3108960"/>
+            <a:ext cx="0" cy="3063240"/>
+          </a:xfrm>
+          <a:prstGeom prst="line">
+            <a:avLst/>
+          </a:prstGeom>
+          <a:noFill/>
+          <a:ln w="12700">
+            <a:solidFill>
+              <a:srgbClr val="E3EAF5"/>
+            </a:solidFill>
+            <a:prstDash val="solid"/>
+          </a:ln>
+        </p:spPr>
+      </p:sp>
+      <p:sp>
+        <p:nvSpPr>
+          <p:cNvPr id="20" name="Text 18"/>
+          <p:cNvSpPr txBox="1"/>
+          <p:nvPr/>
+        </p:nvSpPr>
+        <p:spPr>
+          <a:xfrm>
+            <a:off x="5772150" y="2862072"/>
+            <a:ext cx="548640" cy="237744"/>
+          </a:xfrm>
+          <a:prstGeom prst="rect">
+            <a:avLst/>
+          </a:prstGeom>
+          <a:noFill/>
+          <a:ln/>
+        </p:spPr>
+        <p:txBody>
+          <a:bodyPr wrap="square" lIns="0" tIns="0" rIns="0" bIns="0" rtlCol="0" anchor="ctr"/>
+          <a:lstStyle/>
+          <a:p>
+            <a:pPr algn="ctr" indent="0" marL="0">
+              <a:buNone/>
+            </a:pPr>
+            <a:r>
+              <a:rPr lang="en-US" sz="1000" dirty="0">
+                <a:solidFill>
+                  <a:srgbClr val="5B6B8A"/>
+                </a:solidFill>
+                <a:latin typeface="Calibri" pitchFamily="34" charset="0"/>
+                <a:ea typeface="Calibri" pitchFamily="34" charset="-122"/>
+                <a:cs typeface="Calibri" pitchFamily="34" charset="-120"/>
+              </a:rPr>
+              <a:t>W8</a:t>
+            </a:r>
+            <a:endParaRPr lang="en-US" sz="1000" dirty="0"/>
+          </a:p>
+        </p:txBody>
+      </p:sp>
+      <p:sp>
+        <p:nvSpPr>
+          <p:cNvPr id="21" name="Shape 19"/>
+          <p:cNvSpPr/>
+          <p:nvPr/>
+        </p:nvSpPr>
+        <p:spPr>
+          <a:xfrm>
+            <a:off x="8515350" y="3108960"/>
+            <a:ext cx="0" cy="3063240"/>
+          </a:xfrm>
+          <a:prstGeom prst="line">
+            <a:avLst/>
+          </a:prstGeom>
+          <a:noFill/>
+          <a:ln w="12700">
+            <a:solidFill>
+              <a:srgbClr val="E3EAF5"/>
+            </a:solidFill>
+            <a:prstDash val="solid"/>
+          </a:ln>
+        </p:spPr>
+      </p:sp>
+      <p:sp>
+        <p:nvSpPr>
+          <p:cNvPr id="22" name="Text 20"/>
+          <p:cNvSpPr txBox="1"/>
+          <p:nvPr/>
+        </p:nvSpPr>
+        <p:spPr>
+          <a:xfrm>
+            <a:off x="8286750" y="2862072"/>
+            <a:ext cx="548640" cy="237744"/>
+          </a:xfrm>
+          <a:prstGeom prst="rect">
+            <a:avLst/>
+          </a:prstGeom>
+          <a:noFill/>
+          <a:ln/>
+        </p:spPr>
+        <p:txBody>
+          <a:bodyPr wrap="square" lIns="0" tIns="0" rIns="0" bIns="0" rtlCol="0" anchor="ctr"/>
+          <a:lstStyle/>
+          <a:p>
+            <a:pPr algn="ctr" indent="0" marL="0">
+              <a:buNone/>
+            </a:pPr>
+            <a:r>
+              <a:rPr lang="en-US" sz="1000" dirty="0">
+                <a:solidFill>
+                  <a:srgbClr val="5B6B8A"/>
+                </a:solidFill>
+                <a:latin typeface="Calibri" pitchFamily="34" charset="0"/>
+                <a:ea typeface="Calibri" pitchFamily="34" charset="-122"/>
+                <a:cs typeface="Calibri" pitchFamily="34" charset="-120"/>
+              </a:rPr>
+              <a:t>W12</a:t>
+            </a:r>
+            <a:endParaRPr lang="en-US" sz="1000" dirty="0"/>
+          </a:p>
+        </p:txBody>
+      </p:sp>
+      <p:sp>
+        <p:nvSpPr>
+          <p:cNvPr id="23" name="Shape 21"/>
+          <p:cNvSpPr/>
+          <p:nvPr/>
+        </p:nvSpPr>
+        <p:spPr>
+          <a:xfrm>
+            <a:off x="11029950" y="3108960"/>
+            <a:ext cx="0" cy="3063240"/>
+          </a:xfrm>
+          <a:prstGeom prst="line">
+            <a:avLst/>
+          </a:prstGeom>
+          <a:noFill/>
+          <a:ln w="12700">
+            <a:solidFill>
+              <a:srgbClr val="E3EAF5"/>
+            </a:solidFill>
+            <a:prstDash val="solid"/>
+          </a:ln>
+        </p:spPr>
+      </p:sp>
+      <p:sp>
+        <p:nvSpPr>
+          <p:cNvPr id="24" name="Text 22"/>
+          <p:cNvSpPr txBox="1"/>
+          <p:nvPr/>
+        </p:nvSpPr>
+        <p:spPr>
+          <a:xfrm>
+            <a:off x="10801350" y="2862072"/>
+            <a:ext cx="548640" cy="237744"/>
+          </a:xfrm>
+          <a:prstGeom prst="rect">
+            <a:avLst/>
+          </a:prstGeom>
+          <a:noFill/>
+          <a:ln/>
+        </p:spPr>
+        <p:txBody>
+          <a:bodyPr wrap="square" lIns="0" tIns="0" rIns="0" bIns="0" rtlCol="0" anchor="ctr"/>
+          <a:lstStyle/>
+          <a:p>
+            <a:pPr algn="ctr" indent="0" marL="0">
+              <a:buNone/>
+            </a:pPr>
+            <a:r>
+              <a:rPr lang="en-US" sz="1000" dirty="0">
+                <a:solidFill>
+                  <a:srgbClr val="5B6B8A"/>
+                </a:solidFill>
+                <a:latin typeface="Calibri" pitchFamily="34" charset="0"/>
+                <a:ea typeface="Calibri" pitchFamily="34" charset="-122"/>
+                <a:cs typeface="Calibri" pitchFamily="34" charset="-120"/>
+              </a:rPr>
+              <a:t>W16</a:t>
+            </a:r>
+            <a:endParaRPr lang="en-US" sz="1000" dirty="0"/>
+          </a:p>
+        </p:txBody>
+      </p:sp>
+      <p:sp>
+        <p:nvSpPr>
+          <p:cNvPr id="25" name="Text 23"/>
+          <p:cNvSpPr txBox="1"/>
+          <p:nvPr/>
+        </p:nvSpPr>
+        <p:spPr>
+          <a:xfrm>
+            <a:off x="502920" y="3364992"/>
+            <a:ext cx="1005840" cy="274320"/>
+          </a:xfrm>
+          <a:prstGeom prst="rect">
+            <a:avLst/>
+          </a:prstGeom>
+          <a:noFill/>
+          <a:ln/>
+        </p:spPr>
+        <p:txBody>
+          <a:bodyPr wrap="square" lIns="0" tIns="0" rIns="0" bIns="0" rtlCol="0" anchor="ctr"/>
+          <a:lstStyle/>
+          <a:p>
+            <a:pPr indent="0" marL="0">
+              <a:buNone/>
+            </a:pPr>
+            <a:r>
+              <a:rPr lang="en-US" sz="1200" b="1" dirty="0">
+                <a:solidFill>
+                  <a:srgbClr val="1199BD"/>
+                </a:solidFill>
+                <a:latin typeface="Calibri" pitchFamily="34" charset="0"/>
+                <a:ea typeface="Calibri" pitchFamily="34" charset="-122"/>
+                <a:cs typeface="Calibri" pitchFamily="34" charset="-120"/>
+              </a:rPr>
+              <a:t>Deo</a:t>
+            </a:r>
+            <a:endParaRPr lang="en-US" sz="1200" dirty="0"/>
+          </a:p>
+        </p:txBody>
+      </p:sp>
+      <p:sp>
+        <p:nvSpPr>
+          <p:cNvPr id="26" name="Shape 24"/>
+          <p:cNvSpPr/>
+          <p:nvPr/>
+        </p:nvSpPr>
+        <p:spPr>
+          <a:xfrm>
+            <a:off x="2228850" y="3337560"/>
+            <a:ext cx="3735324" cy="310896"/>
+          </a:xfrm>
+          <a:prstGeom prst="roundRect">
+            <a:avLst>
+              <a:gd name="adj" fmla="val 17647"/>
+            </a:avLst>
+          </a:prstGeom>
+          <a:solidFill>
+            <a:srgbClr val="1199BD"/>
+          </a:solidFill>
+          <a:ln/>
+        </p:spPr>
+      </p:sp>
+      <p:sp>
+        <p:nvSpPr>
+          <p:cNvPr id="27" name="Text 25"/>
+          <p:cNvSpPr txBox="1"/>
+          <p:nvPr/>
+        </p:nvSpPr>
+        <p:spPr>
+          <a:xfrm>
+            <a:off x="2283714" y="3374136"/>
+            <a:ext cx="3643884" cy="237744"/>
+          </a:xfrm>
+          <a:prstGeom prst="rect">
+            <a:avLst/>
+          </a:prstGeom>
+          <a:noFill/>
+          <a:ln/>
+        </p:spPr>
+        <p:txBody>
+          <a:bodyPr wrap="square" lIns="0" tIns="0" rIns="0" bIns="0" rtlCol="0" anchor="ctr"/>
+          <a:lstStyle/>
+          <a:p>
+            <a:pPr indent="0" marL="0">
+              <a:buNone/>
+            </a:pPr>
+            <a:r>
+              <a:rPr lang="en-US" sz="950" dirty="0">
+                <a:solidFill>
+                  <a:srgbClr val="FFFFFF"/>
+                </a:solidFill>
+                <a:latin typeface="Calibri" pitchFamily="34" charset="0"/>
+                <a:ea typeface="Calibri" pitchFamily="34" charset="-122"/>
+                <a:cs typeface="Calibri" pitchFamily="34" charset="-120"/>
+              </a:rPr>
+              <a:t>protocol core</a:t>
+            </a:r>
+            <a:endParaRPr lang="en-US" sz="950" dirty="0"/>
+          </a:p>
+        </p:txBody>
+      </p:sp>
+      <p:sp>
+        <p:nvSpPr>
+          <p:cNvPr id="28" name="Shape 26"/>
+          <p:cNvSpPr/>
+          <p:nvPr/>
+        </p:nvSpPr>
+        <p:spPr>
+          <a:xfrm>
+            <a:off x="6000750" y="3337560"/>
+            <a:ext cx="1849374" cy="310896"/>
+          </a:xfrm>
+          <a:prstGeom prst="roundRect">
+            <a:avLst>
+              <a:gd name="adj" fmla="val 17647"/>
+            </a:avLst>
+          </a:prstGeom>
+          <a:solidFill>
+            <a:srgbClr val="1199BD"/>
+          </a:solidFill>
+          <a:ln/>
+        </p:spPr>
+      </p:sp>
+      <p:sp>
+        <p:nvSpPr>
+          <p:cNvPr id="29" name="Text 27"/>
+          <p:cNvSpPr txBox="1"/>
+          <p:nvPr/>
+        </p:nvSpPr>
+        <p:spPr>
+          <a:xfrm>
+            <a:off x="6055614" y="3374136"/>
+            <a:ext cx="1757934" cy="237744"/>
+          </a:xfrm>
+          <a:prstGeom prst="rect">
+            <a:avLst/>
+          </a:prstGeom>
+          <a:noFill/>
+          <a:ln/>
+        </p:spPr>
+        <p:txBody>
+          <a:bodyPr wrap="square" lIns="0" tIns="0" rIns="0" bIns="0" rtlCol="0" anchor="ctr"/>
+          <a:lstStyle/>
+          <a:p>
+            <a:pPr indent="0" marL="0">
+              <a:buNone/>
+            </a:pPr>
+            <a:r>
+              <a:rPr lang="en-US" sz="950" dirty="0">
+                <a:solidFill>
+                  <a:srgbClr val="FFFFFF"/>
+                </a:solidFill>
+                <a:latin typeface="Calibri" pitchFamily="34" charset="0"/>
+                <a:ea typeface="Calibri" pitchFamily="34" charset="-122"/>
+                <a:cs typeface="Calibri" pitchFamily="34" charset="-120"/>
+              </a:rPr>
+              <a:t>hardening</a:t>
+            </a:r>
+            <a:endParaRPr lang="en-US" sz="950" dirty="0"/>
+          </a:p>
+        </p:txBody>
+      </p:sp>
+      <p:sp>
+        <p:nvSpPr>
+          <p:cNvPr id="30" name="Text 28"/>
+          <p:cNvSpPr txBox="1"/>
+          <p:nvPr/>
+        </p:nvSpPr>
+        <p:spPr>
+          <a:xfrm>
+            <a:off x="502920" y="3931920"/>
+            <a:ext cx="1005840" cy="274320"/>
+          </a:xfrm>
+          <a:prstGeom prst="rect">
+            <a:avLst/>
+          </a:prstGeom>
+          <a:noFill/>
+          <a:ln/>
+        </p:spPr>
+        <p:txBody>
+          <a:bodyPr wrap="square" lIns="0" tIns="0" rIns="0" bIns="0" rtlCol="0" anchor="ctr"/>
+          <a:lstStyle/>
+          <a:p>
+            <a:pPr indent="0" marL="0">
+              <a:buNone/>
+            </a:pPr>
+            <a:r>
+              <a:rPr lang="en-US" sz="1200" b="1" dirty="0">
+                <a:solidFill>
+                  <a:srgbClr val="E58E1A"/>
+                </a:solidFill>
+                <a:latin typeface="Calibri" pitchFamily="34" charset="0"/>
+                <a:ea typeface="Calibri" pitchFamily="34" charset="-122"/>
+                <a:cs typeface="Calibri" pitchFamily="34" charset="-120"/>
+              </a:rPr>
+              <a:t>Victor</a:t>
+            </a:r>
+            <a:endParaRPr lang="en-US" sz="1200" dirty="0"/>
+          </a:p>
+        </p:txBody>
+      </p:sp>
+      <p:sp>
+        <p:nvSpPr>
+          <p:cNvPr id="31" name="Shape 29"/>
+          <p:cNvSpPr/>
+          <p:nvPr/>
+        </p:nvSpPr>
+        <p:spPr>
+          <a:xfrm>
+            <a:off x="1600200" y="3904488"/>
+            <a:ext cx="3106674" cy="310896"/>
+          </a:xfrm>
+          <a:prstGeom prst="roundRect">
+            <a:avLst>
+              <a:gd name="adj" fmla="val 17647"/>
+            </a:avLst>
+          </a:prstGeom>
+          <a:solidFill>
+            <a:srgbClr val="E58E1A"/>
+          </a:solidFill>
+          <a:ln/>
+        </p:spPr>
+      </p:sp>
+      <p:sp>
+        <p:nvSpPr>
+          <p:cNvPr id="32" name="Text 30"/>
+          <p:cNvSpPr txBox="1"/>
+          <p:nvPr/>
+        </p:nvSpPr>
+        <p:spPr>
+          <a:xfrm>
+            <a:off x="1655064" y="3941064"/>
+            <a:ext cx="3015234" cy="237744"/>
+          </a:xfrm>
+          <a:prstGeom prst="rect">
+            <a:avLst/>
+          </a:prstGeom>
+          <a:noFill/>
+          <a:ln/>
+        </p:spPr>
+        <p:txBody>
+          <a:bodyPr wrap="square" lIns="0" tIns="0" rIns="0" bIns="0" rtlCol="0" anchor="ctr"/>
+          <a:lstStyle/>
+          <a:p>
+            <a:pPr indent="0" marL="0">
+              <a:buNone/>
+            </a:pPr>
+            <a:r>
+              <a:rPr lang="en-US" sz="950" dirty="0">
+                <a:solidFill>
+                  <a:srgbClr val="FFFFFF"/>
+                </a:solidFill>
+                <a:latin typeface="Calibri" pitchFamily="34" charset="0"/>
+                <a:ea typeface="Calibri" pitchFamily="34" charset="-122"/>
+                <a:cs typeface="Calibri" pitchFamily="34" charset="-120"/>
+              </a:rPr>
+              <a:t>bring-up + antennas</a:t>
+            </a:r>
+            <a:endParaRPr lang="en-US" sz="950" dirty="0"/>
+          </a:p>
+        </p:txBody>
+      </p:sp>
+      <p:sp>
+        <p:nvSpPr>
+          <p:cNvPr id="33" name="Shape 31"/>
+          <p:cNvSpPr/>
+          <p:nvPr/>
+        </p:nvSpPr>
+        <p:spPr>
+          <a:xfrm>
+            <a:off x="6000750" y="3904488"/>
+            <a:ext cx="1220724" cy="310896"/>
+          </a:xfrm>
+          <a:prstGeom prst="roundRect">
+            <a:avLst>
+              <a:gd name="adj" fmla="val 17647"/>
+            </a:avLst>
+          </a:prstGeom>
+          <a:solidFill>
+            <a:srgbClr val="E58E1A"/>
+          </a:solidFill>
+          <a:ln/>
+        </p:spPr>
+      </p:sp>
+      <p:sp>
+        <p:nvSpPr>
+          <p:cNvPr id="34" name="Text 32"/>
+          <p:cNvSpPr txBox="1"/>
+          <p:nvPr/>
+        </p:nvSpPr>
+        <p:spPr>
+          <a:xfrm>
+            <a:off x="6055614" y="3941064"/>
+            <a:ext cx="1129284" cy="237744"/>
+          </a:xfrm>
+          <a:prstGeom prst="rect">
+            <a:avLst/>
+          </a:prstGeom>
+          <a:noFill/>
+          <a:ln/>
+        </p:spPr>
+        <p:txBody>
+          <a:bodyPr wrap="square" lIns="0" tIns="0" rIns="0" bIns="0" rtlCol="0" anchor="ctr"/>
+          <a:lstStyle/>
+          <a:p>
+            <a:pPr indent="0" marL="0">
+              <a:buNone/>
+            </a:pPr>
+            <a:r>
+              <a:rPr lang="en-US" sz="950" dirty="0">
+                <a:solidFill>
+                  <a:srgbClr val="FFFFFF"/>
+                </a:solidFill>
+                <a:latin typeface="Calibri" pitchFamily="34" charset="0"/>
+                <a:ea typeface="Calibri" pitchFamily="34" charset="-122"/>
+                <a:cs typeface="Calibri" pitchFamily="34" charset="-120"/>
+              </a:rPr>
+              <a:t>range tests</a:t>
+            </a:r>
+            <a:endParaRPr lang="en-US" sz="950" dirty="0"/>
+          </a:p>
+        </p:txBody>
+      </p:sp>
+      <p:sp>
+        <p:nvSpPr>
+          <p:cNvPr id="35" name="Shape 33"/>
+          <p:cNvSpPr/>
+          <p:nvPr/>
+        </p:nvSpPr>
+        <p:spPr>
+          <a:xfrm>
+            <a:off x="8515350" y="3904488"/>
+            <a:ext cx="1220724" cy="310896"/>
+          </a:xfrm>
+          <a:prstGeom prst="roundRect">
+            <a:avLst>
+              <a:gd name="adj" fmla="val 17647"/>
+            </a:avLst>
+          </a:prstGeom>
+          <a:solidFill>
+            <a:srgbClr val="E58E1A"/>
+          </a:solidFill>
+          <a:ln/>
+        </p:spPr>
+      </p:sp>
+      <p:sp>
+        <p:nvSpPr>
+          <p:cNvPr id="36" name="Text 34"/>
+          <p:cNvSpPr txBox="1"/>
+          <p:nvPr/>
+        </p:nvSpPr>
+        <p:spPr>
+          <a:xfrm>
+            <a:off x="8570214" y="3941064"/>
+            <a:ext cx="1129284" cy="237744"/>
+          </a:xfrm>
+          <a:prstGeom prst="rect">
+            <a:avLst/>
+          </a:prstGeom>
+          <a:noFill/>
+          <a:ln/>
+        </p:spPr>
+        <p:txBody>
+          <a:bodyPr wrap="square" lIns="0" tIns="0" rIns="0" bIns="0" rtlCol="0" anchor="ctr"/>
+          <a:lstStyle/>
+          <a:p>
+            <a:pPr indent="0" marL="0">
+              <a:buNone/>
+            </a:pPr>
+            <a:r>
+              <a:rPr lang="en-US" sz="950" dirty="0">
+                <a:solidFill>
+                  <a:srgbClr val="FFFFFF"/>
+                </a:solidFill>
+                <a:latin typeface="Calibri" pitchFamily="34" charset="0"/>
+                <a:ea typeface="Calibri" pitchFamily="34" charset="-122"/>
+                <a:cs typeface="Calibri" pitchFamily="34" charset="-120"/>
+              </a:rPr>
+              <a:t>final char.</a:t>
+            </a:r>
+            <a:endParaRPr lang="en-US" sz="950" dirty="0"/>
+          </a:p>
+        </p:txBody>
+      </p:sp>
+      <p:sp>
+        <p:nvSpPr>
+          <p:cNvPr id="37" name="Text 35"/>
+          <p:cNvSpPr txBox="1"/>
+          <p:nvPr/>
+        </p:nvSpPr>
+        <p:spPr>
+          <a:xfrm>
+            <a:off x="502920" y="4498848"/>
+            <a:ext cx="1005840" cy="274320"/>
+          </a:xfrm>
+          <a:prstGeom prst="rect">
+            <a:avLst/>
+          </a:prstGeom>
+          <a:noFill/>
+          <a:ln/>
+        </p:spPr>
+        <p:txBody>
+          <a:bodyPr wrap="square" lIns="0" tIns="0" rIns="0" bIns="0" rtlCol="0" anchor="ctr"/>
+          <a:lstStyle/>
+          <a:p>
+            <a:pPr indent="0" marL="0">
+              <a:buNone/>
+            </a:pPr>
+            <a:r>
+              <a:rPr lang="en-US" sz="1200" b="1" dirty="0">
+                <a:solidFill>
+                  <a:srgbClr val="6D4BDB"/>
+                </a:solidFill>
+                <a:latin typeface="Calibri" pitchFamily="34" charset="0"/>
+                <a:ea typeface="Calibri" pitchFamily="34" charset="-122"/>
+                <a:cs typeface="Calibri" pitchFamily="34" charset="-120"/>
+              </a:rPr>
+              <a:t>Josiah</a:t>
+            </a:r>
+            <a:endParaRPr lang="en-US" sz="1200" dirty="0"/>
+          </a:p>
+        </p:txBody>
+      </p:sp>
+      <p:sp>
+        <p:nvSpPr>
+          <p:cNvPr id="38" name="Shape 36"/>
+          <p:cNvSpPr/>
+          <p:nvPr/>
+        </p:nvSpPr>
+        <p:spPr>
+          <a:xfrm>
+            <a:off x="1600200" y="4471416"/>
+            <a:ext cx="4363974" cy="310896"/>
+          </a:xfrm>
+          <a:prstGeom prst="roundRect">
+            <a:avLst>
+              <a:gd name="adj" fmla="val 17647"/>
+            </a:avLst>
+          </a:prstGeom>
+          <a:solidFill>
+            <a:srgbClr val="6D4BDB"/>
+          </a:solidFill>
+          <a:ln/>
+        </p:spPr>
+      </p:sp>
+      <p:sp>
+        <p:nvSpPr>
+          <p:cNvPr id="39" name="Text 37"/>
+          <p:cNvSpPr txBox="1"/>
+          <p:nvPr/>
+        </p:nvSpPr>
+        <p:spPr>
+          <a:xfrm>
+            <a:off x="1655064" y="4507992"/>
+            <a:ext cx="4272534" cy="237744"/>
+          </a:xfrm>
+          <a:prstGeom prst="rect">
+            <a:avLst/>
+          </a:prstGeom>
+          <a:noFill/>
+          <a:ln/>
+        </p:spPr>
+        <p:txBody>
+          <a:bodyPr wrap="square" lIns="0" tIns="0" rIns="0" bIns="0" rtlCol="0" anchor="ctr"/>
+          <a:lstStyle/>
+          <a:p>
+            <a:pPr indent="0" marL="0">
+              <a:buNone/>
+            </a:pPr>
+            <a:r>
+              <a:rPr lang="en-US" sz="950" dirty="0">
+                <a:solidFill>
+                  <a:srgbClr val="FFFFFF"/>
+                </a:solidFill>
+                <a:latin typeface="Calibri" pitchFamily="34" charset="0"/>
+                <a:ea typeface="Calibri" pitchFamily="34" charset="-122"/>
+                <a:cs typeface="Calibri" pitchFamily="34" charset="-120"/>
+              </a:rPr>
+              <a:t>display + nav + arrow UI</a:t>
+            </a:r>
+            <a:endParaRPr lang="en-US" sz="950" dirty="0"/>
+          </a:p>
+        </p:txBody>
+      </p:sp>
+      <p:sp>
+        <p:nvSpPr>
+          <p:cNvPr id="40" name="Shape 38"/>
+          <p:cNvSpPr/>
+          <p:nvPr/>
+        </p:nvSpPr>
+        <p:spPr>
+          <a:xfrm>
+            <a:off x="7258050" y="4471416"/>
+            <a:ext cx="1220724" cy="310896"/>
+          </a:xfrm>
+          <a:prstGeom prst="roundRect">
+            <a:avLst>
+              <a:gd name="adj" fmla="val 17647"/>
+            </a:avLst>
+          </a:prstGeom>
+          <a:solidFill>
+            <a:srgbClr val="6D4BDB"/>
+          </a:solidFill>
+          <a:ln/>
+        </p:spPr>
+      </p:sp>
+      <p:sp>
+        <p:nvSpPr>
+          <p:cNvPr id="41" name="Text 39"/>
+          <p:cNvSpPr txBox="1"/>
+          <p:nvPr/>
+        </p:nvSpPr>
+        <p:spPr>
+          <a:xfrm>
+            <a:off x="7312914" y="4507992"/>
+            <a:ext cx="1129284" cy="237744"/>
+          </a:xfrm>
+          <a:prstGeom prst="rect">
+            <a:avLst/>
+          </a:prstGeom>
+          <a:noFill/>
+          <a:ln/>
+        </p:spPr>
+        <p:txBody>
+          <a:bodyPr wrap="square" lIns="0" tIns="0" rIns="0" bIns="0" rtlCol="0" anchor="ctr"/>
+          <a:lstStyle/>
+          <a:p>
+            <a:pPr indent="0" marL="0">
+              <a:buNone/>
+            </a:pPr>
+            <a:r>
+              <a:rPr lang="en-US" sz="950" dirty="0">
+                <a:solidFill>
+                  <a:srgbClr val="FFFFFF"/>
+                </a:solidFill>
+                <a:latin typeface="Calibri" pitchFamily="34" charset="0"/>
+                <a:ea typeface="Calibri" pitchFamily="34" charset="-122"/>
+                <a:cs typeface="Calibri" pitchFamily="34" charset="-120"/>
+              </a:rPr>
+              <a:t>polish</a:t>
+            </a:r>
+            <a:endParaRPr lang="en-US" sz="950" dirty="0"/>
+          </a:p>
+        </p:txBody>
+      </p:sp>
+      <p:sp>
+        <p:nvSpPr>
+          <p:cNvPr id="42" name="Text 40"/>
+          <p:cNvSpPr txBox="1"/>
+          <p:nvPr/>
+        </p:nvSpPr>
+        <p:spPr>
+          <a:xfrm>
+            <a:off x="502920" y="5065776"/>
+            <a:ext cx="1005840" cy="274320"/>
+          </a:xfrm>
+          <a:prstGeom prst="rect">
+            <a:avLst/>
+          </a:prstGeom>
+          <a:noFill/>
+          <a:ln/>
+        </p:spPr>
+        <p:txBody>
+          <a:bodyPr wrap="square" lIns="0" tIns="0" rIns="0" bIns="0" rtlCol="0" anchor="ctr"/>
+          <a:lstStyle/>
+          <a:p>
+            <a:pPr indent="0" marL="0">
+              <a:buNone/>
+            </a:pPr>
+            <a:r>
+              <a:rPr lang="en-US" sz="1200" b="1" dirty="0">
+                <a:solidFill>
+                  <a:srgbClr val="D9488C"/>
+                </a:solidFill>
+                <a:latin typeface="Calibri" pitchFamily="34" charset="0"/>
+                <a:ea typeface="Calibri" pitchFamily="34" charset="-122"/>
+                <a:cs typeface="Calibri" pitchFamily="34" charset="-120"/>
+              </a:rPr>
+              <a:t>Cannon</a:t>
+            </a:r>
+            <a:endParaRPr lang="en-US" sz="1200" dirty="0"/>
+          </a:p>
+        </p:txBody>
+      </p:sp>
+      <p:sp>
+        <p:nvSpPr>
+          <p:cNvPr id="43" name="Shape 41"/>
+          <p:cNvSpPr/>
+          <p:nvPr/>
+        </p:nvSpPr>
+        <p:spPr>
+          <a:xfrm>
+            <a:off x="1600200" y="5038344"/>
+            <a:ext cx="3106674" cy="310896"/>
+          </a:xfrm>
+          <a:prstGeom prst="roundRect">
+            <a:avLst>
+              <a:gd name="adj" fmla="val 17647"/>
+            </a:avLst>
+          </a:prstGeom>
+          <a:solidFill>
+            <a:srgbClr val="D9488C"/>
+          </a:solidFill>
+          <a:ln/>
+        </p:spPr>
+      </p:sp>
+      <p:sp>
+        <p:nvSpPr>
+          <p:cNvPr id="44" name="Text 42"/>
+          <p:cNvSpPr txBox="1"/>
+          <p:nvPr/>
+        </p:nvSpPr>
+        <p:spPr>
+          <a:xfrm>
+            <a:off x="1655064" y="5074920"/>
+            <a:ext cx="3015234" cy="237744"/>
+          </a:xfrm>
+          <a:prstGeom prst="rect">
+            <a:avLst/>
+          </a:prstGeom>
+          <a:noFill/>
+          <a:ln/>
+        </p:spPr>
+        <p:txBody>
+          <a:bodyPr wrap="square" lIns="0" tIns="0" rIns="0" bIns="0" rtlCol="0" anchor="ctr"/>
+          <a:lstStyle/>
+          <a:p>
+            <a:pPr indent="0" marL="0">
+              <a:buNone/>
+            </a:pPr>
+            <a:r>
+              <a:rPr lang="en-US" sz="950" dirty="0">
+                <a:solidFill>
+                  <a:srgbClr val="FFFFFF"/>
+                </a:solidFill>
+                <a:latin typeface="Calibri" pitchFamily="34" charset="0"/>
+                <a:ea typeface="Calibri" pitchFamily="34" charset="-122"/>
+                <a:cs typeface="Calibri" pitchFamily="34" charset="-120"/>
+              </a:rPr>
+              <a:t>bench</a:t>
+            </a:r>
+            <a:endParaRPr lang="en-US" sz="950" dirty="0"/>
+          </a:p>
+        </p:txBody>
+      </p:sp>
+      <p:sp>
+        <p:nvSpPr>
+          <p:cNvPr id="45" name="Shape 43"/>
+          <p:cNvSpPr/>
+          <p:nvPr/>
+        </p:nvSpPr>
+        <p:spPr>
+          <a:xfrm>
+            <a:off x="4743450" y="5038344"/>
+            <a:ext cx="2478024" cy="310896"/>
+          </a:xfrm>
+          <a:prstGeom prst="roundRect">
+            <a:avLst>
+              <a:gd name="adj" fmla="val 17647"/>
+            </a:avLst>
+          </a:prstGeom>
+          <a:solidFill>
+            <a:srgbClr val="D9488C"/>
+          </a:solidFill>
+          <a:ln/>
+        </p:spPr>
+      </p:sp>
+      <p:sp>
+        <p:nvSpPr>
+          <p:cNvPr id="46" name="Text 44"/>
+          <p:cNvSpPr txBox="1"/>
+          <p:nvPr/>
+        </p:nvSpPr>
+        <p:spPr>
+          <a:xfrm>
+            <a:off x="4798314" y="5074920"/>
+            <a:ext cx="2386584" cy="237744"/>
+          </a:xfrm>
+          <a:prstGeom prst="rect">
+            <a:avLst/>
+          </a:prstGeom>
+          <a:noFill/>
+          <a:ln/>
+        </p:spPr>
+        <p:txBody>
+          <a:bodyPr wrap="square" lIns="0" tIns="0" rIns="0" bIns="0" rtlCol="0" anchor="ctr"/>
+          <a:lstStyle/>
+          <a:p>
+            <a:pPr indent="0" marL="0">
+              <a:buNone/>
+            </a:pPr>
+            <a:r>
+              <a:rPr lang="en-US" sz="950" dirty="0">
+                <a:solidFill>
+                  <a:srgbClr val="FFFFFF"/>
+                </a:solidFill>
+                <a:latin typeface="Calibri" pitchFamily="34" charset="0"/>
+                <a:ea typeface="Calibri" pitchFamily="34" charset="-122"/>
+                <a:cs typeface="Calibri" pitchFamily="34" charset="-120"/>
+              </a:rPr>
+              <a:t>integration + drives</a:t>
+            </a:r>
+            <a:endParaRPr lang="en-US" sz="950" dirty="0"/>
+          </a:p>
+        </p:txBody>
+      </p:sp>
+      <p:sp>
+        <p:nvSpPr>
+          <p:cNvPr id="47" name="Shape 45"/>
+          <p:cNvSpPr/>
+          <p:nvPr/>
+        </p:nvSpPr>
+        <p:spPr>
+          <a:xfrm>
+            <a:off x="7258050" y="5038344"/>
+            <a:ext cx="1849374" cy="310896"/>
+          </a:xfrm>
+          <a:prstGeom prst="roundRect">
+            <a:avLst>
+              <a:gd name="adj" fmla="val 17647"/>
+            </a:avLst>
+          </a:prstGeom>
+          <a:solidFill>
+            <a:srgbClr val="D9488C"/>
+          </a:solidFill>
+          <a:ln/>
+        </p:spPr>
+      </p:sp>
+      <p:sp>
+        <p:nvSpPr>
+          <p:cNvPr id="48" name="Text 46"/>
+          <p:cNvSpPr txBox="1"/>
+          <p:nvPr/>
+        </p:nvSpPr>
+        <p:spPr>
+          <a:xfrm>
+            <a:off x="7312914" y="5074920"/>
+            <a:ext cx="1757934" cy="237744"/>
+          </a:xfrm>
+          <a:prstGeom prst="rect">
+            <a:avLst/>
+          </a:prstGeom>
+          <a:noFill/>
+          <a:ln/>
+        </p:spPr>
+        <p:txBody>
+          <a:bodyPr wrap="square" lIns="0" tIns="0" rIns="0" bIns="0" rtlCol="0" anchor="ctr"/>
+          <a:lstStyle/>
+          <a:p>
+            <a:pPr indent="0" marL="0">
+              <a:buNone/>
+            </a:pPr>
+            <a:r>
+              <a:rPr lang="en-US" sz="950" dirty="0">
+                <a:solidFill>
+                  <a:srgbClr val="FFFFFF"/>
+                </a:solidFill>
+                <a:latin typeface="Calibri" pitchFamily="34" charset="0"/>
+                <a:ea typeface="Calibri" pitchFamily="34" charset="-122"/>
+                <a:cs typeface="Calibri" pitchFamily="34" charset="-120"/>
+              </a:rPr>
+              <a:t>install</a:t>
+            </a:r>
+            <a:endParaRPr lang="en-US" sz="950" dirty="0"/>
+          </a:p>
+        </p:txBody>
+      </p:sp>
+      <p:sp>
+        <p:nvSpPr>
+          <p:cNvPr id="49" name="Shape 47"/>
+          <p:cNvSpPr/>
+          <p:nvPr/>
+        </p:nvSpPr>
+        <p:spPr>
+          <a:xfrm>
+            <a:off x="9772650" y="5038344"/>
+            <a:ext cx="1849374" cy="310896"/>
+          </a:xfrm>
+          <a:prstGeom prst="roundRect">
+            <a:avLst>
+              <a:gd name="adj" fmla="val 17647"/>
+            </a:avLst>
+          </a:prstGeom>
+          <a:solidFill>
+            <a:srgbClr val="D9488C"/>
+          </a:solidFill>
+          <a:ln/>
+        </p:spPr>
+      </p:sp>
+      <p:sp>
+        <p:nvSpPr>
+          <p:cNvPr id="50" name="Text 48"/>
+          <p:cNvSpPr txBox="1"/>
+          <p:nvPr/>
+        </p:nvSpPr>
+        <p:spPr>
+          <a:xfrm>
+            <a:off x="9827514" y="5074920"/>
+            <a:ext cx="1757934" cy="237744"/>
+          </a:xfrm>
+          <a:prstGeom prst="rect">
+            <a:avLst/>
+          </a:prstGeom>
+          <a:noFill/>
+          <a:ln/>
+        </p:spPr>
+        <p:txBody>
+          <a:bodyPr wrap="square" lIns="0" tIns="0" rIns="0" bIns="0" rtlCol="0" anchor="ctr"/>
+          <a:lstStyle/>
+          <a:p>
+            <a:pPr indent="0" marL="0">
+              <a:buNone/>
+            </a:pPr>
+            <a:r>
+              <a:rPr lang="en-US" sz="950" dirty="0">
+                <a:solidFill>
+                  <a:srgbClr val="FFFFFF"/>
+                </a:solidFill>
+                <a:latin typeface="Calibri" pitchFamily="34" charset="0"/>
+                <a:ea typeface="Calibri" pitchFamily="34" charset="-122"/>
+                <a:cs typeface="Calibri" pitchFamily="34" charset="-120"/>
+              </a:rPr>
+              <a:t>report</a:t>
+            </a:r>
+            <a:endParaRPr lang="en-US" sz="950" dirty="0"/>
+          </a:p>
+        </p:txBody>
+      </p:sp>
+      <p:sp>
+        <p:nvSpPr>
+          <p:cNvPr id="51" name="Shape 49"/>
+          <p:cNvSpPr/>
+          <p:nvPr/>
+        </p:nvSpPr>
+        <p:spPr>
+          <a:xfrm>
+            <a:off x="4328541" y="5678424"/>
+            <a:ext cx="201168" cy="201168"/>
+          </a:xfrm>
+          <a:prstGeom prst="diamond">
+            <a:avLst/>
+          </a:prstGeom>
+          <a:solidFill>
+            <a:srgbClr val="E58E1A"/>
+          </a:solidFill>
+          <a:ln/>
+        </p:spPr>
+      </p:sp>
+      <p:sp>
+        <p:nvSpPr>
+          <p:cNvPr id="52" name="Text 50"/>
+          <p:cNvSpPr txBox="1"/>
+          <p:nvPr/>
+        </p:nvSpPr>
+        <p:spPr>
+          <a:xfrm>
+            <a:off x="3789045" y="5916168"/>
+            <a:ext cx="1280160" cy="256032"/>
+          </a:xfrm>
+          <a:prstGeom prst="rect">
+            <a:avLst/>
+          </a:prstGeom>
+          <a:noFill/>
+          <a:ln/>
+        </p:spPr>
+        <p:txBody>
+          <a:bodyPr wrap="square" lIns="0" tIns="0" rIns="0" bIns="0" rtlCol="0" anchor="ctr"/>
+          <a:lstStyle/>
+          <a:p>
+            <a:pPr algn="ctr" indent="0" marL="0">
+              <a:buNone/>
+            </a:pPr>
+            <a:r>
+              <a:rPr lang="en-US" sz="1000" b="1" dirty="0">
+                <a:solidFill>
+                  <a:srgbClr val="E58E1A"/>
+                </a:solidFill>
+                <a:latin typeface="Calibri" pitchFamily="34" charset="0"/>
+                <a:ea typeface="Calibri" pitchFamily="34" charset="-122"/>
+                <a:cs typeface="Calibri" pitchFamily="34" charset="-120"/>
+              </a:rPr>
+              <a:t>risk gate</a:t>
+            </a:r>
+            <a:endParaRPr lang="en-US" sz="1000" dirty="0"/>
+          </a:p>
+        </p:txBody>
+      </p:sp>
+      <p:sp>
+        <p:nvSpPr>
+          <p:cNvPr id="53" name="Shape 51"/>
+          <p:cNvSpPr/>
+          <p:nvPr/>
+        </p:nvSpPr>
+        <p:spPr>
+          <a:xfrm>
+            <a:off x="5585841" y="5678424"/>
+            <a:ext cx="201168" cy="201168"/>
+          </a:xfrm>
+          <a:prstGeom prst="diamond">
+            <a:avLst/>
+          </a:prstGeom>
+          <a:solidFill>
+            <a:srgbClr val="E58E1A"/>
+          </a:solidFill>
+          <a:ln/>
+        </p:spPr>
+      </p:sp>
+      <p:sp>
+        <p:nvSpPr>
+          <p:cNvPr id="54" name="Text 52"/>
+          <p:cNvSpPr txBox="1"/>
+          <p:nvPr/>
+        </p:nvSpPr>
+        <p:spPr>
+          <a:xfrm>
+            <a:off x="5046345" y="5916168"/>
+            <a:ext cx="1280160" cy="256032"/>
+          </a:xfrm>
+          <a:prstGeom prst="rect">
+            <a:avLst/>
+          </a:prstGeom>
+          <a:noFill/>
+          <a:ln/>
+        </p:spPr>
+        <p:txBody>
+          <a:bodyPr wrap="square" lIns="0" tIns="0" rIns="0" bIns="0" rtlCol="0" anchor="ctr"/>
+          <a:lstStyle/>
+          <a:p>
+            <a:pPr algn="ctr" indent="0" marL="0">
+              <a:buNone/>
+            </a:pPr>
+            <a:r>
+              <a:rPr lang="en-US" sz="1000" b="1" dirty="0">
+                <a:solidFill>
+                  <a:srgbClr val="E58E1A"/>
+                </a:solidFill>
+                <a:latin typeface="Calibri" pitchFamily="34" charset="0"/>
+                <a:ea typeface="Calibri" pitchFamily="34" charset="-122"/>
+                <a:cs typeface="Calibri" pitchFamily="34" charset="-120"/>
+              </a:rPr>
+              <a:t>bench demo</a:t>
+            </a:r>
+            <a:endParaRPr lang="en-US" sz="1000" dirty="0"/>
+          </a:p>
+        </p:txBody>
+      </p:sp>
+      <p:sp>
+        <p:nvSpPr>
+          <p:cNvPr id="55" name="Shape 53"/>
+          <p:cNvSpPr/>
+          <p:nvPr/>
+        </p:nvSpPr>
+        <p:spPr>
+          <a:xfrm>
+            <a:off x="11243691" y="5678424"/>
+            <a:ext cx="201168" cy="201168"/>
+          </a:xfrm>
+          <a:prstGeom prst="diamond">
+            <a:avLst/>
+          </a:prstGeom>
+          <a:solidFill>
+            <a:srgbClr val="E58E1A"/>
+          </a:solidFill>
+          <a:ln/>
+        </p:spPr>
+      </p:sp>
+      <p:sp>
+        <p:nvSpPr>
+          <p:cNvPr id="56" name="Text 54"/>
+          <p:cNvSpPr txBox="1"/>
+          <p:nvPr/>
+        </p:nvSpPr>
+        <p:spPr>
+          <a:xfrm>
+            <a:off x="10704195" y="5916168"/>
+            <a:ext cx="1280160" cy="256032"/>
+          </a:xfrm>
+          <a:prstGeom prst="rect">
+            <a:avLst/>
+          </a:prstGeom>
+          <a:noFill/>
+          <a:ln/>
+        </p:spPr>
+        <p:txBody>
+          <a:bodyPr wrap="square" lIns="0" tIns="0" rIns="0" bIns="0" rtlCol="0" anchor="ctr"/>
+          <a:lstStyle/>
+          <a:p>
+            <a:pPr algn="ctr" indent="0" marL="0">
+              <a:buNone/>
+            </a:pPr>
+            <a:r>
+              <a:rPr lang="en-US" sz="1000" b="1" dirty="0">
+                <a:solidFill>
+                  <a:srgbClr val="E58E1A"/>
+                </a:solidFill>
+                <a:latin typeface="Calibri" pitchFamily="34" charset="0"/>
+                <a:ea typeface="Calibri" pitchFamily="34" charset="-122"/>
+                <a:cs typeface="Calibri" pitchFamily="34" charset="-120"/>
+              </a:rPr>
+              <a:t>Demo Day</a:t>
+            </a:r>
+            <a:endParaRPr lang="en-US" sz="1000" dirty="0"/>
+          </a:p>
+        </p:txBody>
+      </p:sp>
+      <p:sp>
+        <p:nvSpPr>
+          <p:cNvPr id="57" name="Text 55"/>
+          <p:cNvSpPr txBox="1"/>
+          <p:nvPr/>
+        </p:nvSpPr>
+        <p:spPr>
+          <a:xfrm>
+            <a:off x="502920" y="6355080"/>
+            <a:ext cx="11155680" cy="365760"/>
+          </a:xfrm>
+          <a:prstGeom prst="rect">
+            <a:avLst/>
+          </a:prstGeom>
+          <a:noFill/>
+          <a:ln/>
+        </p:spPr>
+        <p:txBody>
+          <a:bodyPr wrap="square" lIns="0" tIns="0" rIns="0" bIns="0" rtlCol="0" anchor="ctr"/>
+          <a:lstStyle/>
+          <a:p>
+            <a:pPr indent="0" marL="0">
+              <a:buNone/>
+            </a:pPr>
+            <a:r>
+              <a:rPr lang="en-US" sz="1150" i="1" dirty="0">
+                <a:solidFill>
+                  <a:srgbClr val="5B6B8A"/>
+                </a:solidFill>
+                <a:latin typeface="Calibri" pitchFamily="34" charset="0"/>
+                <a:ea typeface="Calibri" pitchFamily="34" charset="-122"/>
+                <a:cs typeface="Calibri" pitchFamily="34" charset="-120"/>
+              </a:rPr>
+              <a:t>Parallelism by design: the TrackerState contract decouples all four lanes from week 2 — no lane waits on another until bench integration (W7).</a:t>
+            </a:r>
+            <a:endParaRPr lang="en-US" sz="1150" dirty="0"/>
+          </a:p>
+        </p:txBody>
+      </p:sp>
+    </p:spTree>
+  </p:cSld>
+  <p:clrMapOvr>
+    <a:masterClrMapping/>
+  </p:clrMapOvr>
+</p:sld>
+</file>
+
+<file path=ppt/slides/slide5.xml><?xml version="1.0" encoding="utf-8"?>
+<p:sld xmlns:a="http://schemas.openxmlformats.org/drawingml/2006/main" xmlns:r="http://schemas.openxmlformats.org/officeDocument/2006/relationships" xmlns:p="http://schemas.openxmlformats.org/presentationml/2006/main">
+  <p:cSld name="Slide 5">
+    <p:bg>
+      <p:bgPr>
+        <a:solidFill>
+          <a:srgbClr val="FFFFFF"/>
+        </a:solidFill>
+      </p:bgPr>
+    </p:bg>
+    <p:spTree>
+      <p:nvGrpSpPr>
+        <p:cNvPr id="1" name=""/>
+        <p:cNvGrpSpPr/>
+        <p:nvPr/>
+      </p:nvGrpSpPr>
+      <p:grpSpPr>
+        <a:xfrm>
+          <a:off x="0" y="0"/>
+          <a:ext cx="0" cy="0"/>
+          <a:chOff x="0" y="0"/>
+          <a:chExt cx="0" cy="0"/>
+        </a:xfrm>
+      </p:grpSpPr>
+      <p:sp>
+        <p:nvSpPr>
+          <p:cNvPr id="2" name="Text 0"/>
+          <p:cNvSpPr txBox="1"/>
+          <p:nvPr/>
+        </p:nvSpPr>
+        <p:spPr>
+          <a:xfrm>
+            <a:off x="502920" y="256032"/>
+            <a:ext cx="11155680" cy="685800"/>
+          </a:xfrm>
+          <a:prstGeom prst="rect">
+            <a:avLst/>
+          </a:prstGeom>
+          <a:noFill/>
+          <a:ln/>
+        </p:spPr>
+        <p:txBody>
+          <a:bodyPr wrap="square" lIns="0" tIns="0" rIns="0" bIns="0" rtlCol="0" anchor="ctr"/>
+          <a:lstStyle/>
+          <a:p>
+            <a:pPr indent="0" marL="0">
+              <a:buNone/>
+            </a:pPr>
+            <a:r>
+              <a:rPr lang="en-US" sz="3200" b="1" dirty="0">
+                <a:solidFill>
+                  <a:srgbClr val="1E2761"/>
+                </a:solidFill>
+                <a:latin typeface="Cambria" pitchFamily="34" charset="0"/>
+                <a:ea typeface="Cambria" pitchFamily="34" charset="-122"/>
+                <a:cs typeface="Cambria" pitchFamily="34" charset="-120"/>
+              </a:rPr>
+              <a:t>Weeks 1–2 · Shared Foundations</a:t>
+            </a:r>
+            <a:endParaRPr lang="en-US" sz="3200" dirty="0"/>
+          </a:p>
+        </p:txBody>
+      </p:sp>
+      <p:sp>
+        <p:nvSpPr>
+          <p:cNvPr id="3" name="Text 1"/>
+          <p:cNvSpPr txBox="1"/>
+          <p:nvPr/>
+        </p:nvSpPr>
+        <p:spPr>
+          <a:xfrm>
+            <a:off x="502920" y="1097280"/>
+            <a:ext cx="5486400" cy="365760"/>
+          </a:xfrm>
+          <a:prstGeom prst="rect">
+            <a:avLst/>
+          </a:prstGeom>
+          <a:noFill/>
+          <a:ln/>
+        </p:spPr>
+        <p:txBody>
+          <a:bodyPr wrap="square" lIns="0" tIns="0" rIns="0" bIns="0" rtlCol="0" anchor="ctr"/>
+          <a:lstStyle/>
+          <a:p>
+            <a:pPr indent="0" marL="0">
+              <a:buNone/>
+            </a:pPr>
+            <a:r>
+              <a:rPr lang="en-US" sz="1700" b="1" dirty="0">
+                <a:solidFill>
+                  <a:srgbClr val="1E2761"/>
+                </a:solidFill>
+                <a:latin typeface="Cambria" pitchFamily="34" charset="0"/>
+                <a:ea typeface="Cambria" pitchFamily="34" charset="-122"/>
+                <a:cs typeface="Cambria" pitchFamily="34" charset="-120"/>
+              </a:rPr>
+              <a:t>The interface contract (agreed W1–W2)</a:t>
+            </a:r>
+            <a:endParaRPr lang="en-US" sz="1700" dirty="0"/>
+          </a:p>
+        </p:txBody>
+      </p:sp>
+      <p:sp>
+        <p:nvSpPr>
+          <p:cNvPr id="4" name="Shape 2"/>
+          <p:cNvSpPr/>
+          <p:nvPr/>
+        </p:nvSpPr>
+        <p:spPr>
+          <a:xfrm>
+            <a:off x="502920" y="1508760"/>
+            <a:ext cx="5486400" cy="2148840"/>
+          </a:xfrm>
+          <a:prstGeom prst="roundRect">
+            <a:avLst>
+              <a:gd name="adj" fmla="val 4255"/>
+            </a:avLst>
+          </a:prstGeom>
+          <a:solidFill>
+            <a:srgbClr val="1E2761"/>
+          </a:solidFill>
+          <a:ln/>
+        </p:spPr>
+      </p:sp>
+      <p:sp>
+        <p:nvSpPr>
+          <p:cNvPr id="5" name="Text 3"/>
+          <p:cNvSpPr txBox="1"/>
+          <p:nvPr/>
+        </p:nvSpPr>
+        <p:spPr>
+          <a:xfrm>
             <a:off x="731520" y="1691640"/>
-            <a:ext cx="5120640" cy="2103120"/>
+            <a:ext cx="5120640" cy="1828800"/>
           </a:xfrm>
           <a:prstGeom prst="rect">
             <a:avLst/>
@@ -4308,7 +7758,7 @@
         </p:nvSpPr>
         <p:spPr>
           <a:xfrm>
-            <a:off x="502920" y="4069080"/>
+            <a:off x="502920" y="3794760"/>
             <a:ext cx="5486400" cy="594360"/>
           </a:xfrm>
           <a:prstGeom prst="rect">
@@ -4333,7 +7783,7 @@
                 <a:ea typeface="Calibri" pitchFamily="34" charset="-122"/>
                 <a:cs typeface="Calibri" pitchFamily="34" charset="-120"/>
               </a:rPr>
-              <a:t>One writer (protocol task) · one reader (UI task) · changed only by joint commit. Lets all four lanes build in parallel.</a:t>
+              <a:t>One writer (protocol task) · one reader (UI task) · changed only by joint commit. This is what lets all four lanes build in parallel.</a:t>
             </a:r>
             <a:endParaRPr lang="en-US" sz="1250" dirty="0"/>
           </a:p>
@@ -4380,7 +7830,7 @@
       </p:sp>
       <p:graphicFrame>
         <p:nvGraphicFramePr>
-          <p:cNvPr id="4" name="Table 0"/>
+          <p:cNvPr id="6" name="Table 0"/>
           <p:cNvGraphicFramePr>
             <a:graphicFrameLocks noGrp="1"/>
           </p:cNvGraphicFramePr>
@@ -5106,7 +8556,7 @@
         </p:nvSpPr>
         <p:spPr>
           <a:xfrm>
-            <a:off x="502920" y="4892040"/>
+            <a:off x="502920" y="4754880"/>
             <a:ext cx="4572000" cy="365760"/>
           </a:xfrm>
           <a:prstGeom prst="rect">
@@ -5145,7 +8595,7 @@
         </p:nvSpPr>
         <p:spPr>
           <a:xfrm>
-            <a:off x="502920" y="5349240"/>
+            <a:off x="502920" y="5257800"/>
             <a:ext cx="256032" cy="256032"/>
           </a:xfrm>
           <a:prstGeom prst="ellipse">
@@ -5165,7 +8615,7 @@
         </p:nvSpPr>
         <p:spPr>
           <a:xfrm>
-            <a:off x="886968" y="5303520"/>
+            <a:off x="886968" y="5212080"/>
             <a:ext cx="5212080" cy="384048"/>
           </a:xfrm>
           <a:prstGeom prst="rect">
@@ -5204,7 +8654,7 @@
         </p:nvSpPr>
         <p:spPr>
           <a:xfrm>
-            <a:off x="6217920" y="5349240"/>
+            <a:off x="6217920" y="5257800"/>
             <a:ext cx="256032" cy="256032"/>
           </a:xfrm>
           <a:prstGeom prst="ellipse">
@@ -5224,7 +8674,7 @@
         </p:nvSpPr>
         <p:spPr>
           <a:xfrm>
-            <a:off x="6601968" y="5303520"/>
+            <a:off x="6601968" y="5212080"/>
             <a:ext cx="5212080" cy="384048"/>
           </a:xfrm>
           <a:prstGeom prst="rect">
@@ -5263,7 +8713,7 @@
         </p:nvSpPr>
         <p:spPr>
           <a:xfrm>
-            <a:off x="502920" y="5916168"/>
+            <a:off x="502920" y="5824728"/>
             <a:ext cx="256032" cy="256032"/>
           </a:xfrm>
           <a:prstGeom prst="ellipse">
@@ -5283,7 +8733,7 @@
         </p:nvSpPr>
         <p:spPr>
           <a:xfrm>
-            <a:off x="886968" y="5870448"/>
+            <a:off x="886968" y="5779008"/>
             <a:ext cx="5212080" cy="384048"/>
           </a:xfrm>
           <a:prstGeom prst="rect">
@@ -5322,7 +8772,7 @@
         </p:nvSpPr>
         <p:spPr>
           <a:xfrm>
-            <a:off x="6217920" y="5916168"/>
+            <a:off x="6217920" y="5824728"/>
             <a:ext cx="256032" cy="256032"/>
           </a:xfrm>
           <a:prstGeom prst="ellipse">
@@ -5342,7 +8792,7 @@
         </p:nvSpPr>
         <p:spPr>
           <a:xfrm>
-            <a:off x="6601968" y="5870448"/>
+            <a:off x="6601968" y="5779008"/>
             <a:ext cx="5212080" cy="384048"/>
           </a:xfrm>
           <a:prstGeom prst="rect">
@@ -5381,9 +8831,9 @@
 </p:sld>
 </file>
 
-<file path=ppt/slides/slide4.xml><?xml version="1.0" encoding="utf-8"?>
+<file path=ppt/slides/slide6.xml><?xml version="1.0" encoding="utf-8"?>
 <p:sld xmlns:a="http://schemas.openxmlformats.org/drawingml/2006/main" xmlns:r="http://schemas.openxmlformats.org/officeDocument/2006/relationships" xmlns:p="http://schemas.openxmlformats.org/presentationml/2006/main">
-  <p:cSld name="Slide 4">
+  <p:cSld name="Slide 6">
     <p:bg>
       <p:bgPr>
         <a:solidFill>
@@ -5488,7 +8938,7 @@
             </a:avLst>
           </a:prstGeom>
           <a:solidFill>
-            <a:srgbClr val="1E2761"/>
+            <a:srgbClr val="E58E1A"/>
           </a:solidFill>
           <a:ln/>
         </p:spPr>
@@ -5700,7 +9150,7 @@
             </a:avLst>
           </a:prstGeom>
           <a:solidFill>
-            <a:srgbClr val="1E2761"/>
+            <a:srgbClr val="6D4BDB"/>
           </a:solidFill>
           <a:ln/>
         </p:spPr>
@@ -5912,7 +9362,7 @@
             </a:avLst>
           </a:prstGeom>
           <a:solidFill>
-            <a:srgbClr val="1E2761"/>
+            <a:srgbClr val="1199BD"/>
           </a:solidFill>
           <a:ln/>
         </p:spPr>
@@ -6124,7 +9574,7 @@
             </a:avLst>
           </a:prstGeom>
           <a:solidFill>
-            <a:srgbClr val="1E2761"/>
+            <a:srgbClr val="D9488C"/>
           </a:solidFill>
           <a:ln/>
         </p:spPr>
@@ -6300,9 +9750,9 @@
 </p:sld>
 </file>
 
-<file path=ppt/slides/slide5.xml><?xml version="1.0" encoding="utf-8"?>
+<file path=ppt/slides/slide7.xml><?xml version="1.0" encoding="utf-8"?>
 <p:sld xmlns:a="http://schemas.openxmlformats.org/drawingml/2006/main" xmlns:r="http://schemas.openxmlformats.org/officeDocument/2006/relationships" xmlns:p="http://schemas.openxmlformats.org/presentationml/2006/main">
-  <p:cSld name="Slide 5">
+  <p:cSld name="Slide 7">
     <p:bg>
       <p:bgPr>
         <a:solidFill>
@@ -6371,12 +9821,12 @@
         </p:nvSpPr>
         <p:spPr>
           <a:xfrm>
-            <a:off x="502920" y="1143000"/>
-            <a:ext cx="4937760" cy="2148840"/>
+            <a:off x="502920" y="1051560"/>
+            <a:ext cx="11201400" cy="1828800"/>
           </a:xfrm>
           <a:prstGeom prst="roundRect">
             <a:avLst>
-              <a:gd name="adj" fmla="val 4255"/>
+              <a:gd name="adj" fmla="val 5000"/>
             </a:avLst>
           </a:prstGeom>
           <a:solidFill>
@@ -6385,16 +9835,88 @@
           <a:ln/>
         </p:spPr>
       </p:sp>
-      <p:sp>
-        <p:nvSpPr>
-          <p:cNvPr id="4" name="Text 2"/>
-          <p:cNvSpPr txBox="1"/>
-          <p:nvPr/>
-        </p:nvSpPr>
-        <p:spPr>
-          <a:xfrm>
-            <a:off x="731520" y="1325880"/>
-            <a:ext cx="4572000" cy="1874520"/>
+      <p:pic>
+        <p:nvPicPr>
+          <p:cNvPr id="4" name="Image 0" descr="C:\Users\deogr\AppData\Local\Temp\claude\C--Users-deogr-Documents-Fall-Project-Off-Grid-Vehicle-dection-project\e8b2e8fa-1513-4aa8-a8f6-ce4fcd20e664\scratchpad\deck\math\rf_prx.png">    </p:cNvPr>
+          <p:cNvPicPr>
+            <a:picLocks noChangeAspect="1"/>
+          </p:cNvPicPr>
+          <p:nvPr/>
+        </p:nvPicPr>
+        <p:blipFill>
+          <a:blip r:embed="rId1"/>
+          <a:stretch>
+            <a:fillRect/>
+          </a:stretch>
+        </p:blipFill>
+        <p:spPr>
+          <a:xfrm>
+            <a:off x="822960" y="1207008"/>
+            <a:ext cx="3108960" cy="246126"/>
+          </a:xfrm>
+          <a:prstGeom prst="rect">
+            <a:avLst/>
+          </a:prstGeom>
+        </p:spPr>
+      </p:pic>
+      <p:pic>
+        <p:nvPicPr>
+          <p:cNvPr id="5" name="Image 1" descr="C:\Users\deogr\AppData\Local\Temp\claude\C--Users-deogr-Documents-Fall-Project-Off-Grid-Vehicle-dection-project\e8b2e8fa-1513-4aa8-a8f6-ce4fcd20e664\scratchpad\deck\math\rf_2ray.png">    </p:cNvPr>
+          <p:cNvPicPr>
+            <a:picLocks noChangeAspect="1"/>
+          </p:cNvPicPr>
+          <p:nvPr/>
+        </p:nvPicPr>
+        <p:blipFill>
+          <a:blip r:embed="rId2"/>
+          <a:stretch>
+            <a:fillRect/>
+          </a:stretch>
+        </p:blipFill>
+        <p:spPr>
+          <a:xfrm>
+            <a:off x="4572000" y="1197864"/>
+            <a:ext cx="4023360" cy="243273"/>
+          </a:xfrm>
+          <a:prstGeom prst="rect">
+            <a:avLst/>
+          </a:prstGeom>
+        </p:spPr>
+      </p:pic>
+      <p:pic>
+        <p:nvPicPr>
+          <p:cNvPr id="6" name="Image 2" descr="C:\Users\deogr\AppData\Local\Temp\claude\C--Users-deogr-Documents-Fall-Project-Off-Grid-Vehicle-dection-project\e8b2e8fa-1513-4aa8-a8f6-ce4fcd20e664\scratchpad\deck\math\rf_fspl.png">    </p:cNvPr>
+          <p:cNvPicPr>
+            <a:picLocks noChangeAspect="1"/>
+          </p:cNvPicPr>
+          <p:nvPr/>
+        </p:nvPicPr>
+        <p:blipFill>
+          <a:blip r:embed="rId3"/>
+          <a:stretch>
+            <a:fillRect/>
+          </a:stretch>
+        </p:blipFill>
+        <p:spPr>
+          <a:xfrm>
+            <a:off x="822960" y="1691640"/>
+            <a:ext cx="5394960" cy="229969"/>
+          </a:xfrm>
+          <a:prstGeom prst="rect">
+            <a:avLst/>
+          </a:prstGeom>
+        </p:spPr>
+      </p:pic>
+      <p:sp>
+        <p:nvSpPr>
+          <p:cNvPr id="7" name="Text 2"/>
+          <p:cNvSpPr txBox="1"/>
+          <p:nvPr/>
+        </p:nvSpPr>
+        <p:spPr>
+          <a:xfrm>
+            <a:off x="822960" y="2212848"/>
+            <a:ext cx="3291840" cy="457200"/>
           </a:xfrm>
           <a:prstGeom prst="rect">
             <a:avLst/>
@@ -6410,97 +9932,47 @@
               <a:buNone/>
             </a:pPr>
             <a:r>
-              <a:rPr lang="en-US" sz="1250" dirty="0">
+              <a:rPr lang="en-US" sz="1200" dirty="0">
                 <a:solidFill>
                   <a:srgbClr val="CADCFC"/>
                 </a:solidFill>
-                <a:latin typeface="Courier New" pitchFamily="34" charset="0"/>
-                <a:ea typeface="Courier New" pitchFamily="34" charset="-122"/>
-                <a:cs typeface="Courier New" pitchFamily="34" charset="-120"/>
-              </a:rPr>
-              <a:t>P_rx = P_tx + G_tx + G_rx − L_path</a:t>
-            </a:r>
-            <a:endParaRPr lang="en-US" sz="1250" dirty="0"/>
-          </a:p>
-          <a:p>
-            <a:pPr indent="0" marL="0">
-              <a:buNone/>
-            </a:pPr>
-            <a:r>
-              <a:rPr lang="en-US" sz="1250" dirty="0">
-                <a:solidFill>
-                  <a:srgbClr val="CADCFC"/>
-                </a:solidFill>
-                <a:latin typeface="Courier New" pitchFamily="34" charset="0"/>
-                <a:ea typeface="Courier New" pitchFamily="34" charset="-122"/>
-                <a:cs typeface="Courier New" pitchFamily="34" charset="-120"/>
-              </a:rPr>
-              <a:t>FSPL(dB) = 32.45 + 20log₁₀f(MHz) + 20log₁₀d(km)</a:t>
-            </a:r>
-            <a:endParaRPr lang="en-US" sz="1250" dirty="0"/>
-          </a:p>
-          <a:p>
-            <a:pPr indent="0" marL="0">
-              <a:buNone/>
-            </a:pPr>
-            <a:r>
-              <a:rPr lang="en-US" sz="1250" dirty="0">
-                <a:solidFill>
-                  <a:srgbClr val="CADCFC"/>
-                </a:solidFill>
-                <a:latin typeface="Courier New" pitchFamily="34" charset="0"/>
-                <a:ea typeface="Courier New" pitchFamily="34" charset="-122"/>
-                <a:cs typeface="Courier New" pitchFamily="34" charset="-120"/>
-              </a:rPr>
-              <a:t>Two-ray:  L ≈ 40log₁₀d − 20log₁₀(h₁h₂)</a:t>
-            </a:r>
-            <a:endParaRPr lang="en-US" sz="1250" dirty="0"/>
-          </a:p>
-          <a:p>
-            <a:pPr indent="0" marL="0">
-              <a:buNone/>
-            </a:pPr>
-            <a:endParaRPr lang="en-US" sz="1250" dirty="0"/>
-          </a:p>
-          <a:p>
-            <a:pPr indent="0" marL="0">
-              <a:buNone/>
-            </a:pPr>
-            <a:r>
-              <a:rPr lang="en-US" sz="1250" dirty="0">
-                <a:solidFill>
-                  <a:srgbClr val="CADCFC"/>
-                </a:solidFill>
-                <a:latin typeface="Courier New" pitchFamily="34" charset="0"/>
-                <a:ea typeface="Courier New" pitchFamily="34" charset="-122"/>
-                <a:cs typeface="Courier New" pitchFamily="34" charset="-120"/>
-              </a:rPr>
-              <a:t>Max allowable path loss:</a:t>
-            </a:r>
-            <a:endParaRPr lang="en-US" sz="1250" dirty="0"/>
-          </a:p>
-          <a:p>
-            <a:pPr indent="0" marL="0">
-              <a:buNone/>
-            </a:pPr>
-            <a:r>
-              <a:rPr lang="en-US" sz="1250" dirty="0">
-                <a:solidFill>
-                  <a:srgbClr val="CADCFC"/>
-                </a:solidFill>
-                <a:latin typeface="Courier New" pitchFamily="34" charset="0"/>
-                <a:ea typeface="Courier New" pitchFamily="34" charset="-122"/>
-                <a:cs typeface="Courier New" pitchFamily="34" charset="-120"/>
-              </a:rPr>
-              <a:t>28 dBm + 3 + 3 − 2 − (−129 dBm) = 161 dB</a:t>
-            </a:r>
-            <a:endParaRPr lang="en-US" sz="1250" dirty="0"/>
-          </a:p>
-        </p:txBody>
-      </p:sp>
+                <a:latin typeface="Calibri" pitchFamily="34" charset="0"/>
+                <a:ea typeface="Calibri" pitchFamily="34" charset="-122"/>
+                <a:cs typeface="Calibri" pitchFamily="34" charset="-120"/>
+              </a:rPr>
+              <a:t>Link margin closes when path loss reaches:</a:t>
+            </a:r>
+            <a:endParaRPr lang="en-US" sz="1200" dirty="0"/>
+          </a:p>
+        </p:txBody>
+      </p:sp>
+      <p:pic>
+        <p:nvPicPr>
+          <p:cNvPr id="8" name="Image 3" descr="C:\Users\deogr\AppData\Local\Temp\claude\C--Users-deogr-Documents-Fall-Project-Off-Grid-Vehicle-dection-project\e8b2e8fa-1513-4aa8-a8f6-ce4fcd20e664\scratchpad\deck\math\rf_budget.png">    </p:cNvPr>
+          <p:cNvPicPr>
+            <a:picLocks noChangeAspect="1"/>
+          </p:cNvPicPr>
+          <p:nvPr/>
+        </p:nvPicPr>
+        <p:blipFill>
+          <a:blip r:embed="rId4"/>
+          <a:stretch>
+            <a:fillRect/>
+          </a:stretch>
+        </p:blipFill>
+        <p:spPr>
+          <a:xfrm>
+            <a:off x="3977640" y="2240280"/>
+            <a:ext cx="7223760" cy="240792"/>
+          </a:xfrm>
+          <a:prstGeom prst="rect">
+            <a:avLst/>
+          </a:prstGeom>
+        </p:spPr>
+      </p:pic>
       <p:graphicFrame>
         <p:nvGraphicFramePr>
-          <p:cNvPr id="6" name="Table 0"/>
+          <p:cNvPr id="8" name="Table 0"/>
           <p:cNvGraphicFramePr>
             <a:graphicFrameLocks noGrp="1"/>
           </p:cNvGraphicFramePr>
@@ -6513,7 +9985,7 @@
           </p:nvPr>
         </p:nvGraphicFramePr>
         <p:xfrm>
-          <a:off x="502920" y="3520440"/>
+          <a:off x="502920" y="3200400"/>
           <a:ext cx="4937760" cy="914400"/>
         </p:xfrm>
         <a:graphic>
@@ -7628,14 +11100,14 @@
       </p:graphicFrame>
       <p:sp>
         <p:nvSpPr>
-          <p:cNvPr id="6" name="Text 3"/>
-          <p:cNvSpPr txBox="1"/>
-          <p:nvPr/>
-        </p:nvSpPr>
-        <p:spPr>
-          <a:xfrm>
-            <a:off x="502920" y="5074920"/>
-            <a:ext cx="4937760" cy="1234440"/>
+          <p:cNvPr id="10" name="Text 3"/>
+          <p:cNvSpPr txBox="1"/>
+          <p:nvPr/>
+        </p:nvSpPr>
+        <p:spPr>
+          <a:xfrm>
+            <a:off x="502920" y="4846320"/>
+            <a:ext cx="4937760" cy="1371600"/>
           </a:xfrm>
           <a:prstGeom prst="rect">
             <a:avLst/>
@@ -7659,7 +11131,7 @@
                 <a:ea typeface="Calibri" pitchFamily="34" charset="-122"/>
                 <a:cs typeface="Calibri" pitchFamily="34" charset="-120"/>
               </a:rPr>
-              <a:t>Each SF step ≈ +2.5–3 dB margin at ~½ the data rate. Payload needs only ~13 bit/s — capacity is deliberately traded for link margin (decode up to 15 dB below the noise floor via chirp spreading gain).</a:t>
+              <a:t>Each SF step ≈ +2.5–3 dB margin at ~½ the data rate. The payload needs only ~13 bit/s — capacity is deliberately traded for link margin (chirp spreading gain decodes up to 15 dB below the noise floor).</a:t>
             </a:r>
             <a:endParaRPr lang="en-US" sz="1200" dirty="0"/>
           </a:p>
@@ -7667,30 +11139,30 @@
       </p:sp>
       <p:graphicFrame>
         <p:nvGraphicFramePr>
-          <p:cNvPr id="7" name="Chart 0" descr=""/>
+          <p:cNvPr id="11" name="Chart 0" descr=""/>
           <p:cNvGraphicFramePr/>
           <p:nvPr/>
         </p:nvGraphicFramePr>
         <p:xfrm>
-          <a:off x="5806440" y="1143000"/>
-          <a:ext cx="5897880" cy="4206240"/>
+          <a:off x="5806440" y="3063240"/>
+          <a:ext cx="5897880" cy="2880360"/>
         </p:xfrm>
         <a:graphic xmlns:a="http://schemas.openxmlformats.org/drawingml/2006/main">
           <a:graphicData uri="http://schemas.openxmlformats.org/drawingml/2006/chart">
-            <c:chart xmlns:c="http://schemas.openxmlformats.org/drawingml/2006/chart" r:id="rId1"/>
+            <c:chart xmlns:c="http://schemas.openxmlformats.org/drawingml/2006/chart" r:id="rId5"/>
           </a:graphicData>
         </a:graphic>
       </p:graphicFrame>
       <p:sp>
         <p:nvSpPr>
-          <p:cNvPr id="8" name="Text 4"/>
-          <p:cNvSpPr txBox="1"/>
-          <p:nvPr/>
-        </p:nvSpPr>
-        <p:spPr>
-          <a:xfrm>
-            <a:off x="5806440" y="5440680"/>
-            <a:ext cx="5897880" cy="868680"/>
+          <p:cNvPr id="12" name="Text 4"/>
+          <p:cNvSpPr txBox="1"/>
+          <p:nvPr/>
+        </p:nvSpPr>
+        <p:spPr>
+          <a:xfrm>
+            <a:off x="5806440" y="6035040"/>
+            <a:ext cx="5897880" cy="731520"/>
           </a:xfrm>
           <a:prstGeom prst="rect">
             <a:avLst/>
@@ -7706,7 +11178,7 @@
               <a:buNone/>
             </a:pPr>
             <a:r>
-              <a:rPr lang="en-US" sz="1200" dirty="0">
+              <a:rPr lang="en-US" sz="1100" dirty="0">
                 <a:solidFill>
                   <a:srgbClr val="222A3F"/>
                 </a:solidFill>
@@ -7714,9 +11186,9 @@
                 <a:ea typeface="Calibri" pitchFamily="34" charset="-122"/>
                 <a:cs typeface="Calibri" pitchFamily="34" charset="-120"/>
               </a:rPr>
-              <a:t>Prediction: line-of-sight reaches tens of km; ground-level two-ray crosses the budget near ~20 km; terrain diffraction sets the real 2–8 km expectation. Victor's W3–W5 range campaign measures this curve.</a:t>
-            </a:r>
-            <a:endParaRPr lang="en-US" sz="1200" dirty="0"/>
+              <a:t>Prediction: LOS reaches tens of km; ground-level two-ray crosses the budget near ~20 km; terrain diffraction sets the honest 2–8 km target. Victor's W3–W5 campaign measures this curve.</a:t>
+            </a:r>
+            <a:endParaRPr lang="en-US" sz="1100" dirty="0"/>
           </a:p>
         </p:txBody>
       </p:sp>
@@ -7728,9 +11200,9 @@
 </p:sld>
 </file>
 
-<file path=ppt/slides/slide6.xml><?xml version="1.0" encoding="utf-8"?>
+<file path=ppt/slides/slide8.xml><?xml version="1.0" encoding="utf-8"?>
 <p:sld xmlns:a="http://schemas.openxmlformats.org/drawingml/2006/main" xmlns:r="http://schemas.openxmlformats.org/officeDocument/2006/relationships" xmlns:p="http://schemas.openxmlformats.org/presentationml/2006/main">
-  <p:cSld name="Slide 6">
+  <p:cSld name="Slide 8">
     <p:bg>
       <p:bgPr>
         <a:solidFill>
@@ -7799,12 +11271,12 @@
         </p:nvSpPr>
         <p:spPr>
           <a:xfrm>
-            <a:off x="502920" y="1143000"/>
-            <a:ext cx="6035040" cy="2560320"/>
+            <a:off x="502920" y="1097280"/>
+            <a:ext cx="6309360" cy="2880360"/>
           </a:xfrm>
           <a:prstGeom prst="roundRect">
             <a:avLst>
-              <a:gd name="adj" fmla="val 3571"/>
+              <a:gd name="adj" fmla="val 3175"/>
             </a:avLst>
           </a:prstGeom>
           <a:solidFill>
@@ -7821,8 +11293,8 @@
         </p:nvSpPr>
         <p:spPr>
           <a:xfrm>
-            <a:off x="731520" y="1325880"/>
-            <a:ext cx="5623560" cy="2286000"/>
+            <a:off x="777240" y="1261872"/>
+            <a:ext cx="5760720" cy="274320"/>
           </a:xfrm>
           <a:prstGeom prst="rect">
             <a:avLst/>
@@ -7838,144 +11310,204 @@
               <a:buNone/>
             </a:pPr>
             <a:r>
-              <a:rPr lang="en-US" sz="1250" dirty="0">
-                <a:solidFill>
-                  <a:srgbClr val="CADCFC"/>
-                </a:solidFill>
-                <a:latin typeface="Courier New" pitchFamily="34" charset="0"/>
-                <a:ea typeface="Courier New" pitchFamily="34" charset="-122"/>
-                <a:cs typeface="Courier New" pitchFamily="34" charset="-120"/>
-              </a:rPr>
-              <a:t>Distance (haversine):</a:t>
-            </a:r>
-            <a:endParaRPr lang="en-US" sz="1250" dirty="0"/>
-          </a:p>
+              <a:rPr lang="en-US" sz="1200" b="1" dirty="0">
+                <a:solidFill>
+                  <a:srgbClr val="E58E1A"/>
+                </a:solidFill>
+                <a:latin typeface="Calibri" pitchFamily="34" charset="0"/>
+                <a:ea typeface="Calibri" pitchFamily="34" charset="-122"/>
+                <a:cs typeface="Calibri" pitchFamily="34" charset="-120"/>
+              </a:rPr>
+              <a:t>Great-circle distance (haversine):</a:t>
+            </a:r>
+            <a:endParaRPr lang="en-US" sz="1200" dirty="0"/>
+          </a:p>
+        </p:txBody>
+      </p:sp>
+      <p:pic>
+        <p:nvPicPr>
+          <p:cNvPr id="5" name="Image 0" descr="C:\Users\deogr\AppData\Local\Temp\claude\C--Users-deogr-Documents-Fall-Project-Off-Grid-Vehicle-dection-project\e8b2e8fa-1513-4aa8-a8f6-ce4fcd20e664\scratchpad\deck\math\nav_hav1.png">    </p:cNvPr>
+          <p:cNvPicPr>
+            <a:picLocks noChangeAspect="1"/>
+          </p:cNvPicPr>
+          <p:nvPr/>
+        </p:nvPicPr>
+        <p:blipFill>
+          <a:blip r:embed="rId1"/>
+          <a:stretch>
+            <a:fillRect/>
+          </a:stretch>
+        </p:blipFill>
+        <p:spPr>
+          <a:xfrm>
+            <a:off x="868680" y="1554480"/>
+            <a:ext cx="4480560" cy="347806"/>
+          </a:xfrm>
+          <a:prstGeom prst="rect">
+            <a:avLst/>
+          </a:prstGeom>
+        </p:spPr>
+      </p:pic>
+      <p:pic>
+        <p:nvPicPr>
+          <p:cNvPr id="6" name="Image 1" descr="C:\Users\deogr\AppData\Local\Temp\claude\C--Users-deogr-Documents-Fall-Project-Off-Grid-Vehicle-dection-project\e8b2e8fa-1513-4aa8-a8f6-ce4fcd20e664\scratchpad\deck\math\nav_hav2.png">    </p:cNvPr>
+          <p:cNvPicPr>
+            <a:picLocks noChangeAspect="1"/>
+          </p:cNvPicPr>
+          <p:nvPr/>
+        </p:nvPicPr>
+        <p:blipFill>
+          <a:blip r:embed="rId2"/>
+          <a:stretch>
+            <a:fillRect/>
+          </a:stretch>
+        </p:blipFill>
+        <p:spPr>
+          <a:xfrm>
+            <a:off x="868680" y="1993392"/>
+            <a:ext cx="3017520" cy="298704"/>
+          </a:xfrm>
+          <a:prstGeom prst="rect">
+            <a:avLst/>
+          </a:prstGeom>
+        </p:spPr>
+      </p:pic>
+      <p:sp>
+        <p:nvSpPr>
+          <p:cNvPr id="7" name="Text 3"/>
+          <p:cNvSpPr txBox="1"/>
+          <p:nvPr/>
+        </p:nvSpPr>
+        <p:spPr>
+          <a:xfrm>
+            <a:off x="777240" y="2487168"/>
+            <a:ext cx="5760720" cy="274320"/>
+          </a:xfrm>
+          <a:prstGeom prst="rect">
+            <a:avLst/>
+          </a:prstGeom>
+          <a:noFill/>
+          <a:ln/>
+        </p:spPr>
+        <p:txBody>
+          <a:bodyPr wrap="square" lIns="0" tIns="0" rIns="0" bIns="0" rtlCol="0" anchor="ctr"/>
+          <a:lstStyle/>
           <a:p>
             <a:pPr indent="0" marL="0">
               <a:buNone/>
             </a:pPr>
             <a:r>
-              <a:rPr lang="en-US" sz="1250" dirty="0">
-                <a:solidFill>
-                  <a:srgbClr val="CADCFC"/>
-                </a:solidFill>
-                <a:latin typeface="Courier New" pitchFamily="34" charset="0"/>
-                <a:ea typeface="Courier New" pitchFamily="34" charset="-122"/>
-                <a:cs typeface="Courier New" pitchFamily="34" charset="-120"/>
-              </a:rPr>
-              <a:t>  a = sin²(Δφ/2) + cosφ₁ cosφ₂ sin²(Δλ/2)</a:t>
-            </a:r>
-            <a:endParaRPr lang="en-US" sz="1250" dirty="0"/>
-          </a:p>
+              <a:rPr lang="en-US" sz="1200" b="1" dirty="0">
+                <a:solidFill>
+                  <a:srgbClr val="E58E1A"/>
+                </a:solidFill>
+                <a:latin typeface="Calibri" pitchFamily="34" charset="0"/>
+                <a:ea typeface="Calibri" pitchFamily="34" charset="-122"/>
+                <a:cs typeface="Calibri" pitchFamily="34" charset="-120"/>
+              </a:rPr>
+              <a:t>Initial bearing (true-north referenced):</a:t>
+            </a:r>
+            <a:endParaRPr lang="en-US" sz="1200" dirty="0"/>
+          </a:p>
+        </p:txBody>
+      </p:sp>
+      <p:pic>
+        <p:nvPicPr>
+          <p:cNvPr id="8" name="Image 2" descr="C:\Users\deogr\AppData\Local\Temp\claude\C--Users-deogr-Documents-Fall-Project-Off-Grid-Vehicle-dection-project\e8b2e8fa-1513-4aa8-a8f6-ce4fcd20e664\scratchpad\deck\math\nav_brg.png">    </p:cNvPr>
+          <p:cNvPicPr>
+            <a:picLocks noChangeAspect="1"/>
+          </p:cNvPicPr>
+          <p:nvPr/>
+        </p:nvPicPr>
+        <p:blipFill>
+          <a:blip r:embed="rId3"/>
+          <a:stretch>
+            <a:fillRect/>
+          </a:stretch>
+        </p:blipFill>
+        <p:spPr>
+          <a:xfrm>
+            <a:off x="868680" y="2788920"/>
+            <a:ext cx="5669280" cy="202279"/>
+          </a:xfrm>
+          <a:prstGeom prst="rect">
+            <a:avLst/>
+          </a:prstGeom>
+        </p:spPr>
+      </p:pic>
+      <p:sp>
+        <p:nvSpPr>
+          <p:cNvPr id="9" name="Text 4"/>
+          <p:cNvSpPr txBox="1"/>
+          <p:nvPr/>
+        </p:nvSpPr>
+        <p:spPr>
+          <a:xfrm>
+            <a:off x="777240" y="3246120"/>
+            <a:ext cx="3291840" cy="274320"/>
+          </a:xfrm>
+          <a:prstGeom prst="rect">
+            <a:avLst/>
+          </a:prstGeom>
+          <a:noFill/>
+          <a:ln/>
+        </p:spPr>
+        <p:txBody>
+          <a:bodyPr wrap="square" lIns="0" tIns="0" rIns="0" bIns="0" rtlCol="0" anchor="ctr"/>
+          <a:lstStyle/>
           <a:p>
             <a:pPr indent="0" marL="0">
               <a:buNone/>
             </a:pPr>
             <a:r>
-              <a:rPr lang="en-US" sz="1250" dirty="0">
-                <a:solidFill>
-                  <a:srgbClr val="CADCFC"/>
-                </a:solidFill>
-                <a:latin typeface="Courier New" pitchFamily="34" charset="0"/>
-                <a:ea typeface="Courier New" pitchFamily="34" charset="-122"/>
-                <a:cs typeface="Courier New" pitchFamily="34" charset="-120"/>
-              </a:rPr>
-              <a:t>  d = 2R · atan2(√a, √(1−a))</a:t>
-            </a:r>
-            <a:endParaRPr lang="en-US" sz="1250" dirty="0"/>
-          </a:p>
-          <a:p>
-            <a:pPr indent="0" marL="0">
-              <a:buNone/>
-            </a:pPr>
-            <a:endParaRPr lang="en-US" sz="1250" dirty="0"/>
-          </a:p>
-          <a:p>
-            <a:pPr indent="0" marL="0">
-              <a:buNone/>
-            </a:pPr>
-            <a:r>
-              <a:rPr lang="en-US" sz="1250" dirty="0">
-                <a:solidFill>
-                  <a:srgbClr val="CADCFC"/>
-                </a:solidFill>
-                <a:latin typeface="Courier New" pitchFamily="34" charset="0"/>
-                <a:ea typeface="Courier New" pitchFamily="34" charset="-122"/>
-                <a:cs typeface="Courier New" pitchFamily="34" charset="-120"/>
-              </a:rPr>
-              <a:t>Initial bearing (true north):</a:t>
-            </a:r>
-            <a:endParaRPr lang="en-US" sz="1250" dirty="0"/>
-          </a:p>
-          <a:p>
-            <a:pPr indent="0" marL="0">
-              <a:buNone/>
-            </a:pPr>
-            <a:r>
-              <a:rPr lang="en-US" sz="1250" dirty="0">
-                <a:solidFill>
-                  <a:srgbClr val="CADCFC"/>
-                </a:solidFill>
-                <a:latin typeface="Courier New" pitchFamily="34" charset="0"/>
-                <a:ea typeface="Courier New" pitchFamily="34" charset="-122"/>
-                <a:cs typeface="Courier New" pitchFamily="34" charset="-120"/>
-              </a:rPr>
-              <a:t>  θ = atan2(sinΔλ cosφ₂,</a:t>
-            </a:r>
-            <a:endParaRPr lang="en-US" sz="1250" dirty="0"/>
-          </a:p>
-          <a:p>
-            <a:pPr indent="0" marL="0">
-              <a:buNone/>
-            </a:pPr>
-            <a:r>
-              <a:rPr lang="en-US" sz="1250" dirty="0">
-                <a:solidFill>
-                  <a:srgbClr val="CADCFC"/>
-                </a:solidFill>
-                <a:latin typeface="Courier New" pitchFamily="34" charset="0"/>
-                <a:ea typeface="Courier New" pitchFamily="34" charset="-122"/>
-                <a:cs typeface="Courier New" pitchFamily="34" charset="-120"/>
-              </a:rPr>
-              <a:t>            cosφ₁ sinφ₂ − sinφ₁ cosφ₂ cosΔλ)</a:t>
-            </a:r>
-            <a:endParaRPr lang="en-US" sz="1250" dirty="0"/>
-          </a:p>
-          <a:p>
-            <a:pPr indent="0" marL="0">
-              <a:buNone/>
-            </a:pPr>
-            <a:endParaRPr lang="en-US" sz="1250" dirty="0"/>
-          </a:p>
-          <a:p>
-            <a:pPr indent="0" marL="0">
-              <a:buNone/>
-            </a:pPr>
-            <a:r>
-              <a:rPr lang="en-US" sz="1250" dirty="0">
-                <a:solidFill>
-                  <a:srgbClr val="CADCFC"/>
-                </a:solidFill>
-                <a:latin typeface="Courier New" pitchFamily="34" charset="0"/>
-                <a:ea typeface="Courier New" pitchFamily="34" charset="-122"/>
-                <a:cs typeface="Courier New" pitchFamily="34" charset="-120"/>
-              </a:rPr>
-              <a:t>Driver's arrow:   arrow = θ − course_over_ground</a:t>
-            </a:r>
-            <a:endParaRPr lang="en-US" sz="1250" dirty="0"/>
-          </a:p>
-        </p:txBody>
-      </p:sp>
-      <p:sp>
-        <p:nvSpPr>
-          <p:cNvPr id="5" name="Text 3"/>
-          <p:cNvSpPr txBox="1"/>
-          <p:nvPr/>
-        </p:nvSpPr>
-        <p:spPr>
-          <a:xfrm>
-            <a:off x="502920" y="3977640"/>
-            <a:ext cx="6035040" cy="2286000"/>
+              <a:rPr lang="en-US" sz="1200" b="1" dirty="0">
+                <a:solidFill>
+                  <a:srgbClr val="E58E1A"/>
+                </a:solidFill>
+                <a:latin typeface="Calibri" pitchFamily="34" charset="0"/>
+                <a:ea typeface="Calibri" pitchFamily="34" charset="-122"/>
+                <a:cs typeface="Calibri" pitchFamily="34" charset="-120"/>
+              </a:rPr>
+              <a:t>Driver's vehicle-relative arrow:</a:t>
+            </a:r>
+            <a:endParaRPr lang="en-US" sz="1200" dirty="0"/>
+          </a:p>
+        </p:txBody>
+      </p:sp>
+      <p:pic>
+        <p:nvPicPr>
+          <p:cNvPr id="10" name="Image 3" descr="C:\Users\deogr\AppData\Local\Temp\claude\C--Users-deogr-Documents-Fall-Project-Off-Grid-Vehicle-dection-project\e8b2e8fa-1513-4aa8-a8f6-ce4fcd20e664\scratchpad\deck\math\nav_arrow.png">    </p:cNvPr>
+          <p:cNvPicPr>
+            <a:picLocks noChangeAspect="1"/>
+          </p:cNvPicPr>
+          <p:nvPr/>
+        </p:nvPicPr>
+        <p:blipFill>
+          <a:blip r:embed="rId4"/>
+          <a:stretch>
+            <a:fillRect/>
+          </a:stretch>
+        </p:blipFill>
+        <p:spPr>
+          <a:xfrm>
+            <a:off x="4160520" y="3246120"/>
+            <a:ext cx="2011680" cy="223520"/>
+          </a:xfrm>
+          <a:prstGeom prst="rect">
+            <a:avLst/>
+          </a:prstGeom>
+        </p:spPr>
+      </p:pic>
+      <p:sp>
+        <p:nvSpPr>
+          <p:cNvPr id="11" name="Text 5"/>
+          <p:cNvSpPr txBox="1"/>
+          <p:nvPr/>
+        </p:nvSpPr>
+        <p:spPr>
+          <a:xfrm>
+            <a:off x="502920" y="4251960"/>
+            <a:ext cx="6309360" cy="2103120"/>
           </a:xfrm>
           <a:prstGeom prst="rect">
             <a:avLst/>
@@ -8024,7 +11556,7 @@
                 <a:ea typeface="Calibri" pitchFamily="34" charset="-122"/>
                 <a:cs typeface="Calibri" pitchFamily="34" charset="-120"/>
               </a:rPr>
-              <a:t>Stationary fallback: north-referenced compass display when speed &lt; 2.2 m/s.</a:t>
+              <a:t>Stationary fallback: north-referenced compass display when v &lt; 2.2 m/s.</a:t>
             </a:r>
             <a:endParaRPr lang="en-US" sz="1300" dirty="0"/>
           </a:p>
@@ -8042,7 +11574,7 @@
                 <a:ea typeface="Calibri" pitchFamily="34" charset="-122"/>
                 <a:cs typeface="Calibri" pitchFamily="34" charset="-120"/>
               </a:rPr>
-              <a:t>No ACKs by design: a newer position supersedes an older one, so the correct reliability metric is data age (staleness) — shown to the driver, always.</a:t>
+              <a:t>No ACKs by design: a newer position supersedes an older one — the correct reliability metric is data age (staleness), always shown to the driver.</a:t>
             </a:r>
             <a:endParaRPr lang="en-US" sz="1300" dirty="0"/>
           </a:p>
@@ -8050,14 +11582,14 @@
       </p:sp>
       <p:sp>
         <p:nvSpPr>
-          <p:cNvPr id="6" name="Shape 4"/>
+          <p:cNvPr id="12" name="Shape 6"/>
           <p:cNvSpPr/>
           <p:nvPr/>
         </p:nvSpPr>
         <p:spPr>
           <a:xfrm>
-            <a:off x="7452360" y="1600200"/>
-            <a:ext cx="3383280" cy="3383280"/>
+            <a:off x="7726680" y="1737360"/>
+            <a:ext cx="3291840" cy="3291840"/>
           </a:xfrm>
           <a:prstGeom prst="ellipse">
             <a:avLst/>
@@ -8075,13 +11607,13 @@
       </p:sp>
       <p:sp>
         <p:nvSpPr>
-          <p:cNvPr id="7" name="Text 5"/>
-          <p:cNvSpPr txBox="1"/>
-          <p:nvPr/>
-        </p:nvSpPr>
-        <p:spPr>
-          <a:xfrm>
-            <a:off x="9006840" y="1216152"/>
+          <p:cNvPr id="13" name="Text 7"/>
+          <p:cNvSpPr txBox="1"/>
+          <p:nvPr/>
+        </p:nvSpPr>
+        <p:spPr>
+          <a:xfrm>
+            <a:off x="9235440" y="1353312"/>
             <a:ext cx="274320" cy="274320"/>
           </a:xfrm>
           <a:prstGeom prst="rect">
@@ -8114,14 +11646,14 @@
       </p:sp>
       <p:sp>
         <p:nvSpPr>
-          <p:cNvPr id="8" name="Shape 6"/>
+          <p:cNvPr id="14" name="Shape 8"/>
           <p:cNvSpPr/>
           <p:nvPr/>
         </p:nvSpPr>
         <p:spPr>
           <a:xfrm>
-            <a:off x="9144000" y="1709928"/>
-            <a:ext cx="0" cy="1581912"/>
+            <a:off x="9372600" y="1847088"/>
+            <a:ext cx="0" cy="1536192"/>
           </a:xfrm>
           <a:prstGeom prst="line">
             <a:avLst/>
@@ -8137,14 +11669,14 @@
       </p:sp>
       <p:sp>
         <p:nvSpPr>
-          <p:cNvPr id="9" name="Shape 7"/>
+          <p:cNvPr id="15" name="Shape 9"/>
           <p:cNvSpPr/>
           <p:nvPr/>
         </p:nvSpPr>
         <p:spPr>
           <a:xfrm flipV="1">
-            <a:off x="9144000" y="2040026"/>
-            <a:ext cx="1048817" cy="1251814"/>
+            <a:off x="9372600" y="2165299"/>
+            <a:ext cx="1020470" cy="1217981"/>
           </a:xfrm>
           <a:prstGeom prst="line">
             <a:avLst/>
@@ -8161,14 +11693,14 @@
       </p:sp>
       <p:sp>
         <p:nvSpPr>
-          <p:cNvPr id="10" name="Text 8"/>
-          <p:cNvSpPr txBox="1"/>
-          <p:nvPr/>
-        </p:nvSpPr>
-        <p:spPr>
-          <a:xfrm>
-            <a:off x="10074402" y="1684782"/>
-            <a:ext cx="1371600" cy="274320"/>
+          <p:cNvPr id="16" name="Text 10"/>
+          <p:cNvSpPr txBox="1"/>
+          <p:nvPr/>
+        </p:nvSpPr>
+        <p:spPr>
+          <a:xfrm>
+            <a:off x="10195560" y="1819656"/>
+            <a:ext cx="1737360" cy="274320"/>
           </a:xfrm>
           <a:prstGeom prst="rect">
             <a:avLst/>
@@ -8192,7 +11724,7 @@
                 <a:ea typeface="Calibri" pitchFamily="34" charset="-122"/>
                 <a:cs typeface="Calibri" pitchFamily="34" charset="-120"/>
               </a:rPr>
-              <a:t>own course</a:t>
+              <a:t>own course (COG)</a:t>
             </a:r>
             <a:endParaRPr lang="en-US" sz="1100" dirty="0"/>
           </a:p>
@@ -8200,14 +11732,14 @@
       </p:sp>
       <p:sp>
         <p:nvSpPr>
-          <p:cNvPr id="11" name="Shape 9"/>
+          <p:cNvPr id="17" name="Shape 11"/>
           <p:cNvSpPr/>
           <p:nvPr/>
         </p:nvSpPr>
         <p:spPr>
           <a:xfrm>
-            <a:off x="9144000" y="3291840"/>
-            <a:ext cx="1488643" cy="676656"/>
+            <a:off x="9372600" y="3383280"/>
+            <a:ext cx="1448410" cy="658368"/>
           </a:xfrm>
           <a:prstGeom prst="line">
             <a:avLst/>
@@ -8224,14 +11756,14 @@
       </p:sp>
       <p:sp>
         <p:nvSpPr>
-          <p:cNvPr id="12" name="Text 10"/>
-          <p:cNvSpPr txBox="1"/>
-          <p:nvPr/>
-        </p:nvSpPr>
-        <p:spPr>
-          <a:xfrm>
-            <a:off x="9736074" y="4137660"/>
-            <a:ext cx="1737360" cy="274320"/>
+          <p:cNvPr id="18" name="Text 12"/>
+          <p:cNvSpPr txBox="1"/>
+          <p:nvPr/>
+        </p:nvSpPr>
+        <p:spPr>
+          <a:xfrm>
+            <a:off x="9866376" y="4239158"/>
+            <a:ext cx="1920240" cy="274320"/>
           </a:xfrm>
           <a:prstGeom prst="rect">
             <a:avLst/>
@@ -8255,7 +11787,7 @@
                 <a:ea typeface="Calibri" pitchFamily="34" charset="-122"/>
                 <a:cs typeface="Calibri" pitchFamily="34" charset="-120"/>
               </a:rPr>
-              <a:t>bearing to partner</a:t>
+              <a:t>bearing θ to partner</a:t>
             </a:r>
             <a:endParaRPr lang="en-US" sz="1100" dirty="0"/>
           </a:p>
@@ -8263,13 +11795,13 @@
       </p:sp>
       <p:sp>
         <p:nvSpPr>
-          <p:cNvPr id="13" name="Text 11"/>
-          <p:cNvSpPr txBox="1"/>
-          <p:nvPr/>
-        </p:nvSpPr>
-        <p:spPr>
-          <a:xfrm>
-            <a:off x="10192817" y="3127248"/>
+          <p:cNvPr id="19" name="Text 13"/>
+          <p:cNvSpPr txBox="1"/>
+          <p:nvPr/>
+        </p:nvSpPr>
+        <p:spPr>
+          <a:xfrm>
+            <a:off x="10360152" y="3218688"/>
             <a:ext cx="1828800" cy="274320"/>
           </a:xfrm>
           <a:prstGeom prst="rect">
@@ -8294,7 +11826,7 @@
                 <a:ea typeface="Calibri" pitchFamily="34" charset="-122"/>
                 <a:cs typeface="Calibri" pitchFamily="34" charset="-120"/>
               </a:rPr>
-              <a:t>arrow ∠ = difference</a:t>
+              <a:t>arrow ∠ = θ − COG</a:t>
             </a:r>
             <a:endParaRPr lang="en-US" sz="1100" dirty="0"/>
           </a:p>
@@ -8302,13 +11834,13 @@
       </p:sp>
       <p:sp>
         <p:nvSpPr>
-          <p:cNvPr id="14" name="Shape 12"/>
+          <p:cNvPr id="20" name="Shape 14"/>
           <p:cNvSpPr/>
           <p:nvPr/>
         </p:nvSpPr>
         <p:spPr>
           <a:xfrm>
-            <a:off x="9089136" y="3236976"/>
+            <a:off x="9317736" y="3328416"/>
             <a:ext cx="109728" cy="109728"/>
           </a:xfrm>
           <a:prstGeom prst="ellipse">
@@ -8322,14 +11854,14 @@
       </p:sp>
       <p:sp>
         <p:nvSpPr>
-          <p:cNvPr id="15" name="Text 13"/>
-          <p:cNvSpPr txBox="1"/>
-          <p:nvPr/>
-        </p:nvSpPr>
-        <p:spPr>
-          <a:xfrm>
-            <a:off x="6766560" y="5440680"/>
-            <a:ext cx="4892040" cy="822960"/>
+          <p:cNvPr id="21" name="Text 15"/>
+          <p:cNvSpPr txBox="1"/>
+          <p:nvPr/>
+        </p:nvSpPr>
+        <p:spPr>
+          <a:xfrm>
+            <a:off x="7040880" y="5440680"/>
+            <a:ext cx="4663440" cy="548640"/>
           </a:xfrm>
           <a:prstGeom prst="rect">
             <a:avLst/>
@@ -8353,7 +11885,7 @@
                 <a:ea typeface="Calibri" pitchFamily="34" charset="-122"/>
                 <a:cs typeface="Calibri" pitchFamily="34" charset="-120"/>
               </a:rPr>
-              <a:t>The displayed arrow is vehicle-relative: bearing minus own course — no compass hardware needed.</a:t>
+              <a:t>Vehicle-relative by subtraction — no compass hardware needed.</a:t>
             </a:r>
             <a:endParaRPr lang="en-US" sz="1200" dirty="0"/>
           </a:p>
@@ -8367,9 +11899,9 @@
 </p:sld>
 </file>
 
-<file path=ppt/slides/slide7.xml><?xml version="1.0" encoding="utf-8"?>
+<file path=ppt/slides/slide9.xml><?xml version="1.0" encoding="utf-8"?>
 <p:sld xmlns:a="http://schemas.openxmlformats.org/drawingml/2006/main" xmlns:r="http://schemas.openxmlformats.org/officeDocument/2006/relationships" xmlns:p="http://schemas.openxmlformats.org/presentationml/2006/main">
-  <p:cSld name="Slide 7">
+  <p:cSld name="Slide 9">
     <p:bg>
       <p:bgPr>
         <a:solidFill>
@@ -8447,7 +11979,7 @@
             </a:avLst>
           </a:prstGeom>
           <a:solidFill>
-            <a:srgbClr val="E58E1A"/>
+            <a:srgbClr val="1199BD"/>
           </a:solidFill>
           <a:ln/>
         </p:spPr>
@@ -8479,7 +12011,7 @@
             <a:r>
               <a:rPr lang="en-US" sz="1400" b="1" dirty="0">
                 <a:solidFill>
-                  <a:srgbClr val="1E2761"/>
+                  <a:srgbClr val="FFFFFF"/>
                 </a:solidFill>
                 <a:latin typeface="Calibri" pitchFamily="34" charset="0"/>
                 <a:ea typeface="Calibri" pitchFamily="34" charset="-122"/>
@@ -8579,7 +12111,7 @@
             <a:r>
               <a:rPr lang="en-US" sz="1400" b="1" dirty="0">
                 <a:solidFill>
-                  <a:srgbClr val="1E2761"/>
+                  <a:srgbClr val="FFFFFF"/>
                 </a:solidFill>
                 <a:latin typeface="Calibri" pitchFamily="34" charset="0"/>
                 <a:ea typeface="Calibri" pitchFamily="34" charset="-122"/>
@@ -8647,7 +12179,7 @@
             </a:avLst>
           </a:prstGeom>
           <a:solidFill>
-            <a:srgbClr val="E58E1A"/>
+            <a:srgbClr val="6D4BDB"/>
           </a:solidFill>
           <a:ln/>
         </p:spPr>
@@ -8679,7 +12211,7 @@
             <a:r>
               <a:rPr lang="en-US" sz="1400" b="1" dirty="0">
                 <a:solidFill>
-                  <a:srgbClr val="1E2761"/>
+                  <a:srgbClr val="FFFFFF"/>
                 </a:solidFill>
                 <a:latin typeface="Calibri" pitchFamily="34" charset="0"/>
                 <a:ea typeface="Calibri" pitchFamily="34" charset="-122"/>
@@ -8747,7 +12279,7 @@
             </a:avLst>
           </a:prstGeom>
           <a:solidFill>
-            <a:srgbClr val="E58E1A"/>
+            <a:srgbClr val="D9488C"/>
           </a:solidFill>
           <a:ln/>
         </p:spPr>
@@ -8779,7 +12311,7 @@
             <a:r>
               <a:rPr lang="en-US" sz="1400" b="1" dirty="0">
                 <a:solidFill>
-                  <a:srgbClr val="1E2761"/>
+                  <a:srgbClr val="FFFFFF"/>
                 </a:solidFill>
                 <a:latin typeface="Calibri" pitchFamily="34" charset="0"/>
                 <a:ea typeface="Calibri" pitchFamily="34" charset="-122"/>
@@ -9086,7 +12618,7 @@
                 <a:ea typeface="Cambria" pitchFamily="34" charset="-122"/>
                 <a:cs typeface="Cambria" pitchFamily="34" charset="-120"/>
               </a:rPr>
-              <a:t>$27.9k</a:t>
+              <a:t>$37.4k</a:t>
             </a:r>
             <a:endParaRPr lang="en-US" sz="4000" dirty="0"/>
           </a:p>
@@ -9125,7 +12657,7 @@
                 <a:ea typeface="Calibri" pitchFamily="34" charset="-122"/>
                 <a:cs typeface="Calibri" pitchFamily="34" charset="-120"/>
               </a:rPr>
-              <a:t>budget estimate (TDL+ETRM)</a:t>
+              <a:t>budget estimate (TDL+TDM+ETRM)</a:t>
             </a:r>
             <a:endParaRPr lang="en-US" sz="1200" dirty="0"/>
           </a:p>
@@ -9203,7 +12735,7 @@
                 <a:ea typeface="Calibri" pitchFamily="34" charset="-122"/>
                 <a:cs typeface="Calibri" pitchFamily="34" charset="-120"/>
               </a:rPr>
-              <a:t>computing equipment in budget</a:t>
+              <a:t>computing in direct materials</a:t>
             </a:r>
             <a:endParaRPr lang="en-US" sz="1200" dirty="0"/>
           </a:p>

--- a/docs/presentations/Group9_Presentation2_Weeks1-2.pptx
+++ b/docs/presentations/Group9_Presentation2_Weeks1-2.pptx
@@ -686,7 +686,7 @@
           <a:p>
             <a:r>
               <a:rPr lang="en-US" dirty="0"/>
-              <a:t/>
+              <a:t>Single-page system view (drawn in Eraser, kept in docs/system-diagram.png). Walk left to right: hardware per vehicle, then the firmware split with TrackerState as the contract, then the telecom-layer view at the bottom. Vehicle B is identical.</a:t>
             </a:r>
             <a:endParaRPr lang="en-US" dirty="0"/>
           </a:p>
@@ -1038,7 +1038,7 @@
           <a:p>
             <a:r>
               <a:rPr lang="en-US" dirty="0"/>
-              <a:t/>
+              <a:t>One packet's journey, numbered: (1) partner GNSS computes a fix, 1 Hz NMEA over UART. (2) Meshtastic B builds a Position packet — lat/lon, speed, track, GPS time — and broadcasts over LoRa every 30-60 s (smart: 30 s / 50 m while moving). (3) Meshtastic A decrypts, files it in its node DB, queues it on FromRadio, rings the FromNum doorbell. (4) protocol/ drains the queue over BLE and nanopb-decodes each frame into node_table. (5) node_table publishes TrackerState once a second — one writer. (6) nav engine reads it — one reader — haversine distance, bearing minus own COG. (7) ui_render redraws at 2 Hz. Full narrative with code: docs/BLE_LINK_WALKTHROUGH.md.</a:t>
             </a:r>
             <a:endParaRPr lang="en-US" dirty="0"/>
           </a:p>
@@ -1126,7 +1126,7 @@
           <a:p>
             <a:r>
               <a:rPr lang="en-US" dirty="0"/>
-              <a:t/>
+              <a:t>How each state works in the shipped code (docs/BLE_LINK_WALKTHROUGH.md has the full excerpts): SCANNING - direct connect to the radio address remembered in NVS first (a Meshtastic radio only general-advertises from boot until its first disconnect, so a scan alone can never reconnect); 1.5 s scan fallback handles first pairing and radio replacement, exponential backoff 1-8 s. CONNECTING - 3 attempts, 10 s each; +9 dBm TX because default power was marginal; MTU 517 so a protobuf frame fits one read. BONDING - Just Works encrypted pairing on every connect; no stored bond ON PURPOSE: a bonded Meshtastic peripheral stops advertising entirely (bench-proven trap). SUBSCRIBED - subscribe FromNum (the doorbell), then write want_config_id with a random nonce so the radio replays its whole node DB; nonce back = snapshot complete. DRAINING - read FromRadio until a zero-length read; one notify can mean many queued frames. Every failure funnels through one teardown back to SCANNING - no state can wedge. Road-proven: mid-carry disconnect on Sep 1 self-recovered with no user action.</a:t>
             </a:r>
             <a:endParaRPr lang="en-US" dirty="0"/>
           </a:p>
@@ -2486,1412 +2486,6 @@
                 <a:ea typeface="Cambria" pitchFamily="34" charset="-122"/>
                 <a:cs typeface="Cambria" pitchFamily="34" charset="-120"/>
               </a:rPr>
-              <a:t>System Architecture — Overview &amp; Rationale</a:t>
-            </a:r>
-            <a:endParaRPr lang="en-US" sz="3000" dirty="0"/>
-          </a:p>
-        </p:txBody>
-      </p:sp>
-      <p:sp>
-        <p:nvSpPr>
-          <p:cNvPr id="3" name="Shape 1"/>
-          <p:cNvSpPr/>
-          <p:nvPr/>
-        </p:nvSpPr>
-        <p:spPr>
-          <a:xfrm>
-            <a:off x="502920" y="1234440"/>
-            <a:ext cx="3291840" cy="3200400"/>
-          </a:xfrm>
-          <a:prstGeom prst="roundRect">
-            <a:avLst>
-              <a:gd name="adj" fmla="val 3429"/>
-            </a:avLst>
-          </a:prstGeom>
-          <a:solidFill>
-            <a:srgbClr val="F2F6FC"/>
-          </a:solidFill>
-          <a:ln w="15875">
-            <a:solidFill>
-              <a:srgbClr val="1E2761"/>
-            </a:solidFill>
-            <a:prstDash val="solid"/>
-          </a:ln>
-        </p:spPr>
-      </p:sp>
-      <p:sp>
-        <p:nvSpPr>
-          <p:cNvPr id="4" name="Text 2"/>
-          <p:cNvSpPr txBox="1"/>
-          <p:nvPr/>
-        </p:nvSpPr>
-        <p:spPr>
-          <a:xfrm>
-            <a:off x="502920" y="1325880"/>
-            <a:ext cx="3291840" cy="320040"/>
-          </a:xfrm>
-          <a:prstGeom prst="rect">
-            <a:avLst/>
-          </a:prstGeom>
-          <a:noFill/>
-          <a:ln/>
-        </p:spPr>
-        <p:txBody>
-          <a:bodyPr wrap="square" lIns="0" tIns="0" rIns="0" bIns="0" rtlCol="0" anchor="ctr"/>
-          <a:lstStyle/>
-          <a:p>
-            <a:pPr algn="ctr" indent="0" marL="0">
-              <a:buNone/>
-            </a:pPr>
-            <a:r>
-              <a:rPr lang="en-US" sz="1400" b="1" dirty="0">
-                <a:solidFill>
-                  <a:srgbClr val="1E2761"/>
-                </a:solidFill>
-                <a:latin typeface="Calibri" pitchFamily="34" charset="0"/>
-                <a:ea typeface="Calibri" pitchFamily="34" charset="-122"/>
-                <a:cs typeface="Calibri" pitchFamily="34" charset="-120"/>
-              </a:rPr>
-              <a:t>VEHICLE A</a:t>
-            </a:r>
-            <a:endParaRPr lang="en-US" sz="1400" dirty="0"/>
-          </a:p>
-        </p:txBody>
-      </p:sp>
-      <p:sp>
-        <p:nvSpPr>
-          <p:cNvPr id="5" name="Shape 3"/>
-          <p:cNvSpPr/>
-          <p:nvPr/>
-        </p:nvSpPr>
-        <p:spPr>
-          <a:xfrm>
-            <a:off x="731520" y="1737360"/>
-            <a:ext cx="2834640" cy="960120"/>
-          </a:xfrm>
-          <a:prstGeom prst="roundRect">
-            <a:avLst>
-              <a:gd name="adj" fmla="val 6667"/>
-            </a:avLst>
-          </a:prstGeom>
-          <a:solidFill>
-            <a:srgbClr val="FFFFFF"/>
-          </a:solidFill>
-          <a:ln w="19050">
-            <a:solidFill>
-              <a:srgbClr val="1E2761"/>
-            </a:solidFill>
-            <a:prstDash val="solid"/>
-          </a:ln>
-        </p:spPr>
-      </p:sp>
-      <p:sp>
-        <p:nvSpPr>
-          <p:cNvPr id="6" name="Text 4"/>
-          <p:cNvSpPr txBox="1"/>
-          <p:nvPr/>
-        </p:nvSpPr>
-        <p:spPr>
-          <a:xfrm>
-            <a:off x="822960" y="1828800"/>
-            <a:ext cx="2697480" cy="777240"/>
-          </a:xfrm>
-          <a:prstGeom prst="rect">
-            <a:avLst/>
-          </a:prstGeom>
-          <a:noFill/>
-          <a:ln/>
-        </p:spPr>
-        <p:txBody>
-          <a:bodyPr wrap="square" lIns="0" tIns="0" rIns="0" bIns="0" rtlCol="0" anchor="ctr"/>
-          <a:lstStyle/>
-          <a:p>
-            <a:pPr indent="0" marL="0">
-              <a:buNone/>
-            </a:pPr>
-            <a:r>
-              <a:rPr lang="en-US" sz="1250" b="1" dirty="0">
-                <a:solidFill>
-                  <a:srgbClr val="1E2761"/>
-                </a:solidFill>
-                <a:latin typeface="Calibri" pitchFamily="34" charset="0"/>
-                <a:ea typeface="Calibri" pitchFamily="34" charset="-122"/>
-                <a:cs typeface="Calibri" pitchFamily="34" charset="-120"/>
-              </a:rPr>
-              <a:t>Heltec V4 — radio node</a:t>
-            </a:r>
-            <a:endParaRPr lang="en-US" sz="1250" dirty="0"/>
-          </a:p>
-          <a:p>
-            <a:pPr indent="0" marL="0">
-              <a:buNone/>
-            </a:pPr>
-            <a:r>
-              <a:rPr lang="en-US" sz="1050" dirty="0">
-                <a:solidFill>
-                  <a:srgbClr val="5B6B8A"/>
-                </a:solidFill>
-                <a:latin typeface="Calibri" pitchFamily="34" charset="0"/>
-                <a:ea typeface="Calibri" pitchFamily="34" charset="-122"/>
-                <a:cs typeface="Calibri" pitchFamily="34" charset="-120"/>
-              </a:rPr>
-              <a:t>ESP32-S3 · SX1262 LoRa · GNSS</a:t>
-            </a:r>
-            <a:endParaRPr lang="en-US" sz="1250" dirty="0"/>
-          </a:p>
-        </p:txBody>
-      </p:sp>
-      <p:sp>
-        <p:nvSpPr>
-          <p:cNvPr id="7" name="Text 5"/>
-          <p:cNvSpPr txBox="1"/>
-          <p:nvPr/>
-        </p:nvSpPr>
-        <p:spPr>
-          <a:xfrm>
-            <a:off x="822960" y="2395728"/>
-            <a:ext cx="2697480" cy="274320"/>
-          </a:xfrm>
-          <a:prstGeom prst="rect">
-            <a:avLst/>
-          </a:prstGeom>
-          <a:noFill/>
-          <a:ln/>
-        </p:spPr>
-        <p:txBody>
-          <a:bodyPr wrap="square" lIns="0" tIns="0" rIns="0" bIns="0" rtlCol="0" anchor="ctr"/>
-          <a:lstStyle/>
-          <a:p>
-            <a:pPr indent="0" marL="0">
-              <a:buNone/>
-            </a:pPr>
-            <a:r>
-              <a:rPr lang="en-US" sz="1000" i="1" dirty="0">
-                <a:solidFill>
-                  <a:srgbClr val="5B6B8A"/>
-                </a:solidFill>
-                <a:latin typeface="Calibri" pitchFamily="34" charset="0"/>
-                <a:ea typeface="Calibri" pitchFamily="34" charset="-122"/>
-                <a:cs typeface="Calibri" pitchFamily="34" charset="-120"/>
-              </a:rPr>
-              <a:t>stock Meshtastic firmware</a:t>
-            </a:r>
-            <a:endParaRPr lang="en-US" sz="1000" dirty="0"/>
-          </a:p>
-        </p:txBody>
-      </p:sp>
-      <p:sp>
-        <p:nvSpPr>
-          <p:cNvPr id="8" name="Shape 6"/>
-          <p:cNvSpPr/>
-          <p:nvPr/>
-        </p:nvSpPr>
-        <p:spPr>
-          <a:xfrm>
-            <a:off x="2148840" y="2697480"/>
-            <a:ext cx="0" cy="548640"/>
-          </a:xfrm>
-          <a:prstGeom prst="line">
-            <a:avLst/>
-          </a:prstGeom>
-          <a:noFill/>
-          <a:ln w="25400">
-            <a:solidFill>
-              <a:srgbClr val="E58E1A"/>
-            </a:solidFill>
-            <a:prstDash val="solid"/>
-            <a:tailEnd type="triangle"/>
-          </a:ln>
-        </p:spPr>
-      </p:sp>
-      <p:sp>
-        <p:nvSpPr>
-          <p:cNvPr id="9" name="Text 7"/>
-          <p:cNvSpPr txBox="1"/>
-          <p:nvPr/>
-        </p:nvSpPr>
-        <p:spPr>
-          <a:xfrm>
-            <a:off x="2221992" y="2843784"/>
-            <a:ext cx="1463040" cy="256032"/>
-          </a:xfrm>
-          <a:prstGeom prst="rect">
-            <a:avLst/>
-          </a:prstGeom>
-          <a:noFill/>
-          <a:ln/>
-        </p:spPr>
-        <p:txBody>
-          <a:bodyPr wrap="square" lIns="0" tIns="0" rIns="0" bIns="0" rtlCol="0" anchor="ctr"/>
-          <a:lstStyle/>
-          <a:p>
-            <a:pPr indent="0" marL="0">
-              <a:buNone/>
-            </a:pPr>
-            <a:r>
-              <a:rPr lang="en-US" sz="950" b="1" dirty="0">
-                <a:solidFill>
-                  <a:srgbClr val="E58E1A"/>
-                </a:solidFill>
-                <a:latin typeface="Calibri" pitchFamily="34" charset="0"/>
-                <a:ea typeface="Calibri" pitchFamily="34" charset="-122"/>
-                <a:cs typeface="Calibri" pitchFamily="34" charset="-120"/>
-              </a:rPr>
-              <a:t>BLE</a:t>
-            </a:r>
-            <a:endParaRPr lang="en-US" sz="950" dirty="0"/>
-          </a:p>
-        </p:txBody>
-      </p:sp>
-      <p:sp>
-        <p:nvSpPr>
-          <p:cNvPr id="10" name="Shape 8"/>
-          <p:cNvSpPr/>
-          <p:nvPr/>
-        </p:nvSpPr>
-        <p:spPr>
-          <a:xfrm>
-            <a:off x="731520" y="3246120"/>
-            <a:ext cx="2834640" cy="960120"/>
-          </a:xfrm>
-          <a:prstGeom prst="roundRect">
-            <a:avLst>
-              <a:gd name="adj" fmla="val 6667"/>
-            </a:avLst>
-          </a:prstGeom>
-          <a:solidFill>
-            <a:srgbClr val="FFFFFF"/>
-          </a:solidFill>
-          <a:ln w="19050">
-            <a:solidFill>
-              <a:srgbClr val="6D4BDB"/>
-            </a:solidFill>
-            <a:prstDash val="solid"/>
-          </a:ln>
-        </p:spPr>
-      </p:sp>
-      <p:sp>
-        <p:nvSpPr>
-          <p:cNvPr id="11" name="Text 9"/>
-          <p:cNvSpPr txBox="1"/>
-          <p:nvPr/>
-        </p:nvSpPr>
-        <p:spPr>
-          <a:xfrm>
-            <a:off x="822960" y="3346704"/>
-            <a:ext cx="2697480" cy="731520"/>
-          </a:xfrm>
-          <a:prstGeom prst="rect">
-            <a:avLst/>
-          </a:prstGeom>
-          <a:noFill/>
-          <a:ln/>
-        </p:spPr>
-        <p:txBody>
-          <a:bodyPr wrap="square" lIns="0" tIns="0" rIns="0" bIns="0" rtlCol="0" anchor="ctr"/>
-          <a:lstStyle/>
-          <a:p>
-            <a:pPr indent="0" marL="0">
-              <a:buNone/>
-            </a:pPr>
-            <a:r>
-              <a:rPr lang="en-US" sz="1250" b="1" dirty="0">
-                <a:solidFill>
-                  <a:srgbClr val="1E2761"/>
-                </a:solidFill>
-                <a:latin typeface="Calibri" pitchFamily="34" charset="0"/>
-                <a:ea typeface="Calibri" pitchFamily="34" charset="-122"/>
-                <a:cs typeface="Calibri" pitchFamily="34" charset="-120"/>
-              </a:rPr>
-              <a:t>Waveshare 4.2″ RLCD — display</a:t>
-            </a:r>
-            <a:endParaRPr lang="en-US" sz="1250" dirty="0"/>
-          </a:p>
-          <a:p>
-            <a:pPr indent="0" marL="0">
-              <a:buNone/>
-            </a:pPr>
-            <a:r>
-              <a:rPr lang="en-US" sz="1050" dirty="0">
-                <a:solidFill>
-                  <a:srgbClr val="5B6B8A"/>
-                </a:solidFill>
-                <a:latin typeface="Calibri" pitchFamily="34" charset="0"/>
-                <a:ea typeface="Calibri" pitchFamily="34" charset="-122"/>
-                <a:cs typeface="Calibri" pitchFamily="34" charset="-120"/>
-              </a:rPr>
-              <a:t>our only custom firmware</a:t>
-            </a:r>
-            <a:endParaRPr lang="en-US" sz="1250" dirty="0"/>
-          </a:p>
-        </p:txBody>
-      </p:sp>
-      <p:sp>
-        <p:nvSpPr>
-          <p:cNvPr id="12" name="Shape 10"/>
-          <p:cNvSpPr/>
-          <p:nvPr/>
-        </p:nvSpPr>
-        <p:spPr>
-          <a:xfrm>
-            <a:off x="4572000" y="1234440"/>
-            <a:ext cx="3291840" cy="3200400"/>
-          </a:xfrm>
-          <a:prstGeom prst="roundRect">
-            <a:avLst>
-              <a:gd name="adj" fmla="val 3429"/>
-            </a:avLst>
-          </a:prstGeom>
-          <a:solidFill>
-            <a:srgbClr val="F2F6FC"/>
-          </a:solidFill>
-          <a:ln w="15875">
-            <a:solidFill>
-              <a:srgbClr val="1E2761"/>
-            </a:solidFill>
-            <a:prstDash val="solid"/>
-          </a:ln>
-        </p:spPr>
-      </p:sp>
-      <p:sp>
-        <p:nvSpPr>
-          <p:cNvPr id="13" name="Text 11"/>
-          <p:cNvSpPr txBox="1"/>
-          <p:nvPr/>
-        </p:nvSpPr>
-        <p:spPr>
-          <a:xfrm>
-            <a:off x="4572000" y="1325880"/>
-            <a:ext cx="3291840" cy="320040"/>
-          </a:xfrm>
-          <a:prstGeom prst="rect">
-            <a:avLst/>
-          </a:prstGeom>
-          <a:noFill/>
-          <a:ln/>
-        </p:spPr>
-        <p:txBody>
-          <a:bodyPr wrap="square" lIns="0" tIns="0" rIns="0" bIns="0" rtlCol="0" anchor="ctr"/>
-          <a:lstStyle/>
-          <a:p>
-            <a:pPr algn="ctr" indent="0" marL="0">
-              <a:buNone/>
-            </a:pPr>
-            <a:r>
-              <a:rPr lang="en-US" sz="1400" b="1" dirty="0">
-                <a:solidFill>
-                  <a:srgbClr val="1E2761"/>
-                </a:solidFill>
-                <a:latin typeface="Calibri" pitchFamily="34" charset="0"/>
-                <a:ea typeface="Calibri" pitchFamily="34" charset="-122"/>
-                <a:cs typeface="Calibri" pitchFamily="34" charset="-120"/>
-              </a:rPr>
-              <a:t>VEHICLE B</a:t>
-            </a:r>
-            <a:endParaRPr lang="en-US" sz="1400" dirty="0"/>
-          </a:p>
-        </p:txBody>
-      </p:sp>
-      <p:sp>
-        <p:nvSpPr>
-          <p:cNvPr id="14" name="Shape 12"/>
-          <p:cNvSpPr/>
-          <p:nvPr/>
-        </p:nvSpPr>
-        <p:spPr>
-          <a:xfrm>
-            <a:off x="4800600" y="1737360"/>
-            <a:ext cx="2834640" cy="960120"/>
-          </a:xfrm>
-          <a:prstGeom prst="roundRect">
-            <a:avLst>
-              <a:gd name="adj" fmla="val 6667"/>
-            </a:avLst>
-          </a:prstGeom>
-          <a:solidFill>
-            <a:srgbClr val="FFFFFF"/>
-          </a:solidFill>
-          <a:ln w="19050">
-            <a:solidFill>
-              <a:srgbClr val="1E2761"/>
-            </a:solidFill>
-            <a:prstDash val="solid"/>
-          </a:ln>
-        </p:spPr>
-      </p:sp>
-      <p:sp>
-        <p:nvSpPr>
-          <p:cNvPr id="15" name="Text 13"/>
-          <p:cNvSpPr txBox="1"/>
-          <p:nvPr/>
-        </p:nvSpPr>
-        <p:spPr>
-          <a:xfrm>
-            <a:off x="4892040" y="1828800"/>
-            <a:ext cx="2697480" cy="777240"/>
-          </a:xfrm>
-          <a:prstGeom prst="rect">
-            <a:avLst/>
-          </a:prstGeom>
-          <a:noFill/>
-          <a:ln/>
-        </p:spPr>
-        <p:txBody>
-          <a:bodyPr wrap="square" lIns="0" tIns="0" rIns="0" bIns="0" rtlCol="0" anchor="ctr"/>
-          <a:lstStyle/>
-          <a:p>
-            <a:pPr indent="0" marL="0">
-              <a:buNone/>
-            </a:pPr>
-            <a:r>
-              <a:rPr lang="en-US" sz="1250" b="1" dirty="0">
-                <a:solidFill>
-                  <a:srgbClr val="1E2761"/>
-                </a:solidFill>
-                <a:latin typeface="Calibri" pitchFamily="34" charset="0"/>
-                <a:ea typeface="Calibri" pitchFamily="34" charset="-122"/>
-                <a:cs typeface="Calibri" pitchFamily="34" charset="-120"/>
-              </a:rPr>
-              <a:t>Heltec V4 — radio node</a:t>
-            </a:r>
-            <a:endParaRPr lang="en-US" sz="1250" dirty="0"/>
-          </a:p>
-          <a:p>
-            <a:pPr indent="0" marL="0">
-              <a:buNone/>
-            </a:pPr>
-            <a:r>
-              <a:rPr lang="en-US" sz="1050" dirty="0">
-                <a:solidFill>
-                  <a:srgbClr val="5B6B8A"/>
-                </a:solidFill>
-                <a:latin typeface="Calibri" pitchFamily="34" charset="0"/>
-                <a:ea typeface="Calibri" pitchFamily="34" charset="-122"/>
-                <a:cs typeface="Calibri" pitchFamily="34" charset="-120"/>
-              </a:rPr>
-              <a:t>ESP32-S3 · SX1262 LoRa · GNSS</a:t>
-            </a:r>
-            <a:endParaRPr lang="en-US" sz="1250" dirty="0"/>
-          </a:p>
-        </p:txBody>
-      </p:sp>
-      <p:sp>
-        <p:nvSpPr>
-          <p:cNvPr id="16" name="Text 14"/>
-          <p:cNvSpPr txBox="1"/>
-          <p:nvPr/>
-        </p:nvSpPr>
-        <p:spPr>
-          <a:xfrm>
-            <a:off x="4892040" y="2395728"/>
-            <a:ext cx="2697480" cy="274320"/>
-          </a:xfrm>
-          <a:prstGeom prst="rect">
-            <a:avLst/>
-          </a:prstGeom>
-          <a:noFill/>
-          <a:ln/>
-        </p:spPr>
-        <p:txBody>
-          <a:bodyPr wrap="square" lIns="0" tIns="0" rIns="0" bIns="0" rtlCol="0" anchor="ctr"/>
-          <a:lstStyle/>
-          <a:p>
-            <a:pPr indent="0" marL="0">
-              <a:buNone/>
-            </a:pPr>
-            <a:r>
-              <a:rPr lang="en-US" sz="1000" i="1" dirty="0">
-                <a:solidFill>
-                  <a:srgbClr val="5B6B8A"/>
-                </a:solidFill>
-                <a:latin typeface="Calibri" pitchFamily="34" charset="0"/>
-                <a:ea typeface="Calibri" pitchFamily="34" charset="-122"/>
-                <a:cs typeface="Calibri" pitchFamily="34" charset="-120"/>
-              </a:rPr>
-              <a:t>stock Meshtastic firmware</a:t>
-            </a:r>
-            <a:endParaRPr lang="en-US" sz="1000" dirty="0"/>
-          </a:p>
-        </p:txBody>
-      </p:sp>
-      <p:sp>
-        <p:nvSpPr>
-          <p:cNvPr id="17" name="Shape 15"/>
-          <p:cNvSpPr/>
-          <p:nvPr/>
-        </p:nvSpPr>
-        <p:spPr>
-          <a:xfrm>
-            <a:off x="6217920" y="2697480"/>
-            <a:ext cx="0" cy="548640"/>
-          </a:xfrm>
-          <a:prstGeom prst="line">
-            <a:avLst/>
-          </a:prstGeom>
-          <a:noFill/>
-          <a:ln w="25400">
-            <a:solidFill>
-              <a:srgbClr val="E58E1A"/>
-            </a:solidFill>
-            <a:prstDash val="solid"/>
-            <a:tailEnd type="triangle"/>
-          </a:ln>
-        </p:spPr>
-      </p:sp>
-      <p:sp>
-        <p:nvSpPr>
-          <p:cNvPr id="18" name="Text 16"/>
-          <p:cNvSpPr txBox="1"/>
-          <p:nvPr/>
-        </p:nvSpPr>
-        <p:spPr>
-          <a:xfrm>
-            <a:off x="6291072" y="2843784"/>
-            <a:ext cx="1463040" cy="256032"/>
-          </a:xfrm>
-          <a:prstGeom prst="rect">
-            <a:avLst/>
-          </a:prstGeom>
-          <a:noFill/>
-          <a:ln/>
-        </p:spPr>
-        <p:txBody>
-          <a:bodyPr wrap="square" lIns="0" tIns="0" rIns="0" bIns="0" rtlCol="0" anchor="ctr"/>
-          <a:lstStyle/>
-          <a:p>
-            <a:pPr indent="0" marL="0">
-              <a:buNone/>
-            </a:pPr>
-            <a:r>
-              <a:rPr lang="en-US" sz="950" b="1" dirty="0">
-                <a:solidFill>
-                  <a:srgbClr val="E58E1A"/>
-                </a:solidFill>
-                <a:latin typeface="Calibri" pitchFamily="34" charset="0"/>
-                <a:ea typeface="Calibri" pitchFamily="34" charset="-122"/>
-                <a:cs typeface="Calibri" pitchFamily="34" charset="-120"/>
-              </a:rPr>
-              <a:t>BLE</a:t>
-            </a:r>
-            <a:endParaRPr lang="en-US" sz="950" dirty="0"/>
-          </a:p>
-        </p:txBody>
-      </p:sp>
-      <p:sp>
-        <p:nvSpPr>
-          <p:cNvPr id="19" name="Shape 17"/>
-          <p:cNvSpPr/>
-          <p:nvPr/>
-        </p:nvSpPr>
-        <p:spPr>
-          <a:xfrm>
-            <a:off x="4800600" y="3246120"/>
-            <a:ext cx="2834640" cy="960120"/>
-          </a:xfrm>
-          <a:prstGeom prst="roundRect">
-            <a:avLst>
-              <a:gd name="adj" fmla="val 6667"/>
-            </a:avLst>
-          </a:prstGeom>
-          <a:solidFill>
-            <a:srgbClr val="FFFFFF"/>
-          </a:solidFill>
-          <a:ln w="19050">
-            <a:solidFill>
-              <a:srgbClr val="6D4BDB"/>
-            </a:solidFill>
-            <a:prstDash val="solid"/>
-          </a:ln>
-        </p:spPr>
-      </p:sp>
-      <p:sp>
-        <p:nvSpPr>
-          <p:cNvPr id="20" name="Text 18"/>
-          <p:cNvSpPr txBox="1"/>
-          <p:nvPr/>
-        </p:nvSpPr>
-        <p:spPr>
-          <a:xfrm>
-            <a:off x="4892040" y="3346704"/>
-            <a:ext cx="2697480" cy="731520"/>
-          </a:xfrm>
-          <a:prstGeom prst="rect">
-            <a:avLst/>
-          </a:prstGeom>
-          <a:noFill/>
-          <a:ln/>
-        </p:spPr>
-        <p:txBody>
-          <a:bodyPr wrap="square" lIns="0" tIns="0" rIns="0" bIns="0" rtlCol="0" anchor="ctr"/>
-          <a:lstStyle/>
-          <a:p>
-            <a:pPr indent="0" marL="0">
-              <a:buNone/>
-            </a:pPr>
-            <a:r>
-              <a:rPr lang="en-US" sz="1250" b="1" dirty="0">
-                <a:solidFill>
-                  <a:srgbClr val="1E2761"/>
-                </a:solidFill>
-                <a:latin typeface="Calibri" pitchFamily="34" charset="0"/>
-                <a:ea typeface="Calibri" pitchFamily="34" charset="-122"/>
-                <a:cs typeface="Calibri" pitchFamily="34" charset="-120"/>
-              </a:rPr>
-              <a:t>Waveshare 4.2″ RLCD — display</a:t>
-            </a:r>
-            <a:endParaRPr lang="en-US" sz="1250" dirty="0"/>
-          </a:p>
-          <a:p>
-            <a:pPr indent="0" marL="0">
-              <a:buNone/>
-            </a:pPr>
-            <a:r>
-              <a:rPr lang="en-US" sz="1050" dirty="0">
-                <a:solidFill>
-                  <a:srgbClr val="5B6B8A"/>
-                </a:solidFill>
-                <a:latin typeface="Calibri" pitchFamily="34" charset="0"/>
-                <a:ea typeface="Calibri" pitchFamily="34" charset="-122"/>
-                <a:cs typeface="Calibri" pitchFamily="34" charset="-120"/>
-              </a:rPr>
-              <a:t>our only custom firmware</a:t>
-            </a:r>
-            <a:endParaRPr lang="en-US" sz="1250" dirty="0"/>
-          </a:p>
-        </p:txBody>
-      </p:sp>
-      <p:sp>
-        <p:nvSpPr>
-          <p:cNvPr id="21" name="Shape 19"/>
-          <p:cNvSpPr/>
-          <p:nvPr/>
-        </p:nvSpPr>
-        <p:spPr>
-          <a:xfrm>
-            <a:off x="3794760" y="2212848"/>
-            <a:ext cx="777240" cy="0"/>
-          </a:xfrm>
-          <a:prstGeom prst="line">
-            <a:avLst/>
-          </a:prstGeom>
-          <a:noFill/>
-          <a:ln w="31750">
-            <a:solidFill>
-              <a:srgbClr val="1E2761"/>
-            </a:solidFill>
-            <a:prstDash val="solid"/>
-            <a:headEnd type="triangle"/>
-            <a:tailEnd type="triangle"/>
-          </a:ln>
-        </p:spPr>
-      </p:sp>
-      <p:sp>
-        <p:nvSpPr>
-          <p:cNvPr id="22" name="Text 20"/>
-          <p:cNvSpPr txBox="1"/>
-          <p:nvPr/>
-        </p:nvSpPr>
-        <p:spPr>
-          <a:xfrm>
-            <a:off x="3063240" y="1847088"/>
-            <a:ext cx="2286000" cy="274320"/>
-          </a:xfrm>
-          <a:prstGeom prst="rect">
-            <a:avLst/>
-          </a:prstGeom>
-          <a:solidFill>
-            <a:srgbClr val="FFFFFF"/>
-          </a:solidFill>
-          <a:ln/>
-        </p:spPr>
-        <p:txBody>
-          <a:bodyPr wrap="square" lIns="0" tIns="0" rIns="0" bIns="0" rtlCol="0" anchor="ctr"/>
-          <a:lstStyle/>
-          <a:p>
-            <a:pPr algn="ctr" indent="0" marL="0">
-              <a:buNone/>
-            </a:pPr>
-            <a:r>
-              <a:rPr lang="en-US" sz="1000" b="1" dirty="0">
-                <a:solidFill>
-                  <a:srgbClr val="1E2761"/>
-                </a:solidFill>
-                <a:latin typeface="Calibri" pitchFamily="34" charset="0"/>
-                <a:ea typeface="Calibri" pitchFamily="34" charset="-122"/>
-                <a:cs typeface="Calibri" pitchFamily="34" charset="-120"/>
-              </a:rPr>
-              <a:t>LoRa 915 MHz · AES · mesh</a:t>
-            </a:r>
-            <a:endParaRPr lang="en-US" sz="1000" dirty="0"/>
-          </a:p>
-        </p:txBody>
-      </p:sp>
-      <p:sp>
-        <p:nvSpPr>
-          <p:cNvPr id="23" name="Text 21"/>
-          <p:cNvSpPr txBox="1"/>
-          <p:nvPr/>
-        </p:nvSpPr>
-        <p:spPr>
-          <a:xfrm>
-            <a:off x="8229600" y="1234440"/>
-            <a:ext cx="3474720" cy="365760"/>
-          </a:xfrm>
-          <a:prstGeom prst="rect">
-            <a:avLst/>
-          </a:prstGeom>
-          <a:noFill/>
-          <a:ln/>
-        </p:spPr>
-        <p:txBody>
-          <a:bodyPr wrap="square" lIns="0" tIns="0" rIns="0" bIns="0" rtlCol="0" anchor="ctr"/>
-          <a:lstStyle/>
-          <a:p>
-            <a:pPr indent="0" marL="0">
-              <a:buNone/>
-            </a:pPr>
-            <a:r>
-              <a:rPr lang="en-US" sz="1800" b="1" dirty="0">
-                <a:solidFill>
-                  <a:srgbClr val="1E2761"/>
-                </a:solidFill>
-                <a:latin typeface="Cambria" pitchFamily="34" charset="0"/>
-                <a:ea typeface="Cambria" pitchFamily="34" charset="-122"/>
-                <a:cs typeface="Cambria" pitchFamily="34" charset="-120"/>
-              </a:rPr>
-              <a:t>Why this architecture</a:t>
-            </a:r>
-            <a:endParaRPr lang="en-US" sz="1800" dirty="0"/>
-          </a:p>
-        </p:txBody>
-      </p:sp>
-      <p:sp>
-        <p:nvSpPr>
-          <p:cNvPr id="24" name="Text 22"/>
-          <p:cNvSpPr txBox="1"/>
-          <p:nvPr/>
-        </p:nvSpPr>
-        <p:spPr>
-          <a:xfrm>
-            <a:off x="8229600" y="1645920"/>
-            <a:ext cx="3520440" cy="2834640"/>
-          </a:xfrm>
-          <a:prstGeom prst="rect">
-            <a:avLst/>
-          </a:prstGeom>
-          <a:noFill/>
-          <a:ln/>
-        </p:spPr>
-        <p:txBody>
-          <a:bodyPr wrap="square" lIns="0" tIns="0" rIns="0" bIns="0" rtlCol="0" anchor="ctr"/>
-          <a:lstStyle/>
-          <a:p>
-            <a:pPr marL="342900" indent="-342900">
-              <a:spcAft>
-                <a:spcPts val="800"/>
-              </a:spcAft>
-              <a:buSzPct val="100000"/>
-              <a:buChar char="•"/>
-            </a:pPr>
-            <a:r>
-              <a:rPr lang="en-US" sz="1250" dirty="0">
-                <a:solidFill>
-                  <a:srgbClr val="222A3F"/>
-                </a:solidFill>
-                <a:latin typeface="Calibri" pitchFamily="34" charset="0"/>
-                <a:ea typeface="Calibri" pitchFamily="34" charset="-122"/>
-                <a:cs typeface="Calibri" pitchFamily="34" charset="-120"/>
-              </a:rPr>
-              <a:t>Meshtastic Client API: documented protobuf stream over BLE — the same interface its phone apps use. No firmware fork.</a:t>
-            </a:r>
-            <a:endParaRPr lang="en-US" sz="1250" dirty="0"/>
-          </a:p>
-          <a:p>
-            <a:pPr marL="342900" indent="-342900">
-              <a:spcAft>
-                <a:spcPts val="800"/>
-              </a:spcAft>
-              <a:buSzPct val="100000"/>
-              <a:buChar char="•"/>
-            </a:pPr>
-            <a:r>
-              <a:rPr lang="en-US" sz="1250" dirty="0">
-                <a:solidFill>
-                  <a:srgbClr val="222A3F"/>
-                </a:solidFill>
-                <a:latin typeface="Calibri" pitchFamily="34" charset="0"/>
-                <a:ea typeface="Calibri" pitchFamily="34" charset="-122"/>
-                <a:cs typeface="Calibri" pitchFamily="34" charset="-120"/>
-              </a:rPr>
-              <a:t>One custom-firmware surface (the display). GPS, encryption, radio timing, mesh relay all ship pre-tested.</a:t>
-            </a:r>
-            <a:endParaRPr lang="en-US" sz="1250" dirty="0"/>
-          </a:p>
-          <a:p>
-            <a:pPr marL="342900" indent="-342900">
-              <a:spcAft>
-                <a:spcPts val="800"/>
-              </a:spcAft>
-              <a:buSzPct val="100000"/>
-              <a:buChar char="•"/>
-            </a:pPr>
-            <a:r>
-              <a:rPr lang="en-US" sz="1250" dirty="0">
-                <a:solidFill>
-                  <a:srgbClr val="222A3F"/>
-                </a:solidFill>
-                <a:latin typeface="Calibri" pitchFamily="34" charset="0"/>
-                <a:ea typeface="Calibri" pitchFamily="34" charset="-122"/>
-                <a:cs typeface="Calibri" pitchFamily="34" charset="-120"/>
-              </a:rPr>
-              <a:t>Any third node (ridge relay, hiker) extends range automatically — mesh for free.</a:t>
-            </a:r>
-            <a:endParaRPr lang="en-US" sz="1250" dirty="0"/>
-          </a:p>
-          <a:p>
-            <a:pPr marL="342900" indent="-342900">
-              <a:buSzPct val="100000"/>
-              <a:buChar char="•"/>
-            </a:pPr>
-            <a:r>
-              <a:rPr lang="en-US" sz="1250" dirty="0">
-                <a:solidFill>
-                  <a:srgbClr val="222A3F"/>
-                </a:solidFill>
-                <a:latin typeface="Calibri" pitchFamily="34" charset="0"/>
-                <a:ea typeface="Calibri" pitchFamily="34" charset="-122"/>
-                <a:cs typeface="Calibri" pitchFamily="34" charset="-120"/>
-              </a:rPr>
-              <a:t>Reflective LCD: sunlight-readable on a dash where TFTs wash out; fast enough for a live arrow.</a:t>
-            </a:r>
-            <a:endParaRPr lang="en-US" sz="1250" dirty="0"/>
-          </a:p>
-        </p:txBody>
-      </p:sp>
-      <p:sp>
-        <p:nvSpPr>
-          <p:cNvPr id="25" name="Text 23"/>
-          <p:cNvSpPr txBox="1"/>
-          <p:nvPr/>
-        </p:nvSpPr>
-        <p:spPr>
-          <a:xfrm>
-            <a:off x="502920" y="4709160"/>
-            <a:ext cx="2743200" cy="320040"/>
-          </a:xfrm>
-          <a:prstGeom prst="rect">
-            <a:avLst/>
-          </a:prstGeom>
-          <a:noFill/>
-          <a:ln/>
-        </p:spPr>
-        <p:txBody>
-          <a:bodyPr wrap="square" lIns="0" tIns="0" rIns="0" bIns="0" rtlCol="0" anchor="ctr"/>
-          <a:lstStyle/>
-          <a:p>
-            <a:pPr indent="0" marL="0">
-              <a:buNone/>
-            </a:pPr>
-            <a:r>
-              <a:rPr lang="en-US" sz="1500" b="1" dirty="0">
-                <a:solidFill>
-                  <a:srgbClr val="1E2761"/>
-                </a:solidFill>
-                <a:latin typeface="Cambria" pitchFamily="34" charset="0"/>
-                <a:ea typeface="Cambria" pitchFamily="34" charset="-122"/>
-                <a:cs typeface="Cambria" pitchFamily="34" charset="-120"/>
-              </a:rPr>
-              <a:t>Protocol stack</a:t>
-            </a:r>
-            <a:endParaRPr lang="en-US" sz="1500" dirty="0"/>
-          </a:p>
-        </p:txBody>
-      </p:sp>
-      <p:sp>
-        <p:nvSpPr>
-          <p:cNvPr id="26" name="Shape 24"/>
-          <p:cNvSpPr/>
-          <p:nvPr/>
-        </p:nvSpPr>
-        <p:spPr>
-          <a:xfrm>
-            <a:off x="502920" y="5074920"/>
-            <a:ext cx="2697480" cy="914400"/>
-          </a:xfrm>
-          <a:prstGeom prst="roundRect">
-            <a:avLst>
-              <a:gd name="adj" fmla="val 7000"/>
-            </a:avLst>
-          </a:prstGeom>
-          <a:solidFill>
-            <a:srgbClr val="F2F6FC"/>
-          </a:solidFill>
-          <a:ln w="12700">
-            <a:solidFill>
-              <a:srgbClr val="1E2761"/>
-            </a:solidFill>
-            <a:prstDash val="solid"/>
-          </a:ln>
-        </p:spPr>
-      </p:sp>
-      <p:sp>
-        <p:nvSpPr>
-          <p:cNvPr id="27" name="Text 25"/>
-          <p:cNvSpPr txBox="1"/>
-          <p:nvPr/>
-        </p:nvSpPr>
-        <p:spPr>
-          <a:xfrm>
-            <a:off x="630936" y="5148072"/>
-            <a:ext cx="2468880" cy="274320"/>
-          </a:xfrm>
-          <a:prstGeom prst="rect">
-            <a:avLst/>
-          </a:prstGeom>
-          <a:noFill/>
-          <a:ln/>
-        </p:spPr>
-        <p:txBody>
-          <a:bodyPr wrap="square" lIns="0" tIns="0" rIns="0" bIns="0" rtlCol="0" anchor="ctr"/>
-          <a:lstStyle/>
-          <a:p>
-            <a:pPr indent="0" marL="0">
-              <a:buNone/>
-            </a:pPr>
-            <a:r>
-              <a:rPr lang="en-US" sz="1200" b="1" dirty="0">
-                <a:solidFill>
-                  <a:srgbClr val="E58E1A"/>
-                </a:solidFill>
-                <a:latin typeface="Calibri" pitchFamily="34" charset="0"/>
-                <a:ea typeface="Calibri" pitchFamily="34" charset="-122"/>
-                <a:cs typeface="Calibri" pitchFamily="34" charset="-120"/>
-              </a:rPr>
-              <a:t>APP</a:t>
-            </a:r>
-            <a:endParaRPr lang="en-US" sz="1200" dirty="0"/>
-          </a:p>
-        </p:txBody>
-      </p:sp>
-      <p:sp>
-        <p:nvSpPr>
-          <p:cNvPr id="28" name="Text 26"/>
-          <p:cNvSpPr txBox="1"/>
-          <p:nvPr/>
-        </p:nvSpPr>
-        <p:spPr>
-          <a:xfrm>
-            <a:off x="630936" y="5413248"/>
-            <a:ext cx="2468880" cy="502920"/>
-          </a:xfrm>
-          <a:prstGeom prst="rect">
-            <a:avLst/>
-          </a:prstGeom>
-          <a:noFill/>
-          <a:ln/>
-        </p:spPr>
-        <p:txBody>
-          <a:bodyPr wrap="square" lIns="0" tIns="0" rIns="0" bIns="0" rtlCol="0" anchor="ctr"/>
-          <a:lstStyle/>
-          <a:p>
-            <a:pPr indent="0" marL="0">
-              <a:buNone/>
-            </a:pPr>
-            <a:r>
-              <a:rPr lang="en-US" sz="1050" dirty="0">
-                <a:solidFill>
-                  <a:srgbClr val="222A3F"/>
-                </a:solidFill>
-                <a:latin typeface="Calibri" pitchFamily="34" charset="0"/>
-                <a:ea typeface="Calibri" pitchFamily="34" charset="-122"/>
-                <a:cs typeface="Calibri" pitchFamily="34" charset="-120"/>
-              </a:rPr>
-              <a:t>Position payload (protobuf, ~40 B)</a:t>
-            </a:r>
-            <a:endParaRPr lang="en-US" sz="1050" dirty="0"/>
-          </a:p>
-        </p:txBody>
-      </p:sp>
-      <p:sp>
-        <p:nvSpPr>
-          <p:cNvPr id="29" name="Shape 27"/>
-          <p:cNvSpPr/>
-          <p:nvPr/>
-        </p:nvSpPr>
-        <p:spPr>
-          <a:xfrm>
-            <a:off x="3355848" y="5074920"/>
-            <a:ext cx="2697480" cy="914400"/>
-          </a:xfrm>
-          <a:prstGeom prst="roundRect">
-            <a:avLst>
-              <a:gd name="adj" fmla="val 7000"/>
-            </a:avLst>
-          </a:prstGeom>
-          <a:solidFill>
-            <a:srgbClr val="F2F6FC"/>
-          </a:solidFill>
-          <a:ln w="12700">
-            <a:solidFill>
-              <a:srgbClr val="1E2761"/>
-            </a:solidFill>
-            <a:prstDash val="solid"/>
-          </a:ln>
-        </p:spPr>
-      </p:sp>
-      <p:sp>
-        <p:nvSpPr>
-          <p:cNvPr id="30" name="Text 28"/>
-          <p:cNvSpPr txBox="1"/>
-          <p:nvPr/>
-        </p:nvSpPr>
-        <p:spPr>
-          <a:xfrm>
-            <a:off x="3483864" y="5148072"/>
-            <a:ext cx="2468880" cy="274320"/>
-          </a:xfrm>
-          <a:prstGeom prst="rect">
-            <a:avLst/>
-          </a:prstGeom>
-          <a:noFill/>
-          <a:ln/>
-        </p:spPr>
-        <p:txBody>
-          <a:bodyPr wrap="square" lIns="0" tIns="0" rIns="0" bIns="0" rtlCol="0" anchor="ctr"/>
-          <a:lstStyle/>
-          <a:p>
-            <a:pPr indent="0" marL="0">
-              <a:buNone/>
-            </a:pPr>
-            <a:r>
-              <a:rPr lang="en-US" sz="1200" b="1" dirty="0">
-                <a:solidFill>
-                  <a:srgbClr val="E58E1A"/>
-                </a:solidFill>
-                <a:latin typeface="Calibri" pitchFamily="34" charset="0"/>
-                <a:ea typeface="Calibri" pitchFamily="34" charset="-122"/>
-                <a:cs typeface="Calibri" pitchFamily="34" charset="-120"/>
-              </a:rPr>
-              <a:t>NET</a:t>
-            </a:r>
-            <a:endParaRPr lang="en-US" sz="1200" dirty="0"/>
-          </a:p>
-        </p:txBody>
-      </p:sp>
-      <p:sp>
-        <p:nvSpPr>
-          <p:cNvPr id="31" name="Text 29"/>
-          <p:cNvSpPr txBox="1"/>
-          <p:nvPr/>
-        </p:nvSpPr>
-        <p:spPr>
-          <a:xfrm>
-            <a:off x="3483864" y="5413248"/>
-            <a:ext cx="2468880" cy="502920"/>
-          </a:xfrm>
-          <a:prstGeom prst="rect">
-            <a:avLst/>
-          </a:prstGeom>
-          <a:noFill/>
-          <a:ln/>
-        </p:spPr>
-        <p:txBody>
-          <a:bodyPr wrap="square" lIns="0" tIns="0" rIns="0" bIns="0" rtlCol="0" anchor="ctr"/>
-          <a:lstStyle/>
-          <a:p>
-            <a:pPr indent="0" marL="0">
-              <a:buNone/>
-            </a:pPr>
-            <a:r>
-              <a:rPr lang="en-US" sz="1050" dirty="0">
-                <a:solidFill>
-                  <a:srgbClr val="222A3F"/>
-                </a:solidFill>
-                <a:latin typeface="Calibri" pitchFamily="34" charset="0"/>
-                <a:ea typeface="Calibri" pitchFamily="34" charset="-122"/>
-                <a:cs typeface="Calibri" pitchFamily="34" charset="-120"/>
-              </a:rPr>
-              <a:t>Managed flooding · hop limit 3 · AES-256</a:t>
-            </a:r>
-            <a:endParaRPr lang="en-US" sz="1050" dirty="0"/>
-          </a:p>
-        </p:txBody>
-      </p:sp>
-      <p:sp>
-        <p:nvSpPr>
-          <p:cNvPr id="32" name="Shape 30"/>
-          <p:cNvSpPr/>
-          <p:nvPr/>
-        </p:nvSpPr>
-        <p:spPr>
-          <a:xfrm>
-            <a:off x="6208776" y="5074920"/>
-            <a:ext cx="2697480" cy="914400"/>
-          </a:xfrm>
-          <a:prstGeom prst="roundRect">
-            <a:avLst>
-              <a:gd name="adj" fmla="val 7000"/>
-            </a:avLst>
-          </a:prstGeom>
-          <a:solidFill>
-            <a:srgbClr val="F2F6FC"/>
-          </a:solidFill>
-          <a:ln w="12700">
-            <a:solidFill>
-              <a:srgbClr val="1E2761"/>
-            </a:solidFill>
-            <a:prstDash val="solid"/>
-          </a:ln>
-        </p:spPr>
-      </p:sp>
-      <p:sp>
-        <p:nvSpPr>
-          <p:cNvPr id="33" name="Text 31"/>
-          <p:cNvSpPr txBox="1"/>
-          <p:nvPr/>
-        </p:nvSpPr>
-        <p:spPr>
-          <a:xfrm>
-            <a:off x="6336792" y="5148072"/>
-            <a:ext cx="2468880" cy="274320"/>
-          </a:xfrm>
-          <a:prstGeom prst="rect">
-            <a:avLst/>
-          </a:prstGeom>
-          <a:noFill/>
-          <a:ln/>
-        </p:spPr>
-        <p:txBody>
-          <a:bodyPr wrap="square" lIns="0" tIns="0" rIns="0" bIns="0" rtlCol="0" anchor="ctr"/>
-          <a:lstStyle/>
-          <a:p>
-            <a:pPr indent="0" marL="0">
-              <a:buNone/>
-            </a:pPr>
-            <a:r>
-              <a:rPr lang="en-US" sz="1200" b="1" dirty="0">
-                <a:solidFill>
-                  <a:srgbClr val="E58E1A"/>
-                </a:solidFill>
-                <a:latin typeface="Calibri" pitchFamily="34" charset="0"/>
-                <a:ea typeface="Calibri" pitchFamily="34" charset="-122"/>
-                <a:cs typeface="Calibri" pitchFamily="34" charset="-120"/>
-              </a:rPr>
-              <a:t>MAC</a:t>
-            </a:r>
-            <a:endParaRPr lang="en-US" sz="1200" dirty="0"/>
-          </a:p>
-        </p:txBody>
-      </p:sp>
-      <p:sp>
-        <p:nvSpPr>
-          <p:cNvPr id="34" name="Text 32"/>
-          <p:cNvSpPr txBox="1"/>
-          <p:nvPr/>
-        </p:nvSpPr>
-        <p:spPr>
-          <a:xfrm>
-            <a:off x="6336792" y="5413248"/>
-            <a:ext cx="2468880" cy="502920"/>
-          </a:xfrm>
-          <a:prstGeom prst="rect">
-            <a:avLst/>
-          </a:prstGeom>
-          <a:noFill/>
-          <a:ln/>
-        </p:spPr>
-        <p:txBody>
-          <a:bodyPr wrap="square" lIns="0" tIns="0" rIns="0" bIns="0" rtlCol="0" anchor="ctr"/>
-          <a:lstStyle/>
-          <a:p>
-            <a:pPr indent="0" marL="0">
-              <a:buNone/>
-            </a:pPr>
-            <a:r>
-              <a:rPr lang="en-US" sz="1050" dirty="0">
-                <a:solidFill>
-                  <a:srgbClr val="222A3F"/>
-                </a:solidFill>
-                <a:latin typeface="Calibri" pitchFamily="34" charset="0"/>
-                <a:ea typeface="Calibri" pitchFamily="34" charset="-122"/>
-                <a:cs typeface="Calibri" pitchFamily="34" charset="-120"/>
-              </a:rPr>
-              <a:t>CSMA, SNR-weighted backoff</a:t>
-            </a:r>
-            <a:endParaRPr lang="en-US" sz="1050" dirty="0"/>
-          </a:p>
-        </p:txBody>
-      </p:sp>
-      <p:sp>
-        <p:nvSpPr>
-          <p:cNvPr id="35" name="Shape 33"/>
-          <p:cNvSpPr/>
-          <p:nvPr/>
-        </p:nvSpPr>
-        <p:spPr>
-          <a:xfrm>
-            <a:off x="9061704" y="5074920"/>
-            <a:ext cx="2697480" cy="914400"/>
-          </a:xfrm>
-          <a:prstGeom prst="roundRect">
-            <a:avLst>
-              <a:gd name="adj" fmla="val 7000"/>
-            </a:avLst>
-          </a:prstGeom>
-          <a:solidFill>
-            <a:srgbClr val="1E2761"/>
-          </a:solidFill>
-          <a:ln w="12700">
-            <a:solidFill>
-              <a:srgbClr val="1E2761"/>
-            </a:solidFill>
-            <a:prstDash val="solid"/>
-          </a:ln>
-        </p:spPr>
-      </p:sp>
-      <p:sp>
-        <p:nvSpPr>
-          <p:cNvPr id="36" name="Text 34"/>
-          <p:cNvSpPr txBox="1"/>
-          <p:nvPr/>
-        </p:nvSpPr>
-        <p:spPr>
-          <a:xfrm>
-            <a:off x="9189720" y="5148072"/>
-            <a:ext cx="2468880" cy="274320"/>
-          </a:xfrm>
-          <a:prstGeom prst="rect">
-            <a:avLst/>
-          </a:prstGeom>
-          <a:noFill/>
-          <a:ln/>
-        </p:spPr>
-        <p:txBody>
-          <a:bodyPr wrap="square" lIns="0" tIns="0" rIns="0" bIns="0" rtlCol="0" anchor="ctr"/>
-          <a:lstStyle/>
-          <a:p>
-            <a:pPr indent="0" marL="0">
-              <a:buNone/>
-            </a:pPr>
-            <a:r>
-              <a:rPr lang="en-US" sz="1200" b="1" dirty="0">
-                <a:solidFill>
-                  <a:srgbClr val="E58E1A"/>
-                </a:solidFill>
-                <a:latin typeface="Calibri" pitchFamily="34" charset="0"/>
-                <a:ea typeface="Calibri" pitchFamily="34" charset="-122"/>
-                <a:cs typeface="Calibri" pitchFamily="34" charset="-120"/>
-              </a:rPr>
-              <a:t>PHY</a:t>
-            </a:r>
-            <a:endParaRPr lang="en-US" sz="1200" dirty="0"/>
-          </a:p>
-        </p:txBody>
-      </p:sp>
-      <p:sp>
-        <p:nvSpPr>
-          <p:cNvPr id="37" name="Text 35"/>
-          <p:cNvSpPr txBox="1"/>
-          <p:nvPr/>
-        </p:nvSpPr>
-        <p:spPr>
-          <a:xfrm>
-            <a:off x="9189720" y="5413248"/>
-            <a:ext cx="2468880" cy="502920"/>
-          </a:xfrm>
-          <a:prstGeom prst="rect">
-            <a:avLst/>
-          </a:prstGeom>
-          <a:noFill/>
-          <a:ln/>
-        </p:spPr>
-        <p:txBody>
-          <a:bodyPr wrap="square" lIns="0" tIns="0" rIns="0" bIns="0" rtlCol="0" anchor="ctr"/>
-          <a:lstStyle/>
-          <a:p>
-            <a:pPr indent="0" marL="0">
-              <a:buNone/>
-            </a:pPr>
-            <a:r>
-              <a:rPr lang="en-US" sz="1050" dirty="0">
-                <a:solidFill>
-                  <a:srgbClr val="FFFFFF"/>
-                </a:solidFill>
-                <a:latin typeface="Calibri" pitchFamily="34" charset="0"/>
-                <a:ea typeface="Calibri" pitchFamily="34" charset="-122"/>
-                <a:cs typeface="Calibri" pitchFamily="34" charset="-120"/>
-              </a:rPr>
-              <a:t>LoRa chirp spread spectrum · 915 MHz ISM</a:t>
-            </a:r>
-            <a:endParaRPr lang="en-US" sz="1050" dirty="0"/>
-          </a:p>
-        </p:txBody>
-      </p:sp>
-    </p:spTree>
-  </p:cSld>
-  <p:clrMapOvr>
-    <a:masterClrMapping/>
-  </p:clrMapOvr>
-</p:sld>
-</file>
-
-<file path=ppt/slides/slide3.xml><?xml version="1.0" encoding="utf-8"?>
-<p:sld xmlns:a="http://schemas.openxmlformats.org/drawingml/2006/main" xmlns:r="http://schemas.openxmlformats.org/officeDocument/2006/relationships" xmlns:p="http://schemas.openxmlformats.org/presentationml/2006/main">
-  <p:cSld name="Slide 3">
-    <p:bg>
-      <p:bgPr>
-        <a:solidFill>
-          <a:srgbClr val="FFFFFF"/>
-        </a:solidFill>
-      </p:bgPr>
-    </p:bg>
-    <p:spTree>
-      <p:nvGrpSpPr>
-        <p:cNvPr id="1" name=""/>
-        <p:cNvGrpSpPr/>
-        <p:nvPr/>
-      </p:nvGrpSpPr>
-      <p:grpSpPr>
-        <a:xfrm>
-          <a:off x="0" y="0"/>
-          <a:ext cx="0" cy="0"/>
-          <a:chOff x="0" y="0"/>
-          <a:chExt cx="0" cy="0"/>
-        </a:xfrm>
-      </p:grpSpPr>
-      <p:sp>
-        <p:nvSpPr>
-          <p:cNvPr id="2" name="Text 0"/>
-          <p:cNvSpPr txBox="1"/>
-          <p:nvPr/>
-        </p:nvSpPr>
-        <p:spPr>
-          <a:xfrm>
-            <a:off x="502920" y="256032"/>
-            <a:ext cx="10058400" cy="685800"/>
-          </a:xfrm>
-          <a:prstGeom prst="rect">
-            <a:avLst/>
-          </a:prstGeom>
-          <a:noFill/>
-          <a:ln/>
-        </p:spPr>
-        <p:txBody>
-          <a:bodyPr wrap="square" lIns="0" tIns="0" rIns="0" bIns="0" rtlCol="0" anchor="ctr"/>
-          <a:lstStyle/>
-          <a:p>
-            <a:pPr indent="0" marL="0">
-              <a:buNone/>
-            </a:pPr>
-            <a:r>
-              <a:rPr lang="en-US" sz="3000" b="1" dirty="0">
-                <a:solidFill>
-                  <a:srgbClr val="1E2761"/>
-                </a:solidFill>
-                <a:latin typeface="Cambria" pitchFamily="34" charset="0"/>
-                <a:ea typeface="Cambria" pitchFamily="34" charset="-122"/>
-                <a:cs typeface="Cambria" pitchFamily="34" charset="-120"/>
-              </a:rPr>
               <a:t>Weeks 1–2 · Shared Foundations</a:t>
             </a:r>
             <a:endParaRPr lang="en-US" sz="3000" dirty="0"/>
@@ -4146,7 +2740,7 @@
       </p:sp>
       <p:graphicFrame>
         <p:nvGraphicFramePr>
-          <p:cNvPr id="4" name="Table 0"/>
+          <p:cNvPr id="3" name="Table 0"/>
           <p:cNvGraphicFramePr>
             <a:graphicFrameLocks noGrp="1"/>
           </p:cNvGraphicFramePr>
@@ -5147,6 +3741,304 @@
 </p:sld>
 </file>
 
+<file path=ppt/slides/slide3.xml><?xml version="1.0" encoding="utf-8"?>
+<p:sld xmlns:a="http://schemas.openxmlformats.org/drawingml/2006/main" xmlns:r="http://schemas.openxmlformats.org/officeDocument/2006/relationships" xmlns:p="http://schemas.openxmlformats.org/presentationml/2006/main">
+  <p:cSld name="Slide 3">
+    <p:bg>
+      <p:bgPr>
+        <a:solidFill>
+          <a:srgbClr val="FFFFFF"/>
+        </a:solidFill>
+      </p:bgPr>
+    </p:bg>
+    <p:spTree>
+      <p:nvGrpSpPr>
+        <p:cNvPr id="1" name=""/>
+        <p:cNvGrpSpPr/>
+        <p:nvPr/>
+      </p:nvGrpSpPr>
+      <p:grpSpPr>
+        <a:xfrm>
+          <a:off x="0" y="0"/>
+          <a:ext cx="0" cy="0"/>
+          <a:chOff x="0" y="0"/>
+          <a:chExt cx="0" cy="0"/>
+        </a:xfrm>
+      </p:grpSpPr>
+      <p:sp>
+        <p:nvSpPr>
+          <p:cNvPr id="2" name="Text 0"/>
+          <p:cNvSpPr txBox="1"/>
+          <p:nvPr/>
+        </p:nvSpPr>
+        <p:spPr>
+          <a:xfrm>
+            <a:off x="502920" y="256032"/>
+            <a:ext cx="10058400" cy="685800"/>
+          </a:xfrm>
+          <a:prstGeom prst="rect">
+            <a:avLst/>
+          </a:prstGeom>
+          <a:noFill/>
+          <a:ln/>
+        </p:spPr>
+        <p:txBody>
+          <a:bodyPr wrap="square" lIns="0" tIns="0" rIns="0" bIns="0" rtlCol="0" anchor="ctr"/>
+          <a:lstStyle/>
+          <a:p>
+            <a:pPr indent="0" marL="0">
+              <a:buNone/>
+            </a:pPr>
+            <a:r>
+              <a:rPr lang="en-US" sz="3000" b="1" dirty="0">
+                <a:solidFill>
+                  <a:srgbClr val="1E2761"/>
+                </a:solidFill>
+                <a:latin typeface="Cambria" pitchFamily="34" charset="0"/>
+                <a:ea typeface="Cambria" pitchFamily="34" charset="-122"/>
+                <a:cs typeface="Cambria" pitchFamily="34" charset="-120"/>
+              </a:rPr>
+              <a:t>The Complete System — One Page</a:t>
+            </a:r>
+            <a:endParaRPr lang="en-US" sz="3000" dirty="0"/>
+          </a:p>
+        </p:txBody>
+      </p:sp>
+      <p:pic>
+        <p:nvPicPr>
+          <p:cNvPr id="3" name="Image 0" descr="C:/Users/deogr/Documents/Fall Project/Off-Grid Vehicle dection project/docs/system-diagram.png">    </p:cNvPr>
+          <p:cNvPicPr>
+            <a:picLocks noChangeAspect="1"/>
+          </p:cNvPicPr>
+          <p:nvPr/>
+        </p:nvPicPr>
+        <p:blipFill>
+          <a:blip r:embed="rId1"/>
+          <a:stretch>
+            <a:fillRect/>
+          </a:stretch>
+        </p:blipFill>
+        <p:spPr>
+          <a:xfrm>
+            <a:off x="365760" y="960120"/>
+            <a:ext cx="5742432" cy="5769864"/>
+          </a:xfrm>
+          <a:prstGeom prst="rect">
+            <a:avLst/>
+          </a:prstGeom>
+        </p:spPr>
+      </p:pic>
+      <p:sp>
+        <p:nvSpPr>
+          <p:cNvPr id="4" name="Text 1"/>
+          <p:cNvSpPr txBox="1"/>
+          <p:nvPr/>
+        </p:nvSpPr>
+        <p:spPr>
+          <a:xfrm>
+            <a:off x="6492240" y="1188720"/>
+            <a:ext cx="5120640" cy="365760"/>
+          </a:xfrm>
+          <a:prstGeom prst="rect">
+            <a:avLst/>
+          </a:prstGeom>
+          <a:noFill/>
+          <a:ln/>
+        </p:spPr>
+        <p:txBody>
+          <a:bodyPr wrap="square" lIns="0" tIns="0" rIns="0" bIns="0" rtlCol="0" anchor="ctr"/>
+          <a:lstStyle/>
+          <a:p>
+            <a:pPr indent="0" marL="0">
+              <a:buNone/>
+            </a:pPr>
+            <a:r>
+              <a:rPr lang="en-US" sz="1700" b="1" dirty="0">
+                <a:solidFill>
+                  <a:srgbClr val="1E2761"/>
+                </a:solidFill>
+                <a:latin typeface="Cambria" pitchFamily="34" charset="0"/>
+                <a:ea typeface="Cambria" pitchFamily="34" charset="-122"/>
+                <a:cs typeface="Cambria" pitchFamily="34" charset="-120"/>
+              </a:rPr>
+              <a:t>How to read it</a:t>
+            </a:r>
+            <a:endParaRPr lang="en-US" sz="1700" dirty="0"/>
+          </a:p>
+        </p:txBody>
+      </p:sp>
+      <p:sp>
+        <p:nvSpPr>
+          <p:cNvPr id="5" name="Text 2"/>
+          <p:cNvSpPr txBox="1"/>
+          <p:nvPr/>
+        </p:nvSpPr>
+        <p:spPr>
+          <a:xfrm>
+            <a:off x="6492240" y="1645920"/>
+            <a:ext cx="5166360" cy="3840480"/>
+          </a:xfrm>
+          <a:prstGeom prst="rect">
+            <a:avLst/>
+          </a:prstGeom>
+          <a:noFill/>
+          <a:ln/>
+        </p:spPr>
+        <p:txBody>
+          <a:bodyPr wrap="square" lIns="0" tIns="0" rIns="0" bIns="0" rtlCol="0" anchor="ctr"/>
+          <a:lstStyle/>
+          <a:p>
+            <a:pPr marL="342900" indent="-342900">
+              <a:spcAft>
+                <a:spcPts val="1000"/>
+              </a:spcAft>
+              <a:buSzPct val="100000"/>
+              <a:buChar char="•"/>
+            </a:pPr>
+            <a:r>
+              <a:rPr lang="en-US" sz="1350" dirty="0">
+                <a:solidFill>
+                  <a:srgbClr val="222A3F"/>
+                </a:solidFill>
+                <a:latin typeface="Calibri" pitchFamily="34" charset="0"/>
+                <a:ea typeface="Calibri" pitchFamily="34" charset="-122"/>
+                <a:cs typeface="Calibri" pitchFamily="34" charset="-120"/>
+              </a:rPr>
+              <a:t>Left — one vehicle's hardware: GNSS → Heltec radio (stock Meshtastic) → roof antenna, plus the Waveshare display, all on vehicle 12 V.</a:t>
+            </a:r>
+            <a:endParaRPr lang="en-US" sz="1350" dirty="0"/>
+          </a:p>
+          <a:p>
+            <a:pPr marL="342900" indent="-342900">
+              <a:spcAft>
+                <a:spcPts val="1000"/>
+              </a:spcAft>
+              <a:buSzPct val="100000"/>
+              <a:buChar char="•"/>
+            </a:pPr>
+            <a:r>
+              <a:rPr lang="en-US" sz="1350" dirty="0">
+                <a:solidFill>
+                  <a:srgbClr val="222A3F"/>
+                </a:solidFill>
+                <a:latin typeface="Calibri" pitchFamily="34" charset="0"/>
+                <a:ea typeface="Calibri" pitchFamily="34" charset="-122"/>
+                <a:cs typeface="Calibri" pitchFamily="34" charset="-120"/>
+              </a:rPr>
+              <a:t>Right — inside the display firmware: Deo's protocol/ chain writes TrackerState; Josiah's nav/ + ui/ chain reads it. One writer, one reader.</a:t>
+            </a:r>
+            <a:endParaRPr lang="en-US" sz="1350" dirty="0"/>
+          </a:p>
+          <a:p>
+            <a:pPr marL="342900" indent="-342900">
+              <a:spcAft>
+                <a:spcPts val="1000"/>
+              </a:spcAft>
+              <a:buSzPct val="100000"/>
+              <a:buChar char="•"/>
+            </a:pPr>
+            <a:r>
+              <a:rPr lang="en-US" sz="1350" dirty="0">
+                <a:solidFill>
+                  <a:srgbClr val="222A3F"/>
+                </a:solidFill>
+                <a:latin typeface="Calibri" pitchFamily="34" charset="0"/>
+                <a:ea typeface="Calibri" pitchFamily="34" charset="-122"/>
+                <a:cs typeface="Calibri" pitchFamily="34" charset="-120"/>
+              </a:rPr>
+              <a:t>Bottom — the same system seen as telecom layers: ~40 B application payload · managed-flooding MAC with AES-256 · LoRa CSS PHY decoding 15 dB below the noise floor.</a:t>
+            </a:r>
+            <a:endParaRPr lang="en-US" sz="1350" dirty="0"/>
+          </a:p>
+          <a:p>
+            <a:pPr marL="342900" indent="-342900">
+              <a:buSzPct val="100000"/>
+              <a:buChar char="•"/>
+            </a:pPr>
+            <a:r>
+              <a:rPr lang="en-US" sz="1350" dirty="0">
+                <a:solidFill>
+                  <a:srgbClr val="222A3F"/>
+                </a:solidFill>
+                <a:latin typeface="Calibri" pitchFamily="34" charset="0"/>
+                <a:ea typeface="Calibri" pitchFamily="34" charset="-122"/>
+                <a:cs typeface="Calibri" pitchFamily="34" charset="-120"/>
+              </a:rPr>
+              <a:t>Vehicle B is an identical copy — the symmetry IS the design: no server, no master, no single point of failure.</a:t>
+            </a:r>
+            <a:endParaRPr lang="en-US" sz="1350" dirty="0"/>
+          </a:p>
+        </p:txBody>
+      </p:sp>
+      <p:sp>
+        <p:nvSpPr>
+          <p:cNvPr id="6" name="Shape 3"/>
+          <p:cNvSpPr/>
+          <p:nvPr/>
+        </p:nvSpPr>
+        <p:spPr>
+          <a:xfrm>
+            <a:off x="6492240" y="5623560"/>
+            <a:ext cx="5166360" cy="868680"/>
+          </a:xfrm>
+          <a:prstGeom prst="roundRect">
+            <a:avLst>
+              <a:gd name="adj" fmla="val 10526"/>
+            </a:avLst>
+          </a:prstGeom>
+          <a:solidFill>
+            <a:srgbClr val="1E2761"/>
+          </a:solidFill>
+          <a:ln/>
+        </p:spPr>
+      </p:sp>
+      <p:sp>
+        <p:nvSpPr>
+          <p:cNvPr id="7" name="Text 4"/>
+          <p:cNvSpPr txBox="1"/>
+          <p:nvPr/>
+        </p:nvSpPr>
+        <p:spPr>
+          <a:xfrm>
+            <a:off x="6720840" y="5715000"/>
+            <a:ext cx="4754880" cy="685800"/>
+          </a:xfrm>
+          <a:prstGeom prst="rect">
+            <a:avLst/>
+          </a:prstGeom>
+          <a:noFill/>
+          <a:ln/>
+        </p:spPr>
+        <p:txBody>
+          <a:bodyPr wrap="square" lIns="0" tIns="0" rIns="0" bIns="0" rtlCol="0" anchor="ctr"/>
+          <a:lstStyle/>
+          <a:p>
+            <a:pPr indent="0" marL="0">
+              <a:buNone/>
+            </a:pPr>
+            <a:r>
+              <a:rPr lang="en-US" sz="1250" dirty="0">
+                <a:solidFill>
+                  <a:srgbClr val="FFFFFF"/>
+                </a:solidFill>
+                <a:latin typeface="Calibri" pitchFamily="34" charset="0"/>
+                <a:ea typeface="Calibri" pitchFamily="34" charset="-122"/>
+                <a:cs typeface="Calibri" pitchFamily="34" charset="-120"/>
+              </a:rPr>
+              <a:t>Everything blue/green on the right is the team's only custom code. Everything else ships tested.</a:t>
+            </a:r>
+            <a:endParaRPr lang="en-US" sz="1250" dirty="0"/>
+          </a:p>
+        </p:txBody>
+      </p:sp>
+    </p:spTree>
+  </p:cSld>
+  <p:clrMapOvr>
+    <a:masterClrMapping/>
+  </p:clrMapOvr>
+</p:sld>
+</file>
+
 <file path=ppt/slides/slide4.xml><?xml version="1.0" encoding="utf-8"?>
 <p:sld xmlns:a="http://schemas.openxmlformats.org/drawingml/2006/main" xmlns:r="http://schemas.openxmlformats.org/officeDocument/2006/relationships" xmlns:p="http://schemas.openxmlformats.org/presentationml/2006/main">
   <p:cSld name="Slide 4">
@@ -8884,7 +7776,7 @@
                 <a:ea typeface="Calibri" pitchFamily="34" charset="-122"/>
                 <a:cs typeface="Calibri" pitchFamily="34" charset="-120"/>
               </a:rPr>
-              <a:t>ui_render task (1 Hz)</a:t>
+              <a:t>ui_render task (2 Hz)</a:t>
             </a:r>
             <a:endParaRPr lang="en-US" sz="1150" dirty="0"/>
           </a:p>
@@ -9091,7 +7983,7 @@
                 <a:ea typeface="Calibri" pitchFamily="34" charset="-122"/>
                 <a:cs typeface="Calibri" pitchFamily="34" charset="-120"/>
               </a:rPr>
-              <a:t>partner ID · units · BLE bond keys</a:t>
+              <a:t>radio BLE addr · units · partner ID (planned)</a:t>
             </a:r>
             <a:endParaRPr lang="en-US" sz="1150" dirty="0"/>
           </a:p>
@@ -9319,7 +8211,7 @@
         </p:nvSpPr>
         <p:spPr>
           <a:xfrm>
-            <a:off x="502920" y="1188720"/>
+            <a:off x="502920" y="1143000"/>
             <a:ext cx="2743200" cy="320040"/>
           </a:xfrm>
           <a:prstGeom prst="rect">
@@ -9358,12 +8250,12 @@
         </p:nvSpPr>
         <p:spPr>
           <a:xfrm>
-            <a:off x="502920" y="1600200"/>
-            <a:ext cx="1691640" cy="822960"/>
+            <a:off x="502920" y="1554480"/>
+            <a:ext cx="1645920" cy="868680"/>
           </a:xfrm>
           <a:prstGeom prst="roundRect">
             <a:avLst>
-              <a:gd name="adj" fmla="val 7778"/>
+              <a:gd name="adj" fmla="val 7368"/>
             </a:avLst>
           </a:prstGeom>
           <a:solidFill>
@@ -9385,8 +8277,8 @@
         </p:nvSpPr>
         <p:spPr>
           <a:xfrm>
-            <a:off x="594360" y="1600200"/>
-            <a:ext cx="1508760" cy="822960"/>
+            <a:off x="594360" y="1554480"/>
+            <a:ext cx="1463040" cy="868680"/>
           </a:xfrm>
           <a:prstGeom prst="rect">
             <a:avLst/>
@@ -9410,7 +8302,7 @@
                 <a:ea typeface="Calibri" pitchFamily="34" charset="-122"/>
                 <a:cs typeface="Calibri" pitchFamily="34" charset="-120"/>
               </a:rPr>
-              <a:t>GPS fix</a:t>
+              <a:t>1 · GPS fix</a:t>
             </a:r>
             <a:endParaRPr lang="en-US" sz="1150" dirty="0"/>
           </a:p>
@@ -9441,8 +8333,8 @@
         </p:nvSpPr>
         <p:spPr>
           <a:xfrm>
-            <a:off x="2194560" y="2011680"/>
-            <a:ext cx="594360" cy="0"/>
+            <a:off x="2148840" y="1984248"/>
+            <a:ext cx="502920" cy="0"/>
           </a:xfrm>
           <a:prstGeom prst="line">
             <a:avLst/>
@@ -9465,8 +8357,8 @@
         </p:nvSpPr>
         <p:spPr>
           <a:xfrm>
-            <a:off x="1874520" y="1700784"/>
-            <a:ext cx="1234440" cy="256032"/>
+            <a:off x="1828800" y="1673352"/>
+            <a:ext cx="1143000" cy="256032"/>
           </a:xfrm>
           <a:prstGeom prst="rect">
             <a:avLst/>
@@ -9504,12 +8396,12 @@
         </p:nvSpPr>
         <p:spPr>
           <a:xfrm>
-            <a:off x="2788920" y="1600200"/>
-            <a:ext cx="1920240" cy="822960"/>
+            <a:off x="2651760" y="1554480"/>
+            <a:ext cx="1828800" cy="868680"/>
           </a:xfrm>
           <a:prstGeom prst="roundRect">
             <a:avLst>
-              <a:gd name="adj" fmla="val 7778"/>
+              <a:gd name="adj" fmla="val 7368"/>
             </a:avLst>
           </a:prstGeom>
           <a:solidFill>
@@ -9531,8 +8423,8 @@
         </p:nvSpPr>
         <p:spPr>
           <a:xfrm>
-            <a:off x="2880360" y="1600200"/>
-            <a:ext cx="1737360" cy="822960"/>
+            <a:off x="2743200" y="1554480"/>
+            <a:ext cx="1645920" cy="868680"/>
           </a:xfrm>
           <a:prstGeom prst="rect">
             <a:avLst/>
@@ -9556,7 +8448,7 @@
                 <a:ea typeface="Calibri" pitchFamily="34" charset="-122"/>
                 <a:cs typeface="Calibri" pitchFamily="34" charset="-120"/>
               </a:rPr>
-              <a:t>Meshtastic B</a:t>
+              <a:t>2 · Meshtastic B</a:t>
             </a:r>
             <a:endParaRPr lang="en-US" sz="1150" dirty="0"/>
           </a:p>
@@ -9587,8 +8479,8 @@
         </p:nvSpPr>
         <p:spPr>
           <a:xfrm>
-            <a:off x="4709160" y="2011680"/>
-            <a:ext cx="1371600" cy="0"/>
+            <a:off x="4480560" y="1984248"/>
+            <a:ext cx="1417320" cy="0"/>
           </a:xfrm>
           <a:prstGeom prst="line">
             <a:avLst/>
@@ -9611,8 +8503,8 @@
         </p:nvSpPr>
         <p:spPr>
           <a:xfrm>
-            <a:off x="4389120" y="1700784"/>
-            <a:ext cx="2011680" cy="256032"/>
+            <a:off x="4160520" y="1673352"/>
+            <a:ext cx="2057400" cy="256032"/>
           </a:xfrm>
           <a:prstGeom prst="rect">
             <a:avLst/>
@@ -9650,7 +8542,7 @@
         </p:nvSpPr>
         <p:spPr>
           <a:xfrm>
-            <a:off x="4434840" y="2286000"/>
+            <a:off x="4206240" y="2240280"/>
             <a:ext cx="2011680" cy="457200"/>
           </a:xfrm>
           <a:prstGeom prst="rect">
@@ -9689,12 +8581,12 @@
         </p:nvSpPr>
         <p:spPr>
           <a:xfrm>
-            <a:off x="6080760" y="1600200"/>
-            <a:ext cx="1920240" cy="822960"/>
+            <a:off x="5897880" y="1554480"/>
+            <a:ext cx="1783080" cy="868680"/>
           </a:xfrm>
           <a:prstGeom prst="roundRect">
             <a:avLst>
-              <a:gd name="adj" fmla="val 7778"/>
+              <a:gd name="adj" fmla="val 7368"/>
             </a:avLst>
           </a:prstGeom>
           <a:solidFill>
@@ -9716,8 +8608,8 @@
         </p:nvSpPr>
         <p:spPr>
           <a:xfrm>
-            <a:off x="6172200" y="1600200"/>
-            <a:ext cx="1737360" cy="822960"/>
+            <a:off x="5989320" y="1554480"/>
+            <a:ext cx="1600200" cy="868680"/>
           </a:xfrm>
           <a:prstGeom prst="rect">
             <a:avLst/>
@@ -9741,7 +8633,7 @@
                 <a:ea typeface="Calibri" pitchFamily="34" charset="-122"/>
                 <a:cs typeface="Calibri" pitchFamily="34" charset="-120"/>
               </a:rPr>
-              <a:t>Meshtastic A</a:t>
+              <a:t>3 · Meshtastic A</a:t>
             </a:r>
             <a:endParaRPr lang="en-US" sz="1150" dirty="0"/>
           </a:p>
@@ -9750,7 +8642,7 @@
               <a:buNone/>
             </a:pPr>
             <a:r>
-              <a:rPr lang="en-US" sz="950" dirty="0">
+              <a:rPr lang="en-US" sz="900" dirty="0">
                 <a:solidFill>
                   <a:srgbClr val="5B6B8A"/>
                 </a:solidFill>
@@ -9758,7 +8650,7 @@
                 <a:ea typeface="Calibri" pitchFamily="34" charset="-122"/>
                 <a:cs typeface="Calibri" pitchFamily="34" charset="-120"/>
               </a:rPr>
-              <a:t>our radio · node DB</a:t>
+              <a:t>receives · node DB · queues FromRadio</a:t>
             </a:r>
             <a:endParaRPr lang="en-US" sz="1150" dirty="0"/>
           </a:p>
@@ -9772,7 +8664,7 @@
         </p:nvSpPr>
         <p:spPr>
           <a:xfrm>
-            <a:off x="8001000" y="2011680"/>
+            <a:off x="7680960" y="1984248"/>
             <a:ext cx="1188720" cy="0"/>
           </a:xfrm>
           <a:prstGeom prst="line">
@@ -9796,7 +8688,7 @@
         </p:nvSpPr>
         <p:spPr>
           <a:xfrm>
-            <a:off x="7680960" y="1700784"/>
+            <a:off x="7360920" y="1673352"/>
             <a:ext cx="1828800" cy="256032"/>
           </a:xfrm>
           <a:prstGeom prst="rect">
@@ -9821,7 +8713,7 @@
                 <a:ea typeface="Calibri" pitchFamily="34" charset="-122"/>
                 <a:cs typeface="Calibri" pitchFamily="34" charset="-120"/>
               </a:rPr>
-              <a:t>BLE notify → read</a:t>
+              <a:t>BLE notify → drain</a:t>
             </a:r>
             <a:endParaRPr lang="en-US" sz="950" dirty="0"/>
           </a:p>
@@ -9835,12 +8727,12 @@
         </p:nvSpPr>
         <p:spPr>
           <a:xfrm>
-            <a:off x="9189720" y="1600200"/>
-            <a:ext cx="2286000" cy="822960"/>
+            <a:off x="8869680" y="1554480"/>
+            <a:ext cx="2788920" cy="868680"/>
           </a:xfrm>
           <a:prstGeom prst="roundRect">
             <a:avLst>
-              <a:gd name="adj" fmla="val 7778"/>
+              <a:gd name="adj" fmla="val 7368"/>
             </a:avLst>
           </a:prstGeom>
           <a:solidFill>
@@ -9862,8 +8754,8 @@
         </p:nvSpPr>
         <p:spPr>
           <a:xfrm>
-            <a:off x="9281160" y="1600200"/>
-            <a:ext cx="2103120" cy="822960"/>
+            <a:off x="8961120" y="1554480"/>
+            <a:ext cx="2606040" cy="868680"/>
           </a:xfrm>
           <a:prstGeom prst="rect">
             <a:avLst/>
@@ -9887,7 +8779,7 @@
                 <a:ea typeface="Calibri" pitchFamily="34" charset="-122"/>
                 <a:cs typeface="Calibri" pitchFamily="34" charset="-120"/>
               </a:rPr>
-              <a:t>protocol/ (Deo)</a:t>
+              <a:t>4 · protocol/ (Deo)</a:t>
             </a:r>
             <a:endParaRPr lang="en-US" sz="1150" dirty="0"/>
           </a:p>
@@ -9896,7 +8788,7 @@
               <a:buNone/>
             </a:pPr>
             <a:r>
-              <a:rPr lang="en-US" sz="950" dirty="0">
+              <a:rPr lang="en-US" sz="900" dirty="0">
                 <a:solidFill>
                   <a:srgbClr val="5B6B8A"/>
                 </a:solidFill>
@@ -9904,7 +8796,7 @@
                 <a:ea typeface="Calibri" pitchFamily="34" charset="-122"/>
                 <a:cs typeface="Calibri" pitchFamily="34" charset="-120"/>
               </a:rPr>
-              <a:t>FromRadio drain · nanopb decode</a:t>
+              <a:t>read FromRadio until empty · nanopb decode → node_table</a:t>
             </a:r>
             <a:endParaRPr lang="en-US" sz="1150" dirty="0"/>
           </a:p>
@@ -9918,14 +8810,14 @@
         </p:nvSpPr>
         <p:spPr>
           <a:xfrm>
-            <a:off x="10332720" y="2423160"/>
-            <a:ext cx="0" cy="685800"/>
+            <a:off x="10259568" y="2423160"/>
+            <a:ext cx="0" cy="640080"/>
           </a:xfrm>
           <a:prstGeom prst="line">
             <a:avLst/>
           </a:prstGeom>
           <a:noFill/>
-          <a:ln w="22225">
+          <a:ln w="25400">
             <a:solidFill>
               <a:srgbClr val="1E2761"/>
             </a:solidFill>
@@ -9941,14 +8833,14 @@
         </p:nvSpPr>
         <p:spPr>
           <a:xfrm>
-            <a:off x="6035040" y="3108960"/>
-            <a:ext cx="4297680" cy="0"/>
+            <a:off x="1737360" y="3063240"/>
+            <a:ext cx="8522208" cy="0"/>
           </a:xfrm>
           <a:prstGeom prst="line">
             <a:avLst/>
           </a:prstGeom>
           <a:noFill/>
-          <a:ln w="22225">
+          <a:ln w="25400">
             <a:solidFill>
               <a:srgbClr val="1E2761"/>
             </a:solidFill>
@@ -9964,14 +8856,14 @@
         </p:nvSpPr>
         <p:spPr>
           <a:xfrm>
-            <a:off x="6035040" y="3108960"/>
+            <a:off x="1737360" y="3063240"/>
             <a:ext cx="0" cy="457200"/>
           </a:xfrm>
           <a:prstGeom prst="line">
             <a:avLst/>
           </a:prstGeom>
           <a:noFill/>
-          <a:ln w="22225">
+          <a:ln w="25400">
             <a:solidFill>
               <a:srgbClr val="1E2761"/>
             </a:solidFill>
@@ -9988,8 +8880,8 @@
         </p:nvSpPr>
         <p:spPr>
           <a:xfrm>
-            <a:off x="502920" y="3246120"/>
-            <a:ext cx="3657600" cy="320040"/>
+            <a:off x="1920240" y="3145536"/>
+            <a:ext cx="3657600" cy="292608"/>
           </a:xfrm>
           <a:prstGeom prst="rect">
             <a:avLst/>
@@ -10027,12 +8919,12 @@
         </p:nvSpPr>
         <p:spPr>
           <a:xfrm>
-            <a:off x="4892040" y="3611880"/>
-            <a:ext cx="2286000" cy="822960"/>
+            <a:off x="502920" y="3520440"/>
+            <a:ext cx="2468880" cy="868680"/>
           </a:xfrm>
           <a:prstGeom prst="roundRect">
             <a:avLst>
-              <a:gd name="adj" fmla="val 7778"/>
+              <a:gd name="adj" fmla="val 7368"/>
             </a:avLst>
           </a:prstGeom>
           <a:solidFill>
@@ -10054,8 +8946,8 @@
         </p:nvSpPr>
         <p:spPr>
           <a:xfrm>
-            <a:off x="4983480" y="3611880"/>
-            <a:ext cx="2103120" cy="822960"/>
+            <a:off x="594360" y="3520440"/>
+            <a:ext cx="2286000" cy="868680"/>
           </a:xfrm>
           <a:prstGeom prst="rect">
             <a:avLst/>
@@ -10079,7 +8971,7 @@
                 <a:ea typeface="Calibri" pitchFamily="34" charset="-122"/>
                 <a:cs typeface="Calibri" pitchFamily="34" charset="-120"/>
               </a:rPr>
-              <a:t>TrackerState</a:t>
+              <a:t>5 · TrackerState</a:t>
             </a:r>
             <a:endParaRPr lang="en-US" sz="1150" dirty="0"/>
           </a:p>
@@ -10088,7 +8980,7 @@
               <a:buNone/>
             </a:pPr>
             <a:r>
-              <a:rPr lang="en-US" sz="950" dirty="0">
+              <a:rPr lang="en-US" sz="900" dirty="0">
                 <a:solidFill>
                   <a:srgbClr val="CADCFC"/>
                 </a:solidFill>
@@ -10096,7 +8988,7 @@
                 <a:ea typeface="Calibri" pitchFamily="34" charset="-122"/>
                 <a:cs typeface="Calibri" pitchFamily="34" charset="-120"/>
               </a:rPr>
-              <a:t>self + partner + link (mutex)</a:t>
+              <a:t>self · partner · ages · clock (mutex · 1 Hz publish)</a:t>
             </a:r>
             <a:endParaRPr lang="en-US" sz="1150" dirty="0"/>
           </a:p>
@@ -10110,8 +9002,8 @@
         </p:nvSpPr>
         <p:spPr>
           <a:xfrm>
-            <a:off x="3977640" y="4023360"/>
-            <a:ext cx="868680" cy="0"/>
+            <a:off x="2971800" y="3950208"/>
+            <a:ext cx="548640" cy="0"/>
           </a:xfrm>
           <a:prstGeom prst="line">
             <a:avLst/>
@@ -10134,12 +9026,12 @@
         </p:nvSpPr>
         <p:spPr>
           <a:xfrm>
-            <a:off x="1508760" y="3611880"/>
-            <a:ext cx="2468880" cy="822960"/>
+            <a:off x="3520440" y="3520440"/>
+            <a:ext cx="2834640" cy="868680"/>
           </a:xfrm>
           <a:prstGeom prst="roundRect">
             <a:avLst>
-              <a:gd name="adj" fmla="val 7778"/>
+              <a:gd name="adj" fmla="val 7368"/>
             </a:avLst>
           </a:prstGeom>
           <a:solidFill>
@@ -10161,8 +9053,8 @@
         </p:nvSpPr>
         <p:spPr>
           <a:xfrm>
-            <a:off x="1600200" y="3611880"/>
-            <a:ext cx="2286000" cy="822960"/>
+            <a:off x="3611880" y="3520440"/>
+            <a:ext cx="2651760" cy="868680"/>
           </a:xfrm>
           <a:prstGeom prst="rect">
             <a:avLst/>
@@ -10186,7 +9078,7 @@
                 <a:ea typeface="Calibri" pitchFamily="34" charset="-122"/>
                 <a:cs typeface="Calibri" pitchFamily="34" charset="-120"/>
               </a:rPr>
-              <a:t>nav engine</a:t>
+              <a:t>6 · nav engine (Josiah)</a:t>
             </a:r>
             <a:endParaRPr lang="en-US" sz="1150" dirty="0"/>
           </a:p>
@@ -10195,7 +9087,7 @@
               <a:buNone/>
             </a:pPr>
             <a:r>
-              <a:rPr lang="en-US" sz="950" dirty="0">
+              <a:rPr lang="en-US" sz="900" dirty="0">
                 <a:solidFill>
                   <a:srgbClr val="5B6B8A"/>
                 </a:solidFill>
@@ -10203,7 +9095,7 @@
                 <a:ea typeface="Calibri" pitchFamily="34" charset="-122"/>
                 <a:cs typeface="Calibri" pitchFamily="34" charset="-120"/>
               </a:rPr>
-              <a:t>d = haversine · arrow = θ − COG</a:t>
+              <a:t>d = haversine · arrow = θ − COG · rose fallback when stopped</a:t>
             </a:r>
             <a:endParaRPr lang="en-US" sz="1150" dirty="0"/>
           </a:p>
@@ -10216,9 +9108,9 @@
           <p:nvPr/>
         </p:nvSpPr>
         <p:spPr>
-          <a:xfrm flipH="1">
-            <a:off x="1005840" y="4023360"/>
-            <a:ext cx="502920" cy="0"/>
+          <a:xfrm>
+            <a:off x="6355080" y="3950208"/>
+            <a:ext cx="548640" cy="0"/>
           </a:xfrm>
           <a:prstGeom prst="line">
             <a:avLst/>
@@ -10226,7 +9118,7 @@
           <a:noFill/>
           <a:ln w="25400">
             <a:solidFill>
-              <a:srgbClr val="6D4BDB"/>
+              <a:srgbClr val="1E2761"/>
             </a:solidFill>
             <a:prstDash val="solid"/>
             <a:tailEnd type="triangle"/>
@@ -10241,12 +9133,12 @@
         </p:nvSpPr>
         <p:spPr>
           <a:xfrm>
-            <a:off x="502920" y="4846320"/>
-            <a:ext cx="2468880" cy="822960"/>
+            <a:off x="6903720" y="3520440"/>
+            <a:ext cx="3017520" cy="868680"/>
           </a:xfrm>
           <a:prstGeom prst="roundRect">
             <a:avLst>
-              <a:gd name="adj" fmla="val 7778"/>
+              <a:gd name="adj" fmla="val 7368"/>
             </a:avLst>
           </a:prstGeom>
           <a:solidFill>
@@ -10268,8 +9160,8 @@
         </p:nvSpPr>
         <p:spPr>
           <a:xfrm>
-            <a:off x="594360" y="4846320"/>
-            <a:ext cx="2286000" cy="822960"/>
+            <a:off x="6995160" y="3520440"/>
+            <a:ext cx="2834640" cy="868680"/>
           </a:xfrm>
           <a:prstGeom prst="rect">
             <a:avLst/>
@@ -10293,7 +9185,7 @@
                 <a:ea typeface="Calibri" pitchFamily="34" charset="-122"/>
                 <a:cs typeface="Calibri" pitchFamily="34" charset="-120"/>
               </a:rPr>
-              <a:t>RLCD redraw @ 1 Hz</a:t>
+              <a:t>7 · RLCD redraw @ 2 Hz</a:t>
             </a:r>
             <a:endParaRPr lang="en-US" sz="1150" dirty="0"/>
           </a:p>
@@ -10310,7 +9202,7 @@
                 <a:ea typeface="Calibri" pitchFamily="34" charset="-122"/>
                 <a:cs typeface="Calibri" pitchFamily="34" charset="-120"/>
               </a:rPr>
-              <a:t>arrow · distance · age · link</a:t>
+              <a:t>arrow · miles · age · link · local clock</a:t>
             </a:r>
             <a:endParaRPr lang="en-US" sz="1150" dirty="0"/>
           </a:p>
@@ -10324,36 +9216,12 @@
         </p:nvSpPr>
         <p:spPr>
           <a:xfrm>
-            <a:off x="1005840" y="4434840"/>
-            <a:ext cx="0" cy="411480"/>
-          </a:xfrm>
-          <a:prstGeom prst="line">
-            <a:avLst/>
-          </a:prstGeom>
-          <a:noFill/>
-          <a:ln w="25400">
-            <a:solidFill>
-              <a:srgbClr val="6D4BDB"/>
-            </a:solidFill>
-            <a:prstDash val="solid"/>
-            <a:tailEnd type="triangle"/>
-          </a:ln>
-        </p:spPr>
-      </p:sp>
-      <p:sp>
-        <p:nvSpPr>
-          <p:cNvPr id="34" name="Shape 32"/>
-          <p:cNvSpPr/>
-          <p:nvPr/>
-        </p:nvSpPr>
-        <p:spPr>
-          <a:xfrm>
-            <a:off x="4206240" y="4846320"/>
-            <a:ext cx="7498080" cy="1417320"/>
+            <a:off x="502920" y="4800600"/>
+            <a:ext cx="11155680" cy="1463040"/>
           </a:xfrm>
           <a:prstGeom prst="roundRect">
             <a:avLst>
-              <a:gd name="adj" fmla="val 6452"/>
+              <a:gd name="adj" fmla="val 6250"/>
             </a:avLst>
           </a:prstGeom>
           <a:solidFill>
@@ -10369,14 +9237,14 @@
       </p:sp>
       <p:sp>
         <p:nvSpPr>
-          <p:cNvPr id="35" name="Text 33"/>
-          <p:cNvSpPr txBox="1"/>
-          <p:nvPr/>
-        </p:nvSpPr>
-        <p:spPr>
-          <a:xfrm>
-            <a:off x="4434840" y="4983480"/>
-            <a:ext cx="7086600" cy="1188720"/>
+          <p:cNvPr id="34" name="Text 32"/>
+          <p:cNvSpPr txBox="1"/>
+          <p:nvPr/>
+        </p:nvSpPr>
+        <p:spPr>
+          <a:xfrm>
+            <a:off x="731520" y="4956048"/>
+            <a:ext cx="10698480" cy="1188720"/>
           </a:xfrm>
           <a:prstGeom prst="rect">
             <a:avLst/>
@@ -10404,7 +9272,7 @@
                 <a:ea typeface="Calibri" pitchFamily="34" charset="-122"/>
                 <a:cs typeface="Calibri" pitchFamily="34" charset="-120"/>
               </a:rPr>
-              <a:t>Own position takes the same path minus the LoRa hop — the local radio streams its own GPS over BLE too.</a:t>
+              <a:t>Own position rides the SAME pipeline minus steps 2–3 — the local radio streams its own GPS over BLE too, so ME and PARTNER stay symmetric.</a:t>
             </a:r>
             <a:endParaRPr lang="en-US" sz="1150" dirty="0"/>
           </a:p>
@@ -10443,7 +9311,7 @@
                 <a:ea typeface="Calibri" pitchFamily="34" charset="-122"/>
                 <a:cs typeface="Calibri" pitchFamily="34" charset="-120"/>
               </a:rPr>
-              <a:t>End-to-end latency ≈ airtime (~0.5 s) — negligible next to the 30–60 s broadcast interval.</a:t>
+              <a:t>End-to-end latency ≈ airtime (~0.5 s) — negligible next to the 30–60 s broadcast cadence.</a:t>
             </a:r>
             <a:endParaRPr lang="en-US" sz="1150" dirty="0"/>
           </a:p>
@@ -10658,7 +9526,7 @@
                 <a:ea typeface="Calibri" pitchFamily="34" charset="-122"/>
                 <a:cs typeface="Calibri" pitchFamily="34" charset="-120"/>
               </a:rPr>
-              <a:t>search for the radio</a:t>
+              <a:t>direct connect by NVS addr · scan fallback</a:t>
             </a:r>
             <a:endParaRPr lang="en-US" sz="1150" dirty="0"/>
           </a:p>
@@ -10741,7 +9609,7 @@
                 <a:ea typeface="Calibri" pitchFamily="34" charset="-122"/>
                 <a:cs typeface="Calibri" pitchFamily="34" charset="-120"/>
               </a:rPr>
-              <a:t>10 s timeout</a:t>
+              <a:t>3 tries · 10 s timeout</a:t>
             </a:r>
             <a:endParaRPr lang="en-US" sz="1150" dirty="0"/>
           </a:p>
@@ -10824,7 +9692,7 @@
                 <a:ea typeface="Calibri" pitchFamily="34" charset="-122"/>
                 <a:cs typeface="Calibri" pitchFamily="34" charset="-120"/>
               </a:rPr>
-              <a:t>PIN once · keys → NVS</a:t>
+              <a:t>encrypted pairing (Just Works, NO_PIN)</a:t>
             </a:r>
             <a:endParaRPr lang="en-US" sz="1150" dirty="0"/>
           </a:p>
@@ -10907,7 +9775,7 @@
                 <a:ea typeface="Calibri" pitchFamily="34" charset="-122"/>
                 <a:cs typeface="Calibri" pitchFamily="34" charset="-120"/>
               </a:rPr>
-              <a:t>fromNum notifications</a:t>
+              <a:t>fromNum notify + want_config handshake</a:t>
             </a:r>
             <a:endParaRPr lang="en-US" sz="1150" dirty="0"/>
           </a:p>

--- a/docs/presentations/Group9_Presentation2_Weeks1-2.pptx
+++ b/docs/presentations/Group9_Presentation2_Weeks1-2.pptx
@@ -4163,831 +4163,72 @@
           </a:p>
         </p:txBody>
       </p:sp>
-      <p:sp>
-        <p:nvSpPr>
-          <p:cNvPr id="5" name="Shape 3"/>
-          <p:cNvSpPr/>
-          <p:nvPr/>
-        </p:nvSpPr>
-        <p:spPr>
-          <a:xfrm>
-            <a:off x="914400" y="2103120"/>
-            <a:ext cx="2926080" cy="2468880"/>
-          </a:xfrm>
-          <a:prstGeom prst="roundRect">
-            <a:avLst>
-              <a:gd name="adj" fmla="val 3704"/>
-            </a:avLst>
-          </a:prstGeom>
-          <a:solidFill>
-            <a:srgbClr val="F2F6FC"/>
-          </a:solidFill>
-          <a:ln w="15875">
-            <a:solidFill>
-              <a:srgbClr val="1E2761"/>
-            </a:solidFill>
-            <a:prstDash val="solid"/>
-          </a:ln>
-        </p:spPr>
-      </p:sp>
-      <p:sp>
-        <p:nvSpPr>
-          <p:cNvPr id="6" name="Text 4"/>
-          <p:cNvSpPr txBox="1"/>
-          <p:nvPr/>
-        </p:nvSpPr>
-        <p:spPr>
-          <a:xfrm>
-            <a:off x="914400" y="2194560"/>
-            <a:ext cx="2926080" cy="292608"/>
-          </a:xfrm>
-          <a:prstGeom prst="rect">
-            <a:avLst/>
-          </a:prstGeom>
-          <a:noFill/>
-          <a:ln/>
-        </p:spPr>
-        <p:txBody>
-          <a:bodyPr wrap="square" lIns="0" tIns="0" rIns="0" bIns="0" rtlCol="0" anchor="ctr"/>
-          <a:lstStyle/>
-          <a:p>
-            <a:pPr algn="ctr" indent="0" marL="0">
-              <a:buNone/>
-            </a:pPr>
-            <a:r>
-              <a:rPr lang="en-US" sz="1300" b="1" dirty="0">
-                <a:solidFill>
-                  <a:srgbClr val="1E2761"/>
+      <p:pic>
+        <p:nvPicPr>
+          <p:cNvPr id="5" name="Image 0" descr="C:/Users/deogr/AppData/Local/Temp/claude/C--Users-deogr-Documents-Fall-Project-Off-Grid-Vehicle-dection-project/e8b2e8fa-1513-4aa8-a8f6-ce4fcd20e664/scratchpad/mermaid_png/diag1.png">    </p:cNvPr>
+          <p:cNvPicPr>
+            <a:picLocks noChangeAspect="1"/>
+          </p:cNvPicPr>
+          <p:nvPr/>
+        </p:nvPicPr>
+        <p:blipFill>
+          <a:blip r:embed="rId1"/>
+          <a:stretch>
+            <a:fillRect/>
+          </a:stretch>
+        </p:blipFill>
+        <p:spPr>
+          <a:xfrm>
+            <a:off x="411480" y="1417320"/>
+            <a:ext cx="7863840" cy="2688336"/>
+          </a:xfrm>
+          <a:prstGeom prst="rect">
+            <a:avLst/>
+          </a:prstGeom>
+        </p:spPr>
+      </p:pic>
+      <p:sp>
+        <p:nvSpPr>
+          <p:cNvPr id="6" name="Text 3"/>
+          <p:cNvSpPr txBox="1"/>
+          <p:nvPr/>
+        </p:nvSpPr>
+        <p:spPr>
+          <a:xfrm>
+            <a:off x="502920" y="4251960"/>
+            <a:ext cx="7680960" cy="320040"/>
+          </a:xfrm>
+          <a:prstGeom prst="rect">
+            <a:avLst/>
+          </a:prstGeom>
+          <a:noFill/>
+          <a:ln/>
+        </p:spPr>
+        <p:txBody>
+          <a:bodyPr wrap="square" lIns="0" tIns="0" rIns="0" bIns="0" rtlCol="0" anchor="ctr"/>
+          <a:lstStyle/>
+          <a:p>
+            <a:pPr indent="0" marL="0">
+              <a:buNone/>
+            </a:pPr>
+            <a:r>
+              <a:rPr lang="en-US" sz="1150" i="1" dirty="0">
+                <a:solidFill>
+                  <a:srgbClr val="5B6B8A"/>
                 </a:solidFill>
                 <a:latin typeface="Calibri" pitchFamily="34" charset="0"/>
                 <a:ea typeface="Calibri" pitchFamily="34" charset="-122"/>
                 <a:cs typeface="Calibri" pitchFamily="34" charset="-120"/>
               </a:rPr>
-              <a:t>VEHICLE A</a:t>
-            </a:r>
-            <a:endParaRPr lang="en-US" sz="1300" dirty="0"/>
-          </a:p>
-        </p:txBody>
-      </p:sp>
-      <p:sp>
-        <p:nvSpPr>
-          <p:cNvPr id="7" name="Shape 5"/>
-          <p:cNvSpPr/>
-          <p:nvPr/>
-        </p:nvSpPr>
-        <p:spPr>
-          <a:xfrm>
-            <a:off x="1143000" y="2560320"/>
-            <a:ext cx="2468880" cy="685800"/>
-          </a:xfrm>
-          <a:prstGeom prst="roundRect">
-            <a:avLst>
-              <a:gd name="adj" fmla="val 9333"/>
-            </a:avLst>
-          </a:prstGeom>
-          <a:solidFill>
-            <a:srgbClr val="FFFFFF"/>
-          </a:solidFill>
-          <a:ln w="19050">
-            <a:solidFill>
-              <a:srgbClr val="1E2761"/>
-            </a:solidFill>
-            <a:prstDash val="solid"/>
-          </a:ln>
-        </p:spPr>
-      </p:sp>
-      <p:sp>
-        <p:nvSpPr>
-          <p:cNvPr id="8" name="Text 6"/>
-          <p:cNvSpPr txBox="1"/>
-          <p:nvPr/>
-        </p:nvSpPr>
-        <p:spPr>
-          <a:xfrm>
-            <a:off x="1234440" y="2560320"/>
-            <a:ext cx="2286000" cy="685800"/>
-          </a:xfrm>
-          <a:prstGeom prst="rect">
-            <a:avLst/>
-          </a:prstGeom>
-          <a:noFill/>
-          <a:ln/>
-        </p:spPr>
-        <p:txBody>
-          <a:bodyPr wrap="square" lIns="0" tIns="0" rIns="0" bIns="0" rtlCol="0" anchor="ctr"/>
-          <a:lstStyle/>
-          <a:p>
-            <a:pPr algn="ctr" indent="0" marL="0">
-              <a:buNone/>
-            </a:pPr>
-            <a:r>
-              <a:rPr lang="en-US" sz="1150" b="1" dirty="0">
-                <a:solidFill>
-                  <a:srgbClr val="1E2761"/>
-                </a:solidFill>
-                <a:latin typeface="Calibri" pitchFamily="34" charset="0"/>
-                <a:ea typeface="Calibri" pitchFamily="34" charset="-122"/>
-                <a:cs typeface="Calibri" pitchFamily="34" charset="-120"/>
-              </a:rPr>
-              <a:t>Radio node</a:t>
+              <a:t>Position broadcasts flow symmetrically — identical installs, no master. (ARCHITECTURE.md §1)</a:t>
             </a:r>
             <a:endParaRPr lang="en-US" sz="1150" dirty="0"/>
           </a:p>
-          <a:p>
-            <a:pPr algn="ctr" indent="0" marL="0">
-              <a:buNone/>
-            </a:pPr>
-            <a:r>
-              <a:rPr lang="en-US" sz="950" dirty="0">
-                <a:solidFill>
-                  <a:srgbClr val="5B6B8A"/>
-                </a:solidFill>
-                <a:latin typeface="Calibri" pitchFamily="34" charset="0"/>
-                <a:ea typeface="Calibri" pitchFamily="34" charset="-122"/>
-                <a:cs typeface="Calibri" pitchFamily="34" charset="-120"/>
-              </a:rPr>
-              <a:t>Meshtastic · GNSS</a:t>
-            </a:r>
-            <a:endParaRPr lang="en-US" sz="1150" dirty="0"/>
-          </a:p>
-        </p:txBody>
-      </p:sp>
-      <p:sp>
-        <p:nvSpPr>
-          <p:cNvPr id="9" name="Shape 7"/>
-          <p:cNvSpPr/>
-          <p:nvPr/>
-        </p:nvSpPr>
-        <p:spPr>
-          <a:xfrm>
-            <a:off x="2377440" y="3246120"/>
-            <a:ext cx="0" cy="457200"/>
-          </a:xfrm>
-          <a:prstGeom prst="line">
-            <a:avLst/>
-          </a:prstGeom>
-          <a:noFill/>
-          <a:ln w="25400">
-            <a:solidFill>
-              <a:srgbClr val="E58E1A"/>
-            </a:solidFill>
-            <a:prstDash val="solid"/>
-            <a:tailEnd type="triangle"/>
-          </a:ln>
-        </p:spPr>
-      </p:sp>
-      <p:sp>
-        <p:nvSpPr>
-          <p:cNvPr id="10" name="Text 8"/>
-          <p:cNvSpPr txBox="1"/>
-          <p:nvPr/>
-        </p:nvSpPr>
-        <p:spPr>
-          <a:xfrm>
-            <a:off x="2450592" y="3346704"/>
-            <a:ext cx="1463040" cy="256032"/>
-          </a:xfrm>
-          <a:prstGeom prst="rect">
-            <a:avLst/>
-          </a:prstGeom>
-          <a:noFill/>
-          <a:ln/>
-        </p:spPr>
-        <p:txBody>
-          <a:bodyPr wrap="square" lIns="0" tIns="0" rIns="0" bIns="0" rtlCol="0" anchor="ctr"/>
-          <a:lstStyle/>
-          <a:p>
-            <a:pPr indent="0" marL="0">
-              <a:buNone/>
-            </a:pPr>
-            <a:r>
-              <a:rPr lang="en-US" sz="950" b="1" dirty="0">
-                <a:solidFill>
-                  <a:srgbClr val="E58E1A"/>
-                </a:solidFill>
-                <a:latin typeface="Calibri" pitchFamily="34" charset="0"/>
-                <a:ea typeface="Calibri" pitchFamily="34" charset="-122"/>
-                <a:cs typeface="Calibri" pitchFamily="34" charset="-120"/>
-              </a:rPr>
-              <a:t>BLE</a:t>
-            </a:r>
-            <a:endParaRPr lang="en-US" sz="950" dirty="0"/>
-          </a:p>
-        </p:txBody>
-      </p:sp>
-      <p:sp>
-        <p:nvSpPr>
-          <p:cNvPr id="11" name="Shape 9"/>
-          <p:cNvSpPr/>
-          <p:nvPr/>
-        </p:nvSpPr>
-        <p:spPr>
-          <a:xfrm>
-            <a:off x="1143000" y="3703320"/>
-            <a:ext cx="2468880" cy="685800"/>
-          </a:xfrm>
-          <a:prstGeom prst="roundRect">
-            <a:avLst>
-              <a:gd name="adj" fmla="val 9333"/>
-            </a:avLst>
-          </a:prstGeom>
-          <a:solidFill>
-            <a:srgbClr val="FFFFFF"/>
-          </a:solidFill>
-          <a:ln w="19050">
-            <a:solidFill>
-              <a:srgbClr val="6D4BDB"/>
-            </a:solidFill>
-            <a:prstDash val="solid"/>
-          </a:ln>
-        </p:spPr>
-      </p:sp>
-      <p:sp>
-        <p:nvSpPr>
-          <p:cNvPr id="12" name="Text 10"/>
-          <p:cNvSpPr txBox="1"/>
-          <p:nvPr/>
-        </p:nvSpPr>
-        <p:spPr>
-          <a:xfrm>
-            <a:off x="1234440" y="3703320"/>
-            <a:ext cx="2286000" cy="685800"/>
-          </a:xfrm>
-          <a:prstGeom prst="rect">
-            <a:avLst/>
-          </a:prstGeom>
-          <a:noFill/>
-          <a:ln/>
-        </p:spPr>
-        <p:txBody>
-          <a:bodyPr wrap="square" lIns="0" tIns="0" rIns="0" bIns="0" rtlCol="0" anchor="ctr"/>
-          <a:lstStyle/>
-          <a:p>
-            <a:pPr algn="ctr" indent="0" marL="0">
-              <a:buNone/>
-            </a:pPr>
-            <a:r>
-              <a:rPr lang="en-US" sz="1150" b="1" dirty="0">
-                <a:solidFill>
-                  <a:srgbClr val="1E2761"/>
-                </a:solidFill>
-                <a:latin typeface="Calibri" pitchFamily="34" charset="0"/>
-                <a:ea typeface="Calibri" pitchFamily="34" charset="-122"/>
-                <a:cs typeface="Calibri" pitchFamily="34" charset="-120"/>
-              </a:rPr>
-              <a:t>Display node</a:t>
-            </a:r>
-            <a:endParaRPr lang="en-US" sz="1150" dirty="0"/>
-          </a:p>
-          <a:p>
-            <a:pPr algn="ctr" indent="0" marL="0">
-              <a:buNone/>
-            </a:pPr>
-            <a:r>
-              <a:rPr lang="en-US" sz="950" dirty="0">
-                <a:solidFill>
-                  <a:srgbClr val="5B6B8A"/>
-                </a:solidFill>
-                <a:latin typeface="Calibri" pitchFamily="34" charset="0"/>
-                <a:ea typeface="Calibri" pitchFamily="34" charset="-122"/>
-                <a:cs typeface="Calibri" pitchFamily="34" charset="-120"/>
-              </a:rPr>
-              <a:t>custom firmware</a:t>
-            </a:r>
-            <a:endParaRPr lang="en-US" sz="1150" dirty="0"/>
-          </a:p>
-        </p:txBody>
-      </p:sp>
-      <p:sp>
-        <p:nvSpPr>
-          <p:cNvPr id="13" name="Shape 11"/>
-          <p:cNvSpPr/>
-          <p:nvPr/>
-        </p:nvSpPr>
-        <p:spPr>
-          <a:xfrm>
-            <a:off x="4709160" y="2103120"/>
-            <a:ext cx="2926080" cy="2468880"/>
-          </a:xfrm>
-          <a:prstGeom prst="roundRect">
-            <a:avLst>
-              <a:gd name="adj" fmla="val 3704"/>
-            </a:avLst>
-          </a:prstGeom>
-          <a:solidFill>
-            <a:srgbClr val="F2F6FC"/>
-          </a:solidFill>
-          <a:ln w="15875">
-            <a:solidFill>
-              <a:srgbClr val="1E2761"/>
-            </a:solidFill>
-            <a:prstDash val="solid"/>
-          </a:ln>
-        </p:spPr>
-      </p:sp>
-      <p:sp>
-        <p:nvSpPr>
-          <p:cNvPr id="14" name="Text 12"/>
-          <p:cNvSpPr txBox="1"/>
-          <p:nvPr/>
-        </p:nvSpPr>
-        <p:spPr>
-          <a:xfrm>
-            <a:off x="4709160" y="2194560"/>
-            <a:ext cx="2926080" cy="292608"/>
-          </a:xfrm>
-          <a:prstGeom prst="rect">
-            <a:avLst/>
-          </a:prstGeom>
-          <a:noFill/>
-          <a:ln/>
-        </p:spPr>
-        <p:txBody>
-          <a:bodyPr wrap="square" lIns="0" tIns="0" rIns="0" bIns="0" rtlCol="0" anchor="ctr"/>
-          <a:lstStyle/>
-          <a:p>
-            <a:pPr algn="ctr" indent="0" marL="0">
-              <a:buNone/>
-            </a:pPr>
-            <a:r>
-              <a:rPr lang="en-US" sz="1300" b="1" dirty="0">
-                <a:solidFill>
-                  <a:srgbClr val="1E2761"/>
-                </a:solidFill>
-                <a:latin typeface="Calibri" pitchFamily="34" charset="0"/>
-                <a:ea typeface="Calibri" pitchFamily="34" charset="-122"/>
-                <a:cs typeface="Calibri" pitchFamily="34" charset="-120"/>
-              </a:rPr>
-              <a:t>VEHICLE B</a:t>
-            </a:r>
-            <a:endParaRPr lang="en-US" sz="1300" dirty="0"/>
-          </a:p>
-        </p:txBody>
-      </p:sp>
-      <p:sp>
-        <p:nvSpPr>
-          <p:cNvPr id="15" name="Shape 13"/>
-          <p:cNvSpPr/>
-          <p:nvPr/>
-        </p:nvSpPr>
-        <p:spPr>
-          <a:xfrm>
-            <a:off x="4937760" y="2560320"/>
-            <a:ext cx="2468880" cy="685800"/>
-          </a:xfrm>
-          <a:prstGeom prst="roundRect">
-            <a:avLst>
-              <a:gd name="adj" fmla="val 9333"/>
-            </a:avLst>
-          </a:prstGeom>
-          <a:solidFill>
-            <a:srgbClr val="FFFFFF"/>
-          </a:solidFill>
-          <a:ln w="19050">
-            <a:solidFill>
-              <a:srgbClr val="1E2761"/>
-            </a:solidFill>
-            <a:prstDash val="solid"/>
-          </a:ln>
-        </p:spPr>
-      </p:sp>
-      <p:sp>
-        <p:nvSpPr>
-          <p:cNvPr id="16" name="Text 14"/>
-          <p:cNvSpPr txBox="1"/>
-          <p:nvPr/>
-        </p:nvSpPr>
-        <p:spPr>
-          <a:xfrm>
-            <a:off x="5029200" y="2560320"/>
-            <a:ext cx="2286000" cy="685800"/>
-          </a:xfrm>
-          <a:prstGeom prst="rect">
-            <a:avLst/>
-          </a:prstGeom>
-          <a:noFill/>
-          <a:ln/>
-        </p:spPr>
-        <p:txBody>
-          <a:bodyPr wrap="square" lIns="0" tIns="0" rIns="0" bIns="0" rtlCol="0" anchor="ctr"/>
-          <a:lstStyle/>
-          <a:p>
-            <a:pPr algn="ctr" indent="0" marL="0">
-              <a:buNone/>
-            </a:pPr>
-            <a:r>
-              <a:rPr lang="en-US" sz="1150" b="1" dirty="0">
-                <a:solidFill>
-                  <a:srgbClr val="1E2761"/>
-                </a:solidFill>
-                <a:latin typeface="Calibri" pitchFamily="34" charset="0"/>
-                <a:ea typeface="Calibri" pitchFamily="34" charset="-122"/>
-                <a:cs typeface="Calibri" pitchFamily="34" charset="-120"/>
-              </a:rPr>
-              <a:t>Radio node</a:t>
-            </a:r>
-            <a:endParaRPr lang="en-US" sz="1150" dirty="0"/>
-          </a:p>
-          <a:p>
-            <a:pPr algn="ctr" indent="0" marL="0">
-              <a:buNone/>
-            </a:pPr>
-            <a:r>
-              <a:rPr lang="en-US" sz="950" dirty="0">
-                <a:solidFill>
-                  <a:srgbClr val="5B6B8A"/>
-                </a:solidFill>
-                <a:latin typeface="Calibri" pitchFamily="34" charset="0"/>
-                <a:ea typeface="Calibri" pitchFamily="34" charset="-122"/>
-                <a:cs typeface="Calibri" pitchFamily="34" charset="-120"/>
-              </a:rPr>
-              <a:t>Meshtastic · GNSS</a:t>
-            </a:r>
-            <a:endParaRPr lang="en-US" sz="1150" dirty="0"/>
-          </a:p>
-        </p:txBody>
-      </p:sp>
-      <p:sp>
-        <p:nvSpPr>
-          <p:cNvPr id="17" name="Shape 15"/>
-          <p:cNvSpPr/>
-          <p:nvPr/>
-        </p:nvSpPr>
-        <p:spPr>
-          <a:xfrm>
-            <a:off x="6172200" y="3246120"/>
-            <a:ext cx="0" cy="457200"/>
-          </a:xfrm>
-          <a:prstGeom prst="line">
-            <a:avLst/>
-          </a:prstGeom>
-          <a:noFill/>
-          <a:ln w="25400">
-            <a:solidFill>
-              <a:srgbClr val="E58E1A"/>
-            </a:solidFill>
-            <a:prstDash val="solid"/>
-            <a:tailEnd type="triangle"/>
-          </a:ln>
-        </p:spPr>
-      </p:sp>
-      <p:sp>
-        <p:nvSpPr>
-          <p:cNvPr id="18" name="Text 16"/>
-          <p:cNvSpPr txBox="1"/>
-          <p:nvPr/>
-        </p:nvSpPr>
-        <p:spPr>
-          <a:xfrm>
-            <a:off x="6245352" y="3346704"/>
-            <a:ext cx="1463040" cy="256032"/>
-          </a:xfrm>
-          <a:prstGeom prst="rect">
-            <a:avLst/>
-          </a:prstGeom>
-          <a:noFill/>
-          <a:ln/>
-        </p:spPr>
-        <p:txBody>
-          <a:bodyPr wrap="square" lIns="0" tIns="0" rIns="0" bIns="0" rtlCol="0" anchor="ctr"/>
-          <a:lstStyle/>
-          <a:p>
-            <a:pPr indent="0" marL="0">
-              <a:buNone/>
-            </a:pPr>
-            <a:r>
-              <a:rPr lang="en-US" sz="950" b="1" dirty="0">
-                <a:solidFill>
-                  <a:srgbClr val="E58E1A"/>
-                </a:solidFill>
-                <a:latin typeface="Calibri" pitchFamily="34" charset="0"/>
-                <a:ea typeface="Calibri" pitchFamily="34" charset="-122"/>
-                <a:cs typeface="Calibri" pitchFamily="34" charset="-120"/>
-              </a:rPr>
-              <a:t>BLE</a:t>
-            </a:r>
-            <a:endParaRPr lang="en-US" sz="950" dirty="0"/>
-          </a:p>
-        </p:txBody>
-      </p:sp>
-      <p:sp>
-        <p:nvSpPr>
-          <p:cNvPr id="19" name="Shape 17"/>
-          <p:cNvSpPr/>
-          <p:nvPr/>
-        </p:nvSpPr>
-        <p:spPr>
-          <a:xfrm>
-            <a:off x="4937760" y="3703320"/>
-            <a:ext cx="2468880" cy="685800"/>
-          </a:xfrm>
-          <a:prstGeom prst="roundRect">
-            <a:avLst>
-              <a:gd name="adj" fmla="val 9333"/>
-            </a:avLst>
-          </a:prstGeom>
-          <a:solidFill>
-            <a:srgbClr val="FFFFFF"/>
-          </a:solidFill>
-          <a:ln w="19050">
-            <a:solidFill>
-              <a:srgbClr val="6D4BDB"/>
-            </a:solidFill>
-            <a:prstDash val="solid"/>
-          </a:ln>
-        </p:spPr>
-      </p:sp>
-      <p:sp>
-        <p:nvSpPr>
-          <p:cNvPr id="20" name="Text 18"/>
-          <p:cNvSpPr txBox="1"/>
-          <p:nvPr/>
-        </p:nvSpPr>
-        <p:spPr>
-          <a:xfrm>
-            <a:off x="5029200" y="3703320"/>
-            <a:ext cx="2286000" cy="685800"/>
-          </a:xfrm>
-          <a:prstGeom prst="rect">
-            <a:avLst/>
-          </a:prstGeom>
-          <a:noFill/>
-          <a:ln/>
-        </p:spPr>
-        <p:txBody>
-          <a:bodyPr wrap="square" lIns="0" tIns="0" rIns="0" bIns="0" rtlCol="0" anchor="ctr"/>
-          <a:lstStyle/>
-          <a:p>
-            <a:pPr algn="ctr" indent="0" marL="0">
-              <a:buNone/>
-            </a:pPr>
-            <a:r>
-              <a:rPr lang="en-US" sz="1150" b="1" dirty="0">
-                <a:solidFill>
-                  <a:srgbClr val="1E2761"/>
-                </a:solidFill>
-                <a:latin typeface="Calibri" pitchFamily="34" charset="0"/>
-                <a:ea typeface="Calibri" pitchFamily="34" charset="-122"/>
-                <a:cs typeface="Calibri" pitchFamily="34" charset="-120"/>
-              </a:rPr>
-              <a:t>Display node</a:t>
-            </a:r>
-            <a:endParaRPr lang="en-US" sz="1150" dirty="0"/>
-          </a:p>
-          <a:p>
-            <a:pPr algn="ctr" indent="0" marL="0">
-              <a:buNone/>
-            </a:pPr>
-            <a:r>
-              <a:rPr lang="en-US" sz="950" dirty="0">
-                <a:solidFill>
-                  <a:srgbClr val="5B6B8A"/>
-                </a:solidFill>
-                <a:latin typeface="Calibri" pitchFamily="34" charset="0"/>
-                <a:ea typeface="Calibri" pitchFamily="34" charset="-122"/>
-                <a:cs typeface="Calibri" pitchFamily="34" charset="-120"/>
-              </a:rPr>
-              <a:t>custom firmware</a:t>
-            </a:r>
-            <a:endParaRPr lang="en-US" sz="1150" dirty="0"/>
-          </a:p>
-        </p:txBody>
-      </p:sp>
-      <p:sp>
-        <p:nvSpPr>
-          <p:cNvPr id="21" name="Shape 19"/>
-          <p:cNvSpPr/>
-          <p:nvPr/>
-        </p:nvSpPr>
-        <p:spPr>
-          <a:xfrm>
-            <a:off x="3840480" y="2926080"/>
-            <a:ext cx="868680" cy="0"/>
-          </a:xfrm>
-          <a:prstGeom prst="line">
-            <a:avLst/>
-          </a:prstGeom>
-          <a:noFill/>
-          <a:ln w="31750">
-            <a:solidFill>
-              <a:srgbClr val="1E2761"/>
-            </a:solidFill>
-            <a:prstDash val="solid"/>
-            <a:headEnd type="triangle"/>
-            <a:tailEnd type="triangle"/>
-          </a:ln>
-        </p:spPr>
-      </p:sp>
-      <p:sp>
-        <p:nvSpPr>
-          <p:cNvPr id="22" name="Text 20"/>
-          <p:cNvSpPr txBox="1"/>
-          <p:nvPr/>
-        </p:nvSpPr>
-        <p:spPr>
-          <a:xfrm>
-            <a:off x="3520440" y="2615184"/>
-            <a:ext cx="1508760" cy="256032"/>
-          </a:xfrm>
-          <a:prstGeom prst="rect">
-            <a:avLst/>
-          </a:prstGeom>
-          <a:noFill/>
-          <a:ln/>
-        </p:spPr>
-        <p:txBody>
-          <a:bodyPr wrap="square" lIns="0" tIns="0" rIns="0" bIns="0" rtlCol="0" anchor="ctr"/>
-          <a:lstStyle/>
-          <a:p>
-            <a:pPr algn="ctr" indent="0" marL="0">
-              <a:buNone/>
-            </a:pPr>
-            <a:r>
-              <a:rPr lang="en-US" sz="950" b="1" dirty="0">
-                <a:solidFill>
-                  <a:srgbClr val="1E2761"/>
-                </a:solidFill>
-                <a:latin typeface="Calibri" pitchFamily="34" charset="0"/>
-                <a:ea typeface="Calibri" pitchFamily="34" charset="-122"/>
-                <a:cs typeface="Calibri" pitchFamily="34" charset="-120"/>
-              </a:rPr>
-              <a:t>LoRa 915 MHz</a:t>
-            </a:r>
-            <a:endParaRPr lang="en-US" sz="950" dirty="0"/>
-          </a:p>
-        </p:txBody>
-      </p:sp>
-      <p:sp>
-        <p:nvSpPr>
-          <p:cNvPr id="23" name="Text 21"/>
-          <p:cNvSpPr txBox="1"/>
-          <p:nvPr/>
-        </p:nvSpPr>
-        <p:spPr>
-          <a:xfrm>
-            <a:off x="914400" y="4754880"/>
-            <a:ext cx="6766560" cy="320040"/>
-          </a:xfrm>
-          <a:prstGeom prst="rect">
-            <a:avLst/>
-          </a:prstGeom>
-          <a:noFill/>
-          <a:ln/>
-        </p:spPr>
-        <p:txBody>
-          <a:bodyPr wrap="square" lIns="0" tIns="0" rIns="0" bIns="0" rtlCol="0" anchor="ctr"/>
-          <a:lstStyle/>
-          <a:p>
-            <a:pPr indent="0" marL="0">
-              <a:buNone/>
-            </a:pPr>
-            <a:r>
-              <a:rPr lang="en-US" sz="1150" i="1" dirty="0">
-                <a:solidFill>
-                  <a:srgbClr val="5B6B8A"/>
-                </a:solidFill>
-                <a:latin typeface="Calibri" pitchFamily="34" charset="0"/>
-                <a:ea typeface="Calibri" pitchFamily="34" charset="-122"/>
-                <a:cs typeface="Calibri" pitchFamily="34" charset="-120"/>
-              </a:rPr>
-              <a:t>Position broadcasts flow symmetrically — identical installs, no master.</a:t>
-            </a:r>
-            <a:endParaRPr lang="en-US" sz="1150" dirty="0"/>
-          </a:p>
-        </p:txBody>
-      </p:sp>
-      <p:sp>
-        <p:nvSpPr>
-          <p:cNvPr id="24" name="Shape 22"/>
-          <p:cNvSpPr/>
-          <p:nvPr/>
-        </p:nvSpPr>
-        <p:spPr>
-          <a:xfrm>
-            <a:off x="3063240" y="1051560"/>
-            <a:ext cx="2377440" cy="731520"/>
-          </a:xfrm>
-          <a:prstGeom prst="roundRect">
-            <a:avLst>
-              <a:gd name="adj" fmla="val 43750"/>
-            </a:avLst>
-          </a:prstGeom>
-          <a:solidFill>
-            <a:srgbClr val="FFFFFF"/>
-          </a:solidFill>
-          <a:ln w="19050">
-            <a:solidFill>
-              <a:srgbClr val="1F9D68"/>
-            </a:solidFill>
-            <a:prstDash val="dash"/>
-          </a:ln>
-        </p:spPr>
-      </p:sp>
-      <p:sp>
-        <p:nvSpPr>
-          <p:cNvPr id="25" name="Text 23"/>
-          <p:cNvSpPr txBox="1"/>
-          <p:nvPr/>
-        </p:nvSpPr>
-        <p:spPr>
-          <a:xfrm>
-            <a:off x="3154680" y="1051560"/>
-            <a:ext cx="2194560" cy="731520"/>
-          </a:xfrm>
-          <a:prstGeom prst="rect">
-            <a:avLst/>
-          </a:prstGeom>
-          <a:noFill/>
-          <a:ln/>
-        </p:spPr>
-        <p:txBody>
-          <a:bodyPr wrap="square" lIns="0" tIns="0" rIns="0" bIns="0" rtlCol="0" anchor="ctr"/>
-          <a:lstStyle/>
-          <a:p>
-            <a:pPr algn="ctr" indent="0" marL="0">
-              <a:buNone/>
-            </a:pPr>
-            <a:r>
-              <a:rPr lang="en-US" sz="1050" b="1" dirty="0">
-                <a:solidFill>
-                  <a:srgbClr val="1F9D68"/>
-                </a:solidFill>
-                <a:latin typeface="Calibri" pitchFamily="34" charset="0"/>
-                <a:ea typeface="Calibri" pitchFamily="34" charset="-122"/>
-                <a:cs typeface="Calibri" pitchFamily="34" charset="-120"/>
-              </a:rPr>
-              <a:t>optional relay node</a:t>
-            </a:r>
-            <a:endParaRPr lang="en-US" sz="1050" dirty="0"/>
-          </a:p>
-          <a:p>
-            <a:pPr algn="ctr" indent="0" marL="0">
-              <a:buNone/>
-            </a:pPr>
-            <a:r>
-              <a:rPr lang="en-US" sz="900" dirty="0">
-                <a:solidFill>
-                  <a:srgbClr val="5B6B8A"/>
-                </a:solidFill>
-                <a:latin typeface="Calibri" pitchFamily="34" charset="0"/>
-                <a:ea typeface="Calibri" pitchFamily="34" charset="-122"/>
-                <a:cs typeface="Calibri" pitchFamily="34" charset="-120"/>
-              </a:rPr>
-              <a:t>any Meshtastic device on high ground</a:t>
-            </a:r>
-            <a:endParaRPr lang="en-US" sz="1050" dirty="0"/>
-          </a:p>
-        </p:txBody>
-      </p:sp>
-      <p:sp>
-        <p:nvSpPr>
-          <p:cNvPr id="26" name="Shape 24"/>
-          <p:cNvSpPr/>
-          <p:nvPr/>
-        </p:nvSpPr>
-        <p:spPr>
-          <a:xfrm flipH="1">
-            <a:off x="2377440" y="1783080"/>
-            <a:ext cx="731520" cy="777240"/>
-          </a:xfrm>
-          <a:prstGeom prst="line">
-            <a:avLst/>
-          </a:prstGeom>
-          <a:noFill/>
-          <a:ln w="19050">
-            <a:solidFill>
-              <a:srgbClr val="1F9D68"/>
-            </a:solidFill>
-            <a:prstDash val="dash"/>
-          </a:ln>
-        </p:spPr>
-      </p:sp>
-      <p:sp>
-        <p:nvSpPr>
-          <p:cNvPr id="27" name="Shape 25"/>
-          <p:cNvSpPr/>
-          <p:nvPr/>
-        </p:nvSpPr>
-        <p:spPr>
-          <a:xfrm>
-            <a:off x="5394960" y="1783080"/>
-            <a:ext cx="777240" cy="777240"/>
-          </a:xfrm>
-          <a:prstGeom prst="line">
-            <a:avLst/>
-          </a:prstGeom>
-          <a:noFill/>
-          <a:ln w="19050">
-            <a:solidFill>
-              <a:srgbClr val="1F9D68"/>
-            </a:solidFill>
-            <a:prstDash val="dash"/>
-          </a:ln>
-        </p:spPr>
-      </p:sp>
-      <p:sp>
-        <p:nvSpPr>
-          <p:cNvPr id="28" name="Text 26"/>
+        </p:txBody>
+      </p:sp>
+      <p:sp>
+        <p:nvSpPr>
+          <p:cNvPr id="7" name="Text 4"/>
           <p:cNvSpPr txBox="1"/>
           <p:nvPr/>
         </p:nvSpPr>
@@ -5026,7 +4267,7 @@
       </p:sp>
       <p:sp>
         <p:nvSpPr>
-          <p:cNvPr id="29" name="Text 27"/>
+          <p:cNvPr id="8" name="Text 5"/>
           <p:cNvSpPr txBox="1"/>
           <p:nvPr/>
         </p:nvSpPr>
@@ -5129,7 +4370,7 @@
       </p:sp>
       <p:sp>
         <p:nvSpPr>
-          <p:cNvPr id="30" name="Shape 28"/>
+          <p:cNvPr id="9" name="Shape 6"/>
           <p:cNvSpPr/>
           <p:nvPr/>
         </p:nvSpPr>
@@ -5151,7 +4392,7 @@
       </p:sp>
       <p:sp>
         <p:nvSpPr>
-          <p:cNvPr id="31" name="Text 29"/>
+          <p:cNvPr id="10" name="Text 7"/>
           <p:cNvSpPr txBox="1"/>
           <p:nvPr/>
         </p:nvSpPr>
@@ -5328,7 +4569,7 @@
         </p:nvSpPr>
         <p:spPr>
           <a:xfrm>
-            <a:off x="502920" y="1051560"/>
+            <a:off x="502920" y="1024128"/>
             <a:ext cx="7680960" cy="320040"/>
           </a:xfrm>
           <a:prstGeom prst="rect">
@@ -5359,653 +4600,39 @@
           </a:p>
         </p:txBody>
       </p:sp>
-      <p:sp>
-        <p:nvSpPr>
-          <p:cNvPr id="6" name="Shape 4"/>
-          <p:cNvSpPr/>
-          <p:nvPr/>
-        </p:nvSpPr>
-        <p:spPr>
-          <a:xfrm>
-            <a:off x="502920" y="1417320"/>
-            <a:ext cx="7772400" cy="1600200"/>
-          </a:xfrm>
-          <a:prstGeom prst="roundRect">
-            <a:avLst>
-              <a:gd name="adj" fmla="val 5714"/>
-            </a:avLst>
-          </a:prstGeom>
-          <a:solidFill>
-            <a:srgbClr val="F2F6FC"/>
-          </a:solidFill>
-          <a:ln w="12700">
-            <a:solidFill>
-              <a:srgbClr val="C9D9EE"/>
-            </a:solidFill>
-            <a:prstDash val="solid"/>
-          </a:ln>
-        </p:spPr>
-      </p:sp>
-      <p:sp>
-        <p:nvSpPr>
-          <p:cNvPr id="7" name="Shape 5"/>
-          <p:cNvSpPr/>
-          <p:nvPr/>
-        </p:nvSpPr>
-        <p:spPr>
-          <a:xfrm>
-            <a:off x="777240" y="1645920"/>
-            <a:ext cx="1554480" cy="640080"/>
-          </a:xfrm>
-          <a:prstGeom prst="roundRect">
-            <a:avLst>
-              <a:gd name="adj" fmla="val 10000"/>
-            </a:avLst>
-          </a:prstGeom>
-          <a:solidFill>
-            <a:srgbClr val="FFFFFF"/>
-          </a:solidFill>
-          <a:ln w="19050">
-            <a:solidFill>
-              <a:srgbClr val="1E2761"/>
-            </a:solidFill>
-            <a:prstDash val="solid"/>
-          </a:ln>
-        </p:spPr>
-      </p:sp>
-      <p:sp>
-        <p:nvSpPr>
-          <p:cNvPr id="8" name="Text 6"/>
-          <p:cNvSpPr txBox="1"/>
-          <p:nvPr/>
-        </p:nvSpPr>
-        <p:spPr>
-          <a:xfrm>
-            <a:off x="868680" y="1645920"/>
-            <a:ext cx="1371600" cy="640080"/>
-          </a:xfrm>
-          <a:prstGeom prst="rect">
-            <a:avLst/>
-          </a:prstGeom>
-          <a:noFill/>
-          <a:ln/>
-        </p:spPr>
-        <p:txBody>
-          <a:bodyPr wrap="square" lIns="0" tIns="0" rIns="0" bIns="0" rtlCol="0" anchor="ctr"/>
-          <a:lstStyle/>
-          <a:p>
-            <a:pPr algn="ctr" indent="0" marL="0">
-              <a:buNone/>
-            </a:pPr>
-            <a:r>
-              <a:rPr lang="en-US" sz="1150" b="1" dirty="0">
-                <a:solidFill>
-                  <a:srgbClr val="1E2761"/>
-                </a:solidFill>
-                <a:latin typeface="Calibri" pitchFamily="34" charset="0"/>
-                <a:ea typeface="Calibri" pitchFamily="34" charset="-122"/>
-                <a:cs typeface="Calibri" pitchFamily="34" charset="-120"/>
-              </a:rPr>
-              <a:t>GNSS module</a:t>
-            </a:r>
-            <a:endParaRPr lang="en-US" sz="1150" dirty="0"/>
-          </a:p>
-          <a:p>
-            <a:pPr algn="ctr" indent="0" marL="0">
-              <a:buNone/>
-            </a:pPr>
-            <a:r>
-              <a:rPr lang="en-US" sz="950" dirty="0">
-                <a:solidFill>
-                  <a:srgbClr val="5B6B8A"/>
-                </a:solidFill>
-                <a:latin typeface="Calibri" pitchFamily="34" charset="0"/>
-                <a:ea typeface="Calibri" pitchFamily="34" charset="-122"/>
-                <a:cs typeface="Calibri" pitchFamily="34" charset="-120"/>
-              </a:rPr>
-              <a:t>1.25 mm 8-pin conn.</a:t>
-            </a:r>
-            <a:endParaRPr lang="en-US" sz="1150" dirty="0"/>
-          </a:p>
-        </p:txBody>
-      </p:sp>
-      <p:sp>
-        <p:nvSpPr>
-          <p:cNvPr id="9" name="Shape 7"/>
-          <p:cNvSpPr/>
-          <p:nvPr/>
-        </p:nvSpPr>
-        <p:spPr>
-          <a:xfrm>
-            <a:off x="2331720" y="1965960"/>
-            <a:ext cx="685800" cy="0"/>
-          </a:xfrm>
-          <a:prstGeom prst="line">
-            <a:avLst/>
-          </a:prstGeom>
-          <a:noFill/>
-          <a:ln w="25400">
-            <a:solidFill>
-              <a:srgbClr val="1E2761"/>
-            </a:solidFill>
-            <a:prstDash val="solid"/>
-            <a:tailEnd type="triangle"/>
-          </a:ln>
-        </p:spPr>
-      </p:sp>
-      <p:sp>
-        <p:nvSpPr>
-          <p:cNvPr id="10" name="Text 8"/>
-          <p:cNvSpPr txBox="1"/>
-          <p:nvPr/>
-        </p:nvSpPr>
-        <p:spPr>
-          <a:xfrm>
-            <a:off x="2011680" y="1655064"/>
-            <a:ext cx="1325880" cy="256032"/>
-          </a:xfrm>
-          <a:prstGeom prst="rect">
-            <a:avLst/>
-          </a:prstGeom>
-          <a:noFill/>
-          <a:ln/>
-        </p:spPr>
-        <p:txBody>
-          <a:bodyPr wrap="square" lIns="0" tIns="0" rIns="0" bIns="0" rtlCol="0" anchor="ctr"/>
-          <a:lstStyle/>
-          <a:p>
-            <a:pPr algn="ctr" indent="0" marL="0">
-              <a:buNone/>
-            </a:pPr>
-            <a:r>
-              <a:rPr lang="en-US" sz="950" b="1" dirty="0">
-                <a:solidFill>
-                  <a:srgbClr val="1E2761"/>
-                </a:solidFill>
-                <a:latin typeface="Calibri" pitchFamily="34" charset="0"/>
-                <a:ea typeface="Calibri" pitchFamily="34" charset="-122"/>
-                <a:cs typeface="Calibri" pitchFamily="34" charset="-120"/>
-              </a:rPr>
-              <a:t>UART (NMEA)</a:t>
-            </a:r>
-            <a:endParaRPr lang="en-US" sz="950" dirty="0"/>
-          </a:p>
-        </p:txBody>
-      </p:sp>
-      <p:sp>
-        <p:nvSpPr>
-          <p:cNvPr id="11" name="Shape 9"/>
-          <p:cNvSpPr/>
-          <p:nvPr/>
-        </p:nvSpPr>
-        <p:spPr>
-          <a:xfrm>
-            <a:off x="3017520" y="1645920"/>
-            <a:ext cx="1554480" cy="640080"/>
-          </a:xfrm>
-          <a:prstGeom prst="roundRect">
-            <a:avLst>
-              <a:gd name="adj" fmla="val 10000"/>
-            </a:avLst>
-          </a:prstGeom>
-          <a:solidFill>
-            <a:srgbClr val="FFFFFF"/>
-          </a:solidFill>
-          <a:ln w="19050">
-            <a:solidFill>
-              <a:srgbClr val="1E2761"/>
-            </a:solidFill>
-            <a:prstDash val="solid"/>
-          </a:ln>
-        </p:spPr>
-      </p:sp>
-      <p:sp>
-        <p:nvSpPr>
-          <p:cNvPr id="12" name="Text 10"/>
-          <p:cNvSpPr txBox="1"/>
-          <p:nvPr/>
-        </p:nvSpPr>
-        <p:spPr>
-          <a:xfrm>
-            <a:off x="3108960" y="1645920"/>
-            <a:ext cx="1371600" cy="640080"/>
-          </a:xfrm>
-          <a:prstGeom prst="rect">
-            <a:avLst/>
-          </a:prstGeom>
-          <a:noFill/>
-          <a:ln/>
-        </p:spPr>
-        <p:txBody>
-          <a:bodyPr wrap="square" lIns="0" tIns="0" rIns="0" bIns="0" rtlCol="0" anchor="ctr"/>
-          <a:lstStyle/>
-          <a:p>
-            <a:pPr algn="ctr" indent="0" marL="0">
-              <a:buNone/>
-            </a:pPr>
-            <a:r>
-              <a:rPr lang="en-US" sz="1150" b="1" dirty="0">
-                <a:solidFill>
-                  <a:srgbClr val="1E2761"/>
-                </a:solidFill>
-                <a:latin typeface="Calibri" pitchFamily="34" charset="0"/>
-                <a:ea typeface="Calibri" pitchFamily="34" charset="-122"/>
-                <a:cs typeface="Calibri" pitchFamily="34" charset="-120"/>
-              </a:rPr>
-              <a:t>ESP32-S3</a:t>
-            </a:r>
-            <a:endParaRPr lang="en-US" sz="1150" dirty="0"/>
-          </a:p>
-          <a:p>
-            <a:pPr algn="ctr" indent="0" marL="0">
-              <a:buNone/>
-            </a:pPr>
-            <a:r>
-              <a:rPr lang="en-US" sz="950" dirty="0">
-                <a:solidFill>
-                  <a:srgbClr val="5B6B8A"/>
-                </a:solidFill>
-                <a:latin typeface="Calibri" pitchFamily="34" charset="0"/>
-                <a:ea typeface="Calibri" pitchFamily="34" charset="-122"/>
-                <a:cs typeface="Calibri" pitchFamily="34" charset="-120"/>
-              </a:rPr>
-              <a:t>runs Meshtastic</a:t>
-            </a:r>
-            <a:endParaRPr lang="en-US" sz="1150" dirty="0"/>
-          </a:p>
-        </p:txBody>
-      </p:sp>
-      <p:sp>
-        <p:nvSpPr>
-          <p:cNvPr id="13" name="Shape 11"/>
-          <p:cNvSpPr/>
-          <p:nvPr/>
-        </p:nvSpPr>
-        <p:spPr>
-          <a:xfrm>
-            <a:off x="4572000" y="1965960"/>
-            <a:ext cx="685800" cy="0"/>
-          </a:xfrm>
-          <a:prstGeom prst="line">
-            <a:avLst/>
-          </a:prstGeom>
-          <a:noFill/>
-          <a:ln w="25400">
-            <a:solidFill>
-              <a:srgbClr val="1E2761"/>
-            </a:solidFill>
-            <a:prstDash val="solid"/>
-            <a:tailEnd type="triangle"/>
-          </a:ln>
-        </p:spPr>
-      </p:sp>
-      <p:sp>
-        <p:nvSpPr>
-          <p:cNvPr id="14" name="Text 12"/>
-          <p:cNvSpPr txBox="1"/>
-          <p:nvPr/>
-        </p:nvSpPr>
-        <p:spPr>
-          <a:xfrm>
-            <a:off x="4251960" y="1655064"/>
-            <a:ext cx="1325880" cy="256032"/>
-          </a:xfrm>
-          <a:prstGeom prst="rect">
-            <a:avLst/>
-          </a:prstGeom>
-          <a:noFill/>
-          <a:ln/>
-        </p:spPr>
-        <p:txBody>
-          <a:bodyPr wrap="square" lIns="0" tIns="0" rIns="0" bIns="0" rtlCol="0" anchor="ctr"/>
-          <a:lstStyle/>
-          <a:p>
-            <a:pPr algn="ctr" indent="0" marL="0">
-              <a:buNone/>
-            </a:pPr>
-            <a:r>
-              <a:rPr lang="en-US" sz="950" b="1" dirty="0">
-                <a:solidFill>
-                  <a:srgbClr val="1E2761"/>
-                </a:solidFill>
-                <a:latin typeface="Calibri" pitchFamily="34" charset="0"/>
-                <a:ea typeface="Calibri" pitchFamily="34" charset="-122"/>
-                <a:cs typeface="Calibri" pitchFamily="34" charset="-120"/>
-              </a:rPr>
-              <a:t>SPI</a:t>
-            </a:r>
-            <a:endParaRPr lang="en-US" sz="950" dirty="0"/>
-          </a:p>
-        </p:txBody>
-      </p:sp>
-      <p:sp>
-        <p:nvSpPr>
-          <p:cNvPr id="15" name="Shape 13"/>
-          <p:cNvSpPr/>
-          <p:nvPr/>
-        </p:nvSpPr>
-        <p:spPr>
-          <a:xfrm>
-            <a:off x="5257800" y="1645920"/>
-            <a:ext cx="1417320" cy="640080"/>
-          </a:xfrm>
-          <a:prstGeom prst="roundRect">
-            <a:avLst>
-              <a:gd name="adj" fmla="val 10000"/>
-            </a:avLst>
-          </a:prstGeom>
-          <a:solidFill>
-            <a:srgbClr val="FFFFFF"/>
-          </a:solidFill>
-          <a:ln w="19050">
-            <a:solidFill>
-              <a:srgbClr val="1E2761"/>
-            </a:solidFill>
-            <a:prstDash val="solid"/>
-          </a:ln>
-        </p:spPr>
-      </p:sp>
-      <p:sp>
-        <p:nvSpPr>
-          <p:cNvPr id="16" name="Text 14"/>
-          <p:cNvSpPr txBox="1"/>
-          <p:nvPr/>
-        </p:nvSpPr>
-        <p:spPr>
-          <a:xfrm>
-            <a:off x="5349240" y="1645920"/>
-            <a:ext cx="1234440" cy="640080"/>
-          </a:xfrm>
-          <a:prstGeom prst="rect">
-            <a:avLst/>
-          </a:prstGeom>
-          <a:noFill/>
-          <a:ln/>
-        </p:spPr>
-        <p:txBody>
-          <a:bodyPr wrap="square" lIns="0" tIns="0" rIns="0" bIns="0" rtlCol="0" anchor="ctr"/>
-          <a:lstStyle/>
-          <a:p>
-            <a:pPr algn="ctr" indent="0" marL="0">
-              <a:buNone/>
-            </a:pPr>
-            <a:r>
-              <a:rPr lang="en-US" sz="1150" b="1" dirty="0">
-                <a:solidFill>
-                  <a:srgbClr val="1E2761"/>
-                </a:solidFill>
-                <a:latin typeface="Calibri" pitchFamily="34" charset="0"/>
-                <a:ea typeface="Calibri" pitchFamily="34" charset="-122"/>
-                <a:cs typeface="Calibri" pitchFamily="34" charset="-120"/>
-              </a:rPr>
-              <a:t>SX1262</a:t>
-            </a:r>
-            <a:endParaRPr lang="en-US" sz="1150" dirty="0"/>
-          </a:p>
-          <a:p>
-            <a:pPr algn="ctr" indent="0" marL="0">
-              <a:buNone/>
-            </a:pPr>
-            <a:r>
-              <a:rPr lang="en-US" sz="950" dirty="0">
-                <a:solidFill>
-                  <a:srgbClr val="5B6B8A"/>
-                </a:solidFill>
-                <a:latin typeface="Calibri" pitchFamily="34" charset="0"/>
-                <a:ea typeface="Calibri" pitchFamily="34" charset="-122"/>
-                <a:cs typeface="Calibri" pitchFamily="34" charset="-120"/>
-              </a:rPr>
-              <a:t>LoRa transceiver</a:t>
-            </a:r>
-            <a:endParaRPr lang="en-US" sz="1150" dirty="0"/>
-          </a:p>
-        </p:txBody>
-      </p:sp>
-      <p:sp>
-        <p:nvSpPr>
-          <p:cNvPr id="17" name="Shape 15"/>
-          <p:cNvSpPr/>
-          <p:nvPr/>
-        </p:nvSpPr>
-        <p:spPr>
-          <a:xfrm>
-            <a:off x="6675120" y="1965960"/>
-            <a:ext cx="457200" cy="0"/>
-          </a:xfrm>
-          <a:prstGeom prst="line">
-            <a:avLst/>
-          </a:prstGeom>
-          <a:noFill/>
-          <a:ln w="25400">
-            <a:solidFill>
-              <a:srgbClr val="1E2761"/>
-            </a:solidFill>
-            <a:prstDash val="solid"/>
-            <a:tailEnd type="triangle"/>
-          </a:ln>
-        </p:spPr>
-      </p:sp>
-      <p:sp>
-        <p:nvSpPr>
-          <p:cNvPr id="18" name="Shape 16"/>
-          <p:cNvSpPr/>
-          <p:nvPr/>
-        </p:nvSpPr>
-        <p:spPr>
-          <a:xfrm>
-            <a:off x="7132320" y="1645920"/>
-            <a:ext cx="960120" cy="640080"/>
-          </a:xfrm>
-          <a:prstGeom prst="roundRect">
-            <a:avLst>
-              <a:gd name="adj" fmla="val 10000"/>
-            </a:avLst>
-          </a:prstGeom>
-          <a:solidFill>
-            <a:srgbClr val="FFFFFF"/>
-          </a:solidFill>
-          <a:ln w="19050">
-            <a:solidFill>
-              <a:srgbClr val="E58E1A"/>
-            </a:solidFill>
-            <a:prstDash val="solid"/>
-          </a:ln>
-        </p:spPr>
-      </p:sp>
-      <p:sp>
-        <p:nvSpPr>
-          <p:cNvPr id="19" name="Text 17"/>
-          <p:cNvSpPr txBox="1"/>
-          <p:nvPr/>
-        </p:nvSpPr>
-        <p:spPr>
-          <a:xfrm>
-            <a:off x="7223760" y="1645920"/>
-            <a:ext cx="777240" cy="640080"/>
-          </a:xfrm>
-          <a:prstGeom prst="rect">
-            <a:avLst/>
-          </a:prstGeom>
-          <a:noFill/>
-          <a:ln/>
-        </p:spPr>
-        <p:txBody>
-          <a:bodyPr wrap="square" lIns="0" tIns="0" rIns="0" bIns="0" rtlCol="0" anchor="ctr"/>
-          <a:lstStyle/>
-          <a:p>
-            <a:pPr algn="ctr" indent="0" marL="0">
-              <a:buNone/>
-            </a:pPr>
-            <a:r>
-              <a:rPr lang="en-US" sz="1150" b="1" dirty="0">
-                <a:solidFill>
-                  <a:srgbClr val="B06207"/>
-                </a:solidFill>
-                <a:latin typeface="Calibri" pitchFamily="34" charset="0"/>
-                <a:ea typeface="Calibri" pitchFamily="34" charset="-122"/>
-                <a:cs typeface="Calibri" pitchFamily="34" charset="-120"/>
-              </a:rPr>
-              <a:t>antenna</a:t>
-            </a:r>
-            <a:endParaRPr lang="en-US" sz="1150" dirty="0"/>
-          </a:p>
-          <a:p>
-            <a:pPr algn="ctr" indent="0" marL="0">
-              <a:buNone/>
-            </a:pPr>
-            <a:r>
-              <a:rPr lang="en-US" sz="950" dirty="0">
-                <a:solidFill>
-                  <a:srgbClr val="5B6B8A"/>
-                </a:solidFill>
-                <a:latin typeface="Calibri" pitchFamily="34" charset="0"/>
-                <a:ea typeface="Calibri" pitchFamily="34" charset="-122"/>
-                <a:cs typeface="Calibri" pitchFamily="34" charset="-120"/>
-              </a:rPr>
-              <a:t>915 MHz roof</a:t>
-            </a:r>
-            <a:endParaRPr lang="en-US" sz="1150" dirty="0"/>
-          </a:p>
-        </p:txBody>
-      </p:sp>
-      <p:sp>
-        <p:nvSpPr>
-          <p:cNvPr id="20" name="Shape 18"/>
-          <p:cNvSpPr/>
-          <p:nvPr/>
-        </p:nvSpPr>
-        <p:spPr>
-          <a:xfrm>
-            <a:off x="3794760" y="2286000"/>
-            <a:ext cx="0" cy="411480"/>
-          </a:xfrm>
-          <a:prstGeom prst="line">
-            <a:avLst/>
-          </a:prstGeom>
-          <a:noFill/>
-          <a:ln w="25400">
-            <a:solidFill>
-              <a:srgbClr val="1E2761"/>
-            </a:solidFill>
-            <a:prstDash val="solid"/>
-            <a:tailEnd type="triangle"/>
-          </a:ln>
-        </p:spPr>
-      </p:sp>
-      <p:sp>
-        <p:nvSpPr>
-          <p:cNvPr id="21" name="Text 19"/>
-          <p:cNvSpPr txBox="1"/>
-          <p:nvPr/>
-        </p:nvSpPr>
-        <p:spPr>
-          <a:xfrm>
-            <a:off x="3867912" y="2363724"/>
-            <a:ext cx="1463040" cy="256032"/>
-          </a:xfrm>
-          <a:prstGeom prst="rect">
-            <a:avLst/>
-          </a:prstGeom>
-          <a:noFill/>
-          <a:ln/>
-        </p:spPr>
-        <p:txBody>
-          <a:bodyPr wrap="square" lIns="0" tIns="0" rIns="0" bIns="0" rtlCol="0" anchor="ctr"/>
-          <a:lstStyle/>
-          <a:p>
-            <a:pPr indent="0" marL="0">
-              <a:buNone/>
-            </a:pPr>
-            <a:r>
-              <a:rPr lang="en-US" sz="950" b="1" dirty="0">
-                <a:solidFill>
-                  <a:srgbClr val="1E2761"/>
-                </a:solidFill>
-                <a:latin typeface="Calibri" pitchFamily="34" charset="0"/>
-                <a:ea typeface="Calibri" pitchFamily="34" charset="-122"/>
-                <a:cs typeface="Calibri" pitchFamily="34" charset="-120"/>
-              </a:rPr>
-              <a:t>I2C</a:t>
-            </a:r>
-            <a:endParaRPr lang="en-US" sz="950" dirty="0"/>
-          </a:p>
-        </p:txBody>
-      </p:sp>
-      <p:sp>
-        <p:nvSpPr>
-          <p:cNvPr id="22" name="Shape 20"/>
-          <p:cNvSpPr/>
-          <p:nvPr/>
-        </p:nvSpPr>
-        <p:spPr>
-          <a:xfrm>
-            <a:off x="3017520" y="2697480"/>
-            <a:ext cx="1554480" cy="256032"/>
-          </a:xfrm>
-          <a:prstGeom prst="roundRect">
-            <a:avLst>
-              <a:gd name="adj" fmla="val 25000"/>
-            </a:avLst>
-          </a:prstGeom>
-          <a:solidFill>
-            <a:srgbClr val="FFFFFF"/>
-          </a:solidFill>
-          <a:ln w="12700">
-            <a:solidFill>
-              <a:srgbClr val="1E2761"/>
-            </a:solidFill>
-            <a:prstDash val="solid"/>
-          </a:ln>
-        </p:spPr>
-      </p:sp>
-      <p:sp>
-        <p:nvSpPr>
-          <p:cNvPr id="23" name="Text 21"/>
-          <p:cNvSpPr txBox="1"/>
-          <p:nvPr/>
-        </p:nvSpPr>
-        <p:spPr>
-          <a:xfrm>
-            <a:off x="3108960" y="2697480"/>
-            <a:ext cx="1371600" cy="256032"/>
-          </a:xfrm>
-          <a:prstGeom prst="rect">
-            <a:avLst/>
-          </a:prstGeom>
-          <a:noFill/>
-          <a:ln/>
-        </p:spPr>
-        <p:txBody>
-          <a:bodyPr wrap="square" lIns="0" tIns="0" rIns="0" bIns="0" rtlCol="0" anchor="ctr"/>
-          <a:lstStyle/>
-          <a:p>
-            <a:pPr algn="ctr" indent="0" marL="0">
-              <a:buNone/>
-            </a:pPr>
-            <a:r>
-              <a:rPr lang="en-US" sz="850" b="1" dirty="0">
-                <a:solidFill>
-                  <a:srgbClr val="1E2761"/>
-                </a:solidFill>
-                <a:latin typeface="Calibri" pitchFamily="34" charset="0"/>
-                <a:ea typeface="Calibri" pitchFamily="34" charset="-122"/>
-                <a:cs typeface="Calibri" pitchFamily="34" charset="-120"/>
-              </a:rPr>
-              <a:t>0.96″ OLED — field debug for free</a:t>
-            </a:r>
-            <a:endParaRPr lang="en-US" sz="850" dirty="0"/>
-          </a:p>
-        </p:txBody>
-      </p:sp>
-      <p:sp>
-        <p:nvSpPr>
-          <p:cNvPr id="24" name="Text 22"/>
-          <p:cNvSpPr txBox="1"/>
-          <p:nvPr/>
-        </p:nvSpPr>
-        <p:spPr>
-          <a:xfrm>
-            <a:off x="502920" y="3246120"/>
+      <p:pic>
+        <p:nvPicPr>
+          <p:cNvPr id="6" name="Image 0" descr="C:/Users/deogr/AppData/Local/Temp/claude/C--Users-deogr-Documents-Fall-Project-Off-Grid-Vehicle-dection-project/e8b2e8fa-1513-4aa8-a8f6-ce4fcd20e664/scratchpad/mermaid_png/diag2.png">    </p:cNvPr>
+          <p:cNvPicPr>
+            <a:picLocks noChangeAspect="1"/>
+          </p:cNvPicPr>
+          <p:nvPr/>
+        </p:nvPicPr>
+        <p:blipFill>
+          <a:blip r:embed="rId1"/>
+          <a:stretch>
+            <a:fillRect/>
+          </a:stretch>
+        </p:blipFill>
+        <p:spPr>
+          <a:xfrm>
+            <a:off x="502920" y="1389888"/>
+            <a:ext cx="7772400" cy="1581912"/>
+          </a:xfrm>
+          <a:prstGeom prst="rect">
+            <a:avLst/>
+          </a:prstGeom>
+        </p:spPr>
+      </p:pic>
+      <p:sp>
+        <p:nvSpPr>
+          <p:cNvPr id="7" name="Text 4"/>
+          <p:cNvSpPr txBox="1"/>
+          <p:nvPr/>
+        </p:nvSpPr>
+        <p:spPr>
+          <a:xfrm>
+            <a:off x="502920" y="3127248"/>
             <a:ext cx="7680960" cy="320040"/>
           </a:xfrm>
           <a:prstGeom prst="rect">
@@ -6036,271 +4663,39 @@
           </a:p>
         </p:txBody>
       </p:sp>
-      <p:sp>
-        <p:nvSpPr>
-          <p:cNvPr id="25" name="Shape 23"/>
-          <p:cNvSpPr/>
-          <p:nvPr/>
-        </p:nvSpPr>
-        <p:spPr>
-          <a:xfrm>
-            <a:off x="502920" y="3611880"/>
-            <a:ext cx="7772400" cy="1051560"/>
-          </a:xfrm>
-          <a:prstGeom prst="roundRect">
-            <a:avLst>
-              <a:gd name="adj" fmla="val 8696"/>
-            </a:avLst>
-          </a:prstGeom>
-          <a:solidFill>
-            <a:srgbClr val="F2F6FC"/>
-          </a:solidFill>
-          <a:ln w="12700">
-            <a:solidFill>
-              <a:srgbClr val="C9D9EE"/>
-            </a:solidFill>
-            <a:prstDash val="solid"/>
-          </a:ln>
-        </p:spPr>
-      </p:sp>
-      <p:sp>
-        <p:nvSpPr>
-          <p:cNvPr id="26" name="Shape 24"/>
-          <p:cNvSpPr/>
-          <p:nvPr/>
-        </p:nvSpPr>
-        <p:spPr>
-          <a:xfrm>
-            <a:off x="777240" y="3794760"/>
-            <a:ext cx="2103120" cy="685800"/>
-          </a:xfrm>
-          <a:prstGeom prst="roundRect">
-            <a:avLst>
-              <a:gd name="adj" fmla="val 9333"/>
-            </a:avLst>
-          </a:prstGeom>
-          <a:solidFill>
-            <a:srgbClr val="FFFFFF"/>
-          </a:solidFill>
-          <a:ln w="19050">
-            <a:solidFill>
-              <a:srgbClr val="6D4BDB"/>
-            </a:solidFill>
-            <a:prstDash val="solid"/>
-          </a:ln>
-        </p:spPr>
-      </p:sp>
-      <p:sp>
-        <p:nvSpPr>
-          <p:cNvPr id="27" name="Text 25"/>
-          <p:cNvSpPr txBox="1"/>
-          <p:nvPr/>
-        </p:nvSpPr>
-        <p:spPr>
-          <a:xfrm>
-            <a:off x="868680" y="3794760"/>
-            <a:ext cx="1920240" cy="685800"/>
-          </a:xfrm>
-          <a:prstGeom prst="rect">
-            <a:avLst/>
-          </a:prstGeom>
-          <a:noFill/>
-          <a:ln/>
-        </p:spPr>
-        <p:txBody>
-          <a:bodyPr wrap="square" lIns="0" tIns="0" rIns="0" bIns="0" rtlCol="0" anchor="ctr"/>
-          <a:lstStyle/>
-          <a:p>
-            <a:pPr algn="ctr" indent="0" marL="0">
-              <a:buNone/>
-            </a:pPr>
-            <a:r>
-              <a:rPr lang="en-US" sz="1150" b="1" dirty="0">
-                <a:solidFill>
-                  <a:srgbClr val="1E2761"/>
-                </a:solidFill>
-                <a:latin typeface="Calibri" pitchFamily="34" charset="0"/>
-                <a:ea typeface="Calibri" pitchFamily="34" charset="-122"/>
-                <a:cs typeface="Calibri" pitchFamily="34" charset="-120"/>
-              </a:rPr>
-              <a:t>ESP32-S3</a:t>
-            </a:r>
-            <a:endParaRPr lang="en-US" sz="1150" dirty="0"/>
-          </a:p>
-          <a:p>
-            <a:pPr algn="ctr" indent="0" marL="0">
-              <a:buNone/>
-            </a:pPr>
-            <a:r>
-              <a:rPr lang="en-US" sz="950" dirty="0">
-                <a:solidFill>
-                  <a:srgbClr val="5B6B8A"/>
-                </a:solidFill>
-                <a:latin typeface="Calibri" pitchFamily="34" charset="0"/>
-                <a:ea typeface="Calibri" pitchFamily="34" charset="-122"/>
-                <a:cs typeface="Calibri" pitchFamily="34" charset="-120"/>
-              </a:rPr>
-              <a:t>16 MB flash · 8 MB PSRAM</a:t>
-            </a:r>
-            <a:endParaRPr lang="en-US" sz="1150" dirty="0"/>
-          </a:p>
-        </p:txBody>
-      </p:sp>
-      <p:sp>
-        <p:nvSpPr>
-          <p:cNvPr id="28" name="Shape 26"/>
-          <p:cNvSpPr/>
-          <p:nvPr/>
-        </p:nvSpPr>
-        <p:spPr>
-          <a:xfrm>
-            <a:off x="2880360" y="4133088"/>
-            <a:ext cx="1188720" cy="0"/>
-          </a:xfrm>
-          <a:prstGeom prst="line">
-            <a:avLst/>
-          </a:prstGeom>
-          <a:noFill/>
-          <a:ln w="25400">
-            <a:solidFill>
-              <a:srgbClr val="6D4BDB"/>
-            </a:solidFill>
-            <a:prstDash val="solid"/>
-            <a:tailEnd type="triangle"/>
-          </a:ln>
-        </p:spPr>
-      </p:sp>
-      <p:sp>
-        <p:nvSpPr>
-          <p:cNvPr id="29" name="Text 27"/>
-          <p:cNvSpPr txBox="1"/>
-          <p:nvPr/>
-        </p:nvSpPr>
-        <p:spPr>
-          <a:xfrm>
-            <a:off x="2560320" y="3822192"/>
-            <a:ext cx="1828800" cy="256032"/>
-          </a:xfrm>
-          <a:prstGeom prst="rect">
-            <a:avLst/>
-          </a:prstGeom>
-          <a:noFill/>
-          <a:ln/>
-        </p:spPr>
-        <p:txBody>
-          <a:bodyPr wrap="square" lIns="0" tIns="0" rIns="0" bIns="0" rtlCol="0" anchor="ctr"/>
-          <a:lstStyle/>
-          <a:p>
-            <a:pPr algn="ctr" indent="0" marL="0">
-              <a:buNone/>
-            </a:pPr>
-            <a:r>
-              <a:rPr lang="en-US" sz="950" b="1" dirty="0">
-                <a:solidFill>
-                  <a:srgbClr val="6D4BDB"/>
-                </a:solidFill>
-                <a:latin typeface="Calibri" pitchFamily="34" charset="0"/>
-                <a:ea typeface="Calibri" pitchFamily="34" charset="-122"/>
-                <a:cs typeface="Calibri" pitchFamily="34" charset="-120"/>
-              </a:rPr>
-              <a:t>SPI · framebuffer in PSRAM</a:t>
-            </a:r>
-            <a:endParaRPr lang="en-US" sz="950" dirty="0"/>
-          </a:p>
-        </p:txBody>
-      </p:sp>
-      <p:sp>
-        <p:nvSpPr>
-          <p:cNvPr id="30" name="Shape 28"/>
-          <p:cNvSpPr/>
-          <p:nvPr/>
-        </p:nvSpPr>
-        <p:spPr>
-          <a:xfrm>
-            <a:off x="4069080" y="3794760"/>
-            <a:ext cx="2286000" cy="685800"/>
-          </a:xfrm>
-          <a:prstGeom prst="roundRect">
-            <a:avLst>
-              <a:gd name="adj" fmla="val 9333"/>
-            </a:avLst>
-          </a:prstGeom>
-          <a:solidFill>
-            <a:srgbClr val="FFFFFF"/>
-          </a:solidFill>
-          <a:ln w="19050">
-            <a:solidFill>
-              <a:srgbClr val="6D4BDB"/>
-            </a:solidFill>
-            <a:prstDash val="solid"/>
-          </a:ln>
-        </p:spPr>
-      </p:sp>
-      <p:sp>
-        <p:nvSpPr>
-          <p:cNvPr id="31" name="Text 29"/>
-          <p:cNvSpPr txBox="1"/>
-          <p:nvPr/>
-        </p:nvSpPr>
-        <p:spPr>
-          <a:xfrm>
-            <a:off x="4160520" y="3794760"/>
-            <a:ext cx="2103120" cy="685800"/>
-          </a:xfrm>
-          <a:prstGeom prst="rect">
-            <a:avLst/>
-          </a:prstGeom>
-          <a:noFill/>
-          <a:ln/>
-        </p:spPr>
-        <p:txBody>
-          <a:bodyPr wrap="square" lIns="0" tIns="0" rIns="0" bIns="0" rtlCol="0" anchor="ctr"/>
-          <a:lstStyle/>
-          <a:p>
-            <a:pPr algn="ctr" indent="0" marL="0">
-              <a:buNone/>
-            </a:pPr>
-            <a:r>
-              <a:rPr lang="en-US" sz="1150" b="1" dirty="0">
-                <a:solidFill>
-                  <a:srgbClr val="1E2761"/>
-                </a:solidFill>
-                <a:latin typeface="Calibri" pitchFamily="34" charset="0"/>
-                <a:ea typeface="Calibri" pitchFamily="34" charset="-122"/>
-                <a:cs typeface="Calibri" pitchFamily="34" charset="-120"/>
-              </a:rPr>
-              <a:t>4.2″ reflective LCD</a:t>
-            </a:r>
-            <a:endParaRPr lang="en-US" sz="1150" dirty="0"/>
-          </a:p>
-          <a:p>
-            <a:pPr algn="ctr" indent="0" marL="0">
-              <a:buNone/>
-            </a:pPr>
-            <a:r>
-              <a:rPr lang="en-US" sz="950" dirty="0">
-                <a:solidFill>
-                  <a:srgbClr val="5B6B8A"/>
-                </a:solidFill>
-                <a:latin typeface="Calibri" pitchFamily="34" charset="0"/>
-                <a:ea typeface="Calibri" pitchFamily="34" charset="-122"/>
-                <a:cs typeface="Calibri" pitchFamily="34" charset="-120"/>
-              </a:rPr>
-              <a:t>400×300 · 1 bpp · sunlight-readable</a:t>
-            </a:r>
-            <a:endParaRPr lang="en-US" sz="1150" dirty="0"/>
-          </a:p>
-        </p:txBody>
-      </p:sp>
-      <p:sp>
-        <p:nvSpPr>
-          <p:cNvPr id="32" name="Text 30"/>
-          <p:cNvSpPr txBox="1"/>
-          <p:nvPr/>
-        </p:nvSpPr>
-        <p:spPr>
-          <a:xfrm>
-            <a:off x="502920" y="4892040"/>
+      <p:pic>
+        <p:nvPicPr>
+          <p:cNvPr id="8" name="Image 1" descr="C:/Users/deogr/AppData/Local/Temp/claude/C--Users-deogr-Documents-Fall-Project-Off-Grid-Vehicle-dection-project/e8b2e8fa-1513-4aa8-a8f6-ce4fcd20e664/scratchpad/mermaid_png/diag3.png">    </p:cNvPr>
+          <p:cNvPicPr>
+            <a:picLocks noChangeAspect="1"/>
+          </p:cNvPicPr>
+          <p:nvPr/>
+        </p:nvPicPr>
+        <p:blipFill>
+          <a:blip r:embed="rId2"/>
+          <a:stretch>
+            <a:fillRect/>
+          </a:stretch>
+        </p:blipFill>
+        <p:spPr>
+          <a:xfrm>
+            <a:off x="502920" y="3493008"/>
+            <a:ext cx="6400800" cy="841248"/>
+          </a:xfrm>
+          <a:prstGeom prst="rect">
+            <a:avLst/>
+          </a:prstGeom>
+        </p:spPr>
+      </p:pic>
+      <p:sp>
+        <p:nvSpPr>
+          <p:cNvPr id="9" name="Text 5"/>
+          <p:cNvSpPr txBox="1"/>
+          <p:nvPr/>
+        </p:nvSpPr>
+        <p:spPr>
+          <a:xfrm>
+            <a:off x="502920" y="4498848"/>
             <a:ext cx="4572000" cy="320040"/>
           </a:xfrm>
           <a:prstGeom prst="rect">
@@ -6331,363 +4726,33 @@
           </a:p>
         </p:txBody>
       </p:sp>
-      <p:sp>
-        <p:nvSpPr>
-          <p:cNvPr id="33" name="Shape 31"/>
-          <p:cNvSpPr/>
-          <p:nvPr/>
-        </p:nvSpPr>
-        <p:spPr>
-          <a:xfrm>
-            <a:off x="502920" y="5257800"/>
-            <a:ext cx="7772400" cy="1051560"/>
-          </a:xfrm>
-          <a:prstGeom prst="roundRect">
-            <a:avLst>
-              <a:gd name="adj" fmla="val 8696"/>
-            </a:avLst>
-          </a:prstGeom>
-          <a:solidFill>
-            <a:srgbClr val="F2F6FC"/>
-          </a:solidFill>
-          <a:ln w="12700">
-            <a:solidFill>
-              <a:srgbClr val="C9D9EE"/>
-            </a:solidFill>
-            <a:prstDash val="solid"/>
-          </a:ln>
-        </p:spPr>
-      </p:sp>
-      <p:sp>
-        <p:nvSpPr>
-          <p:cNvPr id="34" name="Shape 32"/>
-          <p:cNvSpPr/>
-          <p:nvPr/>
-        </p:nvSpPr>
-        <p:spPr>
-          <a:xfrm>
-            <a:off x="777240" y="5440680"/>
-            <a:ext cx="1737360" cy="685800"/>
-          </a:xfrm>
-          <a:prstGeom prst="roundRect">
-            <a:avLst>
-              <a:gd name="adj" fmla="val 9333"/>
-            </a:avLst>
-          </a:prstGeom>
-          <a:solidFill>
-            <a:srgbClr val="FFFFFF"/>
-          </a:solidFill>
-          <a:ln w="19050">
-            <a:solidFill>
-              <a:srgbClr val="1E2761"/>
-            </a:solidFill>
-            <a:prstDash val="solid"/>
-          </a:ln>
-        </p:spPr>
-      </p:sp>
-      <p:sp>
-        <p:nvSpPr>
-          <p:cNvPr id="35" name="Text 33"/>
-          <p:cNvSpPr txBox="1"/>
-          <p:nvPr/>
-        </p:nvSpPr>
-        <p:spPr>
-          <a:xfrm>
-            <a:off x="868680" y="5440680"/>
-            <a:ext cx="1554480" cy="685800"/>
-          </a:xfrm>
-          <a:prstGeom prst="rect">
-            <a:avLst/>
-          </a:prstGeom>
-          <a:noFill/>
-          <a:ln/>
-        </p:spPr>
-        <p:txBody>
-          <a:bodyPr wrap="square" lIns="0" tIns="0" rIns="0" bIns="0" rtlCol="0" anchor="ctr"/>
-          <a:lstStyle/>
-          <a:p>
-            <a:pPr algn="ctr" indent="0" marL="0">
-              <a:buNone/>
-            </a:pPr>
-            <a:r>
-              <a:rPr lang="en-US" sz="1150" b="1" dirty="0">
-                <a:solidFill>
-                  <a:srgbClr val="1E2761"/>
-                </a:solidFill>
-                <a:latin typeface="Calibri" pitchFamily="34" charset="0"/>
-                <a:ea typeface="Calibri" pitchFamily="34" charset="-122"/>
-                <a:cs typeface="Calibri" pitchFamily="34" charset="-120"/>
-              </a:rPr>
-              <a:t>Vehicle 12 V</a:t>
-            </a:r>
-            <a:endParaRPr lang="en-US" sz="1150" dirty="0"/>
-          </a:p>
-          <a:p>
-            <a:pPr algn="ctr" indent="0" marL="0">
-              <a:buNone/>
-            </a:pPr>
-            <a:r>
-              <a:rPr lang="en-US" sz="950" dirty="0">
-                <a:solidFill>
-                  <a:srgbClr val="5B6B8A"/>
-                </a:solidFill>
-                <a:latin typeface="Calibri" pitchFamily="34" charset="0"/>
-                <a:ea typeface="Calibri" pitchFamily="34" charset="-122"/>
-                <a:cs typeface="Calibri" pitchFamily="34" charset="-120"/>
-              </a:rPr>
-              <a:t>→ USB-C 5 V</a:t>
-            </a:r>
-            <a:endParaRPr lang="en-US" sz="1150" dirty="0"/>
-          </a:p>
-        </p:txBody>
-      </p:sp>
-      <p:sp>
-        <p:nvSpPr>
-          <p:cNvPr id="36" name="Shape 34"/>
-          <p:cNvSpPr/>
-          <p:nvPr/>
-        </p:nvSpPr>
-        <p:spPr>
-          <a:xfrm>
-            <a:off x="2514600" y="5669280"/>
-            <a:ext cx="640080" cy="0"/>
-          </a:xfrm>
-          <a:prstGeom prst="line">
-            <a:avLst/>
-          </a:prstGeom>
-          <a:noFill/>
-          <a:ln w="25400">
-            <a:solidFill>
-              <a:srgbClr val="1E2761"/>
-            </a:solidFill>
-            <a:prstDash val="solid"/>
-            <a:tailEnd type="triangle"/>
-          </a:ln>
-        </p:spPr>
-      </p:sp>
-      <p:sp>
-        <p:nvSpPr>
-          <p:cNvPr id="37" name="Shape 35"/>
-          <p:cNvSpPr/>
-          <p:nvPr/>
-        </p:nvSpPr>
-        <p:spPr>
-          <a:xfrm>
-            <a:off x="3154680" y="5440680"/>
-            <a:ext cx="1554480" cy="685800"/>
-          </a:xfrm>
-          <a:prstGeom prst="roundRect">
-            <a:avLst>
-              <a:gd name="adj" fmla="val 9333"/>
-            </a:avLst>
-          </a:prstGeom>
-          <a:solidFill>
-            <a:srgbClr val="FFFFFF"/>
-          </a:solidFill>
-          <a:ln w="19050">
-            <a:solidFill>
-              <a:srgbClr val="1E2761"/>
-            </a:solidFill>
-            <a:prstDash val="solid"/>
-          </a:ln>
-        </p:spPr>
-      </p:sp>
-      <p:sp>
-        <p:nvSpPr>
-          <p:cNvPr id="38" name="Text 36"/>
-          <p:cNvSpPr txBox="1"/>
-          <p:nvPr/>
-        </p:nvSpPr>
-        <p:spPr>
-          <a:xfrm>
-            <a:off x="3246120" y="5440680"/>
-            <a:ext cx="1371600" cy="685800"/>
-          </a:xfrm>
-          <a:prstGeom prst="rect">
-            <a:avLst/>
-          </a:prstGeom>
-          <a:noFill/>
-          <a:ln/>
-        </p:spPr>
-        <p:txBody>
-          <a:bodyPr wrap="square" lIns="0" tIns="0" rIns="0" bIns="0" rtlCol="0" anchor="ctr"/>
-          <a:lstStyle/>
-          <a:p>
-            <a:pPr algn="ctr" indent="0" marL="0">
-              <a:buNone/>
-            </a:pPr>
-            <a:r>
-              <a:rPr lang="en-US" sz="1150" b="1" dirty="0">
-                <a:solidFill>
-                  <a:srgbClr val="1E2761"/>
-                </a:solidFill>
-                <a:latin typeface="Calibri" pitchFamily="34" charset="0"/>
-                <a:ea typeface="Calibri" pitchFamily="34" charset="-122"/>
-                <a:cs typeface="Calibri" pitchFamily="34" charset="-120"/>
-              </a:rPr>
-              <a:t>Radio node</a:t>
-            </a:r>
-            <a:endParaRPr lang="en-US" sz="1150" dirty="0"/>
-          </a:p>
-        </p:txBody>
-      </p:sp>
-      <p:sp>
-        <p:nvSpPr>
-          <p:cNvPr id="39" name="Shape 37"/>
-          <p:cNvSpPr/>
-          <p:nvPr/>
-        </p:nvSpPr>
-        <p:spPr>
-          <a:xfrm>
-            <a:off x="4709160" y="5779008"/>
-            <a:ext cx="1051560" cy="0"/>
-          </a:xfrm>
-          <a:prstGeom prst="line">
-            <a:avLst/>
-          </a:prstGeom>
-          <a:noFill/>
-          <a:ln w="25400">
-            <a:solidFill>
-              <a:srgbClr val="E58E1A"/>
-            </a:solidFill>
-            <a:prstDash val="solid"/>
-            <a:headEnd type="triangle"/>
-            <a:tailEnd type="triangle"/>
-          </a:ln>
-        </p:spPr>
-      </p:sp>
-      <p:sp>
-        <p:nvSpPr>
-          <p:cNvPr id="40" name="Text 38"/>
-          <p:cNvSpPr txBox="1"/>
-          <p:nvPr/>
-        </p:nvSpPr>
-        <p:spPr>
-          <a:xfrm>
-            <a:off x="4389120" y="5468112"/>
-            <a:ext cx="1691640" cy="256032"/>
-          </a:xfrm>
-          <a:prstGeom prst="rect">
-            <a:avLst/>
-          </a:prstGeom>
-          <a:noFill/>
-          <a:ln/>
-        </p:spPr>
-        <p:txBody>
-          <a:bodyPr wrap="square" lIns="0" tIns="0" rIns="0" bIns="0" rtlCol="0" anchor="ctr"/>
-          <a:lstStyle/>
-          <a:p>
-            <a:pPr algn="ctr" indent="0" marL="0">
-              <a:buNone/>
-            </a:pPr>
-            <a:r>
-              <a:rPr lang="en-US" sz="950" b="1" dirty="0">
-                <a:solidFill>
-                  <a:srgbClr val="E58E1A"/>
-                </a:solidFill>
-                <a:latin typeface="Calibri" pitchFamily="34" charset="0"/>
-                <a:ea typeface="Calibri" pitchFamily="34" charset="-122"/>
-                <a:cs typeface="Calibri" pitchFamily="34" charset="-120"/>
-              </a:rPr>
-              <a:t>BLE 2.4 GHz (~1 m)</a:t>
-            </a:r>
-            <a:endParaRPr lang="en-US" sz="950" dirty="0"/>
-          </a:p>
-        </p:txBody>
-      </p:sp>
-      <p:sp>
-        <p:nvSpPr>
-          <p:cNvPr id="41" name="Shape 39"/>
-          <p:cNvSpPr/>
-          <p:nvPr/>
-        </p:nvSpPr>
-        <p:spPr>
-          <a:xfrm>
-            <a:off x="5760720" y="5440680"/>
-            <a:ext cx="1554480" cy="685800"/>
-          </a:xfrm>
-          <a:prstGeom prst="roundRect">
-            <a:avLst>
-              <a:gd name="adj" fmla="val 9333"/>
-            </a:avLst>
-          </a:prstGeom>
-          <a:solidFill>
-            <a:srgbClr val="FFFFFF"/>
-          </a:solidFill>
-          <a:ln w="19050">
-            <a:solidFill>
-              <a:srgbClr val="6D4BDB"/>
-            </a:solidFill>
-            <a:prstDash val="solid"/>
-          </a:ln>
-        </p:spPr>
-      </p:sp>
-      <p:sp>
-        <p:nvSpPr>
-          <p:cNvPr id="42" name="Text 40"/>
-          <p:cNvSpPr txBox="1"/>
-          <p:nvPr/>
-        </p:nvSpPr>
-        <p:spPr>
-          <a:xfrm>
-            <a:off x="5852160" y="5440680"/>
-            <a:ext cx="1371600" cy="685800"/>
-          </a:xfrm>
-          <a:prstGeom prst="rect">
-            <a:avLst/>
-          </a:prstGeom>
-          <a:noFill/>
-          <a:ln/>
-        </p:spPr>
-        <p:txBody>
-          <a:bodyPr wrap="square" lIns="0" tIns="0" rIns="0" bIns="0" rtlCol="0" anchor="ctr"/>
-          <a:lstStyle/>
-          <a:p>
-            <a:pPr algn="ctr" indent="0" marL="0">
-              <a:buNone/>
-            </a:pPr>
-            <a:r>
-              <a:rPr lang="en-US" sz="1150" b="1" dirty="0">
-                <a:solidFill>
-                  <a:srgbClr val="1E2761"/>
-                </a:solidFill>
-                <a:latin typeface="Calibri" pitchFamily="34" charset="0"/>
-                <a:ea typeface="Calibri" pitchFamily="34" charset="-122"/>
-                <a:cs typeface="Calibri" pitchFamily="34" charset="-120"/>
-              </a:rPr>
-              <a:t>Display node</a:t>
-            </a:r>
-            <a:endParaRPr lang="en-US" sz="1150" dirty="0"/>
-          </a:p>
-        </p:txBody>
-      </p:sp>
-      <p:sp>
-        <p:nvSpPr>
-          <p:cNvPr id="43" name="Shape 41"/>
-          <p:cNvSpPr/>
-          <p:nvPr/>
-        </p:nvSpPr>
-        <p:spPr>
-          <a:xfrm>
-            <a:off x="2514600" y="5943600"/>
-            <a:ext cx="3246120" cy="0"/>
-          </a:xfrm>
-          <a:prstGeom prst="line">
-            <a:avLst/>
-          </a:prstGeom>
-          <a:noFill/>
-          <a:ln w="12700">
-            <a:solidFill>
-              <a:srgbClr val="1E2761"/>
-            </a:solidFill>
-            <a:prstDash val="solid"/>
-            <a:tailEnd type="triangle"/>
-          </a:ln>
-        </p:spPr>
-      </p:sp>
-      <p:sp>
-        <p:nvSpPr>
-          <p:cNvPr id="44" name="Text 42"/>
+      <p:pic>
+        <p:nvPicPr>
+          <p:cNvPr id="10" name="Image 2" descr="C:/Users/deogr/AppData/Local/Temp/claude/C--Users-deogr-Documents-Fall-Project-Off-Grid-Vehicle-dection-project/e8b2e8fa-1513-4aa8-a8f6-ce4fcd20e664/scratchpad/mermaid_png/diag4.png">    </p:cNvPr>
+          <p:cNvPicPr>
+            <a:picLocks noChangeAspect="1"/>
+          </p:cNvPicPr>
+          <p:nvPr/>
+        </p:nvPicPr>
+        <p:blipFill>
+          <a:blip r:embed="rId3"/>
+          <a:stretch>
+            <a:fillRect/>
+          </a:stretch>
+        </p:blipFill>
+        <p:spPr>
+          <a:xfrm>
+            <a:off x="502920" y="4864608"/>
+            <a:ext cx="5486400" cy="1069848"/>
+          </a:xfrm>
+          <a:prstGeom prst="rect">
+            <a:avLst/>
+          </a:prstGeom>
+        </p:spPr>
+      </p:pic>
+      <p:sp>
+        <p:nvSpPr>
+          <p:cNvPr id="11" name="Text 6"/>
           <p:cNvSpPr txBox="1"/>
           <p:nvPr/>
         </p:nvSpPr>
@@ -6726,7 +4791,7 @@
       </p:sp>
       <p:sp>
         <p:nvSpPr>
-          <p:cNvPr id="45" name="Text 43"/>
+          <p:cNvPr id="12" name="Text 7"/>
           <p:cNvSpPr txBox="1"/>
           <p:nvPr/>
         </p:nvSpPr>
@@ -6959,1046 +5024,40 @@
           </a:p>
         </p:txBody>
       </p:sp>
-      <p:sp>
-        <p:nvSpPr>
-          <p:cNvPr id="5" name="Shape 3"/>
-          <p:cNvSpPr/>
-          <p:nvPr/>
-        </p:nvSpPr>
-        <p:spPr>
-          <a:xfrm>
-            <a:off x="502920" y="1188720"/>
-            <a:ext cx="3566160" cy="3977640"/>
-          </a:xfrm>
-          <a:prstGeom prst="roundRect">
-            <a:avLst>
-              <a:gd name="adj" fmla="val 2564"/>
-            </a:avLst>
-          </a:prstGeom>
-          <a:solidFill>
-            <a:srgbClr val="F2F6FC"/>
-          </a:solidFill>
-          <a:ln w="19050">
-            <a:solidFill>
-              <a:srgbClr val="1199BD"/>
-            </a:solidFill>
-            <a:prstDash val="solid"/>
-          </a:ln>
-        </p:spPr>
-      </p:sp>
-      <p:sp>
-        <p:nvSpPr>
-          <p:cNvPr id="6" name="Text 4"/>
-          <p:cNvSpPr txBox="1"/>
-          <p:nvPr/>
-        </p:nvSpPr>
-        <p:spPr>
-          <a:xfrm>
-            <a:off x="685800" y="1298448"/>
-            <a:ext cx="3200400" cy="292608"/>
-          </a:xfrm>
-          <a:prstGeom prst="rect">
-            <a:avLst/>
-          </a:prstGeom>
-          <a:noFill/>
-          <a:ln/>
-        </p:spPr>
-        <p:txBody>
-          <a:bodyPr wrap="square" lIns="0" tIns="0" rIns="0" bIns="0" rtlCol="0" anchor="ctr"/>
-          <a:lstStyle/>
-          <a:p>
-            <a:pPr indent="0" marL="0">
-              <a:buNone/>
-            </a:pPr>
-            <a:r>
-              <a:rPr lang="en-US" sz="1300" b="1" dirty="0">
-                <a:solidFill>
-                  <a:srgbClr val="1199BD"/>
-                </a:solidFill>
-                <a:latin typeface="Calibri" pitchFamily="34" charset="0"/>
-                <a:ea typeface="Calibri" pitchFamily="34" charset="-122"/>
-                <a:cs typeface="Calibri" pitchFamily="34" charset="-120"/>
-              </a:rPr>
-              <a:t>protocol/  (Deo)</a:t>
-            </a:r>
-            <a:endParaRPr lang="en-US" sz="1300" dirty="0"/>
-          </a:p>
-        </p:txBody>
-      </p:sp>
-      <p:sp>
-        <p:nvSpPr>
-          <p:cNvPr id="7" name="Shape 5"/>
-          <p:cNvSpPr/>
-          <p:nvPr/>
-        </p:nvSpPr>
-        <p:spPr>
-          <a:xfrm>
-            <a:off x="777240" y="1691640"/>
-            <a:ext cx="3017520" cy="914400"/>
-          </a:xfrm>
-          <a:prstGeom prst="roundRect">
-            <a:avLst>
-              <a:gd name="adj" fmla="val 7000"/>
-            </a:avLst>
-          </a:prstGeom>
-          <a:solidFill>
-            <a:srgbClr val="FFFFFF"/>
-          </a:solidFill>
-          <a:ln w="19050">
-            <a:solidFill>
-              <a:srgbClr val="1199BD"/>
-            </a:solidFill>
-            <a:prstDash val="solid"/>
-          </a:ln>
-        </p:spPr>
-      </p:sp>
-      <p:sp>
-        <p:nvSpPr>
-          <p:cNvPr id="8" name="Text 6"/>
-          <p:cNvSpPr txBox="1"/>
-          <p:nvPr/>
-        </p:nvSpPr>
-        <p:spPr>
-          <a:xfrm>
-            <a:off x="868680" y="1691640"/>
-            <a:ext cx="2834640" cy="914400"/>
-          </a:xfrm>
-          <a:prstGeom prst="rect">
-            <a:avLst/>
-          </a:prstGeom>
-          <a:noFill/>
-          <a:ln/>
-        </p:spPr>
-        <p:txBody>
-          <a:bodyPr wrap="square" lIns="0" tIns="0" rIns="0" bIns="0" rtlCol="0" anchor="ctr"/>
-          <a:lstStyle/>
-          <a:p>
-            <a:pPr algn="ctr" indent="0" marL="0">
-              <a:buNone/>
-            </a:pPr>
-            <a:r>
-              <a:rPr lang="en-US" sz="1150" b="1" dirty="0">
-                <a:solidFill>
-                  <a:srgbClr val="1E2761"/>
-                </a:solidFill>
-                <a:latin typeface="Calibri" pitchFamily="34" charset="0"/>
-                <a:ea typeface="Calibri" pitchFamily="34" charset="-122"/>
-                <a:cs typeface="Calibri" pitchFamily="34" charset="-120"/>
-              </a:rPr>
-              <a:t>ble_link task — NimBLE central</a:t>
-            </a:r>
-            <a:endParaRPr lang="en-US" sz="1150" dirty="0"/>
-          </a:p>
-          <a:p>
-            <a:pPr algn="ctr" indent="0" marL="0">
-              <a:buNone/>
-            </a:pPr>
-            <a:r>
-              <a:rPr lang="en-US" sz="1000" dirty="0">
-                <a:solidFill>
-                  <a:srgbClr val="5B6B8A"/>
-                </a:solidFill>
-                <a:latin typeface="Calibri" pitchFamily="34" charset="0"/>
-                <a:ea typeface="Calibri" pitchFamily="34" charset="-122"/>
-                <a:cs typeface="Calibri" pitchFamily="34" charset="-120"/>
-              </a:rPr>
-              <a:t>scan → connect → bond → subscribe → drain FromRadio</a:t>
-            </a:r>
-            <a:endParaRPr lang="en-US" sz="1150" dirty="0"/>
-          </a:p>
-        </p:txBody>
-      </p:sp>
-      <p:sp>
-        <p:nvSpPr>
-          <p:cNvPr id="9" name="Shape 7"/>
-          <p:cNvSpPr/>
-          <p:nvPr/>
-        </p:nvSpPr>
-        <p:spPr>
-          <a:xfrm>
-            <a:off x="2286000" y="2606040"/>
-            <a:ext cx="0" cy="365760"/>
-          </a:xfrm>
-          <a:prstGeom prst="line">
-            <a:avLst/>
-          </a:prstGeom>
-          <a:noFill/>
-          <a:ln w="25400">
-            <a:solidFill>
-              <a:srgbClr val="1E2761"/>
-            </a:solidFill>
-            <a:prstDash val="solid"/>
-            <a:tailEnd type="triangle"/>
-          </a:ln>
-        </p:spPr>
-      </p:sp>
-      <p:sp>
-        <p:nvSpPr>
-          <p:cNvPr id="10" name="Shape 8"/>
-          <p:cNvSpPr/>
-          <p:nvPr/>
-        </p:nvSpPr>
-        <p:spPr>
-          <a:xfrm>
-            <a:off x="777240" y="2971800"/>
-            <a:ext cx="3017520" cy="777240"/>
-          </a:xfrm>
-          <a:prstGeom prst="roundRect">
-            <a:avLst>
-              <a:gd name="adj" fmla="val 8235"/>
-            </a:avLst>
-          </a:prstGeom>
-          <a:solidFill>
-            <a:srgbClr val="FFFFFF"/>
-          </a:solidFill>
-          <a:ln w="19050">
-            <a:solidFill>
-              <a:srgbClr val="1199BD"/>
-            </a:solidFill>
-            <a:prstDash val="solid"/>
-          </a:ln>
-        </p:spPr>
-      </p:sp>
-      <p:sp>
-        <p:nvSpPr>
-          <p:cNvPr id="11" name="Text 9"/>
-          <p:cNvSpPr txBox="1"/>
-          <p:nvPr/>
-        </p:nvSpPr>
-        <p:spPr>
-          <a:xfrm>
-            <a:off x="868680" y="2971800"/>
-            <a:ext cx="2834640" cy="777240"/>
-          </a:xfrm>
-          <a:prstGeom prst="rect">
-            <a:avLst/>
-          </a:prstGeom>
-          <a:noFill/>
-          <a:ln/>
-        </p:spPr>
-        <p:txBody>
-          <a:bodyPr wrap="square" lIns="0" tIns="0" rIns="0" bIns="0" rtlCol="0" anchor="ctr"/>
-          <a:lstStyle/>
-          <a:p>
-            <a:pPr algn="ctr" indent="0" marL="0">
-              <a:buNone/>
-            </a:pPr>
-            <a:r>
-              <a:rPr lang="en-US" sz="1150" b="1" dirty="0">
-                <a:solidFill>
-                  <a:srgbClr val="1E2761"/>
-                </a:solidFill>
-                <a:latin typeface="Calibri" pitchFamily="34" charset="0"/>
-                <a:ea typeface="Calibri" pitchFamily="34" charset="-122"/>
-                <a:cs typeface="Calibri" pitchFamily="34" charset="-120"/>
-              </a:rPr>
-              <a:t>proto_decode (nanopb)</a:t>
-            </a:r>
-            <a:endParaRPr lang="en-US" sz="1150" dirty="0"/>
-          </a:p>
-          <a:p>
-            <a:pPr algn="ctr" indent="0" marL="0">
-              <a:buNone/>
-            </a:pPr>
-            <a:r>
-              <a:rPr lang="en-US" sz="1000" dirty="0">
-                <a:solidFill>
-                  <a:srgbClr val="5B6B8A"/>
-                </a:solidFill>
-                <a:latin typeface="Calibri" pitchFamily="34" charset="0"/>
-                <a:ea typeface="Calibri" pitchFamily="34" charset="-122"/>
-                <a:cs typeface="Calibri" pitchFamily="34" charset="-120"/>
-              </a:rPr>
-              <a:t>FromRadio → Position · NodeInfo · MyNodeInfo</a:t>
-            </a:r>
-            <a:endParaRPr lang="en-US" sz="1150" dirty="0"/>
-          </a:p>
-        </p:txBody>
-      </p:sp>
-      <p:sp>
-        <p:nvSpPr>
-          <p:cNvPr id="12" name="Shape 10"/>
-          <p:cNvSpPr/>
-          <p:nvPr/>
-        </p:nvSpPr>
-        <p:spPr>
-          <a:xfrm>
-            <a:off x="2286000" y="3749040"/>
-            <a:ext cx="0" cy="365760"/>
-          </a:xfrm>
-          <a:prstGeom prst="line">
-            <a:avLst/>
-          </a:prstGeom>
-          <a:noFill/>
-          <a:ln w="25400">
-            <a:solidFill>
-              <a:srgbClr val="1E2761"/>
-            </a:solidFill>
-            <a:prstDash val="solid"/>
-            <a:tailEnd type="triangle"/>
-          </a:ln>
-        </p:spPr>
-      </p:sp>
-      <p:sp>
-        <p:nvSpPr>
-          <p:cNvPr id="13" name="Shape 11"/>
-          <p:cNvSpPr/>
-          <p:nvPr/>
-        </p:nvSpPr>
-        <p:spPr>
-          <a:xfrm>
-            <a:off x="777240" y="4114800"/>
-            <a:ext cx="3017520" cy="777240"/>
-          </a:xfrm>
-          <a:prstGeom prst="roundRect">
-            <a:avLst>
-              <a:gd name="adj" fmla="val 8235"/>
-            </a:avLst>
-          </a:prstGeom>
-          <a:solidFill>
-            <a:srgbClr val="FFFFFF"/>
-          </a:solidFill>
-          <a:ln w="19050">
-            <a:solidFill>
-              <a:srgbClr val="1199BD"/>
-            </a:solidFill>
-            <a:prstDash val="solid"/>
-          </a:ln>
-        </p:spPr>
-      </p:sp>
-      <p:sp>
-        <p:nvSpPr>
-          <p:cNvPr id="14" name="Text 12"/>
-          <p:cNvSpPr txBox="1"/>
-          <p:nvPr/>
-        </p:nvSpPr>
-        <p:spPr>
-          <a:xfrm>
-            <a:off x="868680" y="4114800"/>
-            <a:ext cx="2834640" cy="777240"/>
-          </a:xfrm>
-          <a:prstGeom prst="rect">
-            <a:avLst/>
-          </a:prstGeom>
-          <a:noFill/>
-          <a:ln/>
-        </p:spPr>
-        <p:txBody>
-          <a:bodyPr wrap="square" lIns="0" tIns="0" rIns="0" bIns="0" rtlCol="0" anchor="ctr"/>
-          <a:lstStyle/>
-          <a:p>
-            <a:pPr algn="ctr" indent="0" marL="0">
-              <a:buNone/>
-            </a:pPr>
-            <a:r>
-              <a:rPr lang="en-US" sz="1150" b="1" dirty="0">
-                <a:solidFill>
-                  <a:srgbClr val="1E2761"/>
-                </a:solidFill>
-                <a:latin typeface="Calibri" pitchFamily="34" charset="0"/>
-                <a:ea typeface="Calibri" pitchFamily="34" charset="-122"/>
-                <a:cs typeface="Calibri" pitchFamily="34" charset="-120"/>
-              </a:rPr>
-              <a:t>node_table</a:t>
-            </a:r>
-            <a:endParaRPr lang="en-US" sz="1150" dirty="0"/>
-          </a:p>
-          <a:p>
-            <a:pPr algn="ctr" indent="0" marL="0">
-              <a:buNone/>
-            </a:pPr>
-            <a:r>
-              <a:rPr lang="en-US" sz="1000" dirty="0">
-                <a:solidFill>
-                  <a:srgbClr val="5B6B8A"/>
-                </a:solidFill>
-                <a:latin typeface="Calibri" pitchFamily="34" charset="0"/>
-                <a:ea typeface="Calibri" pitchFamily="34" charset="-122"/>
-                <a:cs typeface="Calibri" pitchFamily="34" charset="-120"/>
-              </a:rPr>
-              <a:t>own + partner fix · age tracking</a:t>
-            </a:r>
-            <a:endParaRPr lang="en-US" sz="1150" dirty="0"/>
-          </a:p>
-        </p:txBody>
-      </p:sp>
-      <p:sp>
-        <p:nvSpPr>
-          <p:cNvPr id="15" name="Shape 13"/>
-          <p:cNvSpPr/>
-          <p:nvPr/>
-        </p:nvSpPr>
-        <p:spPr>
-          <a:xfrm>
-            <a:off x="4572000" y="2926080"/>
-            <a:ext cx="2606040" cy="1371600"/>
-          </a:xfrm>
-          <a:prstGeom prst="roundRect">
-            <a:avLst>
-              <a:gd name="adj" fmla="val 10000"/>
-            </a:avLst>
-          </a:prstGeom>
-          <a:solidFill>
-            <a:srgbClr val="1E2761"/>
-          </a:solidFill>
-          <a:ln/>
-        </p:spPr>
-      </p:sp>
-      <p:sp>
-        <p:nvSpPr>
-          <p:cNvPr id="16" name="Text 14"/>
-          <p:cNvSpPr txBox="1"/>
-          <p:nvPr/>
-        </p:nvSpPr>
-        <p:spPr>
-          <a:xfrm>
-            <a:off x="4663440" y="2926080"/>
-            <a:ext cx="2423160" cy="1371600"/>
-          </a:xfrm>
-          <a:prstGeom prst="rect">
-            <a:avLst/>
-          </a:prstGeom>
-          <a:noFill/>
-          <a:ln/>
-        </p:spPr>
-        <p:txBody>
-          <a:bodyPr wrap="square" lIns="0" tIns="0" rIns="0" bIns="0" rtlCol="0" anchor="ctr"/>
-          <a:lstStyle/>
-          <a:p>
-            <a:pPr algn="ctr" indent="0" marL="0">
-              <a:buNone/>
-            </a:pPr>
-            <a:r>
-              <a:rPr lang="en-US" sz="1500" b="1" dirty="0">
-                <a:solidFill>
-                  <a:srgbClr val="FFFFFF"/>
-                </a:solidFill>
-                <a:latin typeface="Calibri" pitchFamily="34" charset="0"/>
-                <a:ea typeface="Calibri" pitchFamily="34" charset="-122"/>
-                <a:cs typeface="Calibri" pitchFamily="34" charset="-120"/>
-              </a:rPr>
-              <a:t>TrackerState</a:t>
-            </a:r>
-            <a:endParaRPr lang="en-US" sz="1500" dirty="0"/>
-          </a:p>
-          <a:p>
-            <a:pPr algn="ctr" indent="0" marL="0">
-              <a:buNone/>
-            </a:pPr>
-            <a:r>
-              <a:rPr lang="en-US" sz="1050" dirty="0">
-                <a:solidFill>
-                  <a:srgbClr val="CADCFC"/>
-                </a:solidFill>
-                <a:latin typeface="Calibri" pitchFamily="34" charset="0"/>
-                <a:ea typeface="Calibri" pitchFamily="34" charset="-122"/>
-                <a:cs typeface="Calibri" pitchFamily="34" charset="-120"/>
-              </a:rPr>
-              <a:t>mutex-protected</a:t>
-            </a:r>
-            <a:endParaRPr lang="en-US" sz="1500" dirty="0"/>
-          </a:p>
-          <a:p>
-            <a:pPr algn="ctr" indent="0" marL="0">
-              <a:buNone/>
-            </a:pPr>
-            <a:r>
-              <a:rPr lang="en-US" sz="1050" dirty="0">
-                <a:solidFill>
-                  <a:srgbClr val="CADCFC"/>
-                </a:solidFill>
-                <a:latin typeface="Calibri" pitchFamily="34" charset="0"/>
-                <a:ea typeface="Calibri" pitchFamily="34" charset="-122"/>
-                <a:cs typeface="Calibri" pitchFamily="34" charset="-120"/>
-              </a:rPr>
-              <a:t>self · partner · ble_connected</a:t>
-            </a:r>
-            <a:endParaRPr lang="en-US" sz="1500" dirty="0"/>
-          </a:p>
-        </p:txBody>
-      </p:sp>
-      <p:sp>
-        <p:nvSpPr>
-          <p:cNvPr id="17" name="Shape 15"/>
-          <p:cNvSpPr/>
-          <p:nvPr/>
-        </p:nvSpPr>
-        <p:spPr>
-          <a:xfrm>
-            <a:off x="4069080" y="3611880"/>
-            <a:ext cx="502920" cy="0"/>
-          </a:xfrm>
-          <a:prstGeom prst="line">
-            <a:avLst/>
-          </a:prstGeom>
-          <a:noFill/>
-          <a:ln w="25400">
-            <a:solidFill>
-              <a:srgbClr val="1E2761"/>
-            </a:solidFill>
-            <a:prstDash val="solid"/>
-            <a:tailEnd type="triangle"/>
-          </a:ln>
-        </p:spPr>
-      </p:sp>
-      <p:sp>
-        <p:nvSpPr>
-          <p:cNvPr id="18" name="Shape 16"/>
-          <p:cNvSpPr/>
-          <p:nvPr/>
-        </p:nvSpPr>
-        <p:spPr>
-          <a:xfrm>
-            <a:off x="7178040" y="3611880"/>
-            <a:ext cx="502920" cy="0"/>
-          </a:xfrm>
-          <a:prstGeom prst="line">
-            <a:avLst/>
-          </a:prstGeom>
-          <a:noFill/>
-          <a:ln w="25400">
-            <a:solidFill>
-              <a:srgbClr val="1E2761"/>
-            </a:solidFill>
-            <a:prstDash val="solid"/>
-            <a:tailEnd type="triangle"/>
-          </a:ln>
-        </p:spPr>
-      </p:sp>
-      <p:sp>
-        <p:nvSpPr>
-          <p:cNvPr id="19" name="Text 17"/>
-          <p:cNvSpPr txBox="1"/>
-          <p:nvPr/>
-        </p:nvSpPr>
-        <p:spPr>
-          <a:xfrm>
-            <a:off x="3931920" y="3794760"/>
-            <a:ext cx="914400" cy="237744"/>
-          </a:xfrm>
-          <a:prstGeom prst="rect">
-            <a:avLst/>
-          </a:prstGeom>
-          <a:noFill/>
-          <a:ln/>
-        </p:spPr>
-        <p:txBody>
-          <a:bodyPr wrap="square" lIns="0" tIns="0" rIns="0" bIns="0" rtlCol="0" anchor="ctr"/>
-          <a:lstStyle/>
-          <a:p>
-            <a:pPr indent="0" marL="0">
-              <a:buNone/>
-            </a:pPr>
-            <a:r>
-              <a:rPr lang="en-US" sz="900" b="1" dirty="0">
-                <a:solidFill>
-                  <a:srgbClr val="5B6B8A"/>
-                </a:solidFill>
-                <a:latin typeface="Calibri" pitchFamily="34" charset="0"/>
-                <a:ea typeface="Calibri" pitchFamily="34" charset="-122"/>
-                <a:cs typeface="Calibri" pitchFamily="34" charset="-120"/>
-              </a:rPr>
-              <a:t>ONE writer</a:t>
-            </a:r>
-            <a:endParaRPr lang="en-US" sz="900" dirty="0"/>
-          </a:p>
-        </p:txBody>
-      </p:sp>
-      <p:sp>
-        <p:nvSpPr>
-          <p:cNvPr id="20" name="Text 18"/>
-          <p:cNvSpPr txBox="1"/>
-          <p:nvPr/>
-        </p:nvSpPr>
-        <p:spPr>
-          <a:xfrm>
-            <a:off x="7086600" y="3794760"/>
-            <a:ext cx="914400" cy="237744"/>
-          </a:xfrm>
-          <a:prstGeom prst="rect">
-            <a:avLst/>
-          </a:prstGeom>
-          <a:noFill/>
-          <a:ln/>
-        </p:spPr>
-        <p:txBody>
-          <a:bodyPr wrap="square" lIns="0" tIns="0" rIns="0" bIns="0" rtlCol="0" anchor="ctr"/>
-          <a:lstStyle/>
-          <a:p>
-            <a:pPr indent="0" marL="0">
-              <a:buNone/>
-            </a:pPr>
-            <a:r>
-              <a:rPr lang="en-US" sz="900" b="1" dirty="0">
-                <a:solidFill>
-                  <a:srgbClr val="5B6B8A"/>
-                </a:solidFill>
-                <a:latin typeface="Calibri" pitchFamily="34" charset="0"/>
-                <a:ea typeface="Calibri" pitchFamily="34" charset="-122"/>
-                <a:cs typeface="Calibri" pitchFamily="34" charset="-120"/>
-              </a:rPr>
-              <a:t>ONE reader</a:t>
-            </a:r>
-            <a:endParaRPr lang="en-US" sz="900" dirty="0"/>
-          </a:p>
-        </p:txBody>
-      </p:sp>
-      <p:sp>
-        <p:nvSpPr>
-          <p:cNvPr id="21" name="Shape 19"/>
-          <p:cNvSpPr/>
-          <p:nvPr/>
-        </p:nvSpPr>
-        <p:spPr>
-          <a:xfrm>
-            <a:off x="8092440" y="1188720"/>
-            <a:ext cx="3566160" cy="3977640"/>
-          </a:xfrm>
-          <a:prstGeom prst="roundRect">
-            <a:avLst>
-              <a:gd name="adj" fmla="val 2564"/>
-            </a:avLst>
-          </a:prstGeom>
-          <a:solidFill>
-            <a:srgbClr val="F2F6FC"/>
-          </a:solidFill>
-          <a:ln w="19050">
-            <a:solidFill>
-              <a:srgbClr val="6D4BDB"/>
-            </a:solidFill>
-            <a:prstDash val="solid"/>
-          </a:ln>
-        </p:spPr>
-      </p:sp>
-      <p:sp>
-        <p:nvSpPr>
-          <p:cNvPr id="22" name="Text 20"/>
-          <p:cNvSpPr txBox="1"/>
-          <p:nvPr/>
-        </p:nvSpPr>
-        <p:spPr>
-          <a:xfrm>
-            <a:off x="8275320" y="1298448"/>
-            <a:ext cx="3200400" cy="292608"/>
-          </a:xfrm>
-          <a:prstGeom prst="rect">
-            <a:avLst/>
-          </a:prstGeom>
-          <a:noFill/>
-          <a:ln/>
-        </p:spPr>
-        <p:txBody>
-          <a:bodyPr wrap="square" lIns="0" tIns="0" rIns="0" bIns="0" rtlCol="0" anchor="ctr"/>
-          <a:lstStyle/>
-          <a:p>
-            <a:pPr indent="0" marL="0">
-              <a:buNone/>
-            </a:pPr>
-            <a:r>
-              <a:rPr lang="en-US" sz="1300" b="1" dirty="0">
-                <a:solidFill>
-                  <a:srgbClr val="6D4BDB"/>
-                </a:solidFill>
-                <a:latin typeface="Calibri" pitchFamily="34" charset="0"/>
-                <a:ea typeface="Calibri" pitchFamily="34" charset="-122"/>
-                <a:cs typeface="Calibri" pitchFamily="34" charset="-120"/>
-              </a:rPr>
-              <a:t>ui/ + nav/  (Josiah)</a:t>
-            </a:r>
-            <a:endParaRPr lang="en-US" sz="1300" dirty="0"/>
-          </a:p>
-        </p:txBody>
-      </p:sp>
-      <p:sp>
-        <p:nvSpPr>
-          <p:cNvPr id="23" name="Shape 21"/>
-          <p:cNvSpPr/>
-          <p:nvPr/>
-        </p:nvSpPr>
-        <p:spPr>
-          <a:xfrm>
-            <a:off x="8366760" y="1691640"/>
-            <a:ext cx="3017520" cy="914400"/>
-          </a:xfrm>
-          <a:prstGeom prst="roundRect">
-            <a:avLst>
-              <a:gd name="adj" fmla="val 7000"/>
-            </a:avLst>
-          </a:prstGeom>
-          <a:solidFill>
-            <a:srgbClr val="FFFFFF"/>
-          </a:solidFill>
-          <a:ln w="19050">
-            <a:solidFill>
-              <a:srgbClr val="6D4BDB"/>
-            </a:solidFill>
-            <a:prstDash val="solid"/>
-          </a:ln>
-        </p:spPr>
-      </p:sp>
-      <p:sp>
-        <p:nvSpPr>
-          <p:cNvPr id="24" name="Text 22"/>
-          <p:cNvSpPr txBox="1"/>
-          <p:nvPr/>
-        </p:nvSpPr>
-        <p:spPr>
-          <a:xfrm>
-            <a:off x="8458200" y="1691640"/>
-            <a:ext cx="2834640" cy="914400"/>
-          </a:xfrm>
-          <a:prstGeom prst="rect">
-            <a:avLst/>
-          </a:prstGeom>
-          <a:noFill/>
-          <a:ln/>
-        </p:spPr>
-        <p:txBody>
-          <a:bodyPr wrap="square" lIns="0" tIns="0" rIns="0" bIns="0" rtlCol="0" anchor="ctr"/>
-          <a:lstStyle/>
-          <a:p>
-            <a:pPr algn="ctr" indent="0" marL="0">
-              <a:buNone/>
-            </a:pPr>
-            <a:r>
-              <a:rPr lang="en-US" sz="1150" b="1" dirty="0">
-                <a:solidFill>
-                  <a:srgbClr val="1E2761"/>
-                </a:solidFill>
-                <a:latin typeface="Calibri" pitchFamily="34" charset="0"/>
-                <a:ea typeface="Calibri" pitchFamily="34" charset="-122"/>
-                <a:cs typeface="Calibri" pitchFamily="34" charset="-120"/>
-              </a:rPr>
-              <a:t>nav engine</a:t>
-            </a:r>
-            <a:endParaRPr lang="en-US" sz="1150" dirty="0"/>
-          </a:p>
-          <a:p>
-            <a:pPr algn="ctr" indent="0" marL="0">
-              <a:buNone/>
-            </a:pPr>
-            <a:r>
-              <a:rPr lang="en-US" sz="1000" dirty="0">
-                <a:solidFill>
-                  <a:srgbClr val="5B6B8A"/>
-                </a:solidFill>
-                <a:latin typeface="Calibri" pitchFamily="34" charset="0"/>
-                <a:ea typeface="Calibri" pitchFamily="34" charset="-122"/>
-                <a:cs typeface="Calibri" pitchFamily="34" charset="-120"/>
-              </a:rPr>
-              <a:t>haversine · bearing · COG heading + stationary fallback</a:t>
-            </a:r>
-            <a:endParaRPr lang="en-US" sz="1150" dirty="0"/>
-          </a:p>
-        </p:txBody>
-      </p:sp>
-      <p:sp>
-        <p:nvSpPr>
-          <p:cNvPr id="25" name="Shape 23"/>
-          <p:cNvSpPr/>
-          <p:nvPr/>
-        </p:nvSpPr>
-        <p:spPr>
-          <a:xfrm>
-            <a:off x="9875520" y="2606040"/>
-            <a:ext cx="0" cy="365760"/>
-          </a:xfrm>
-          <a:prstGeom prst="line">
-            <a:avLst/>
-          </a:prstGeom>
-          <a:noFill/>
-          <a:ln w="25400">
-            <a:solidFill>
-              <a:srgbClr val="1E2761"/>
-            </a:solidFill>
-            <a:prstDash val="solid"/>
-            <a:tailEnd type="triangle"/>
-          </a:ln>
-        </p:spPr>
-      </p:sp>
-      <p:sp>
-        <p:nvSpPr>
-          <p:cNvPr id="26" name="Shape 24"/>
-          <p:cNvSpPr/>
-          <p:nvPr/>
-        </p:nvSpPr>
-        <p:spPr>
-          <a:xfrm>
-            <a:off x="8366760" y="2971800"/>
-            <a:ext cx="3017520" cy="777240"/>
-          </a:xfrm>
-          <a:prstGeom prst="roundRect">
-            <a:avLst>
-              <a:gd name="adj" fmla="val 8235"/>
-            </a:avLst>
-          </a:prstGeom>
-          <a:solidFill>
-            <a:srgbClr val="FFFFFF"/>
-          </a:solidFill>
-          <a:ln w="19050">
-            <a:solidFill>
-              <a:srgbClr val="6D4BDB"/>
-            </a:solidFill>
-            <a:prstDash val="solid"/>
-          </a:ln>
-        </p:spPr>
-      </p:sp>
-      <p:sp>
-        <p:nvSpPr>
-          <p:cNvPr id="27" name="Text 25"/>
-          <p:cNvSpPr txBox="1"/>
-          <p:nvPr/>
-        </p:nvSpPr>
-        <p:spPr>
-          <a:xfrm>
-            <a:off x="8458200" y="2971800"/>
-            <a:ext cx="2834640" cy="777240"/>
-          </a:xfrm>
-          <a:prstGeom prst="rect">
-            <a:avLst/>
-          </a:prstGeom>
-          <a:noFill/>
-          <a:ln/>
-        </p:spPr>
-        <p:txBody>
-          <a:bodyPr wrap="square" lIns="0" tIns="0" rIns="0" bIns="0" rtlCol="0" anchor="ctr"/>
-          <a:lstStyle/>
-          <a:p>
-            <a:pPr algn="ctr" indent="0" marL="0">
-              <a:buNone/>
-            </a:pPr>
-            <a:r>
-              <a:rPr lang="en-US" sz="1150" b="1" dirty="0">
-                <a:solidFill>
-                  <a:srgbClr val="1E2761"/>
-                </a:solidFill>
-                <a:latin typeface="Calibri" pitchFamily="34" charset="0"/>
-                <a:ea typeface="Calibri" pitchFamily="34" charset="-122"/>
-                <a:cs typeface="Calibri" pitchFamily="34" charset="-120"/>
-              </a:rPr>
-              <a:t>ui_render task (2 Hz)</a:t>
-            </a:r>
-            <a:endParaRPr lang="en-US" sz="1150" dirty="0"/>
-          </a:p>
-          <a:p>
-            <a:pPr algn="ctr" indent="0" marL="0">
-              <a:buNone/>
-            </a:pPr>
-            <a:r>
-              <a:rPr lang="en-US" sz="1000" dirty="0">
-                <a:solidFill>
-                  <a:srgbClr val="5B6B8A"/>
-                </a:solidFill>
-                <a:latin typeface="Calibri" pitchFamily="34" charset="0"/>
-                <a:ea typeface="Calibri" pitchFamily="34" charset="-122"/>
-                <a:cs typeface="Calibri" pitchFamily="34" charset="-120"/>
-              </a:rPr>
-              <a:t>arrow · distance · data age · link status</a:t>
-            </a:r>
-            <a:endParaRPr lang="en-US" sz="1150" dirty="0"/>
-          </a:p>
-        </p:txBody>
-      </p:sp>
-      <p:sp>
-        <p:nvSpPr>
-          <p:cNvPr id="28" name="Shape 26"/>
-          <p:cNvSpPr/>
-          <p:nvPr/>
-        </p:nvSpPr>
-        <p:spPr>
-          <a:xfrm>
-            <a:off x="8366760" y="4114800"/>
-            <a:ext cx="3017520" cy="777240"/>
-          </a:xfrm>
-          <a:prstGeom prst="roundRect">
-            <a:avLst>
-              <a:gd name="adj" fmla="val 8235"/>
-            </a:avLst>
-          </a:prstGeom>
-          <a:solidFill>
-            <a:srgbClr val="FFFFFF"/>
-          </a:solidFill>
-          <a:ln w="19050">
-            <a:solidFill>
-              <a:srgbClr val="6D4BDB"/>
-            </a:solidFill>
-            <a:prstDash val="dash"/>
-          </a:ln>
-        </p:spPr>
-      </p:sp>
-      <p:sp>
-        <p:nvSpPr>
-          <p:cNvPr id="29" name="Text 27"/>
-          <p:cNvSpPr txBox="1"/>
-          <p:nvPr/>
-        </p:nvSpPr>
-        <p:spPr>
-          <a:xfrm>
-            <a:off x="8458200" y="4114800"/>
-            <a:ext cx="2834640" cy="777240"/>
-          </a:xfrm>
-          <a:prstGeom prst="rect">
-            <a:avLst/>
-          </a:prstGeom>
-          <a:noFill/>
-          <a:ln/>
-        </p:spPr>
-        <p:txBody>
-          <a:bodyPr wrap="square" lIns="0" tIns="0" rIns="0" bIns="0" rtlCol="0" anchor="ctr"/>
-          <a:lstStyle/>
-          <a:p>
-            <a:pPr algn="ctr" indent="0" marL="0">
-              <a:buNone/>
-            </a:pPr>
-            <a:r>
-              <a:rPr lang="en-US" sz="1150" b="1" dirty="0">
-                <a:solidFill>
-                  <a:srgbClr val="1E2761"/>
-                </a:solidFill>
-                <a:latin typeface="Calibri" pitchFamily="34" charset="0"/>
-                <a:ea typeface="Calibri" pitchFamily="34" charset="-122"/>
-                <a:cs typeface="Calibri" pitchFamily="34" charset="-120"/>
-              </a:rPr>
-              <a:t>sim feed (dev only)</a:t>
-            </a:r>
-            <a:endParaRPr lang="en-US" sz="1150" dirty="0"/>
-          </a:p>
-          <a:p>
-            <a:pPr algn="ctr" indent="0" marL="0">
-              <a:buNone/>
-            </a:pPr>
-            <a:r>
-              <a:rPr lang="en-US" sz="1000" dirty="0">
-                <a:solidFill>
-                  <a:srgbClr val="5B6B8A"/>
-                </a:solidFill>
-                <a:latin typeface="Calibri" pitchFamily="34" charset="0"/>
-                <a:ea typeface="Calibri" pitchFamily="34" charset="-122"/>
-                <a:cs typeface="Calibri" pitchFamily="34" charset="-120"/>
-              </a:rPr>
-              <a:t>5 fake-data scenarios — UI runs with zero radios</a:t>
-            </a:r>
-            <a:endParaRPr lang="en-US" sz="1150" dirty="0"/>
-          </a:p>
-        </p:txBody>
-      </p:sp>
-      <p:sp>
-        <p:nvSpPr>
-          <p:cNvPr id="30" name="Shape 28"/>
-          <p:cNvSpPr/>
-          <p:nvPr/>
-        </p:nvSpPr>
-        <p:spPr>
-          <a:xfrm flipH="1" flipV="1">
-            <a:off x="7178040" y="4069080"/>
-            <a:ext cx="1188720" cy="411480"/>
-          </a:xfrm>
-          <a:prstGeom prst="line">
-            <a:avLst/>
-          </a:prstGeom>
-          <a:noFill/>
-          <a:ln w="19050">
-            <a:solidFill>
-              <a:srgbClr val="6D4BDB"/>
-            </a:solidFill>
-            <a:prstDash val="dash"/>
-            <a:tailEnd type="triangle"/>
-          </a:ln>
-        </p:spPr>
-      </p:sp>
-      <p:sp>
-        <p:nvSpPr>
-          <p:cNvPr id="31" name="Shape 29"/>
-          <p:cNvSpPr/>
-          <p:nvPr/>
-        </p:nvSpPr>
-        <p:spPr>
-          <a:xfrm>
-            <a:off x="4572000" y="4892040"/>
-            <a:ext cx="2606040" cy="548640"/>
-          </a:xfrm>
-          <a:prstGeom prst="roundRect">
-            <a:avLst>
-              <a:gd name="adj" fmla="val 11667"/>
-            </a:avLst>
-          </a:prstGeom>
-          <a:solidFill>
-            <a:srgbClr val="FFFFFF"/>
-          </a:solidFill>
-          <a:ln w="19050">
-            <a:solidFill>
-              <a:srgbClr val="1E2761"/>
-            </a:solidFill>
-            <a:prstDash val="dash"/>
-          </a:ln>
-        </p:spPr>
-      </p:sp>
-      <p:sp>
-        <p:nvSpPr>
-          <p:cNvPr id="32" name="Text 30"/>
-          <p:cNvSpPr txBox="1"/>
-          <p:nvPr/>
-        </p:nvSpPr>
-        <p:spPr>
-          <a:xfrm>
-            <a:off x="4663440" y="4892040"/>
-            <a:ext cx="2423160" cy="548640"/>
-          </a:xfrm>
-          <a:prstGeom prst="rect">
-            <a:avLst/>
-          </a:prstGeom>
-          <a:noFill/>
-          <a:ln/>
-        </p:spPr>
-        <p:txBody>
-          <a:bodyPr wrap="square" lIns="0" tIns="0" rIns="0" bIns="0" rtlCol="0" anchor="ctr"/>
-          <a:lstStyle/>
-          <a:p>
-            <a:pPr algn="ctr" indent="0" marL="0">
-              <a:buNone/>
-            </a:pPr>
-            <a:r>
-              <a:rPr lang="en-US" sz="1150" b="1" dirty="0">
-                <a:solidFill>
-                  <a:srgbClr val="1E2761"/>
-                </a:solidFill>
-                <a:latin typeface="Calibri" pitchFamily="34" charset="0"/>
-                <a:ea typeface="Calibri" pitchFamily="34" charset="-122"/>
-                <a:cs typeface="Calibri" pitchFamily="34" charset="-120"/>
-              </a:rPr>
-              <a:t>NVS config</a:t>
-            </a:r>
-            <a:endParaRPr lang="en-US" sz="1150" dirty="0"/>
-          </a:p>
-          <a:p>
-            <a:pPr algn="ctr" indent="0" marL="0">
-              <a:buNone/>
-            </a:pPr>
-            <a:r>
-              <a:rPr lang="en-US" sz="950" dirty="0">
-                <a:solidFill>
-                  <a:srgbClr val="5B6B8A"/>
-                </a:solidFill>
-                <a:latin typeface="Calibri" pitchFamily="34" charset="0"/>
-                <a:ea typeface="Calibri" pitchFamily="34" charset="-122"/>
-                <a:cs typeface="Calibri" pitchFamily="34" charset="-120"/>
-              </a:rPr>
-              <a:t>radio BLE addr · units · partner ID (planned)</a:t>
-            </a:r>
-            <a:endParaRPr lang="en-US" sz="1150" dirty="0"/>
-          </a:p>
-        </p:txBody>
-      </p:sp>
-      <p:sp>
-        <p:nvSpPr>
-          <p:cNvPr id="33" name="Text 31"/>
-          <p:cNvSpPr txBox="1"/>
-          <p:nvPr/>
-        </p:nvSpPr>
-        <p:spPr>
-          <a:xfrm>
-            <a:off x="502920" y="5623560"/>
-            <a:ext cx="11155680" cy="1097280"/>
+      <p:pic>
+        <p:nvPicPr>
+          <p:cNvPr id="5" name="Image 0" descr="C:/Users/deogr/AppData/Local/Temp/claude/C--Users-deogr-Documents-Fall-Project-Off-Grid-Vehicle-dection-project/e8b2e8fa-1513-4aa8-a8f6-ce4fcd20e664/scratchpad/mermaid_png/diag5.png">    </p:cNvPr>
+          <p:cNvPicPr>
+            <a:picLocks noChangeAspect="1"/>
+          </p:cNvPicPr>
+          <p:nvPr/>
+        </p:nvPicPr>
+        <p:blipFill>
+          <a:blip r:embed="rId1"/>
+          <a:stretch>
+            <a:fillRect/>
+          </a:stretch>
+        </p:blipFill>
+        <p:spPr>
+          <a:xfrm>
+            <a:off x="640080" y="1280160"/>
+            <a:ext cx="10881360" cy="3072384"/>
+          </a:xfrm>
+          <a:prstGeom prst="rect">
+            <a:avLst/>
+          </a:prstGeom>
+        </p:spPr>
+      </p:pic>
+      <p:sp>
+        <p:nvSpPr>
+          <p:cNvPr id="6" name="Text 3"/>
+          <p:cNvSpPr txBox="1"/>
+          <p:nvPr/>
+        </p:nvSpPr>
+        <p:spPr>
+          <a:xfrm>
+            <a:off x="640080" y="4663440"/>
+            <a:ext cx="10972800" cy="1371600"/>
           </a:xfrm>
           <a:prstGeom prst="rect">
             <a:avLst/>
@@ -8018,7 +5077,7 @@
               <a:buChar char="•"/>
             </a:pPr>
             <a:r>
-              <a:rPr lang="en-US" sz="1200" dirty="0">
+              <a:rPr lang="en-US" sz="1250" dirty="0">
                 <a:solidFill>
                   <a:srgbClr val="222A3F"/>
                 </a:solidFill>
@@ -8028,7 +5087,7 @@
               </a:rPr>
               <a:t>One writer, one reader — a single mutex, no ordering bugs, and the halves never call each other.</a:t>
             </a:r>
-            <a:endParaRPr lang="en-US" sz="1200" dirty="0"/>
+            <a:endParaRPr lang="en-US" sz="1250" dirty="0"/>
           </a:p>
           <a:p>
             <a:pPr marL="342900" indent="-342900">
@@ -8039,7 +5098,7 @@
               <a:buChar char="•"/>
             </a:pPr>
             <a:r>
-              <a:rPr lang="en-US" sz="1200" dirty="0">
+              <a:rPr lang="en-US" sz="1250" dirty="0">
                 <a:solidFill>
                   <a:srgbClr val="222A3F"/>
                 </a:solidFill>
@@ -8049,7 +5108,7 @@
               </a:rPr>
               <a:t>The sim feed is a first-class component: the entire UI is testable on a bench with no radios.</a:t>
             </a:r>
-            <a:endParaRPr lang="en-US" sz="1200" dirty="0"/>
+            <a:endParaRPr lang="en-US" sz="1250" dirty="0"/>
           </a:p>
           <a:p>
             <a:pPr marL="342900" indent="-342900">
@@ -8057,7 +5116,7 @@
               <a:buChar char="•"/>
             </a:pPr>
             <a:r>
-              <a:rPr lang="en-US" sz="1200" dirty="0">
+              <a:rPr lang="en-US" sz="1250" dirty="0">
                 <a:solidFill>
                   <a:srgbClr val="222A3F"/>
                 </a:solidFill>
@@ -8067,7 +5126,7 @@
               </a:rPr>
               <a:t>Pairing is configuration, not code — the same firmware runs in both vehicles.</a:t>
             </a:r>
-            <a:endParaRPr lang="en-US" sz="1200" dirty="0"/>
+            <a:endParaRPr lang="en-US" sz="1250" dirty="0"/>
           </a:p>
         </p:txBody>
       </p:sp>
@@ -8203,1025 +5262,44 @@
           </a:p>
         </p:txBody>
       </p:sp>
-      <p:sp>
-        <p:nvSpPr>
-          <p:cNvPr id="5" name="Text 3"/>
-          <p:cNvSpPr txBox="1"/>
-          <p:nvPr/>
-        </p:nvSpPr>
-        <p:spPr>
-          <a:xfrm>
-            <a:off x="502920" y="1143000"/>
-            <a:ext cx="2743200" cy="320040"/>
-          </a:xfrm>
-          <a:prstGeom prst="rect">
-            <a:avLst/>
-          </a:prstGeom>
-          <a:noFill/>
-          <a:ln/>
-        </p:spPr>
-        <p:txBody>
-          <a:bodyPr wrap="square" lIns="0" tIns="0" rIns="0" bIns="0" rtlCol="0" anchor="ctr"/>
-          <a:lstStyle/>
-          <a:p>
-            <a:pPr indent="0" marL="0">
-              <a:buNone/>
-            </a:pPr>
-            <a:r>
-              <a:rPr lang="en-US" sz="1400" b="1" dirty="0">
-                <a:solidFill>
-                  <a:srgbClr val="1E2761"/>
-                </a:solidFill>
-                <a:latin typeface="Cambria" pitchFamily="34" charset="0"/>
-                <a:ea typeface="Cambria" pitchFamily="34" charset="-122"/>
-                <a:cs typeface="Cambria" pitchFamily="34" charset="-120"/>
-              </a:rPr>
-              <a:t>Across vehicles</a:t>
-            </a:r>
-            <a:endParaRPr lang="en-US" sz="1400" dirty="0"/>
-          </a:p>
-        </p:txBody>
-      </p:sp>
-      <p:sp>
-        <p:nvSpPr>
-          <p:cNvPr id="6" name="Shape 4"/>
+      <p:pic>
+        <p:nvPicPr>
+          <p:cNvPr id="5" name="Image 0" descr="C:/Users/deogr/AppData/Local/Temp/claude/C--Users-deogr-Documents-Fall-Project-Off-Grid-Vehicle-dection-project/e8b2e8fa-1513-4aa8-a8f6-ce4fcd20e664/scratchpad/mermaid_png/diag6.png">    </p:cNvPr>
+          <p:cNvPicPr>
+            <a:picLocks noChangeAspect="1"/>
+          </p:cNvPicPr>
+          <p:nvPr/>
+        </p:nvPicPr>
+        <p:blipFill>
+          <a:blip r:embed="rId1"/>
+          <a:stretch>
+            <a:fillRect/>
+          </a:stretch>
+        </p:blipFill>
+        <p:spPr>
+          <a:xfrm>
+            <a:off x="1051560" y="1097280"/>
+            <a:ext cx="10058400" cy="3675888"/>
+          </a:xfrm>
+          <a:prstGeom prst="rect">
+            <a:avLst/>
+          </a:prstGeom>
+        </p:spPr>
+      </p:pic>
+      <p:sp>
+        <p:nvSpPr>
+          <p:cNvPr id="6" name="Shape 3"/>
           <p:cNvSpPr/>
           <p:nvPr/>
         </p:nvSpPr>
         <p:spPr>
           <a:xfrm>
-            <a:off x="502920" y="1554480"/>
-            <a:ext cx="1645920" cy="868680"/>
+            <a:off x="502920" y="4983480"/>
+            <a:ext cx="11155680" cy="1417320"/>
           </a:xfrm>
           <a:prstGeom prst="roundRect">
             <a:avLst>
-              <a:gd name="adj" fmla="val 7368"/>
-            </a:avLst>
-          </a:prstGeom>
-          <a:solidFill>
-            <a:srgbClr val="FFFFFF"/>
-          </a:solidFill>
-          <a:ln w="19050">
-            <a:solidFill>
-              <a:srgbClr val="1E2761"/>
-            </a:solidFill>
-            <a:prstDash val="solid"/>
-          </a:ln>
-        </p:spPr>
-      </p:sp>
-      <p:sp>
-        <p:nvSpPr>
-          <p:cNvPr id="7" name="Text 5"/>
-          <p:cNvSpPr txBox="1"/>
-          <p:nvPr/>
-        </p:nvSpPr>
-        <p:spPr>
-          <a:xfrm>
-            <a:off x="594360" y="1554480"/>
-            <a:ext cx="1463040" cy="868680"/>
-          </a:xfrm>
-          <a:prstGeom prst="rect">
-            <a:avLst/>
-          </a:prstGeom>
-          <a:noFill/>
-          <a:ln/>
-        </p:spPr>
-        <p:txBody>
-          <a:bodyPr wrap="square" lIns="0" tIns="0" rIns="0" bIns="0" rtlCol="0" anchor="ctr"/>
-          <a:lstStyle/>
-          <a:p>
-            <a:pPr algn="ctr" indent="0" marL="0">
-              <a:buNone/>
-            </a:pPr>
-            <a:r>
-              <a:rPr lang="en-US" sz="1150" b="1" dirty="0">
-                <a:solidFill>
-                  <a:srgbClr val="1E2761"/>
-                </a:solidFill>
-                <a:latin typeface="Calibri" pitchFamily="34" charset="0"/>
-                <a:ea typeface="Calibri" pitchFamily="34" charset="-122"/>
-                <a:cs typeface="Calibri" pitchFamily="34" charset="-120"/>
-              </a:rPr>
-              <a:t>1 · GPS fix</a:t>
-            </a:r>
-            <a:endParaRPr lang="en-US" sz="1150" dirty="0"/>
-          </a:p>
-          <a:p>
-            <a:pPr algn="ctr" indent="0" marL="0">
-              <a:buNone/>
-            </a:pPr>
-            <a:r>
-              <a:rPr lang="en-US" sz="950" dirty="0">
-                <a:solidFill>
-                  <a:srgbClr val="5B6B8A"/>
-                </a:solidFill>
-                <a:latin typeface="Calibri" pitchFamily="34" charset="0"/>
-                <a:ea typeface="Calibri" pitchFamily="34" charset="-122"/>
-                <a:cs typeface="Calibri" pitchFamily="34" charset="-120"/>
-              </a:rPr>
-              <a:t>partner vehicle · 1 Hz NMEA</a:t>
-            </a:r>
-            <a:endParaRPr lang="en-US" sz="1150" dirty="0"/>
-          </a:p>
-        </p:txBody>
-      </p:sp>
-      <p:sp>
-        <p:nvSpPr>
-          <p:cNvPr id="8" name="Shape 6"/>
-          <p:cNvSpPr/>
-          <p:nvPr/>
-        </p:nvSpPr>
-        <p:spPr>
-          <a:xfrm>
-            <a:off x="2148840" y="1984248"/>
-            <a:ext cx="502920" cy="0"/>
-          </a:xfrm>
-          <a:prstGeom prst="line">
-            <a:avLst/>
-          </a:prstGeom>
-          <a:noFill/>
-          <a:ln w="25400">
-            <a:solidFill>
-              <a:srgbClr val="1E2761"/>
-            </a:solidFill>
-            <a:prstDash val="solid"/>
-            <a:tailEnd type="triangle"/>
-          </a:ln>
-        </p:spPr>
-      </p:sp>
-      <p:sp>
-        <p:nvSpPr>
-          <p:cNvPr id="9" name="Text 7"/>
-          <p:cNvSpPr txBox="1"/>
-          <p:nvPr/>
-        </p:nvSpPr>
-        <p:spPr>
-          <a:xfrm>
-            <a:off x="1828800" y="1673352"/>
-            <a:ext cx="1143000" cy="256032"/>
-          </a:xfrm>
-          <a:prstGeom prst="rect">
-            <a:avLst/>
-          </a:prstGeom>
-          <a:noFill/>
-          <a:ln/>
-        </p:spPr>
-        <p:txBody>
-          <a:bodyPr wrap="square" lIns="0" tIns="0" rIns="0" bIns="0" rtlCol="0" anchor="ctr"/>
-          <a:lstStyle/>
-          <a:p>
-            <a:pPr algn="ctr" indent="0" marL="0">
-              <a:buNone/>
-            </a:pPr>
-            <a:r>
-              <a:rPr lang="en-US" sz="950" b="1" dirty="0">
-                <a:solidFill>
-                  <a:srgbClr val="1E2761"/>
-                </a:solidFill>
-                <a:latin typeface="Calibri" pitchFamily="34" charset="0"/>
-                <a:ea typeface="Calibri" pitchFamily="34" charset="-122"/>
-                <a:cs typeface="Calibri" pitchFamily="34" charset="-120"/>
-              </a:rPr>
-              <a:t>UART</a:t>
-            </a:r>
-            <a:endParaRPr lang="en-US" sz="950" dirty="0"/>
-          </a:p>
-        </p:txBody>
-      </p:sp>
-      <p:sp>
-        <p:nvSpPr>
-          <p:cNvPr id="10" name="Shape 8"/>
-          <p:cNvSpPr/>
-          <p:nvPr/>
-        </p:nvSpPr>
-        <p:spPr>
-          <a:xfrm>
-            <a:off x="2651760" y="1554480"/>
-            <a:ext cx="1828800" cy="868680"/>
-          </a:xfrm>
-          <a:prstGeom prst="roundRect">
-            <a:avLst>
-              <a:gd name="adj" fmla="val 7368"/>
-            </a:avLst>
-          </a:prstGeom>
-          <a:solidFill>
-            <a:srgbClr val="FFFFFF"/>
-          </a:solidFill>
-          <a:ln w="19050">
-            <a:solidFill>
-              <a:srgbClr val="1E2761"/>
-            </a:solidFill>
-            <a:prstDash val="solid"/>
-          </a:ln>
-        </p:spPr>
-      </p:sp>
-      <p:sp>
-        <p:nvSpPr>
-          <p:cNvPr id="11" name="Text 9"/>
-          <p:cNvSpPr txBox="1"/>
-          <p:nvPr/>
-        </p:nvSpPr>
-        <p:spPr>
-          <a:xfrm>
-            <a:off x="2743200" y="1554480"/>
-            <a:ext cx="1645920" cy="868680"/>
-          </a:xfrm>
-          <a:prstGeom prst="rect">
-            <a:avLst/>
-          </a:prstGeom>
-          <a:noFill/>
-          <a:ln/>
-        </p:spPr>
-        <p:txBody>
-          <a:bodyPr wrap="square" lIns="0" tIns="0" rIns="0" bIns="0" rtlCol="0" anchor="ctr"/>
-          <a:lstStyle/>
-          <a:p>
-            <a:pPr algn="ctr" indent="0" marL="0">
-              <a:buNone/>
-            </a:pPr>
-            <a:r>
-              <a:rPr lang="en-US" sz="1150" b="1" dirty="0">
-                <a:solidFill>
-                  <a:srgbClr val="1E2761"/>
-                </a:solidFill>
-                <a:latin typeface="Calibri" pitchFamily="34" charset="0"/>
-                <a:ea typeface="Calibri" pitchFamily="34" charset="-122"/>
-                <a:cs typeface="Calibri" pitchFamily="34" charset="-120"/>
-              </a:rPr>
-              <a:t>2 · Meshtastic B</a:t>
-            </a:r>
-            <a:endParaRPr lang="en-US" sz="1150" dirty="0"/>
-          </a:p>
-          <a:p>
-            <a:pPr algn="ctr" indent="0" marL="0">
-              <a:buNone/>
-            </a:pPr>
-            <a:r>
-              <a:rPr lang="en-US" sz="950" dirty="0">
-                <a:solidFill>
-                  <a:srgbClr val="5B6B8A"/>
-                </a:solidFill>
-                <a:latin typeface="Calibri" pitchFamily="34" charset="0"/>
-                <a:ea typeface="Calibri" pitchFamily="34" charset="-122"/>
-                <a:cs typeface="Calibri" pitchFamily="34" charset="-120"/>
-              </a:rPr>
-              <a:t>builds Position packet</a:t>
-            </a:r>
-            <a:endParaRPr lang="en-US" sz="1150" dirty="0"/>
-          </a:p>
-        </p:txBody>
-      </p:sp>
-      <p:sp>
-        <p:nvSpPr>
-          <p:cNvPr id="12" name="Shape 10"/>
-          <p:cNvSpPr/>
-          <p:nvPr/>
-        </p:nvSpPr>
-        <p:spPr>
-          <a:xfrm>
-            <a:off x="4480560" y="1984248"/>
-            <a:ext cx="1417320" cy="0"/>
-          </a:xfrm>
-          <a:prstGeom prst="line">
-            <a:avLst/>
-          </a:prstGeom>
-          <a:noFill/>
-          <a:ln w="31750">
-            <a:solidFill>
-              <a:srgbClr val="B06207"/>
-            </a:solidFill>
-            <a:prstDash val="solid"/>
-            <a:tailEnd type="triangle"/>
-          </a:ln>
-        </p:spPr>
-      </p:sp>
-      <p:sp>
-        <p:nvSpPr>
-          <p:cNvPr id="13" name="Text 11"/>
-          <p:cNvSpPr txBox="1"/>
-          <p:nvPr/>
-        </p:nvSpPr>
-        <p:spPr>
-          <a:xfrm>
-            <a:off x="4160520" y="1673352"/>
-            <a:ext cx="2057400" cy="256032"/>
-          </a:xfrm>
-          <a:prstGeom prst="rect">
-            <a:avLst/>
-          </a:prstGeom>
-          <a:noFill/>
-          <a:ln/>
-        </p:spPr>
-        <p:txBody>
-          <a:bodyPr wrap="square" lIns="0" tIns="0" rIns="0" bIns="0" rtlCol="0" anchor="ctr"/>
-          <a:lstStyle/>
-          <a:p>
-            <a:pPr algn="ctr" indent="0" marL="0">
-              <a:buNone/>
-            </a:pPr>
-            <a:r>
-              <a:rPr lang="en-US" sz="950" b="1" dirty="0">
-                <a:solidFill>
-                  <a:srgbClr val="B06207"/>
-                </a:solidFill>
-                <a:latin typeface="Calibri" pitchFamily="34" charset="0"/>
-                <a:ea typeface="Calibri" pitchFamily="34" charset="-122"/>
-                <a:cs typeface="Calibri" pitchFamily="34" charset="-120"/>
-              </a:rPr>
-              <a:t>LoRa · every 30–60 s</a:t>
-            </a:r>
-            <a:endParaRPr lang="en-US" sz="950" dirty="0"/>
-          </a:p>
-        </p:txBody>
-      </p:sp>
-      <p:sp>
-        <p:nvSpPr>
-          <p:cNvPr id="14" name="Text 12"/>
-          <p:cNvSpPr txBox="1"/>
-          <p:nvPr/>
-        </p:nvSpPr>
-        <p:spPr>
-          <a:xfrm>
-            <a:off x="4206240" y="2240280"/>
-            <a:ext cx="2011680" cy="457200"/>
-          </a:xfrm>
-          <a:prstGeom prst="rect">
-            <a:avLst/>
-          </a:prstGeom>
-          <a:noFill/>
-          <a:ln/>
-        </p:spPr>
-        <p:txBody>
-          <a:bodyPr wrap="square" lIns="0" tIns="0" rIns="0" bIns="0" rtlCol="0" anchor="ctr"/>
-          <a:lstStyle/>
-          <a:p>
-            <a:pPr algn="ctr" indent="0" marL="0">
-              <a:buNone/>
-            </a:pPr>
-            <a:r>
-              <a:rPr lang="en-US" sz="900" dirty="0">
-                <a:solidFill>
-                  <a:srgbClr val="B06207"/>
-                </a:solidFill>
-                <a:latin typeface="Calibri" pitchFamily="34" charset="0"/>
-                <a:ea typeface="Calibri" pitchFamily="34" charset="-122"/>
-                <a:cs typeface="Calibri" pitchFamily="34" charset="-120"/>
-              </a:rPr>
-              <a:t>~0.5 s airtime · AES-256 · mesh relay</a:t>
-            </a:r>
-            <a:endParaRPr lang="en-US" sz="900" dirty="0"/>
-          </a:p>
-        </p:txBody>
-      </p:sp>
-      <p:sp>
-        <p:nvSpPr>
-          <p:cNvPr id="15" name="Shape 13"/>
-          <p:cNvSpPr/>
-          <p:nvPr/>
-        </p:nvSpPr>
-        <p:spPr>
-          <a:xfrm>
-            <a:off x="5897880" y="1554480"/>
-            <a:ext cx="1783080" cy="868680"/>
-          </a:xfrm>
-          <a:prstGeom prst="roundRect">
-            <a:avLst>
-              <a:gd name="adj" fmla="val 7368"/>
-            </a:avLst>
-          </a:prstGeom>
-          <a:solidFill>
-            <a:srgbClr val="FFFFFF"/>
-          </a:solidFill>
-          <a:ln w="19050">
-            <a:solidFill>
-              <a:srgbClr val="1E2761"/>
-            </a:solidFill>
-            <a:prstDash val="solid"/>
-          </a:ln>
-        </p:spPr>
-      </p:sp>
-      <p:sp>
-        <p:nvSpPr>
-          <p:cNvPr id="16" name="Text 14"/>
-          <p:cNvSpPr txBox="1"/>
-          <p:nvPr/>
-        </p:nvSpPr>
-        <p:spPr>
-          <a:xfrm>
-            <a:off x="5989320" y="1554480"/>
-            <a:ext cx="1600200" cy="868680"/>
-          </a:xfrm>
-          <a:prstGeom prst="rect">
-            <a:avLst/>
-          </a:prstGeom>
-          <a:noFill/>
-          <a:ln/>
-        </p:spPr>
-        <p:txBody>
-          <a:bodyPr wrap="square" lIns="0" tIns="0" rIns="0" bIns="0" rtlCol="0" anchor="ctr"/>
-          <a:lstStyle/>
-          <a:p>
-            <a:pPr algn="ctr" indent="0" marL="0">
-              <a:buNone/>
-            </a:pPr>
-            <a:r>
-              <a:rPr lang="en-US" sz="1150" b="1" dirty="0">
-                <a:solidFill>
-                  <a:srgbClr val="1E2761"/>
-                </a:solidFill>
-                <a:latin typeface="Calibri" pitchFamily="34" charset="0"/>
-                <a:ea typeface="Calibri" pitchFamily="34" charset="-122"/>
-                <a:cs typeface="Calibri" pitchFamily="34" charset="-120"/>
-              </a:rPr>
-              <a:t>3 · Meshtastic A</a:t>
-            </a:r>
-            <a:endParaRPr lang="en-US" sz="1150" dirty="0"/>
-          </a:p>
-          <a:p>
-            <a:pPr algn="ctr" indent="0" marL="0">
-              <a:buNone/>
-            </a:pPr>
-            <a:r>
-              <a:rPr lang="en-US" sz="900" dirty="0">
-                <a:solidFill>
-                  <a:srgbClr val="5B6B8A"/>
-                </a:solidFill>
-                <a:latin typeface="Calibri" pitchFamily="34" charset="0"/>
-                <a:ea typeface="Calibri" pitchFamily="34" charset="-122"/>
-                <a:cs typeface="Calibri" pitchFamily="34" charset="-120"/>
-              </a:rPr>
-              <a:t>receives · node DB · queues FromRadio</a:t>
-            </a:r>
-            <a:endParaRPr lang="en-US" sz="1150" dirty="0"/>
-          </a:p>
-        </p:txBody>
-      </p:sp>
-      <p:sp>
-        <p:nvSpPr>
-          <p:cNvPr id="17" name="Shape 15"/>
-          <p:cNvSpPr/>
-          <p:nvPr/>
-        </p:nvSpPr>
-        <p:spPr>
-          <a:xfrm>
-            <a:off x="7680960" y="1984248"/>
-            <a:ext cx="1188720" cy="0"/>
-          </a:xfrm>
-          <a:prstGeom prst="line">
-            <a:avLst/>
-          </a:prstGeom>
-          <a:noFill/>
-          <a:ln w="25400">
-            <a:solidFill>
-              <a:srgbClr val="E58E1A"/>
-            </a:solidFill>
-            <a:prstDash val="solid"/>
-            <a:tailEnd type="triangle"/>
-          </a:ln>
-        </p:spPr>
-      </p:sp>
-      <p:sp>
-        <p:nvSpPr>
-          <p:cNvPr id="18" name="Text 16"/>
-          <p:cNvSpPr txBox="1"/>
-          <p:nvPr/>
-        </p:nvSpPr>
-        <p:spPr>
-          <a:xfrm>
-            <a:off x="7360920" y="1673352"/>
-            <a:ext cx="1828800" cy="256032"/>
-          </a:xfrm>
-          <a:prstGeom prst="rect">
-            <a:avLst/>
-          </a:prstGeom>
-          <a:noFill/>
-          <a:ln/>
-        </p:spPr>
-        <p:txBody>
-          <a:bodyPr wrap="square" lIns="0" tIns="0" rIns="0" bIns="0" rtlCol="0" anchor="ctr"/>
-          <a:lstStyle/>
-          <a:p>
-            <a:pPr algn="ctr" indent="0" marL="0">
-              <a:buNone/>
-            </a:pPr>
-            <a:r>
-              <a:rPr lang="en-US" sz="950" b="1" dirty="0">
-                <a:solidFill>
-                  <a:srgbClr val="E58E1A"/>
-                </a:solidFill>
-                <a:latin typeface="Calibri" pitchFamily="34" charset="0"/>
-                <a:ea typeface="Calibri" pitchFamily="34" charset="-122"/>
-                <a:cs typeface="Calibri" pitchFamily="34" charset="-120"/>
-              </a:rPr>
-              <a:t>BLE notify → drain</a:t>
-            </a:r>
-            <a:endParaRPr lang="en-US" sz="950" dirty="0"/>
-          </a:p>
-        </p:txBody>
-      </p:sp>
-      <p:sp>
-        <p:nvSpPr>
-          <p:cNvPr id="19" name="Shape 17"/>
-          <p:cNvSpPr/>
-          <p:nvPr/>
-        </p:nvSpPr>
-        <p:spPr>
-          <a:xfrm>
-            <a:off x="8869680" y="1554480"/>
-            <a:ext cx="2788920" cy="868680"/>
-          </a:xfrm>
-          <a:prstGeom prst="roundRect">
-            <a:avLst>
-              <a:gd name="adj" fmla="val 7368"/>
-            </a:avLst>
-          </a:prstGeom>
-          <a:solidFill>
-            <a:srgbClr val="FFFFFF"/>
-          </a:solidFill>
-          <a:ln w="19050">
-            <a:solidFill>
-              <a:srgbClr val="1199BD"/>
-            </a:solidFill>
-            <a:prstDash val="solid"/>
-          </a:ln>
-        </p:spPr>
-      </p:sp>
-      <p:sp>
-        <p:nvSpPr>
-          <p:cNvPr id="20" name="Text 18"/>
-          <p:cNvSpPr txBox="1"/>
-          <p:nvPr/>
-        </p:nvSpPr>
-        <p:spPr>
-          <a:xfrm>
-            <a:off x="8961120" y="1554480"/>
-            <a:ext cx="2606040" cy="868680"/>
-          </a:xfrm>
-          <a:prstGeom prst="rect">
-            <a:avLst/>
-          </a:prstGeom>
-          <a:noFill/>
-          <a:ln/>
-        </p:spPr>
-        <p:txBody>
-          <a:bodyPr wrap="square" lIns="0" tIns="0" rIns="0" bIns="0" rtlCol="0" anchor="ctr"/>
-          <a:lstStyle/>
-          <a:p>
-            <a:pPr algn="ctr" indent="0" marL="0">
-              <a:buNone/>
-            </a:pPr>
-            <a:r>
-              <a:rPr lang="en-US" sz="1150" b="1" dirty="0">
-                <a:solidFill>
-                  <a:srgbClr val="1E2761"/>
-                </a:solidFill>
-                <a:latin typeface="Calibri" pitchFamily="34" charset="0"/>
-                <a:ea typeface="Calibri" pitchFamily="34" charset="-122"/>
-                <a:cs typeface="Calibri" pitchFamily="34" charset="-120"/>
-              </a:rPr>
-              <a:t>4 · protocol/ (Deo)</a:t>
-            </a:r>
-            <a:endParaRPr lang="en-US" sz="1150" dirty="0"/>
-          </a:p>
-          <a:p>
-            <a:pPr algn="ctr" indent="0" marL="0">
-              <a:buNone/>
-            </a:pPr>
-            <a:r>
-              <a:rPr lang="en-US" sz="900" dirty="0">
-                <a:solidFill>
-                  <a:srgbClr val="5B6B8A"/>
-                </a:solidFill>
-                <a:latin typeface="Calibri" pitchFamily="34" charset="0"/>
-                <a:ea typeface="Calibri" pitchFamily="34" charset="-122"/>
-                <a:cs typeface="Calibri" pitchFamily="34" charset="-120"/>
-              </a:rPr>
-              <a:t>read FromRadio until empty · nanopb decode → node_table</a:t>
-            </a:r>
-            <a:endParaRPr lang="en-US" sz="1150" dirty="0"/>
-          </a:p>
-        </p:txBody>
-      </p:sp>
-      <p:sp>
-        <p:nvSpPr>
-          <p:cNvPr id="21" name="Shape 19"/>
-          <p:cNvSpPr/>
-          <p:nvPr/>
-        </p:nvSpPr>
-        <p:spPr>
-          <a:xfrm>
-            <a:off x="10259568" y="2423160"/>
-            <a:ext cx="0" cy="640080"/>
-          </a:xfrm>
-          <a:prstGeom prst="line">
-            <a:avLst/>
-          </a:prstGeom>
-          <a:noFill/>
-          <a:ln w="25400">
-            <a:solidFill>
-              <a:srgbClr val="1E2761"/>
-            </a:solidFill>
-            <a:prstDash val="solid"/>
-          </a:ln>
-        </p:spPr>
-      </p:sp>
-      <p:sp>
-        <p:nvSpPr>
-          <p:cNvPr id="22" name="Shape 20"/>
-          <p:cNvSpPr/>
-          <p:nvPr/>
-        </p:nvSpPr>
-        <p:spPr>
-          <a:xfrm>
-            <a:off x="1737360" y="3063240"/>
-            <a:ext cx="8522208" cy="0"/>
-          </a:xfrm>
-          <a:prstGeom prst="line">
-            <a:avLst/>
-          </a:prstGeom>
-          <a:noFill/>
-          <a:ln w="25400">
-            <a:solidFill>
-              <a:srgbClr val="1E2761"/>
-            </a:solidFill>
-            <a:prstDash val="solid"/>
-          </a:ln>
-        </p:spPr>
-      </p:sp>
-      <p:sp>
-        <p:nvSpPr>
-          <p:cNvPr id="23" name="Shape 21"/>
-          <p:cNvSpPr/>
-          <p:nvPr/>
-        </p:nvSpPr>
-        <p:spPr>
-          <a:xfrm>
-            <a:off x="1737360" y="3063240"/>
-            <a:ext cx="0" cy="457200"/>
-          </a:xfrm>
-          <a:prstGeom prst="line">
-            <a:avLst/>
-          </a:prstGeom>
-          <a:noFill/>
-          <a:ln w="25400">
-            <a:solidFill>
-              <a:srgbClr val="1E2761"/>
-            </a:solidFill>
-            <a:prstDash val="solid"/>
-            <a:tailEnd type="triangle"/>
-          </a:ln>
-        </p:spPr>
-      </p:sp>
-      <p:sp>
-        <p:nvSpPr>
-          <p:cNvPr id="24" name="Text 22"/>
-          <p:cNvSpPr txBox="1"/>
-          <p:nvPr/>
-        </p:nvSpPr>
-        <p:spPr>
-          <a:xfrm>
-            <a:off x="1920240" y="3145536"/>
-            <a:ext cx="3657600" cy="292608"/>
-          </a:xfrm>
-          <a:prstGeom prst="rect">
-            <a:avLst/>
-          </a:prstGeom>
-          <a:noFill/>
-          <a:ln/>
-        </p:spPr>
-        <p:txBody>
-          <a:bodyPr wrap="square" lIns="0" tIns="0" rIns="0" bIns="0" rtlCol="0" anchor="ctr"/>
-          <a:lstStyle/>
-          <a:p>
-            <a:pPr indent="0" marL="0">
-              <a:buNone/>
-            </a:pPr>
-            <a:r>
-              <a:rPr lang="en-US" sz="1400" b="1" dirty="0">
-                <a:solidFill>
-                  <a:srgbClr val="1E2761"/>
-                </a:solidFill>
-                <a:latin typeface="Cambria" pitchFamily="34" charset="0"/>
-                <a:ea typeface="Cambria" pitchFamily="34" charset="-122"/>
-                <a:cs typeface="Cambria" pitchFamily="34" charset="-120"/>
-              </a:rPr>
-              <a:t>Inside the display node</a:t>
-            </a:r>
-            <a:endParaRPr lang="en-US" sz="1400" dirty="0"/>
-          </a:p>
-        </p:txBody>
-      </p:sp>
-      <p:sp>
-        <p:nvSpPr>
-          <p:cNvPr id="25" name="Shape 23"/>
-          <p:cNvSpPr/>
-          <p:nvPr/>
-        </p:nvSpPr>
-        <p:spPr>
-          <a:xfrm>
-            <a:off x="502920" y="3520440"/>
-            <a:ext cx="2468880" cy="868680"/>
-          </a:xfrm>
-          <a:prstGeom prst="roundRect">
-            <a:avLst>
-              <a:gd name="adj" fmla="val 7368"/>
-            </a:avLst>
-          </a:prstGeom>
-          <a:solidFill>
-            <a:srgbClr val="1E2761"/>
-          </a:solidFill>
-          <a:ln w="19050">
-            <a:solidFill>
-              <a:srgbClr val="1E2761"/>
-            </a:solidFill>
-            <a:prstDash val="solid"/>
-          </a:ln>
-        </p:spPr>
-      </p:sp>
-      <p:sp>
-        <p:nvSpPr>
-          <p:cNvPr id="26" name="Text 24"/>
-          <p:cNvSpPr txBox="1"/>
-          <p:nvPr/>
-        </p:nvSpPr>
-        <p:spPr>
-          <a:xfrm>
-            <a:off x="594360" y="3520440"/>
-            <a:ext cx="2286000" cy="868680"/>
-          </a:xfrm>
-          <a:prstGeom prst="rect">
-            <a:avLst/>
-          </a:prstGeom>
-          <a:noFill/>
-          <a:ln/>
-        </p:spPr>
-        <p:txBody>
-          <a:bodyPr wrap="square" lIns="0" tIns="0" rIns="0" bIns="0" rtlCol="0" anchor="ctr"/>
-          <a:lstStyle/>
-          <a:p>
-            <a:pPr algn="ctr" indent="0" marL="0">
-              <a:buNone/>
-            </a:pPr>
-            <a:r>
-              <a:rPr lang="en-US" sz="1150" b="1" dirty="0">
-                <a:solidFill>
-                  <a:srgbClr val="FFFFFF"/>
-                </a:solidFill>
-                <a:latin typeface="Calibri" pitchFamily="34" charset="0"/>
-                <a:ea typeface="Calibri" pitchFamily="34" charset="-122"/>
-                <a:cs typeface="Calibri" pitchFamily="34" charset="-120"/>
-              </a:rPr>
-              <a:t>5 · TrackerState</a:t>
-            </a:r>
-            <a:endParaRPr lang="en-US" sz="1150" dirty="0"/>
-          </a:p>
-          <a:p>
-            <a:pPr algn="ctr" indent="0" marL="0">
-              <a:buNone/>
-            </a:pPr>
-            <a:r>
-              <a:rPr lang="en-US" sz="900" dirty="0">
-                <a:solidFill>
-                  <a:srgbClr val="CADCFC"/>
-                </a:solidFill>
-                <a:latin typeface="Calibri" pitchFamily="34" charset="0"/>
-                <a:ea typeface="Calibri" pitchFamily="34" charset="-122"/>
-                <a:cs typeface="Calibri" pitchFamily="34" charset="-120"/>
-              </a:rPr>
-              <a:t>self · partner · ages · clock (mutex · 1 Hz publish)</a:t>
-            </a:r>
-            <a:endParaRPr lang="en-US" sz="1150" dirty="0"/>
-          </a:p>
-        </p:txBody>
-      </p:sp>
-      <p:sp>
-        <p:nvSpPr>
-          <p:cNvPr id="27" name="Shape 25"/>
-          <p:cNvSpPr/>
-          <p:nvPr/>
-        </p:nvSpPr>
-        <p:spPr>
-          <a:xfrm>
-            <a:off x="2971800" y="3950208"/>
-            <a:ext cx="548640" cy="0"/>
-          </a:xfrm>
-          <a:prstGeom prst="line">
-            <a:avLst/>
-          </a:prstGeom>
-          <a:noFill/>
-          <a:ln w="25400">
-            <a:solidFill>
-              <a:srgbClr val="1E2761"/>
-            </a:solidFill>
-            <a:prstDash val="solid"/>
-            <a:tailEnd type="triangle"/>
-          </a:ln>
-        </p:spPr>
-      </p:sp>
-      <p:sp>
-        <p:nvSpPr>
-          <p:cNvPr id="28" name="Shape 26"/>
-          <p:cNvSpPr/>
-          <p:nvPr/>
-        </p:nvSpPr>
-        <p:spPr>
-          <a:xfrm>
-            <a:off x="3520440" y="3520440"/>
-            <a:ext cx="2834640" cy="868680"/>
-          </a:xfrm>
-          <a:prstGeom prst="roundRect">
-            <a:avLst>
-              <a:gd name="adj" fmla="val 7368"/>
-            </a:avLst>
-          </a:prstGeom>
-          <a:solidFill>
-            <a:srgbClr val="FFFFFF"/>
-          </a:solidFill>
-          <a:ln w="19050">
-            <a:solidFill>
-              <a:srgbClr val="6D4BDB"/>
-            </a:solidFill>
-            <a:prstDash val="solid"/>
-          </a:ln>
-        </p:spPr>
-      </p:sp>
-      <p:sp>
-        <p:nvSpPr>
-          <p:cNvPr id="29" name="Text 27"/>
-          <p:cNvSpPr txBox="1"/>
-          <p:nvPr/>
-        </p:nvSpPr>
-        <p:spPr>
-          <a:xfrm>
-            <a:off x="3611880" y="3520440"/>
-            <a:ext cx="2651760" cy="868680"/>
-          </a:xfrm>
-          <a:prstGeom prst="rect">
-            <a:avLst/>
-          </a:prstGeom>
-          <a:noFill/>
-          <a:ln/>
-        </p:spPr>
-        <p:txBody>
-          <a:bodyPr wrap="square" lIns="0" tIns="0" rIns="0" bIns="0" rtlCol="0" anchor="ctr"/>
-          <a:lstStyle/>
-          <a:p>
-            <a:pPr algn="ctr" indent="0" marL="0">
-              <a:buNone/>
-            </a:pPr>
-            <a:r>
-              <a:rPr lang="en-US" sz="1150" b="1" dirty="0">
-                <a:solidFill>
-                  <a:srgbClr val="1E2761"/>
-                </a:solidFill>
-                <a:latin typeface="Calibri" pitchFamily="34" charset="0"/>
-                <a:ea typeface="Calibri" pitchFamily="34" charset="-122"/>
-                <a:cs typeface="Calibri" pitchFamily="34" charset="-120"/>
-              </a:rPr>
-              <a:t>6 · nav engine (Josiah)</a:t>
-            </a:r>
-            <a:endParaRPr lang="en-US" sz="1150" dirty="0"/>
-          </a:p>
-          <a:p>
-            <a:pPr algn="ctr" indent="0" marL="0">
-              <a:buNone/>
-            </a:pPr>
-            <a:r>
-              <a:rPr lang="en-US" sz="900" dirty="0">
-                <a:solidFill>
-                  <a:srgbClr val="5B6B8A"/>
-                </a:solidFill>
-                <a:latin typeface="Calibri" pitchFamily="34" charset="0"/>
-                <a:ea typeface="Calibri" pitchFamily="34" charset="-122"/>
-                <a:cs typeface="Calibri" pitchFamily="34" charset="-120"/>
-              </a:rPr>
-              <a:t>d = haversine · arrow = θ − COG · rose fallback when stopped</a:t>
-            </a:r>
-            <a:endParaRPr lang="en-US" sz="1150" dirty="0"/>
-          </a:p>
-        </p:txBody>
-      </p:sp>
-      <p:sp>
-        <p:nvSpPr>
-          <p:cNvPr id="30" name="Shape 28"/>
-          <p:cNvSpPr/>
-          <p:nvPr/>
-        </p:nvSpPr>
-        <p:spPr>
-          <a:xfrm>
-            <a:off x="6355080" y="3950208"/>
-            <a:ext cx="548640" cy="0"/>
-          </a:xfrm>
-          <a:prstGeom prst="line">
-            <a:avLst/>
-          </a:prstGeom>
-          <a:noFill/>
-          <a:ln w="25400">
-            <a:solidFill>
-              <a:srgbClr val="1E2761"/>
-            </a:solidFill>
-            <a:prstDash val="solid"/>
-            <a:tailEnd type="triangle"/>
-          </a:ln>
-        </p:spPr>
-      </p:sp>
-      <p:sp>
-        <p:nvSpPr>
-          <p:cNvPr id="31" name="Shape 29"/>
-          <p:cNvSpPr/>
-          <p:nvPr/>
-        </p:nvSpPr>
-        <p:spPr>
-          <a:xfrm>
-            <a:off x="6903720" y="3520440"/>
-            <a:ext cx="3017520" cy="868680"/>
-          </a:xfrm>
-          <a:prstGeom prst="roundRect">
-            <a:avLst>
-              <a:gd name="adj" fmla="val 7368"/>
-            </a:avLst>
-          </a:prstGeom>
-          <a:solidFill>
-            <a:srgbClr val="FFFFFF"/>
-          </a:solidFill>
-          <a:ln w="19050">
-            <a:solidFill>
-              <a:srgbClr val="6D4BDB"/>
-            </a:solidFill>
-            <a:prstDash val="solid"/>
-          </a:ln>
-        </p:spPr>
-      </p:sp>
-      <p:sp>
-        <p:nvSpPr>
-          <p:cNvPr id="32" name="Text 30"/>
-          <p:cNvSpPr txBox="1"/>
-          <p:nvPr/>
-        </p:nvSpPr>
-        <p:spPr>
-          <a:xfrm>
-            <a:off x="6995160" y="3520440"/>
-            <a:ext cx="2834640" cy="868680"/>
-          </a:xfrm>
-          <a:prstGeom prst="rect">
-            <a:avLst/>
-          </a:prstGeom>
-          <a:noFill/>
-          <a:ln/>
-        </p:spPr>
-        <p:txBody>
-          <a:bodyPr wrap="square" lIns="0" tIns="0" rIns="0" bIns="0" rtlCol="0" anchor="ctr"/>
-          <a:lstStyle/>
-          <a:p>
-            <a:pPr algn="ctr" indent="0" marL="0">
-              <a:buNone/>
-            </a:pPr>
-            <a:r>
-              <a:rPr lang="en-US" sz="1150" b="1" dirty="0">
-                <a:solidFill>
-                  <a:srgbClr val="1E2761"/>
-                </a:solidFill>
-                <a:latin typeface="Calibri" pitchFamily="34" charset="0"/>
-                <a:ea typeface="Calibri" pitchFamily="34" charset="-122"/>
-                <a:cs typeface="Calibri" pitchFamily="34" charset="-120"/>
-              </a:rPr>
-              <a:t>7 · RLCD redraw @ 2 Hz</a:t>
-            </a:r>
-            <a:endParaRPr lang="en-US" sz="1150" dirty="0"/>
-          </a:p>
-          <a:p>
-            <a:pPr algn="ctr" indent="0" marL="0">
-              <a:buNone/>
-            </a:pPr>
-            <a:r>
-              <a:rPr lang="en-US" sz="950" dirty="0">
-                <a:solidFill>
-                  <a:srgbClr val="5B6B8A"/>
-                </a:solidFill>
-                <a:latin typeface="Calibri" pitchFamily="34" charset="0"/>
-                <a:ea typeface="Calibri" pitchFamily="34" charset="-122"/>
-                <a:cs typeface="Calibri" pitchFamily="34" charset="-120"/>
-              </a:rPr>
-              <a:t>arrow · miles · age · link · local clock</a:t>
-            </a:r>
-            <a:endParaRPr lang="en-US" sz="1150" dirty="0"/>
-          </a:p>
-        </p:txBody>
-      </p:sp>
-      <p:sp>
-        <p:nvSpPr>
-          <p:cNvPr id="33" name="Shape 31"/>
-          <p:cNvSpPr/>
-          <p:nvPr/>
-        </p:nvSpPr>
-        <p:spPr>
-          <a:xfrm>
-            <a:off x="502920" y="4800600"/>
-            <a:ext cx="11155680" cy="1463040"/>
-          </a:xfrm>
-          <a:prstGeom prst="roundRect">
-            <a:avLst>
-              <a:gd name="adj" fmla="val 6250"/>
+              <a:gd name="adj" fmla="val 6452"/>
             </a:avLst>
           </a:prstGeom>
           <a:solidFill>
@@ -9237,13 +5315,13 @@
       </p:sp>
       <p:sp>
         <p:nvSpPr>
-          <p:cNvPr id="34" name="Text 32"/>
-          <p:cNvSpPr txBox="1"/>
-          <p:nvPr/>
-        </p:nvSpPr>
-        <p:spPr>
-          <a:xfrm>
-            <a:off x="731520" y="4956048"/>
+          <p:cNvPr id="7" name="Text 4"/>
+          <p:cNvSpPr txBox="1"/>
+          <p:nvPr/>
+        </p:nvSpPr>
+        <p:spPr>
+          <a:xfrm>
+            <a:off x="731520" y="5120640"/>
             <a:ext cx="10698480" cy="1188720"/>
           </a:xfrm>
           <a:prstGeom prst="rect">
@@ -9449,849 +5527,144 @@
           </a:p>
         </p:txBody>
       </p:sp>
-      <p:sp>
-        <p:nvSpPr>
-          <p:cNvPr id="5" name="Shape 3"/>
+      <p:pic>
+        <p:nvPicPr>
+          <p:cNvPr id="5" name="Image 0" descr="C:/Users/deogr/AppData/Local/Temp/claude/C--Users-deogr-Documents-Fall-Project-Off-Grid-Vehicle-dection-project/e8b2e8fa-1513-4aa8-a8f6-ce4fcd20e664/scratchpad/mermaid_png/diag7.png">    </p:cNvPr>
+          <p:cNvPicPr>
+            <a:picLocks noChangeAspect="1"/>
+          </p:cNvPicPr>
+          <p:nvPr/>
+        </p:nvPicPr>
+        <p:blipFill>
+          <a:blip r:embed="rId1"/>
+          <a:stretch>
+            <a:fillRect/>
+          </a:stretch>
+        </p:blipFill>
+        <p:spPr>
+          <a:xfrm>
+            <a:off x="685800" y="1325880"/>
+            <a:ext cx="3520440" cy="5120640"/>
+          </a:xfrm>
+          <a:prstGeom prst="rect">
+            <a:avLst/>
+          </a:prstGeom>
+        </p:spPr>
+      </p:pic>
+      <p:sp>
+        <p:nvSpPr>
+          <p:cNvPr id="6" name="Shape 3"/>
           <p:cNvSpPr/>
           <p:nvPr/>
         </p:nvSpPr>
         <p:spPr>
           <a:xfrm>
-            <a:off x="640080" y="2011680"/>
-            <a:ext cx="1965960" cy="914400"/>
+            <a:off x="4709160" y="1600200"/>
+            <a:ext cx="6858000" cy="1737360"/>
           </a:xfrm>
           <a:prstGeom prst="roundRect">
             <a:avLst>
-              <a:gd name="adj" fmla="val 7000"/>
+              <a:gd name="adj" fmla="val 5263"/>
             </a:avLst>
           </a:prstGeom>
           <a:solidFill>
-            <a:srgbClr val="F2F6FC"/>
+            <a:srgbClr val="1E2761"/>
           </a:solidFill>
-          <a:ln w="19050">
-            <a:solidFill>
-              <a:srgbClr val="1E2761"/>
-            </a:solidFill>
-            <a:prstDash val="solid"/>
-          </a:ln>
-        </p:spPr>
-      </p:sp>
-      <p:sp>
-        <p:nvSpPr>
-          <p:cNvPr id="6" name="Text 4"/>
-          <p:cNvSpPr txBox="1"/>
-          <p:nvPr/>
-        </p:nvSpPr>
-        <p:spPr>
-          <a:xfrm>
-            <a:off x="731520" y="2011680"/>
-            <a:ext cx="1783080" cy="914400"/>
-          </a:xfrm>
-          <a:prstGeom prst="rect">
-            <a:avLst/>
-          </a:prstGeom>
-          <a:noFill/>
-          <a:ln/>
-        </p:spPr>
-        <p:txBody>
-          <a:bodyPr wrap="square" lIns="0" tIns="0" rIns="0" bIns="0" rtlCol="0" anchor="ctr"/>
-          <a:lstStyle/>
-          <a:p>
-            <a:pPr algn="ctr" indent="0" marL="0">
-              <a:buNone/>
-            </a:pPr>
-            <a:r>
-              <a:rPr lang="en-US" sz="1150" b="1" dirty="0">
-                <a:solidFill>
-                  <a:srgbClr val="1E2761"/>
+          <a:ln/>
+        </p:spPr>
+      </p:sp>
+      <p:sp>
+        <p:nvSpPr>
+          <p:cNvPr id="7" name="Text 4"/>
+          <p:cNvSpPr txBox="1"/>
+          <p:nvPr/>
+        </p:nvSpPr>
+        <p:spPr>
+          <a:xfrm>
+            <a:off x="4937760" y="1755648"/>
+            <a:ext cx="6400800" cy="292608"/>
+          </a:xfrm>
+          <a:prstGeom prst="rect">
+            <a:avLst/>
+          </a:prstGeom>
+          <a:noFill/>
+          <a:ln/>
+        </p:spPr>
+        <p:txBody>
+          <a:bodyPr wrap="square" lIns="0" tIns="0" rIns="0" bIns="0" rtlCol="0" anchor="ctr"/>
+          <a:lstStyle/>
+          <a:p>
+            <a:pPr indent="0" marL="0">
+              <a:buNone/>
+            </a:pPr>
+            <a:r>
+              <a:rPr lang="en-US" sz="1350" b="1" dirty="0">
+                <a:solidFill>
+                  <a:srgbClr val="E58E1A"/>
                 </a:solidFill>
                 <a:latin typeface="Calibri" pitchFamily="34" charset="0"/>
                 <a:ea typeface="Calibri" pitchFamily="34" charset="-122"/>
                 <a:cs typeface="Calibri" pitchFamily="34" charset="-120"/>
               </a:rPr>
-              <a:t>SCANNING</a:t>
-            </a:r>
-            <a:endParaRPr lang="en-US" sz="1150" dirty="0"/>
-          </a:p>
-          <a:p>
-            <a:pPr algn="ctr" indent="0" marL="0">
-              <a:buNone/>
-            </a:pPr>
-            <a:r>
-              <a:rPr lang="en-US" sz="950" dirty="0">
-                <a:solidFill>
-                  <a:srgbClr val="5B6B8A"/>
+              <a:t>Degradation rule</a:t>
+            </a:r>
+            <a:endParaRPr lang="en-US" sz="1350" dirty="0"/>
+          </a:p>
+        </p:txBody>
+      </p:sp>
+      <p:sp>
+        <p:nvSpPr>
+          <p:cNvPr id="8" name="Text 5"/>
+          <p:cNvSpPr txBox="1"/>
+          <p:nvPr/>
+        </p:nvSpPr>
+        <p:spPr>
+          <a:xfrm>
+            <a:off x="4937760" y="2103120"/>
+            <a:ext cx="6400800" cy="1097280"/>
+          </a:xfrm>
+          <a:prstGeom prst="rect">
+            <a:avLst/>
+          </a:prstGeom>
+          <a:noFill/>
+          <a:ln/>
+        </p:spPr>
+        <p:txBody>
+          <a:bodyPr wrap="square" lIns="0" tIns="0" rIns="0" bIns="0" rtlCol="0" anchor="ctr"/>
+          <a:lstStyle/>
+          <a:p>
+            <a:pPr indent="0" marL="0">
+              <a:buNone/>
+            </a:pPr>
+            <a:r>
+              <a:rPr lang="en-US" sz="1300" dirty="0">
+                <a:solidFill>
+                  <a:srgbClr val="FFFFFF"/>
                 </a:solidFill>
                 <a:latin typeface="Calibri" pitchFamily="34" charset="0"/>
                 <a:ea typeface="Calibri" pitchFamily="34" charset="-122"/>
                 <a:cs typeface="Calibri" pitchFamily="34" charset="-120"/>
               </a:rPr>
-              <a:t>direct connect by NVS addr · scan fallback</a:t>
-            </a:r>
-            <a:endParaRPr lang="en-US" sz="1150" dirty="0"/>
-          </a:p>
-        </p:txBody>
-      </p:sp>
-      <p:sp>
-        <p:nvSpPr>
-          <p:cNvPr id="7" name="Shape 5"/>
+              <a:t>The UI always renders — last known data plus an honest age and link flag — no matter what state the BLE link is in. Link loss degrades the display; it never blanks it.</a:t>
+            </a:r>
+            <a:endParaRPr lang="en-US" sz="1300" dirty="0"/>
+          </a:p>
+        </p:txBody>
+      </p:sp>
+      <p:sp>
+        <p:nvSpPr>
+          <p:cNvPr id="9" name="Shape 6"/>
           <p:cNvSpPr/>
           <p:nvPr/>
         </p:nvSpPr>
         <p:spPr>
           <a:xfrm>
-            <a:off x="2880360" y="2011680"/>
-            <a:ext cx="1965960" cy="914400"/>
+            <a:off x="4709160" y="3611880"/>
+            <a:ext cx="6858000" cy="1737360"/>
           </a:xfrm>
           <a:prstGeom prst="roundRect">
             <a:avLst>
-              <a:gd name="adj" fmla="val 7000"/>
-            </a:avLst>
-          </a:prstGeom>
-          <a:solidFill>
-            <a:srgbClr val="F2F6FC"/>
-          </a:solidFill>
-          <a:ln w="19050">
-            <a:solidFill>
-              <a:srgbClr val="1E2761"/>
-            </a:solidFill>
-            <a:prstDash val="solid"/>
-          </a:ln>
-        </p:spPr>
-      </p:sp>
-      <p:sp>
-        <p:nvSpPr>
-          <p:cNvPr id="8" name="Text 6"/>
-          <p:cNvSpPr txBox="1"/>
-          <p:nvPr/>
-        </p:nvSpPr>
-        <p:spPr>
-          <a:xfrm>
-            <a:off x="2971800" y="2011680"/>
-            <a:ext cx="1783080" cy="914400"/>
-          </a:xfrm>
-          <a:prstGeom prst="rect">
-            <a:avLst/>
-          </a:prstGeom>
-          <a:noFill/>
-          <a:ln/>
-        </p:spPr>
-        <p:txBody>
-          <a:bodyPr wrap="square" lIns="0" tIns="0" rIns="0" bIns="0" rtlCol="0" anchor="ctr"/>
-          <a:lstStyle/>
-          <a:p>
-            <a:pPr algn="ctr" indent="0" marL="0">
-              <a:buNone/>
-            </a:pPr>
-            <a:r>
-              <a:rPr lang="en-US" sz="1150" b="1" dirty="0">
-                <a:solidFill>
-                  <a:srgbClr val="1E2761"/>
-                </a:solidFill>
-                <a:latin typeface="Calibri" pitchFamily="34" charset="0"/>
-                <a:ea typeface="Calibri" pitchFamily="34" charset="-122"/>
-                <a:cs typeface="Calibri" pitchFamily="34" charset="-120"/>
-              </a:rPr>
-              <a:t>CONNECTING</a:t>
-            </a:r>
-            <a:endParaRPr lang="en-US" sz="1150" dirty="0"/>
-          </a:p>
-          <a:p>
-            <a:pPr algn="ctr" indent="0" marL="0">
-              <a:buNone/>
-            </a:pPr>
-            <a:r>
-              <a:rPr lang="en-US" sz="950" dirty="0">
-                <a:solidFill>
-                  <a:srgbClr val="5B6B8A"/>
-                </a:solidFill>
-                <a:latin typeface="Calibri" pitchFamily="34" charset="0"/>
-                <a:ea typeface="Calibri" pitchFamily="34" charset="-122"/>
-                <a:cs typeface="Calibri" pitchFamily="34" charset="-120"/>
-              </a:rPr>
-              <a:t>3 tries · 10 s timeout</a:t>
-            </a:r>
-            <a:endParaRPr lang="en-US" sz="1150" dirty="0"/>
-          </a:p>
-        </p:txBody>
-      </p:sp>
-      <p:sp>
-        <p:nvSpPr>
-          <p:cNvPr id="9" name="Shape 7"/>
-          <p:cNvSpPr/>
-          <p:nvPr/>
-        </p:nvSpPr>
-        <p:spPr>
-          <a:xfrm>
-            <a:off x="5120640" y="2011680"/>
-            <a:ext cx="1965960" cy="914400"/>
-          </a:xfrm>
-          <a:prstGeom prst="roundRect">
-            <a:avLst>
-              <a:gd name="adj" fmla="val 7000"/>
-            </a:avLst>
-          </a:prstGeom>
-          <a:solidFill>
-            <a:srgbClr val="FDF1E2"/>
-          </a:solidFill>
-          <a:ln w="19050">
-            <a:solidFill>
-              <a:srgbClr val="B06207"/>
-            </a:solidFill>
-            <a:prstDash val="solid"/>
-          </a:ln>
-        </p:spPr>
-      </p:sp>
-      <p:sp>
-        <p:nvSpPr>
-          <p:cNvPr id="10" name="Text 8"/>
-          <p:cNvSpPr txBox="1"/>
-          <p:nvPr/>
-        </p:nvSpPr>
-        <p:spPr>
-          <a:xfrm>
-            <a:off x="5212080" y="2011680"/>
-            <a:ext cx="1783080" cy="914400"/>
-          </a:xfrm>
-          <a:prstGeom prst="rect">
-            <a:avLst/>
-          </a:prstGeom>
-          <a:noFill/>
-          <a:ln/>
-        </p:spPr>
-        <p:txBody>
-          <a:bodyPr wrap="square" lIns="0" tIns="0" rIns="0" bIns="0" rtlCol="0" anchor="ctr"/>
-          <a:lstStyle/>
-          <a:p>
-            <a:pPr algn="ctr" indent="0" marL="0">
-              <a:buNone/>
-            </a:pPr>
-            <a:r>
-              <a:rPr lang="en-US" sz="1150" b="1" dirty="0">
-                <a:solidFill>
-                  <a:srgbClr val="B06207"/>
-                </a:solidFill>
-                <a:latin typeface="Calibri" pitchFamily="34" charset="0"/>
-                <a:ea typeface="Calibri" pitchFamily="34" charset="-122"/>
-                <a:cs typeface="Calibri" pitchFamily="34" charset="-120"/>
-              </a:rPr>
-              <a:t>BONDING</a:t>
-            </a:r>
-            <a:endParaRPr lang="en-US" sz="1150" dirty="0"/>
-          </a:p>
-          <a:p>
-            <a:pPr algn="ctr" indent="0" marL="0">
-              <a:buNone/>
-            </a:pPr>
-            <a:r>
-              <a:rPr lang="en-US" sz="950" dirty="0">
-                <a:solidFill>
-                  <a:srgbClr val="5B6B8A"/>
-                </a:solidFill>
-                <a:latin typeface="Calibri" pitchFamily="34" charset="0"/>
-                <a:ea typeface="Calibri" pitchFamily="34" charset="-122"/>
-                <a:cs typeface="Calibri" pitchFamily="34" charset="-120"/>
-              </a:rPr>
-              <a:t>encrypted pairing (Just Works, NO_PIN)</a:t>
-            </a:r>
-            <a:endParaRPr lang="en-US" sz="1150" dirty="0"/>
-          </a:p>
-        </p:txBody>
-      </p:sp>
-      <p:sp>
-        <p:nvSpPr>
-          <p:cNvPr id="11" name="Shape 9"/>
-          <p:cNvSpPr/>
-          <p:nvPr/>
-        </p:nvSpPr>
-        <p:spPr>
-          <a:xfrm>
-            <a:off x="7360920" y="2011680"/>
-            <a:ext cx="1965960" cy="914400"/>
-          </a:xfrm>
-          <a:prstGeom prst="roundRect">
-            <a:avLst>
-              <a:gd name="adj" fmla="val 7000"/>
-            </a:avLst>
-          </a:prstGeom>
-          <a:solidFill>
-            <a:srgbClr val="E7F5EE"/>
-          </a:solidFill>
-          <a:ln w="19050">
-            <a:solidFill>
-              <a:srgbClr val="1F9D68"/>
-            </a:solidFill>
-            <a:prstDash val="solid"/>
-          </a:ln>
-        </p:spPr>
-      </p:sp>
-      <p:sp>
-        <p:nvSpPr>
-          <p:cNvPr id="12" name="Text 10"/>
-          <p:cNvSpPr txBox="1"/>
-          <p:nvPr/>
-        </p:nvSpPr>
-        <p:spPr>
-          <a:xfrm>
-            <a:off x="7452360" y="2011680"/>
-            <a:ext cx="1783080" cy="914400"/>
-          </a:xfrm>
-          <a:prstGeom prst="rect">
-            <a:avLst/>
-          </a:prstGeom>
-          <a:noFill/>
-          <a:ln/>
-        </p:spPr>
-        <p:txBody>
-          <a:bodyPr wrap="square" lIns="0" tIns="0" rIns="0" bIns="0" rtlCol="0" anchor="ctr"/>
-          <a:lstStyle/>
-          <a:p>
-            <a:pPr algn="ctr" indent="0" marL="0">
-              <a:buNone/>
-            </a:pPr>
-            <a:r>
-              <a:rPr lang="en-US" sz="1150" b="1" dirty="0">
-                <a:solidFill>
-                  <a:srgbClr val="1F9D68"/>
-                </a:solidFill>
-                <a:latin typeface="Calibri" pitchFamily="34" charset="0"/>
-                <a:ea typeface="Calibri" pitchFamily="34" charset="-122"/>
-                <a:cs typeface="Calibri" pitchFamily="34" charset="-120"/>
-              </a:rPr>
-              <a:t>SUBSCRIBED</a:t>
-            </a:r>
-            <a:endParaRPr lang="en-US" sz="1150" dirty="0"/>
-          </a:p>
-          <a:p>
-            <a:pPr algn="ctr" indent="0" marL="0">
-              <a:buNone/>
-            </a:pPr>
-            <a:r>
-              <a:rPr lang="en-US" sz="950" dirty="0">
-                <a:solidFill>
-                  <a:srgbClr val="5B6B8A"/>
-                </a:solidFill>
-                <a:latin typeface="Calibri" pitchFamily="34" charset="0"/>
-                <a:ea typeface="Calibri" pitchFamily="34" charset="-122"/>
-                <a:cs typeface="Calibri" pitchFamily="34" charset="-120"/>
-              </a:rPr>
-              <a:t>fromNum notify + want_config handshake</a:t>
-            </a:r>
-            <a:endParaRPr lang="en-US" sz="1150" dirty="0"/>
-          </a:p>
-        </p:txBody>
-      </p:sp>
-      <p:sp>
-        <p:nvSpPr>
-          <p:cNvPr id="13" name="Shape 11"/>
-          <p:cNvSpPr/>
-          <p:nvPr/>
-        </p:nvSpPr>
-        <p:spPr>
-          <a:xfrm>
-            <a:off x="9601200" y="2011680"/>
-            <a:ext cx="1965960" cy="914400"/>
-          </a:xfrm>
-          <a:prstGeom prst="roundRect">
-            <a:avLst>
-              <a:gd name="adj" fmla="val 7000"/>
-            </a:avLst>
-          </a:prstGeom>
-          <a:solidFill>
-            <a:srgbClr val="E7F5EE"/>
-          </a:solidFill>
-          <a:ln w="19050">
-            <a:solidFill>
-              <a:srgbClr val="1F9D68"/>
-            </a:solidFill>
-            <a:prstDash val="solid"/>
-          </a:ln>
-        </p:spPr>
-      </p:sp>
-      <p:sp>
-        <p:nvSpPr>
-          <p:cNvPr id="14" name="Text 12"/>
-          <p:cNvSpPr txBox="1"/>
-          <p:nvPr/>
-        </p:nvSpPr>
-        <p:spPr>
-          <a:xfrm>
-            <a:off x="9692640" y="2011680"/>
-            <a:ext cx="1783080" cy="914400"/>
-          </a:xfrm>
-          <a:prstGeom prst="rect">
-            <a:avLst/>
-          </a:prstGeom>
-          <a:noFill/>
-          <a:ln/>
-        </p:spPr>
-        <p:txBody>
-          <a:bodyPr wrap="square" lIns="0" tIns="0" rIns="0" bIns="0" rtlCol="0" anchor="ctr"/>
-          <a:lstStyle/>
-          <a:p>
-            <a:pPr algn="ctr" indent="0" marL="0">
-              <a:buNone/>
-            </a:pPr>
-            <a:r>
-              <a:rPr lang="en-US" sz="1150" b="1" dirty="0">
-                <a:solidFill>
-                  <a:srgbClr val="1F9D68"/>
-                </a:solidFill>
-                <a:latin typeface="Calibri" pitchFamily="34" charset="0"/>
-                <a:ea typeface="Calibri" pitchFamily="34" charset="-122"/>
-                <a:cs typeface="Calibri" pitchFamily="34" charset="-120"/>
-              </a:rPr>
-              <a:t>DRAINING</a:t>
-            </a:r>
-            <a:endParaRPr lang="en-US" sz="1150" dirty="0"/>
-          </a:p>
-          <a:p>
-            <a:pPr algn="ctr" indent="0" marL="0">
-              <a:buNone/>
-            </a:pPr>
-            <a:r>
-              <a:rPr lang="en-US" sz="950" dirty="0">
-                <a:solidFill>
-                  <a:srgbClr val="5B6B8A"/>
-                </a:solidFill>
-                <a:latin typeface="Calibri" pitchFamily="34" charset="0"/>
-                <a:ea typeface="Calibri" pitchFamily="34" charset="-122"/>
-                <a:cs typeface="Calibri" pitchFamily="34" charset="-120"/>
-              </a:rPr>
-              <a:t>read FromRadio → empty</a:t>
-            </a:r>
-            <a:endParaRPr lang="en-US" sz="1150" dirty="0"/>
-          </a:p>
-        </p:txBody>
-      </p:sp>
-      <p:sp>
-        <p:nvSpPr>
-          <p:cNvPr id="15" name="Shape 13"/>
-          <p:cNvSpPr/>
-          <p:nvPr/>
-        </p:nvSpPr>
-        <p:spPr>
-          <a:xfrm>
-            <a:off x="2606040" y="2468880"/>
-            <a:ext cx="274320" cy="0"/>
-          </a:xfrm>
-          <a:prstGeom prst="line">
-            <a:avLst/>
-          </a:prstGeom>
-          <a:noFill/>
-          <a:ln w="25400">
-            <a:solidFill>
-              <a:srgbClr val="1E2761"/>
-            </a:solidFill>
-            <a:prstDash val="solid"/>
-            <a:tailEnd type="triangle"/>
-          </a:ln>
-        </p:spPr>
-      </p:sp>
-      <p:sp>
-        <p:nvSpPr>
-          <p:cNvPr id="16" name="Shape 14"/>
-          <p:cNvSpPr/>
-          <p:nvPr/>
-        </p:nvSpPr>
-        <p:spPr>
-          <a:xfrm>
-            <a:off x="4846320" y="2468880"/>
-            <a:ext cx="274320" cy="0"/>
-          </a:xfrm>
-          <a:prstGeom prst="line">
-            <a:avLst/>
-          </a:prstGeom>
-          <a:noFill/>
-          <a:ln w="25400">
-            <a:solidFill>
-              <a:srgbClr val="1E2761"/>
-            </a:solidFill>
-            <a:prstDash val="solid"/>
-            <a:tailEnd type="triangle"/>
-          </a:ln>
-        </p:spPr>
-      </p:sp>
-      <p:sp>
-        <p:nvSpPr>
-          <p:cNvPr id="17" name="Shape 15"/>
-          <p:cNvSpPr/>
-          <p:nvPr/>
-        </p:nvSpPr>
-        <p:spPr>
-          <a:xfrm>
-            <a:off x="7086600" y="2468880"/>
-            <a:ext cx="274320" cy="0"/>
-          </a:xfrm>
-          <a:prstGeom prst="line">
-            <a:avLst/>
-          </a:prstGeom>
-          <a:noFill/>
-          <a:ln w="25400">
-            <a:solidFill>
-              <a:srgbClr val="1E2761"/>
-            </a:solidFill>
-            <a:prstDash val="solid"/>
-            <a:tailEnd type="triangle"/>
-          </a:ln>
-        </p:spPr>
-      </p:sp>
-      <p:sp>
-        <p:nvSpPr>
-          <p:cNvPr id="18" name="Shape 16"/>
-          <p:cNvSpPr/>
-          <p:nvPr/>
-        </p:nvSpPr>
-        <p:spPr>
-          <a:xfrm>
-            <a:off x="9326880" y="2286000"/>
-            <a:ext cx="274320" cy="0"/>
-          </a:xfrm>
-          <a:prstGeom prst="line">
-            <a:avLst/>
-          </a:prstGeom>
-          <a:noFill/>
-          <a:ln w="25400">
-            <a:solidFill>
-              <a:srgbClr val="1F9D68"/>
-            </a:solidFill>
-            <a:prstDash val="solid"/>
-            <a:tailEnd type="triangle"/>
-          </a:ln>
-        </p:spPr>
-      </p:sp>
-      <p:sp>
-        <p:nvSpPr>
-          <p:cNvPr id="19" name="Shape 17"/>
-          <p:cNvSpPr/>
-          <p:nvPr/>
-        </p:nvSpPr>
-        <p:spPr>
-          <a:xfrm flipH="1">
-            <a:off x="9326880" y="2697480"/>
-            <a:ext cx="274320" cy="0"/>
-          </a:xfrm>
-          <a:prstGeom prst="line">
-            <a:avLst/>
-          </a:prstGeom>
-          <a:noFill/>
-          <a:ln w="25400">
-            <a:solidFill>
-              <a:srgbClr val="1F9D68"/>
-            </a:solidFill>
-            <a:prstDash val="solid"/>
-            <a:tailEnd type="triangle"/>
-          </a:ln>
-        </p:spPr>
-      </p:sp>
-      <p:sp>
-        <p:nvSpPr>
-          <p:cNvPr id="20" name="Text 18"/>
-          <p:cNvSpPr txBox="1"/>
-          <p:nvPr/>
-        </p:nvSpPr>
-        <p:spPr>
-          <a:xfrm>
-            <a:off x="9098280" y="2971800"/>
-            <a:ext cx="1280160" cy="237744"/>
-          </a:xfrm>
-          <a:prstGeom prst="rect">
-            <a:avLst/>
-          </a:prstGeom>
-          <a:noFill/>
-          <a:ln/>
-        </p:spPr>
-        <p:txBody>
-          <a:bodyPr wrap="square" lIns="0" tIns="0" rIns="0" bIns="0" rtlCol="0" anchor="ctr"/>
-          <a:lstStyle/>
-          <a:p>
-            <a:pPr algn="ctr" indent="0" marL="0">
-              <a:buNone/>
-            </a:pPr>
-            <a:r>
-              <a:rPr lang="en-US" sz="900" b="1" dirty="0">
-                <a:solidFill>
-                  <a:srgbClr val="1F9D68"/>
-                </a:solidFill>
-                <a:latin typeface="Calibri" pitchFamily="34" charset="0"/>
-                <a:ea typeface="Calibri" pitchFamily="34" charset="-122"/>
-                <a:cs typeface="Calibri" pitchFamily="34" charset="-120"/>
-              </a:rPr>
-              <a:t>notify / empty</a:t>
-            </a:r>
-            <a:endParaRPr lang="en-US" sz="900" dirty="0"/>
-          </a:p>
-        </p:txBody>
-      </p:sp>
-      <p:sp>
-        <p:nvSpPr>
-          <p:cNvPr id="21" name="Shape 19"/>
-          <p:cNvSpPr/>
-          <p:nvPr/>
-        </p:nvSpPr>
-        <p:spPr>
-          <a:xfrm>
-            <a:off x="3840480" y="2926080"/>
-            <a:ext cx="0" cy="822960"/>
-          </a:xfrm>
-          <a:prstGeom prst="line">
-            <a:avLst/>
-          </a:prstGeom>
-          <a:noFill/>
-          <a:ln w="22225">
-            <a:solidFill>
-              <a:srgbClr val="C0392B"/>
-            </a:solidFill>
-            <a:prstDash val="solid"/>
-          </a:ln>
-        </p:spPr>
-      </p:sp>
-      <p:sp>
-        <p:nvSpPr>
-          <p:cNvPr id="22" name="Shape 20"/>
-          <p:cNvSpPr/>
-          <p:nvPr/>
-        </p:nvSpPr>
-        <p:spPr>
-          <a:xfrm>
-            <a:off x="6126480" y="2926080"/>
-            <a:ext cx="0" cy="822960"/>
-          </a:xfrm>
-          <a:prstGeom prst="line">
-            <a:avLst/>
-          </a:prstGeom>
-          <a:noFill/>
-          <a:ln w="22225">
-            <a:solidFill>
-              <a:srgbClr val="C0392B"/>
-            </a:solidFill>
-            <a:prstDash val="solid"/>
-          </a:ln>
-        </p:spPr>
-      </p:sp>
-      <p:sp>
-        <p:nvSpPr>
-          <p:cNvPr id="23" name="Shape 21"/>
-          <p:cNvSpPr/>
-          <p:nvPr/>
-        </p:nvSpPr>
-        <p:spPr>
-          <a:xfrm>
-            <a:off x="8321040" y="2926080"/>
-            <a:ext cx="0" cy="822960"/>
-          </a:xfrm>
-          <a:prstGeom prst="line">
-            <a:avLst/>
-          </a:prstGeom>
-          <a:noFill/>
-          <a:ln w="22225">
-            <a:solidFill>
-              <a:srgbClr val="C0392B"/>
-            </a:solidFill>
-            <a:prstDash val="solid"/>
-          </a:ln>
-        </p:spPr>
-      </p:sp>
-      <p:sp>
-        <p:nvSpPr>
-          <p:cNvPr id="24" name="Shape 22"/>
-          <p:cNvSpPr/>
-          <p:nvPr/>
-        </p:nvSpPr>
-        <p:spPr>
-          <a:xfrm>
-            <a:off x="1600200" y="3749040"/>
-            <a:ext cx="6720840" cy="0"/>
-          </a:xfrm>
-          <a:prstGeom prst="line">
-            <a:avLst/>
-          </a:prstGeom>
-          <a:noFill/>
-          <a:ln w="22225">
-            <a:solidFill>
-              <a:srgbClr val="C0392B"/>
-            </a:solidFill>
-            <a:prstDash val="solid"/>
-          </a:ln>
-        </p:spPr>
-      </p:sp>
-      <p:sp>
-        <p:nvSpPr>
-          <p:cNvPr id="25" name="Shape 23"/>
-          <p:cNvSpPr/>
-          <p:nvPr/>
-        </p:nvSpPr>
-        <p:spPr>
-          <a:xfrm flipV="1">
-            <a:off x="1600200" y="2926080"/>
-            <a:ext cx="0" cy="822960"/>
-          </a:xfrm>
-          <a:prstGeom prst="line">
-            <a:avLst/>
-          </a:prstGeom>
-          <a:noFill/>
-          <a:ln w="22225">
-            <a:solidFill>
-              <a:srgbClr val="C0392B"/>
-            </a:solidFill>
-            <a:prstDash val="solid"/>
-            <a:tailEnd type="triangle"/>
-          </a:ln>
-        </p:spPr>
-      </p:sp>
-      <p:sp>
-        <p:nvSpPr>
-          <p:cNvPr id="26" name="Text 24"/>
-          <p:cNvSpPr txBox="1"/>
-          <p:nvPr/>
-        </p:nvSpPr>
-        <p:spPr>
-          <a:xfrm>
-            <a:off x="2103120" y="3822192"/>
-            <a:ext cx="5943600" cy="274320"/>
-          </a:xfrm>
-          <a:prstGeom prst="rect">
-            <a:avLst/>
-          </a:prstGeom>
-          <a:noFill/>
-          <a:ln/>
-        </p:spPr>
-        <p:txBody>
-          <a:bodyPr wrap="square" lIns="0" tIns="0" rIns="0" bIns="0" rtlCol="0" anchor="ctr"/>
-          <a:lstStyle/>
-          <a:p>
-            <a:pPr indent="0" marL="0">
-              <a:buNone/>
-            </a:pPr>
-            <a:r>
-              <a:rPr lang="en-US" sz="1050" b="1" dirty="0">
-                <a:solidFill>
-                  <a:srgbClr val="C0392B"/>
-                </a:solidFill>
-                <a:latin typeface="Calibri" pitchFamily="34" charset="0"/>
-                <a:ea typeface="Calibri" pitchFamily="34" charset="-122"/>
-                <a:cs typeface="Calibri" pitchFamily="34" charset="-120"/>
-              </a:rPr>
-              <a:t>connect fail (backoff) · bond fail · disconnect → back to SCANNING</a:t>
-            </a:r>
-            <a:endParaRPr lang="en-US" sz="1050" dirty="0"/>
-          </a:p>
-        </p:txBody>
-      </p:sp>
-      <p:sp>
-        <p:nvSpPr>
-          <p:cNvPr id="27" name="Shape 25"/>
-          <p:cNvSpPr/>
-          <p:nvPr/>
-        </p:nvSpPr>
-        <p:spPr>
-          <a:xfrm>
-            <a:off x="640080" y="4572000"/>
-            <a:ext cx="5394960" cy="1645920"/>
-          </a:xfrm>
-          <a:prstGeom prst="roundRect">
-            <a:avLst>
-              <a:gd name="adj" fmla="val 5556"/>
-            </a:avLst>
-          </a:prstGeom>
-          <a:solidFill>
-            <a:srgbClr val="1E2761"/>
-          </a:solidFill>
-          <a:ln/>
-        </p:spPr>
-      </p:sp>
-      <p:sp>
-        <p:nvSpPr>
-          <p:cNvPr id="28" name="Text 26"/>
-          <p:cNvSpPr txBox="1"/>
-          <p:nvPr/>
-        </p:nvSpPr>
-        <p:spPr>
-          <a:xfrm>
-            <a:off x="868680" y="4709160"/>
-            <a:ext cx="4937760" cy="292608"/>
-          </a:xfrm>
-          <a:prstGeom prst="rect">
-            <a:avLst/>
-          </a:prstGeom>
-          <a:noFill/>
-          <a:ln/>
-        </p:spPr>
-        <p:txBody>
-          <a:bodyPr wrap="square" lIns="0" tIns="0" rIns="0" bIns="0" rtlCol="0" anchor="ctr"/>
-          <a:lstStyle/>
-          <a:p>
-            <a:pPr indent="0" marL="0">
-              <a:buNone/>
-            </a:pPr>
-            <a:r>
-              <a:rPr lang="en-US" sz="1300" b="1" dirty="0">
-                <a:solidFill>
-                  <a:srgbClr val="E58E1A"/>
-                </a:solidFill>
-                <a:latin typeface="Calibri" pitchFamily="34" charset="0"/>
-                <a:ea typeface="Calibri" pitchFamily="34" charset="-122"/>
-                <a:cs typeface="Calibri" pitchFamily="34" charset="-120"/>
-              </a:rPr>
-              <a:t>Degradation rule</a:t>
-            </a:r>
-            <a:endParaRPr lang="en-US" sz="1300" dirty="0"/>
-          </a:p>
-        </p:txBody>
-      </p:sp>
-      <p:sp>
-        <p:nvSpPr>
-          <p:cNvPr id="29" name="Text 27"/>
-          <p:cNvSpPr txBox="1"/>
-          <p:nvPr/>
-        </p:nvSpPr>
-        <p:spPr>
-          <a:xfrm>
-            <a:off x="868680" y="5029200"/>
-            <a:ext cx="4937760" cy="1097280"/>
-          </a:xfrm>
-          <a:prstGeom prst="rect">
-            <a:avLst/>
-          </a:prstGeom>
-          <a:noFill/>
-          <a:ln/>
-        </p:spPr>
-        <p:txBody>
-          <a:bodyPr wrap="square" lIns="0" tIns="0" rIns="0" bIns="0" rtlCol="0" anchor="ctr"/>
-          <a:lstStyle/>
-          <a:p>
-            <a:pPr indent="0" marL="0">
-              <a:buNone/>
-            </a:pPr>
-            <a:r>
-              <a:rPr lang="en-US" sz="1250" dirty="0">
-                <a:solidFill>
-                  <a:srgbClr val="FFFFFF"/>
-                </a:solidFill>
-                <a:latin typeface="Calibri" pitchFamily="34" charset="0"/>
-                <a:ea typeface="Calibri" pitchFamily="34" charset="-122"/>
-                <a:cs typeface="Calibri" pitchFamily="34" charset="-120"/>
-              </a:rPr>
-              <a:t>The UI always renders — last known data plus an honest age and link flag — no matter what state the BLE link is in. Link loss degrades the display; it never blanks it.</a:t>
-            </a:r>
-            <a:endParaRPr lang="en-US" sz="1250" dirty="0"/>
-          </a:p>
-        </p:txBody>
-      </p:sp>
-      <p:sp>
-        <p:nvSpPr>
-          <p:cNvPr id="30" name="Shape 28"/>
-          <p:cNvSpPr/>
-          <p:nvPr/>
-        </p:nvSpPr>
-        <p:spPr>
-          <a:xfrm>
-            <a:off x="6309360" y="4572000"/>
-            <a:ext cx="5394960" cy="1645920"/>
-          </a:xfrm>
-          <a:prstGeom prst="roundRect">
-            <a:avLst>
-              <a:gd name="adj" fmla="val 5556"/>
+              <a:gd name="adj" fmla="val 5263"/>
             </a:avLst>
           </a:prstGeom>
           <a:solidFill>
@@ -10307,14 +5680,14 @@
       </p:sp>
       <p:sp>
         <p:nvSpPr>
-          <p:cNvPr id="31" name="Text 29"/>
-          <p:cNvSpPr txBox="1"/>
-          <p:nvPr/>
-        </p:nvSpPr>
-        <p:spPr>
-          <a:xfrm>
-            <a:off x="6537960" y="4709160"/>
-            <a:ext cx="4937760" cy="292608"/>
+          <p:cNvPr id="10" name="Text 7"/>
+          <p:cNvSpPr txBox="1"/>
+          <p:nvPr/>
+        </p:nvSpPr>
+        <p:spPr>
+          <a:xfrm>
+            <a:off x="4937760" y="3767328"/>
+            <a:ext cx="6400800" cy="292608"/>
           </a:xfrm>
           <a:prstGeom prst="rect">
             <a:avLst/>
@@ -10330,7 +5703,7 @@
               <a:buNone/>
             </a:pPr>
             <a:r>
-              <a:rPr lang="en-US" sz="1300" b="1" dirty="0">
+              <a:rPr lang="en-US" sz="1350" b="1" dirty="0">
                 <a:solidFill>
                   <a:srgbClr val="B06207"/>
                 </a:solidFill>
@@ -10338,22 +5711,22 @@
                 <a:ea typeface="Calibri" pitchFamily="34" charset="-122"/>
                 <a:cs typeface="Calibri" pitchFamily="34" charset="-120"/>
               </a:rPr>
-              <a:t>Risk gate — Week 5</a:t>
-            </a:r>
-            <a:endParaRPr lang="en-US" sz="1300" dirty="0"/>
-          </a:p>
-        </p:txBody>
-      </p:sp>
-      <p:sp>
-        <p:nvSpPr>
-          <p:cNvPr id="32" name="Text 30"/>
-          <p:cNvSpPr txBox="1"/>
-          <p:nvPr/>
-        </p:nvSpPr>
-        <p:spPr>
-          <a:xfrm>
-            <a:off x="6537960" y="5029200"/>
-            <a:ext cx="4937760" cy="1097280"/>
+              <a:t>Fallback (was the Week-5 risk gate — now retired: link is road-proven)</a:t>
+            </a:r>
+            <a:endParaRPr lang="en-US" sz="1350" dirty="0"/>
+          </a:p>
+        </p:txBody>
+      </p:sp>
+      <p:sp>
+        <p:nvSpPr>
+          <p:cNvPr id="11" name="Text 8"/>
+          <p:cNvSpPr txBox="1"/>
+          <p:nvPr/>
+        </p:nvSpPr>
+        <p:spPr>
+          <a:xfrm>
+            <a:off x="4937760" y="4114800"/>
+            <a:ext cx="6400800" cy="1097280"/>
           </a:xfrm>
           <a:prstGeom prst="rect">
             <a:avLst/>
@@ -10369,7 +5742,7 @@
               <a:buNone/>
             </a:pPr>
             <a:r>
-              <a:rPr lang="en-US" sz="1250" dirty="0">
+              <a:rPr lang="en-US" sz="1300" dirty="0">
                 <a:solidFill>
                   <a:srgbClr val="222A3F"/>
                 </a:solidFill>
@@ -10377,9 +5750,48 @@
                 <a:ea typeface="Calibri" pitchFamily="34" charset="-122"/>
                 <a:cs typeface="Calibri" pitchFamily="34" charset="-120"/>
               </a:rPr>
-              <a:t>BONDING is the highest-uncertainty transition. If pairing is still blocked after two weeks, the transport swaps to Meshtastic's identical API over WiFi/TCP :4403 — decoder, state, and UI untouched.</a:t>
-            </a:r>
-            <a:endParaRPr lang="en-US" sz="1250" dirty="0"/>
+              <a:t>If BLE ever becomes hostile, the transport swaps to Meshtastic's identical protobuf API over WiFi/TCP :4403 — decoder, node table, and UI untouched.</a:t>
+            </a:r>
+            <a:endParaRPr lang="en-US" sz="1300" dirty="0"/>
+          </a:p>
+        </p:txBody>
+      </p:sp>
+      <p:sp>
+        <p:nvSpPr>
+          <p:cNvPr id="12" name="Text 9"/>
+          <p:cNvSpPr txBox="1"/>
+          <p:nvPr/>
+        </p:nvSpPr>
+        <p:spPr>
+          <a:xfrm>
+            <a:off x="4709160" y="5577840"/>
+            <a:ext cx="6858000" cy="1005840"/>
+          </a:xfrm>
+          <a:prstGeom prst="rect">
+            <a:avLst/>
+          </a:prstGeom>
+          <a:noFill/>
+          <a:ln/>
+        </p:spPr>
+        <p:txBody>
+          <a:bodyPr wrap="square" lIns="0" tIns="0" rIns="0" bIns="0" rtlCol="0" anchor="ctr"/>
+          <a:lstStyle/>
+          <a:p>
+            <a:pPr indent="0" marL="0">
+              <a:buNone/>
+            </a:pPr>
+            <a:r>
+              <a:rPr lang="en-US" sz="1200" i="1" dirty="0">
+                <a:solidFill>
+                  <a:srgbClr val="5B6B8A"/>
+                </a:solidFill>
+                <a:latin typeface="Calibri" pitchFamily="34" charset="0"/>
+                <a:ea typeface="Calibri" pitchFamily="34" charset="-122"/>
+                <a:cs typeface="Calibri" pitchFamily="34" charset="-120"/>
+              </a:rPr>
+              <a:t>Bench-derived design choices: direct connect by remembered address (the radio only advertises briefly at boot) · no stored bond on purpose (a bonded Meshtastic radio stops advertising) · every failure funnels through one teardown back to SCANNING, so no state can wedge.</a:t>
+            </a:r>
+            <a:endParaRPr lang="en-US" sz="1200" dirty="0"/>
           </a:p>
         </p:txBody>
       </p:sp>
